--- a/presentation/PLBP-SG1.pptx
+++ b/presentation/PLBP-SG1.pptx
@@ -18,6 +18,9 @@
     <p:sldId id="266" r:id="rId18"/>
     <p:sldId id="267" r:id="rId19"/>
     <p:sldId id="268" r:id="rId20"/>
+    <p:sldId id="269" r:id="rId21"/>
+    <p:sldId id="270" r:id="rId22"/>
+    <p:sldId id="271" r:id="rId23"/>
   </p:sldIdLst>
   <p:sldSz cx="14630400" cy="8229600" type="screen4x3"/>
   <p:notesSz cx="6858000" cy="9144000"/>
@@ -799,6 +802,204 @@
 </p:notes>
 </file>
 
+<file path=ppt/notesSlides/notesSlide14.xml><?xml version="1.0" encoding="utf-8"?>
+<p:notes xmlns:a="http://schemas.openxmlformats.org/drawingml/2006/main" xmlns:p="http://schemas.openxmlformats.org/presentationml/2006/main" xmlns:r="http://schemas.openxmlformats.org/officeDocument/2006/relationships">
+  <p:cSld>
+    <p:spTree>
+      <p:nvGrpSpPr>
+        <p:cNvPr id="1" name=""/>
+        <p:cNvGrpSpPr/>
+        <p:nvPr/>
+      </p:nvGrpSpPr>
+      <p:grpSpPr>
+        <a:xfrm>
+          <a:off x="0" y="0"/>
+          <a:ext cx="0" cy="0"/>
+          <a:chOff x="0" y="0"/>
+          <a:chExt cx="0" cy="0"/>
+        </a:xfrm>
+      </p:grpSpPr>
+      <p:sp>
+        <p:nvSpPr>
+          <p:cNvPr id="2" name="Slide Image Placeholder 1"/>
+          <p:cNvSpPr>
+            <a:spLocks noGrp="1"/>
+          </p:cNvSpPr>
+          <p:nvPr>
+            <p:ph type="sldImg" idx="2"/>
+          </p:nvPr>
+        </p:nvSpPr>
+        <p:spPr/>
+      </p:sp>
+      <p:sp>
+        <p:nvSpPr>
+          <p:cNvPr id="3" name="Notes Placeholder 2"/>
+          <p:cNvSpPr>
+            <a:spLocks noGrp="1"/>
+          </p:cNvSpPr>
+          <p:nvPr>
+            <p:ph type="body" idx="3" sz="quarter"/>
+          </p:nvPr>
+        </p:nvSpPr>
+        <p:spPr/>
+        <p:txBody>
+          <a:bodyPr/>
+          <a:lstStyle/>
+          <a:p/>
+        </p:txBody>
+      </p:sp>
+      <p:sp>
+        <p:nvSpPr>
+          <p:cNvPr id="4" name="Slide Number Placeholder 3"/>
+          <p:cNvSpPr>
+            <a:spLocks noGrp="1"/>
+          </p:cNvSpPr>
+          <p:nvPr>
+            <p:ph type="sldNum" idx="5" sz="quarter"/>
+          </p:nvPr>
+        </p:nvSpPr>
+        <p:spPr/>
+      </p:sp>
+    </p:spTree>
+  </p:cSld>
+  <p:clrMapOvr>
+    <a:masterClrMapping/>
+  </p:clrMapOvr>
+</p:notes>
+</file>
+
+<file path=ppt/notesSlides/notesSlide15.xml><?xml version="1.0" encoding="utf-8"?>
+<p:notes xmlns:a="http://schemas.openxmlformats.org/drawingml/2006/main" xmlns:p="http://schemas.openxmlformats.org/presentationml/2006/main" xmlns:r="http://schemas.openxmlformats.org/officeDocument/2006/relationships">
+  <p:cSld>
+    <p:spTree>
+      <p:nvGrpSpPr>
+        <p:cNvPr id="1" name=""/>
+        <p:cNvGrpSpPr/>
+        <p:nvPr/>
+      </p:nvGrpSpPr>
+      <p:grpSpPr>
+        <a:xfrm>
+          <a:off x="0" y="0"/>
+          <a:ext cx="0" cy="0"/>
+          <a:chOff x="0" y="0"/>
+          <a:chExt cx="0" cy="0"/>
+        </a:xfrm>
+      </p:grpSpPr>
+      <p:sp>
+        <p:nvSpPr>
+          <p:cNvPr id="2" name="Slide Image Placeholder 1"/>
+          <p:cNvSpPr>
+            <a:spLocks noGrp="1"/>
+          </p:cNvSpPr>
+          <p:nvPr>
+            <p:ph type="sldImg" idx="2"/>
+          </p:nvPr>
+        </p:nvSpPr>
+        <p:spPr/>
+      </p:sp>
+      <p:sp>
+        <p:nvSpPr>
+          <p:cNvPr id="3" name="Notes Placeholder 2"/>
+          <p:cNvSpPr>
+            <a:spLocks noGrp="1"/>
+          </p:cNvSpPr>
+          <p:nvPr>
+            <p:ph type="body" idx="3" sz="quarter"/>
+          </p:nvPr>
+        </p:nvSpPr>
+        <p:spPr/>
+        <p:txBody>
+          <a:bodyPr/>
+          <a:lstStyle/>
+          <a:p/>
+        </p:txBody>
+      </p:sp>
+      <p:sp>
+        <p:nvSpPr>
+          <p:cNvPr id="4" name="Slide Number Placeholder 3"/>
+          <p:cNvSpPr>
+            <a:spLocks noGrp="1"/>
+          </p:cNvSpPr>
+          <p:nvPr>
+            <p:ph type="sldNum" idx="5" sz="quarter"/>
+          </p:nvPr>
+        </p:nvSpPr>
+        <p:spPr/>
+      </p:sp>
+    </p:spTree>
+  </p:cSld>
+  <p:clrMapOvr>
+    <a:masterClrMapping/>
+  </p:clrMapOvr>
+</p:notes>
+</file>
+
+<file path=ppt/notesSlides/notesSlide16.xml><?xml version="1.0" encoding="utf-8"?>
+<p:notes xmlns:a="http://schemas.openxmlformats.org/drawingml/2006/main" xmlns:p="http://schemas.openxmlformats.org/presentationml/2006/main" xmlns:r="http://schemas.openxmlformats.org/officeDocument/2006/relationships">
+  <p:cSld>
+    <p:spTree>
+      <p:nvGrpSpPr>
+        <p:cNvPr id="1" name=""/>
+        <p:cNvGrpSpPr/>
+        <p:nvPr/>
+      </p:nvGrpSpPr>
+      <p:grpSpPr>
+        <a:xfrm>
+          <a:off x="0" y="0"/>
+          <a:ext cx="0" cy="0"/>
+          <a:chOff x="0" y="0"/>
+          <a:chExt cx="0" cy="0"/>
+        </a:xfrm>
+      </p:grpSpPr>
+      <p:sp>
+        <p:nvSpPr>
+          <p:cNvPr id="2" name="Slide Image Placeholder 1"/>
+          <p:cNvSpPr>
+            <a:spLocks noGrp="1"/>
+          </p:cNvSpPr>
+          <p:nvPr>
+            <p:ph type="sldImg" idx="2"/>
+          </p:nvPr>
+        </p:nvSpPr>
+        <p:spPr/>
+      </p:sp>
+      <p:sp>
+        <p:nvSpPr>
+          <p:cNvPr id="3" name="Notes Placeholder 2"/>
+          <p:cNvSpPr>
+            <a:spLocks noGrp="1"/>
+          </p:cNvSpPr>
+          <p:nvPr>
+            <p:ph type="body" idx="3" sz="quarter"/>
+          </p:nvPr>
+        </p:nvSpPr>
+        <p:spPr/>
+        <p:txBody>
+          <a:bodyPr/>
+          <a:lstStyle/>
+          <a:p/>
+        </p:txBody>
+      </p:sp>
+      <p:sp>
+        <p:nvSpPr>
+          <p:cNvPr id="4" name="Slide Number Placeholder 3"/>
+          <p:cNvSpPr>
+            <a:spLocks noGrp="1"/>
+          </p:cNvSpPr>
+          <p:nvPr>
+            <p:ph type="sldNum" idx="5" sz="quarter"/>
+          </p:nvPr>
+        </p:nvSpPr>
+        <p:spPr/>
+      </p:sp>
+    </p:spTree>
+  </p:cSld>
+  <p:clrMapOvr>
+    <a:masterClrMapping/>
+  </p:clrMapOvr>
+</p:notes>
+</file>
+
 <file path=ppt/notesSlides/notesSlide2.xml><?xml version="1.0" encoding="utf-8"?>
 <p:notes xmlns:a="http://schemas.openxmlformats.org/drawingml/2006/main" xmlns:p="http://schemas.openxmlformats.org/presentationml/2006/main" xmlns:r="http://schemas.openxmlformats.org/officeDocument/2006/relationships">
   <p:cSld>
@@ -5210,7 +5411,7 @@
               </a:defRPr>
             </a:pPr>
             <a:r>
-              <a:t>01 / 13</a:t>
+              <a:t>01 / 16</a:t>
             </a:r>
           </a:p>
         </p:txBody>
@@ -5224,7 +5425,7 @@
         <p:spPr>
           <a:xfrm>
             <a:off x="0" y="8183879"/>
-            <a:ext cx="1125415" cy="45720"/>
+            <a:ext cx="914400" cy="45720"/>
           </a:xfrm>
           <a:prstGeom prst="rect">
             <a:avLst/>
@@ -6392,7 +6593,7 @@
               </a:defRPr>
             </a:pPr>
             <a:r>
-              <a:t>09 / РЕЗУЛЬТАТЫ ПРОЕКТА</a:t>
+              <a:t>OPENROCKET / OR01</a:t>
             </a:r>
           </a:p>
         </p:txBody>
@@ -6519,7 +6720,7 @@
               </a:defRPr>
             </a:pPr>
             <a:r>
-              <a:t>1,5 кг нагрузки → 5,787 кг на старте</a:t>
+              <a:t>Центровка и давление в полёте</a:t>
             </a:r>
           </a:p>
         </p:txBody>
@@ -6604,7 +6805,7 @@
               </a:defRPr>
             </a:pPr>
             <a:r>
-              <a:t>Общая масса по ТЗ не ограничена. Шкала до 6 кг. Масса расчётная, не измеренная.</a:t>
+              <a:t>CG: 940 → 874 мм. Max q: 26,48 кПа. Карта давлений и прочность ещё не рассчитаны.</a:t>
             </a:r>
           </a:p>
         </p:txBody>
@@ -6646,7 +6847,7 @@
               </a:defRPr>
             </a:pPr>
             <a:r>
-              <a:t>10 / 13</a:t>
+              <a:t>10 / 16</a:t>
             </a:r>
           </a:p>
         </p:txBody>
@@ -6660,7 +6861,7 @@
         <p:spPr>
           <a:xfrm>
             <a:off x="0" y="8183879"/>
-            <a:ext cx="11254153" cy="45720"/>
+            <a:ext cx="9144000" cy="45720"/>
           </a:xfrm>
           <a:prstGeom prst="rect">
             <a:avLst/>
@@ -6694,430 +6895,30 @@
           </a:p>
         </p:txBody>
       </p:sp>
-      <p:sp>
-        <p:nvSpPr>
-          <p:cNvPr id="25" name="TextBox 24"/>
-          <p:cNvSpPr txBox="1"/>
-          <p:nvPr/>
-        </p:nvSpPr>
-        <p:spPr>
-          <a:xfrm>
-            <a:off x="731520" y="2788920"/>
-            <a:ext cx="7315200" cy="548640"/>
-          </a:xfrm>
-          <a:prstGeom prst="rect">
-            <a:avLst/>
-          </a:prstGeom>
-          <a:noFill/>
-        </p:spPr>
-        <p:txBody>
-          <a:bodyPr wrap="square" lIns="0" rIns="0" tIns="0" bIns="0">
-            <a:spAutoFit/>
-          </a:bodyPr>
-          <a:lstStyle/>
-          <a:p>
-            <a:pPr>
-              <a:spcBef>
-                <a:spcPts val="0"/>
-              </a:spcBef>
-              <a:spcAft>
-                <a:spcPts val="900"/>
-              </a:spcAft>
-              <a:defRPr sz="2700" b="1">
-                <a:solidFill>
-                  <a:srgbClr val="F4F1E9"/>
-                </a:solidFill>
-                <a:latin typeface="Noto Sans"/>
-              </a:defRPr>
-            </a:pPr>
-            <a:r>
-              <a:t>Контрольный макет 1,0 кг — PDF ТЗ</a:t>
-            </a:r>
-          </a:p>
-        </p:txBody>
-      </p:sp>
-      <p:sp>
-        <p:nvSpPr>
-          <p:cNvPr id="26" name="TextBox 25"/>
-          <p:cNvSpPr txBox="1"/>
-          <p:nvPr/>
-        </p:nvSpPr>
-        <p:spPr>
-          <a:xfrm>
-            <a:off x="10241280" y="2633472"/>
-            <a:ext cx="3657600" cy="731520"/>
-          </a:xfrm>
-          <a:prstGeom prst="rect">
-            <a:avLst/>
-          </a:prstGeom>
-          <a:noFill/>
-        </p:spPr>
-        <p:txBody>
-          <a:bodyPr wrap="square" lIns="0" rIns="0" tIns="0" bIns="0">
-            <a:spAutoFit/>
-          </a:bodyPr>
-          <a:lstStyle/>
-          <a:p>
-            <a:pPr>
-              <a:spcBef>
-                <a:spcPts val="0"/>
-              </a:spcBef>
-              <a:spcAft>
-                <a:spcPts val="900"/>
-              </a:spcAft>
-              <a:defRPr sz="4000" b="1">
-                <a:solidFill>
-                  <a:srgbClr val="FF793F"/>
-                </a:solidFill>
-                <a:latin typeface="Noto Sans"/>
-              </a:defRPr>
-            </a:pPr>
-            <a:r>
-              <a:t>5,287 кг</a:t>
-            </a:r>
-          </a:p>
-        </p:txBody>
-      </p:sp>
-      <p:sp>
-        <p:nvSpPr>
-          <p:cNvPr id="27" name="Rectangle 26"/>
-          <p:cNvSpPr/>
-          <p:nvPr/>
-        </p:nvSpPr>
-        <p:spPr>
-          <a:xfrm>
-            <a:off x="731520" y="3547872"/>
-            <a:ext cx="13167360" cy="310896"/>
-          </a:xfrm>
-          <a:prstGeom prst="rect">
-            <a:avLst/>
-          </a:prstGeom>
-          <a:solidFill>
-            <a:srgbClr val="354347"/>
-          </a:solidFill>
-          <a:ln>
-            <a:noFill/>
-          </a:ln>
-        </p:spPr>
-        <p:style>
-          <a:lnRef idx="1">
-            <a:schemeClr val="accent1"/>
-          </a:lnRef>
-          <a:fillRef idx="3">
-            <a:schemeClr val="accent1"/>
-          </a:fillRef>
-          <a:effectRef idx="2">
-            <a:schemeClr val="accent1"/>
-          </a:effectRef>
-          <a:fontRef idx="minor">
-            <a:schemeClr val="lt1"/>
-          </a:fontRef>
-        </p:style>
-        <p:txBody>
-          <a:bodyPr rtlCol="0" anchor="ctr"/>
-          <a:lstStyle/>
-          <a:p>
-            <a:pPr algn="ctr"/>
-          </a:p>
-        </p:txBody>
-      </p:sp>
-      <p:sp>
-        <p:nvSpPr>
-          <p:cNvPr id="28" name="Rectangle 27"/>
-          <p:cNvSpPr/>
-          <p:nvPr/>
-        </p:nvSpPr>
-        <p:spPr>
-          <a:xfrm>
-            <a:off x="731520" y="3547872"/>
-            <a:ext cx="11602638" cy="310896"/>
-          </a:xfrm>
-          <a:prstGeom prst="rect">
-            <a:avLst/>
-          </a:prstGeom>
-          <a:solidFill>
-            <a:srgbClr val="FF793F"/>
-          </a:solidFill>
-          <a:ln>
-            <a:noFill/>
-          </a:ln>
-        </p:spPr>
-        <p:style>
-          <a:lnRef idx="1">
-            <a:schemeClr val="accent1"/>
-          </a:lnRef>
-          <a:fillRef idx="3">
-            <a:schemeClr val="accent1"/>
-          </a:fillRef>
-          <a:effectRef idx="2">
-            <a:schemeClr val="accent1"/>
-          </a:effectRef>
-          <a:fontRef idx="minor">
-            <a:schemeClr val="lt1"/>
-          </a:fontRef>
-        </p:style>
-        <p:txBody>
-          <a:bodyPr rtlCol="0" anchor="ctr"/>
-          <a:lstStyle/>
-          <a:p>
-            <a:pPr algn="ctr"/>
-          </a:p>
-        </p:txBody>
-      </p:sp>
-      <p:sp>
-        <p:nvSpPr>
-          <p:cNvPr id="29" name="TextBox 28"/>
-          <p:cNvSpPr txBox="1"/>
-          <p:nvPr/>
-        </p:nvSpPr>
-        <p:spPr>
-          <a:xfrm>
-            <a:off x="731520" y="4023360"/>
-            <a:ext cx="9144000" cy="457200"/>
-          </a:xfrm>
-          <a:prstGeom prst="rect">
-            <a:avLst/>
-          </a:prstGeom>
-          <a:noFill/>
-        </p:spPr>
-        <p:txBody>
-          <a:bodyPr wrap="square" lIns="0" rIns="0" tIns="0" bIns="0">
-            <a:spAutoFit/>
-          </a:bodyPr>
-          <a:lstStyle/>
-          <a:p>
-            <a:pPr>
-              <a:spcBef>
-                <a:spcPts val="0"/>
-              </a:spcBef>
-              <a:spcAft>
-                <a:spcPts val="900"/>
-              </a:spcAft>
-              <a:defRPr sz="2000" b="0">
-                <a:solidFill>
-                  <a:srgbClr val="AFBDC0"/>
-                </a:solidFill>
-                <a:latin typeface="Noto Sans"/>
-              </a:defRPr>
-            </a:pPr>
-            <a:r>
-              <a:t>Полная стартовая масса; лимит по ТЗ не установлен.</a:t>
-            </a:r>
-          </a:p>
-        </p:txBody>
-      </p:sp>
-      <p:sp>
-        <p:nvSpPr>
-          <p:cNvPr id="30" name="TextBox 29"/>
-          <p:cNvSpPr txBox="1"/>
-          <p:nvPr/>
-        </p:nvSpPr>
-        <p:spPr>
-          <a:xfrm>
-            <a:off x="731520" y="4709160"/>
-            <a:ext cx="7315200" cy="548640"/>
-          </a:xfrm>
-          <a:prstGeom prst="rect">
-            <a:avLst/>
-          </a:prstGeom>
-          <a:noFill/>
-        </p:spPr>
-        <p:txBody>
-          <a:bodyPr wrap="square" lIns="0" rIns="0" tIns="0" bIns="0">
-            <a:spAutoFit/>
-          </a:bodyPr>
-          <a:lstStyle/>
-          <a:p>
-            <a:pPr>
-              <a:spcBef>
-                <a:spcPts val="0"/>
-              </a:spcBef>
-              <a:spcAft>
-                <a:spcPts val="900"/>
-              </a:spcAft>
-              <a:defRPr sz="2700" b="1">
-                <a:solidFill>
-                  <a:srgbClr val="F4F1E9"/>
-                </a:solidFill>
-                <a:latin typeface="Noto Sans"/>
-              </a:defRPr>
-            </a:pPr>
-            <a:r>
-              <a:t>Основной макет 1,5 кг — проект</a:t>
-            </a:r>
-          </a:p>
-        </p:txBody>
-      </p:sp>
-      <p:sp>
-        <p:nvSpPr>
-          <p:cNvPr id="31" name="TextBox 30"/>
-          <p:cNvSpPr txBox="1"/>
-          <p:nvPr/>
-        </p:nvSpPr>
-        <p:spPr>
-          <a:xfrm>
-            <a:off x="10241280" y="4553712"/>
-            <a:ext cx="3657600" cy="731520"/>
-          </a:xfrm>
-          <a:prstGeom prst="rect">
-            <a:avLst/>
-          </a:prstGeom>
-          <a:noFill/>
-        </p:spPr>
-        <p:txBody>
-          <a:bodyPr wrap="square" lIns="0" rIns="0" tIns="0" bIns="0">
-            <a:spAutoFit/>
-          </a:bodyPr>
-          <a:lstStyle/>
-          <a:p>
-            <a:pPr>
-              <a:spcBef>
-                <a:spcPts val="0"/>
-              </a:spcBef>
-              <a:spcAft>
-                <a:spcPts val="900"/>
-              </a:spcAft>
-              <a:defRPr sz="4000" b="1">
-                <a:solidFill>
-                  <a:srgbClr val="FF793F"/>
-                </a:solidFill>
-                <a:latin typeface="Noto Sans"/>
-              </a:defRPr>
-            </a:pPr>
-            <a:r>
-              <a:t>5,787 кг</a:t>
-            </a:r>
-          </a:p>
-        </p:txBody>
-      </p:sp>
-      <p:sp>
-        <p:nvSpPr>
-          <p:cNvPr id="32" name="Rectangle 31"/>
-          <p:cNvSpPr/>
-          <p:nvPr/>
-        </p:nvSpPr>
-        <p:spPr>
-          <a:xfrm>
-            <a:off x="731520" y="5468112"/>
-            <a:ext cx="13167360" cy="310896"/>
-          </a:xfrm>
-          <a:prstGeom prst="rect">
-            <a:avLst/>
-          </a:prstGeom>
-          <a:solidFill>
-            <a:srgbClr val="354347"/>
-          </a:solidFill>
-          <a:ln>
-            <a:noFill/>
-          </a:ln>
-        </p:spPr>
-        <p:style>
-          <a:lnRef idx="1">
-            <a:schemeClr val="accent1"/>
-          </a:lnRef>
-          <a:fillRef idx="3">
-            <a:schemeClr val="accent1"/>
-          </a:fillRef>
-          <a:effectRef idx="2">
-            <a:schemeClr val="accent1"/>
-          </a:effectRef>
-          <a:fontRef idx="minor">
-            <a:schemeClr val="lt1"/>
-          </a:fontRef>
-        </p:style>
-        <p:txBody>
-          <a:bodyPr rtlCol="0" anchor="ctr"/>
-          <a:lstStyle/>
-          <a:p>
-            <a:pPr algn="ctr"/>
-          </a:p>
-        </p:txBody>
-      </p:sp>
-      <p:sp>
-        <p:nvSpPr>
-          <p:cNvPr id="33" name="Rectangle 32"/>
-          <p:cNvSpPr/>
-          <p:nvPr/>
-        </p:nvSpPr>
-        <p:spPr>
-          <a:xfrm>
-            <a:off x="731520" y="5468112"/>
-            <a:ext cx="12699918" cy="310896"/>
-          </a:xfrm>
-          <a:prstGeom prst="rect">
-            <a:avLst/>
-          </a:prstGeom>
-          <a:solidFill>
-            <a:srgbClr val="FF793F"/>
-          </a:solidFill>
-          <a:ln>
-            <a:noFill/>
-          </a:ln>
-        </p:spPr>
-        <p:style>
-          <a:lnRef idx="1">
-            <a:schemeClr val="accent1"/>
-          </a:lnRef>
-          <a:fillRef idx="3">
-            <a:schemeClr val="accent1"/>
-          </a:fillRef>
-          <a:effectRef idx="2">
-            <a:schemeClr val="accent1"/>
-          </a:effectRef>
-          <a:fontRef idx="minor">
-            <a:schemeClr val="lt1"/>
-          </a:fontRef>
-        </p:style>
-        <p:txBody>
-          <a:bodyPr rtlCol="0" anchor="ctr"/>
-          <a:lstStyle/>
-          <a:p>
-            <a:pPr algn="ctr"/>
-          </a:p>
-        </p:txBody>
-      </p:sp>
-      <p:sp>
-        <p:nvSpPr>
-          <p:cNvPr id="34" name="TextBox 33"/>
-          <p:cNvSpPr txBox="1"/>
-          <p:nvPr/>
-        </p:nvSpPr>
-        <p:spPr>
-          <a:xfrm>
-            <a:off x="731520" y="5943600"/>
-            <a:ext cx="9144000" cy="457200"/>
-          </a:xfrm>
-          <a:prstGeom prst="rect">
-            <a:avLst/>
-          </a:prstGeom>
-          <a:noFill/>
-        </p:spPr>
-        <p:txBody>
-          <a:bodyPr wrap="square" lIns="0" rIns="0" tIns="0" bIns="0">
-            <a:spAutoFit/>
-          </a:bodyPr>
-          <a:lstStyle/>
-          <a:p>
-            <a:pPr>
-              <a:spcBef>
-                <a:spcPts val="0"/>
-              </a:spcBef>
-              <a:spcAft>
-                <a:spcPts val="900"/>
-              </a:spcAft>
-              <a:defRPr sz="2000" b="0">
-                <a:solidFill>
-                  <a:srgbClr val="AFBDC0"/>
-                </a:solidFill>
-                <a:latin typeface="Noto Sans"/>
-              </a:defRPr>
-            </a:pPr>
-            <a:r>
-              <a:t>Полная стартовая масса; лимит по ТЗ не установлен.</a:t>
-            </a:r>
-          </a:p>
-        </p:txBody>
-      </p:sp>
+      <p:pic>
+        <p:nvPicPr>
+          <p:cNvPr id="25" name="Picture 24" descr="or-balance-pressure.png"/>
+          <p:cNvPicPr>
+            <a:picLocks noChangeAspect="1"/>
+          </p:cNvPicPr>
+          <p:nvPr/>
+        </p:nvPicPr>
+        <p:blipFill>
+          <a:blip r:embed="rId3"/>
+          <a:stretch>
+            <a:fillRect/>
+          </a:stretch>
+        </p:blipFill>
+        <p:spPr>
+          <a:xfrm>
+            <a:off x="1447799" y="2395728"/>
+            <a:ext cx="11734800" cy="4526280"/>
+          </a:xfrm>
+          <a:prstGeom prst="rect">
+            <a:avLst/>
+          </a:prstGeom>
+        </p:spPr>
+      </p:pic>
     </p:spTree>
   </p:cSld>
   <p:clrMapOvr>
@@ -7826,7 +7627,7 @@
               </a:defRPr>
             </a:pPr>
             <a:r>
-              <a:t>10 / РЕЗУЛЬТАТЫ ПРОЕКТА</a:t>
+              <a:t>OPENROCKET / OR01</a:t>
             </a:r>
           </a:p>
         </p:txBody>
@@ -7953,7 +7754,7 @@
               </a:defRPr>
             </a:pPr>
             <a:r>
-              <a:t>Материалы и честное облегчение</a:t>
+              <a:t>Модель можно открыть и пересчитать</a:t>
             </a:r>
           </a:p>
         </p:txBody>
@@ -8038,7 +7839,7 @@
               </a:defRPr>
             </a:pPr>
             <a:r>
-              <a:t>MassAudit и просмотрщик раскрывают каждую массу. Подтверждённая экономия без потерь: 0 г.</a:t>
+              <a:t>Шестистепенная модель жёсткого тела. Расчётная воспроизводимость не равна подтверждению полётом.</a:t>
             </a:r>
           </a:p>
         </p:txBody>
@@ -8080,7 +7881,7 @@
               </a:defRPr>
             </a:pPr>
             <a:r>
-              <a:t>11 / 13</a:t>
+              <a:t>11 / 16</a:t>
             </a:r>
           </a:p>
         </p:txBody>
@@ -8094,7 +7895,7 @@
         <p:spPr>
           <a:xfrm>
             <a:off x="0" y="8183879"/>
-            <a:ext cx="12379569" cy="45720"/>
+            <a:ext cx="10058400" cy="45720"/>
           </a:xfrm>
           <a:prstGeom prst="rect">
             <a:avLst/>
@@ -8251,7 +8052,7 @@
               </a:defRPr>
             </a:pPr>
             <a:r>
-              <a:t>Стеклопластик</a:t>
+              <a:t>.ork + .rse</a:t>
             </a:r>
           </a:p>
         </p:txBody>
@@ -8293,7 +8094,7 @@
               </a:defRPr>
             </a:pPr>
             <a:r>
-              <a:t>1850 кг/м³ — принятая плотность. Марка и укладка открыты.</a:t>
+              <a:t>OpenRocket 24.12. Пять сохранённых сценариев, штатная остановка на апогее.</a:t>
             </a:r>
           </a:p>
         </p:txBody>
@@ -8421,7 +8222,7 @@
               </a:defRPr>
             </a:pPr>
             <a:r>
-              <a:t>Полимер</a:t>
+              <a:t>Проверка переноса</a:t>
             </a:r>
           </a:p>
         </p:txBody>
@@ -8463,7 +8264,7 @@
               </a:defRPr>
             </a:pPr>
             <a:r>
-              <a:t>1270 кг/м³ — допущение для обтекателя.</a:t>
+              <a:t>Масса и CG совпали с CAD. Проверены повторная загрузка и уменьшение шага.</a:t>
             </a:r>
           </a:p>
         </p:txBody>
@@ -8591,7 +8392,7 @@
               </a:defRPr>
             </a:pPr>
             <a:r>
-              <a:t>−630 г условно</a:t>
+              <a:t>Следующий шаг</a:t>
             </a:r>
           </a:p>
         </p:txBody>
@@ -8633,7 +8434,7 @@
               </a:defRPr>
             </a:pPr>
             <a:r>
-              <a:t>Варианты стенок, материала и плат; без проверки не применены.</a:t>
+              <a:t>Реальные массы, двигатель, ветер, направляющая; разработка отделения и спасения.</a:t>
             </a:r>
           </a:p>
         </p:txBody>
@@ -9346,7 +9147,7 @@
               </a:defRPr>
             </a:pPr>
             <a:r>
-              <a:t>11 / РЕЗУЛЬТАТЫ ПРОЕКТА</a:t>
+              <a:t>08 / РЕЗУЛЬТАТЫ ПРОЕКТА</a:t>
             </a:r>
           </a:p>
         </p:txBody>
@@ -9473,7 +9274,7 @@
               </a:defRPr>
             </a:pPr>
             <a:r>
-              <a:t>Что подтверждено на этой итерации</a:t>
+              <a:t>Модульная конструкция</a:t>
             </a:r>
           </a:p>
         </p:txBody>
@@ -9558,7 +9359,7 @@
               </a:defRPr>
             </a:pPr>
             <a:r>
-              <a:t>24 тела; стабилизаторы видны после повторного открытия в FreeCAD. Физических испытаний нет.</a:t>
+              <a:t>A04: последовательность отсеков задана. Крепления, разделение и обслуживание требуют разработки.</a:t>
             </a:r>
           </a:p>
         </p:txBody>
@@ -9600,7 +9401,7 @@
               </a:defRPr>
             </a:pPr>
             <a:r>
-              <a:t>12 / 13</a:t>
+              <a:t>12 / 16</a:t>
             </a:r>
           </a:p>
         </p:txBody>
@@ -9614,7 +9415,7 @@
         <p:spPr>
           <a:xfrm>
             <a:off x="0" y="8183879"/>
-            <a:ext cx="13504984" cy="45720"/>
+            <a:ext cx="10972800" cy="45720"/>
           </a:xfrm>
           <a:prstGeom prst="rect">
             <a:avLst/>
@@ -9656,8 +9457,8 @@
         </p:nvSpPr>
         <p:spPr>
           <a:xfrm>
-            <a:off x="658368" y="2743200"/>
-            <a:ext cx="6542532" cy="3474720"/>
+            <a:off x="658368" y="2697480"/>
+            <a:ext cx="6565392" cy="1627632"/>
           </a:xfrm>
           <a:prstGeom prst="rect">
             <a:avLst/>
@@ -9699,8 +9500,8 @@
         </p:nvSpPr>
         <p:spPr>
           <a:xfrm>
-            <a:off x="658368" y="2743200"/>
-            <a:ext cx="6542532" cy="32004"/>
+            <a:off x="658368" y="2697480"/>
+            <a:ext cx="36576" cy="1627632"/>
           </a:xfrm>
           <a:prstGeom prst="rect">
             <a:avLst/>
@@ -9742,8 +9543,50 @@
         </p:nvSpPr>
         <p:spPr>
           <a:xfrm>
-            <a:off x="886968" y="2971800"/>
-            <a:ext cx="6085332" cy="694944"/>
+            <a:off x="905256" y="3035808"/>
+            <a:ext cx="868680" cy="868680"/>
+          </a:xfrm>
+          <a:prstGeom prst="rect">
+            <a:avLst/>
+          </a:prstGeom>
+          <a:noFill/>
+        </p:spPr>
+        <p:txBody>
+          <a:bodyPr wrap="square" lIns="0" rIns="0" tIns="0" bIns="0">
+            <a:spAutoFit/>
+          </a:bodyPr>
+          <a:lstStyle/>
+          <a:p>
+            <a:pPr>
+              <a:spcBef>
+                <a:spcPts val="0"/>
+              </a:spcBef>
+              <a:spcAft>
+                <a:spcPts val="900"/>
+              </a:spcAft>
+              <a:defRPr sz="4000" b="1">
+                <a:solidFill>
+                  <a:srgbClr val="FF793F"/>
+                </a:solidFill>
+                <a:latin typeface="Noto Sans"/>
+              </a:defRPr>
+            </a:pPr>
+            <a:r>
+              <a:t>01</a:t>
+            </a:r>
+          </a:p>
+        </p:txBody>
+      </p:sp>
+      <p:sp>
+        <p:nvSpPr>
+          <p:cNvPr id="28" name="TextBox 27"/>
+          <p:cNvSpPr txBox="1"/>
+          <p:nvPr/>
+        </p:nvSpPr>
+        <p:spPr>
+          <a:xfrm>
+            <a:off x="1938528" y="2971800"/>
+            <a:ext cx="4956048" cy="566928"/>
           </a:xfrm>
           <a:prstGeom prst="rect">
             <a:avLst/>
@@ -9771,21 +9614,21 @@
               </a:defRPr>
             </a:pPr>
             <a:r>
-              <a:t>Сделано</a:t>
+              <a:t>Учебный макет</a:t>
             </a:r>
           </a:p>
         </p:txBody>
       </p:sp>
       <p:sp>
         <p:nvSpPr>
-          <p:cNvPr id="28" name="TextBox 27"/>
+          <p:cNvPr id="29" name="TextBox 28"/>
           <p:cNvSpPr txBox="1"/>
           <p:nvPr/>
         </p:nvSpPr>
         <p:spPr>
           <a:xfrm>
-            <a:off x="886968" y="3685032"/>
-            <a:ext cx="6085332" cy="2423160"/>
+            <a:off x="1938528" y="3602736"/>
+            <a:ext cx="4956048" cy="576072"/>
           </a:xfrm>
           <a:prstGeom prst="rect">
             <a:avLst/>
@@ -9805,7 +9648,7 @@
               <a:spcAft>
                 <a:spcPts val="900"/>
               </a:spcAft>
-              <a:defRPr sz="2100" b="0">
+              <a:defRPr sz="1800" b="0">
                 <a:solidFill>
                   <a:srgbClr val="AFBDC0"/>
                 </a:solidFill>
@@ -9813,9 +9656,118 @@
               </a:defRPr>
             </a:pPr>
             <a:r>
-              <a:t>CAD A04, материалы, STEP и просмотр.</a:t>
+              <a:t>Собственная система спасения.</a:t>
             </a:r>
           </a:p>
+        </p:txBody>
+      </p:sp>
+      <p:sp>
+        <p:nvSpPr>
+          <p:cNvPr id="30" name="Rectangle 29"/>
+          <p:cNvSpPr/>
+          <p:nvPr/>
+        </p:nvSpPr>
+        <p:spPr>
+          <a:xfrm>
+            <a:off x="7452360" y="2697480"/>
+            <a:ext cx="6565392" cy="1627632"/>
+          </a:xfrm>
+          <a:prstGeom prst="rect">
+            <a:avLst/>
+          </a:prstGeom>
+          <a:solidFill>
+            <a:srgbClr val="1A2427"/>
+          </a:solidFill>
+          <a:ln>
+            <a:noFill/>
+          </a:ln>
+        </p:spPr>
+        <p:style>
+          <a:lnRef idx="1">
+            <a:schemeClr val="accent1"/>
+          </a:lnRef>
+          <a:fillRef idx="3">
+            <a:schemeClr val="accent1"/>
+          </a:fillRef>
+          <a:effectRef idx="2">
+            <a:schemeClr val="accent1"/>
+          </a:effectRef>
+          <a:fontRef idx="minor">
+            <a:schemeClr val="lt1"/>
+          </a:fontRef>
+        </p:style>
+        <p:txBody>
+          <a:bodyPr rtlCol="0" anchor="ctr"/>
+          <a:lstStyle/>
+          <a:p>
+            <a:pPr algn="ctr"/>
+          </a:p>
+        </p:txBody>
+      </p:sp>
+      <p:sp>
+        <p:nvSpPr>
+          <p:cNvPr id="31" name="Rectangle 30"/>
+          <p:cNvSpPr/>
+          <p:nvPr/>
+        </p:nvSpPr>
+        <p:spPr>
+          <a:xfrm>
+            <a:off x="7452360" y="2697480"/>
+            <a:ext cx="36576" cy="1627632"/>
+          </a:xfrm>
+          <a:prstGeom prst="rect">
+            <a:avLst/>
+          </a:prstGeom>
+          <a:solidFill>
+            <a:srgbClr val="FF793F"/>
+          </a:solidFill>
+          <a:ln>
+            <a:noFill/>
+          </a:ln>
+        </p:spPr>
+        <p:style>
+          <a:lnRef idx="1">
+            <a:schemeClr val="accent1"/>
+          </a:lnRef>
+          <a:fillRef idx="3">
+            <a:schemeClr val="accent1"/>
+          </a:fillRef>
+          <a:effectRef idx="2">
+            <a:schemeClr val="accent1"/>
+          </a:effectRef>
+          <a:fontRef idx="minor">
+            <a:schemeClr val="lt1"/>
+          </a:fontRef>
+        </p:style>
+        <p:txBody>
+          <a:bodyPr rtlCol="0" anchor="ctr"/>
+          <a:lstStyle/>
+          <a:p>
+            <a:pPr algn="ctr"/>
+          </a:p>
+        </p:txBody>
+      </p:sp>
+      <p:sp>
+        <p:nvSpPr>
+          <p:cNvPr id="32" name="TextBox 31"/>
+          <p:cNvSpPr txBox="1"/>
+          <p:nvPr/>
+        </p:nvSpPr>
+        <p:spPr>
+          <a:xfrm>
+            <a:off x="7699248" y="3035808"/>
+            <a:ext cx="868680" cy="868680"/>
+          </a:xfrm>
+          <a:prstGeom prst="rect">
+            <a:avLst/>
+          </a:prstGeom>
+          <a:noFill/>
+        </p:spPr>
+        <p:txBody>
+          <a:bodyPr wrap="square" lIns="0" rIns="0" tIns="0" bIns="0">
+            <a:spAutoFit/>
+          </a:bodyPr>
+          <a:lstStyle/>
           <a:p>
             <a:pPr>
               <a:spcBef>
@@ -9824,115 +9776,29 @@
               <a:spcAft>
                 <a:spcPts val="900"/>
               </a:spcAft>
-              <a:defRPr sz="2100" b="0">
+              <a:defRPr sz="4000" b="1">
                 <a:solidFill>
-                  <a:srgbClr val="AFBDC0"/>
+                  <a:srgbClr val="FF793F"/>
                 </a:solidFill>
                 <a:latin typeface="Noto Sans"/>
               </a:defRPr>
             </a:pPr>
             <a:r>
-              <a:t>GUI, ведомость и предварительные расчёты.</a:t>
+              <a:t>02</a:t>
             </a:r>
           </a:p>
         </p:txBody>
       </p:sp>
       <p:sp>
         <p:nvSpPr>
-          <p:cNvPr id="29" name="Rectangle 28"/>
-          <p:cNvSpPr/>
-          <p:nvPr/>
-        </p:nvSpPr>
-        <p:spPr>
-          <a:xfrm>
-            <a:off x="7429500" y="2743200"/>
-            <a:ext cx="6542532" cy="3474720"/>
-          </a:xfrm>
-          <a:prstGeom prst="rect">
-            <a:avLst/>
-          </a:prstGeom>
-          <a:solidFill>
-            <a:srgbClr val="1A2427"/>
-          </a:solidFill>
-          <a:ln>
-            <a:noFill/>
-          </a:ln>
-        </p:spPr>
-        <p:style>
-          <a:lnRef idx="1">
-            <a:schemeClr val="accent1"/>
-          </a:lnRef>
-          <a:fillRef idx="3">
-            <a:schemeClr val="accent1"/>
-          </a:fillRef>
-          <a:effectRef idx="2">
-            <a:schemeClr val="accent1"/>
-          </a:effectRef>
-          <a:fontRef idx="minor">
-            <a:schemeClr val="lt1"/>
-          </a:fontRef>
-        </p:style>
-        <p:txBody>
-          <a:bodyPr rtlCol="0" anchor="ctr"/>
-          <a:lstStyle/>
-          <a:p>
-            <a:pPr algn="ctr"/>
-          </a:p>
-        </p:txBody>
-      </p:sp>
-      <p:sp>
-        <p:nvSpPr>
-          <p:cNvPr id="30" name="Rectangle 29"/>
-          <p:cNvSpPr/>
-          <p:nvPr/>
-        </p:nvSpPr>
-        <p:spPr>
-          <a:xfrm>
-            <a:off x="7429500" y="2743200"/>
-            <a:ext cx="6542532" cy="32004"/>
-          </a:xfrm>
-          <a:prstGeom prst="rect">
-            <a:avLst/>
-          </a:prstGeom>
-          <a:solidFill>
-            <a:srgbClr val="FF793F"/>
-          </a:solidFill>
-          <a:ln>
-            <a:noFill/>
-          </a:ln>
-        </p:spPr>
-        <p:style>
-          <a:lnRef idx="1">
-            <a:schemeClr val="accent1"/>
-          </a:lnRef>
-          <a:fillRef idx="3">
-            <a:schemeClr val="accent1"/>
-          </a:fillRef>
-          <a:effectRef idx="2">
-            <a:schemeClr val="accent1"/>
-          </a:effectRef>
-          <a:fontRef idx="minor">
-            <a:schemeClr val="lt1"/>
-          </a:fontRef>
-        </p:style>
-        <p:txBody>
-          <a:bodyPr rtlCol="0" anchor="ctr"/>
-          <a:lstStyle/>
-          <a:p>
-            <a:pPr algn="ctr"/>
-          </a:p>
-        </p:txBody>
-      </p:sp>
-      <p:sp>
-        <p:nvSpPr>
-          <p:cNvPr id="31" name="TextBox 30"/>
+          <p:cNvPr id="33" name="TextBox 32"/>
           <p:cNvSpPr txBox="1"/>
           <p:nvPr/>
         </p:nvSpPr>
         <p:spPr>
           <a:xfrm>
-            <a:off x="7658100" y="2971800"/>
-            <a:ext cx="6085332" cy="694944"/>
+            <a:off x="8732520" y="2971800"/>
+            <a:ext cx="4956048" cy="566928"/>
           </a:xfrm>
           <a:prstGeom prst="rect">
             <a:avLst/>
@@ -9960,21 +9826,21 @@
               </a:defRPr>
             </a:pPr>
             <a:r>
-              <a:t>Открыто</a:t>
+              <a:t>Возврат носителя</a:t>
             </a:r>
           </a:p>
         </p:txBody>
       </p:sp>
       <p:sp>
         <p:nvSpPr>
-          <p:cNvPr id="32" name="TextBox 31"/>
+          <p:cNvPr id="34" name="TextBox 33"/>
           <p:cNvSpPr txBox="1"/>
           <p:nvPr/>
         </p:nvSpPr>
         <p:spPr>
           <a:xfrm>
-            <a:off x="7658100" y="3685032"/>
-            <a:ext cx="6085332" cy="2423160"/>
+            <a:off x="8732520" y="3602736"/>
+            <a:ext cx="4956048" cy="576072"/>
           </a:xfrm>
           <a:prstGeom prst="rect">
             <a:avLst/>
@@ -9994,7 +9860,7 @@
               <a:spcAft>
                 <a:spcPts val="900"/>
               </a:spcAft>
-              <a:defRPr sz="2100" b="0">
+              <a:defRPr sz="1800" b="0">
                 <a:solidFill>
                   <a:srgbClr val="AFBDC0"/>
                 </a:solidFill>
@@ -10002,9 +9868,118 @@
               </a:defRPr>
             </a:pPr>
             <a:r>
-              <a:t>Рабочие соединения и компоненты.</a:t>
+              <a:t>Спасение и обслуживаемые крепления.</a:t>
             </a:r>
           </a:p>
+        </p:txBody>
+      </p:sp>
+      <p:sp>
+        <p:nvSpPr>
+          <p:cNvPr id="35" name="Rectangle 34"/>
+          <p:cNvSpPr/>
+          <p:nvPr/>
+        </p:nvSpPr>
+        <p:spPr>
+          <a:xfrm>
+            <a:off x="658368" y="4544568"/>
+            <a:ext cx="6565392" cy="1627632"/>
+          </a:xfrm>
+          <a:prstGeom prst="rect">
+            <a:avLst/>
+          </a:prstGeom>
+          <a:solidFill>
+            <a:srgbClr val="1A2427"/>
+          </a:solidFill>
+          <a:ln>
+            <a:noFill/>
+          </a:ln>
+        </p:spPr>
+        <p:style>
+          <a:lnRef idx="1">
+            <a:schemeClr val="accent1"/>
+          </a:lnRef>
+          <a:fillRef idx="3">
+            <a:schemeClr val="accent1"/>
+          </a:fillRef>
+          <a:effectRef idx="2">
+            <a:schemeClr val="accent1"/>
+          </a:effectRef>
+          <a:fontRef idx="minor">
+            <a:schemeClr val="lt1"/>
+          </a:fontRef>
+        </p:style>
+        <p:txBody>
+          <a:bodyPr rtlCol="0" anchor="ctr"/>
+          <a:lstStyle/>
+          <a:p>
+            <a:pPr algn="ctr"/>
+          </a:p>
+        </p:txBody>
+      </p:sp>
+      <p:sp>
+        <p:nvSpPr>
+          <p:cNvPr id="36" name="Rectangle 35"/>
+          <p:cNvSpPr/>
+          <p:nvPr/>
+        </p:nvSpPr>
+        <p:spPr>
+          <a:xfrm>
+            <a:off x="658368" y="4544568"/>
+            <a:ext cx="36576" cy="1627632"/>
+          </a:xfrm>
+          <a:prstGeom prst="rect">
+            <a:avLst/>
+          </a:prstGeom>
+          <a:solidFill>
+            <a:srgbClr val="FF793F"/>
+          </a:solidFill>
+          <a:ln>
+            <a:noFill/>
+          </a:ln>
+        </p:spPr>
+        <p:style>
+          <a:lnRef idx="1">
+            <a:schemeClr val="accent1"/>
+          </a:lnRef>
+          <a:fillRef idx="3">
+            <a:schemeClr val="accent1"/>
+          </a:fillRef>
+          <a:effectRef idx="2">
+            <a:schemeClr val="accent1"/>
+          </a:effectRef>
+          <a:fontRef idx="minor">
+            <a:schemeClr val="lt1"/>
+          </a:fontRef>
+        </p:style>
+        <p:txBody>
+          <a:bodyPr rtlCol="0" anchor="ctr"/>
+          <a:lstStyle/>
+          <a:p>
+            <a:pPr algn="ctr"/>
+          </a:p>
+        </p:txBody>
+      </p:sp>
+      <p:sp>
+        <p:nvSpPr>
+          <p:cNvPr id="37" name="TextBox 36"/>
+          <p:cNvSpPr txBox="1"/>
+          <p:nvPr/>
+        </p:nvSpPr>
+        <p:spPr>
+          <a:xfrm>
+            <a:off x="905256" y="4882896"/>
+            <a:ext cx="868680" cy="868680"/>
+          </a:xfrm>
+          <a:prstGeom prst="rect">
+            <a:avLst/>
+          </a:prstGeom>
+          <a:noFill/>
+        </p:spPr>
+        <p:txBody>
+          <a:bodyPr wrap="square" lIns="0" rIns="0" tIns="0" bIns="0">
+            <a:spAutoFit/>
+          </a:bodyPr>
+          <a:lstStyle/>
           <a:p>
             <a:pPr>
               <a:spcBef>
@@ -10013,7 +9988,91 @@
               <a:spcAft>
                 <a:spcPts val="900"/>
               </a:spcAft>
-              <a:defRPr sz="2100" b="0">
+              <a:defRPr sz="4000" b="1">
+                <a:solidFill>
+                  <a:srgbClr val="FF793F"/>
+                </a:solidFill>
+                <a:latin typeface="Noto Sans"/>
+              </a:defRPr>
+            </a:pPr>
+            <a:r>
+              <a:t>03</a:t>
+            </a:r>
+          </a:p>
+        </p:txBody>
+      </p:sp>
+      <p:sp>
+        <p:nvSpPr>
+          <p:cNvPr id="38" name="TextBox 37"/>
+          <p:cNvSpPr txBox="1"/>
+          <p:nvPr/>
+        </p:nvSpPr>
+        <p:spPr>
+          <a:xfrm>
+            <a:off x="1938528" y="4818888"/>
+            <a:ext cx="4956048" cy="566928"/>
+          </a:xfrm>
+          <a:prstGeom prst="rect">
+            <a:avLst/>
+          </a:prstGeom>
+          <a:noFill/>
+        </p:spPr>
+        <p:txBody>
+          <a:bodyPr wrap="square" lIns="0" rIns="0" tIns="0" bIns="0">
+            <a:spAutoFit/>
+          </a:bodyPr>
+          <a:lstStyle/>
+          <a:p>
+            <a:pPr>
+              <a:spcBef>
+                <a:spcPts val="0"/>
+              </a:spcBef>
+              <a:spcAft>
+                <a:spcPts val="900"/>
+              </a:spcAft>
+              <a:defRPr sz="2300" b="1">
+                <a:solidFill>
+                  <a:srgbClr val="F4F1E9"/>
+                </a:solidFill>
+                <a:latin typeface="Noto Sans"/>
+              </a:defRPr>
+            </a:pPr>
+            <a:r>
+              <a:t>Бортовая система</a:t>
+            </a:r>
+          </a:p>
+        </p:txBody>
+      </p:sp>
+      <p:sp>
+        <p:nvSpPr>
+          <p:cNvPr id="39" name="TextBox 38"/>
+          <p:cNvSpPr txBox="1"/>
+          <p:nvPr/>
+        </p:nvSpPr>
+        <p:spPr>
+          <a:xfrm>
+            <a:off x="1938528" y="5449824"/>
+            <a:ext cx="4956048" cy="576072"/>
+          </a:xfrm>
+          <a:prstGeom prst="rect">
+            <a:avLst/>
+          </a:prstGeom>
+          <a:noFill/>
+        </p:spPr>
+        <p:txBody>
+          <a:bodyPr wrap="square" lIns="0" rIns="0" tIns="0" bIns="0">
+            <a:spAutoFit/>
+          </a:bodyPr>
+          <a:lstStyle/>
+          <a:p>
+            <a:pPr>
+              <a:spcBef>
+                <a:spcPts val="0"/>
+              </a:spcBef>
+              <a:spcAft>
+                <a:spcPts val="900"/>
+              </a:spcAft>
+              <a:defRPr sz="1800" b="0">
                 <a:solidFill>
                   <a:srgbClr val="AFBDC0"/>
                 </a:solidFill>
@@ -10021,7 +10080,219 @@
               </a:defRPr>
             </a:pPr>
             <a:r>
-              <a:t>Прочность, стенды и полёт.</a:t>
+              <a:t>Измерения, запись, радио, самописец.</a:t>
+            </a:r>
+          </a:p>
+        </p:txBody>
+      </p:sp>
+      <p:sp>
+        <p:nvSpPr>
+          <p:cNvPr id="40" name="Rectangle 39"/>
+          <p:cNvSpPr/>
+          <p:nvPr/>
+        </p:nvSpPr>
+        <p:spPr>
+          <a:xfrm>
+            <a:off x="7452360" y="4544568"/>
+            <a:ext cx="6565392" cy="1627632"/>
+          </a:xfrm>
+          <a:prstGeom prst="rect">
+            <a:avLst/>
+          </a:prstGeom>
+          <a:solidFill>
+            <a:srgbClr val="1A2427"/>
+          </a:solidFill>
+          <a:ln>
+            <a:noFill/>
+          </a:ln>
+        </p:spPr>
+        <p:style>
+          <a:lnRef idx="1">
+            <a:schemeClr val="accent1"/>
+          </a:lnRef>
+          <a:fillRef idx="3">
+            <a:schemeClr val="accent1"/>
+          </a:fillRef>
+          <a:effectRef idx="2">
+            <a:schemeClr val="accent1"/>
+          </a:effectRef>
+          <a:fontRef idx="minor">
+            <a:schemeClr val="lt1"/>
+          </a:fontRef>
+        </p:style>
+        <p:txBody>
+          <a:bodyPr rtlCol="0" anchor="ctr"/>
+          <a:lstStyle/>
+          <a:p>
+            <a:pPr algn="ctr"/>
+          </a:p>
+        </p:txBody>
+      </p:sp>
+      <p:sp>
+        <p:nvSpPr>
+          <p:cNvPr id="41" name="Rectangle 40"/>
+          <p:cNvSpPr/>
+          <p:nvPr/>
+        </p:nvSpPr>
+        <p:spPr>
+          <a:xfrm>
+            <a:off x="7452360" y="4544568"/>
+            <a:ext cx="36576" cy="1627632"/>
+          </a:xfrm>
+          <a:prstGeom prst="rect">
+            <a:avLst/>
+          </a:prstGeom>
+          <a:solidFill>
+            <a:srgbClr val="FF793F"/>
+          </a:solidFill>
+          <a:ln>
+            <a:noFill/>
+          </a:ln>
+        </p:spPr>
+        <p:style>
+          <a:lnRef idx="1">
+            <a:schemeClr val="accent1"/>
+          </a:lnRef>
+          <a:fillRef idx="3">
+            <a:schemeClr val="accent1"/>
+          </a:fillRef>
+          <a:effectRef idx="2">
+            <a:schemeClr val="accent1"/>
+          </a:effectRef>
+          <a:fontRef idx="minor">
+            <a:schemeClr val="lt1"/>
+          </a:fontRef>
+        </p:style>
+        <p:txBody>
+          <a:bodyPr rtlCol="0" anchor="ctr"/>
+          <a:lstStyle/>
+          <a:p>
+            <a:pPr algn="ctr"/>
+          </a:p>
+        </p:txBody>
+      </p:sp>
+      <p:sp>
+        <p:nvSpPr>
+          <p:cNvPr id="42" name="TextBox 41"/>
+          <p:cNvSpPr txBox="1"/>
+          <p:nvPr/>
+        </p:nvSpPr>
+        <p:spPr>
+          <a:xfrm>
+            <a:off x="7699248" y="4882896"/>
+            <a:ext cx="868680" cy="868680"/>
+          </a:xfrm>
+          <a:prstGeom prst="rect">
+            <a:avLst/>
+          </a:prstGeom>
+          <a:noFill/>
+        </p:spPr>
+        <p:txBody>
+          <a:bodyPr wrap="square" lIns="0" rIns="0" tIns="0" bIns="0">
+            <a:spAutoFit/>
+          </a:bodyPr>
+          <a:lstStyle/>
+          <a:p>
+            <a:pPr>
+              <a:spcBef>
+                <a:spcPts val="0"/>
+              </a:spcBef>
+              <a:spcAft>
+                <a:spcPts val="900"/>
+              </a:spcAft>
+              <a:defRPr sz="4000" b="1">
+                <a:solidFill>
+                  <a:srgbClr val="FF793F"/>
+                </a:solidFill>
+                <a:latin typeface="Noto Sans"/>
+              </a:defRPr>
+            </a:pPr>
+            <a:r>
+              <a:t>04</a:t>
+            </a:r>
+          </a:p>
+        </p:txBody>
+      </p:sp>
+      <p:sp>
+        <p:nvSpPr>
+          <p:cNvPr id="43" name="TextBox 42"/>
+          <p:cNvSpPr txBox="1"/>
+          <p:nvPr/>
+        </p:nvSpPr>
+        <p:spPr>
+          <a:xfrm>
+            <a:off x="8732520" y="4818888"/>
+            <a:ext cx="4956048" cy="566928"/>
+          </a:xfrm>
+          <a:prstGeom prst="rect">
+            <a:avLst/>
+          </a:prstGeom>
+          <a:noFill/>
+        </p:spPr>
+        <p:txBody>
+          <a:bodyPr wrap="square" lIns="0" rIns="0" tIns="0" bIns="0">
+            <a:spAutoFit/>
+          </a:bodyPr>
+          <a:lstStyle/>
+          <a:p>
+            <a:pPr>
+              <a:spcBef>
+                <a:spcPts val="0"/>
+              </a:spcBef>
+              <a:spcAft>
+                <a:spcPts val="900"/>
+              </a:spcAft>
+              <a:defRPr sz="2300" b="1">
+                <a:solidFill>
+                  <a:srgbClr val="F4F1E9"/>
+                </a:solidFill>
+                <a:latin typeface="Noto Sans"/>
+              </a:defRPr>
+            </a:pPr>
+            <a:r>
+              <a:t>Двигательный модуль</a:t>
+            </a:r>
+          </a:p>
+        </p:txBody>
+      </p:sp>
+      <p:sp>
+        <p:nvSpPr>
+          <p:cNvPr id="44" name="TextBox 43"/>
+          <p:cNvSpPr txBox="1"/>
+          <p:nvPr/>
+        </p:nvSpPr>
+        <p:spPr>
+          <a:xfrm>
+            <a:off x="8732520" y="5449824"/>
+            <a:ext cx="4956048" cy="576072"/>
+          </a:xfrm>
+          <a:prstGeom prst="rect">
+            <a:avLst/>
+          </a:prstGeom>
+          <a:noFill/>
+        </p:spPr>
+        <p:txBody>
+          <a:bodyPr wrap="square" lIns="0" rIns="0" tIns="0" bIns="0">
+            <a:spAutoFit/>
+          </a:bodyPr>
+          <a:lstStyle/>
+          <a:p>
+            <a:pPr>
+              <a:spcBef>
+                <a:spcPts val="0"/>
+              </a:spcBef>
+              <a:spcAft>
+                <a:spcPts val="900"/>
+              </a:spcAft>
+              <a:defRPr sz="1800" b="0">
+                <a:solidFill>
+                  <a:srgbClr val="AFBDC0"/>
+                </a:solidFill>
+                <a:latin typeface="Noto Sans"/>
+              </a:defRPr>
+            </a:pPr>
+            <a:r>
+              <a:t>Справочный интерфейс Ø54 × 358 мм.</a:t>
             </a:r>
           </a:p>
         </p:txBody>
@@ -10734,7 +11005,7 @@
               </a:defRPr>
             </a:pPr>
             <a:r>
-              <a:t>ИСТОЧНИКИ</a:t>
+              <a:t>09 / РЕЗУЛЬТАТЫ ПРОЕКТА</a:t>
             </a:r>
           </a:p>
         </p:txBody>
@@ -10861,6 +11132,4348 @@
               </a:defRPr>
             </a:pPr>
             <a:r>
+              <a:t>1,5 кг нагрузки → 5,787 кг на старте</a:t>
+            </a:r>
+          </a:p>
+        </p:txBody>
+      </p:sp>
+      <p:sp>
+        <p:nvSpPr>
+          <p:cNvPr id="21" name="Rectangle 20"/>
+          <p:cNvSpPr/>
+          <p:nvPr/>
+        </p:nvSpPr>
+        <p:spPr>
+          <a:xfrm>
+            <a:off x="658368" y="7159752"/>
+            <a:ext cx="13313664" cy="10972"/>
+          </a:xfrm>
+          <a:prstGeom prst="rect">
+            <a:avLst/>
+          </a:prstGeom>
+          <a:solidFill>
+            <a:srgbClr val="354347"/>
+          </a:solidFill>
+          <a:ln>
+            <a:noFill/>
+          </a:ln>
+        </p:spPr>
+        <p:style>
+          <a:lnRef idx="1">
+            <a:schemeClr val="accent1"/>
+          </a:lnRef>
+          <a:fillRef idx="3">
+            <a:schemeClr val="accent1"/>
+          </a:fillRef>
+          <a:effectRef idx="2">
+            <a:schemeClr val="accent1"/>
+          </a:effectRef>
+          <a:fontRef idx="minor">
+            <a:schemeClr val="lt1"/>
+          </a:fontRef>
+        </p:style>
+        <p:txBody>
+          <a:bodyPr rtlCol="0" anchor="ctr"/>
+          <a:lstStyle/>
+          <a:p>
+            <a:pPr algn="ctr"/>
+          </a:p>
+        </p:txBody>
+      </p:sp>
+      <p:sp>
+        <p:nvSpPr>
+          <p:cNvPr id="22" name="TextBox 21"/>
+          <p:cNvSpPr txBox="1"/>
+          <p:nvPr/>
+        </p:nvSpPr>
+        <p:spPr>
+          <a:xfrm>
+            <a:off x="658368" y="7342631"/>
+            <a:ext cx="12344400" cy="621792"/>
+          </a:xfrm>
+          <a:prstGeom prst="rect">
+            <a:avLst/>
+          </a:prstGeom>
+          <a:noFill/>
+        </p:spPr>
+        <p:txBody>
+          <a:bodyPr wrap="square" lIns="0" rIns="0" tIns="0" bIns="0">
+            <a:spAutoFit/>
+          </a:bodyPr>
+          <a:lstStyle/>
+          <a:p>
+            <a:pPr>
+              <a:spcBef>
+                <a:spcPts val="0"/>
+              </a:spcBef>
+              <a:spcAft>
+                <a:spcPts val="900"/>
+              </a:spcAft>
+              <a:defRPr sz="1200" b="0">
+                <a:solidFill>
+                  <a:srgbClr val="AFBDC0"/>
+                </a:solidFill>
+                <a:latin typeface="Noto Sans"/>
+              </a:defRPr>
+            </a:pPr>
+            <a:r>
+              <a:t>Общая масса по ТЗ не ограничена. Шкала до 6 кг. Масса расчётная, не измеренная.</a:t>
+            </a:r>
+          </a:p>
+        </p:txBody>
+      </p:sp>
+      <p:sp>
+        <p:nvSpPr>
+          <p:cNvPr id="23" name="TextBox 22"/>
+          <p:cNvSpPr txBox="1"/>
+          <p:nvPr/>
+        </p:nvSpPr>
+        <p:spPr>
+          <a:xfrm>
+            <a:off x="13121640" y="7507224"/>
+            <a:ext cx="914400" cy="365760"/>
+          </a:xfrm>
+          <a:prstGeom prst="rect">
+            <a:avLst/>
+          </a:prstGeom>
+          <a:noFill/>
+        </p:spPr>
+        <p:txBody>
+          <a:bodyPr wrap="square" lIns="0" rIns="0" tIns="0" bIns="0">
+            <a:spAutoFit/>
+          </a:bodyPr>
+          <a:lstStyle/>
+          <a:p>
+            <a:pPr>
+              <a:spcBef>
+                <a:spcPts val="0"/>
+              </a:spcBef>
+              <a:spcAft>
+                <a:spcPts val="900"/>
+              </a:spcAft>
+              <a:defRPr sz="1100" b="0">
+                <a:solidFill>
+                  <a:srgbClr val="FF793F"/>
+                </a:solidFill>
+                <a:latin typeface="Noto Sans"/>
+              </a:defRPr>
+            </a:pPr>
+            <a:r>
+              <a:t>13 / 16</a:t>
+            </a:r>
+          </a:p>
+        </p:txBody>
+      </p:sp>
+      <p:sp>
+        <p:nvSpPr>
+          <p:cNvPr id="24" name="Rectangle 23"/>
+          <p:cNvSpPr/>
+          <p:nvPr/>
+        </p:nvSpPr>
+        <p:spPr>
+          <a:xfrm>
+            <a:off x="0" y="8183879"/>
+            <a:ext cx="11887200" cy="45720"/>
+          </a:xfrm>
+          <a:prstGeom prst="rect">
+            <a:avLst/>
+          </a:prstGeom>
+          <a:solidFill>
+            <a:srgbClr val="FF793F"/>
+          </a:solidFill>
+          <a:ln>
+            <a:noFill/>
+          </a:ln>
+        </p:spPr>
+        <p:style>
+          <a:lnRef idx="1">
+            <a:schemeClr val="accent1"/>
+          </a:lnRef>
+          <a:fillRef idx="3">
+            <a:schemeClr val="accent1"/>
+          </a:fillRef>
+          <a:effectRef idx="2">
+            <a:schemeClr val="accent1"/>
+          </a:effectRef>
+          <a:fontRef idx="minor">
+            <a:schemeClr val="lt1"/>
+          </a:fontRef>
+        </p:style>
+        <p:txBody>
+          <a:bodyPr rtlCol="0" anchor="ctr"/>
+          <a:lstStyle/>
+          <a:p>
+            <a:pPr algn="ctr"/>
+          </a:p>
+        </p:txBody>
+      </p:sp>
+      <p:sp>
+        <p:nvSpPr>
+          <p:cNvPr id="25" name="TextBox 24"/>
+          <p:cNvSpPr txBox="1"/>
+          <p:nvPr/>
+        </p:nvSpPr>
+        <p:spPr>
+          <a:xfrm>
+            <a:off x="731520" y="2788920"/>
+            <a:ext cx="7315200" cy="548640"/>
+          </a:xfrm>
+          <a:prstGeom prst="rect">
+            <a:avLst/>
+          </a:prstGeom>
+          <a:noFill/>
+        </p:spPr>
+        <p:txBody>
+          <a:bodyPr wrap="square" lIns="0" rIns="0" tIns="0" bIns="0">
+            <a:spAutoFit/>
+          </a:bodyPr>
+          <a:lstStyle/>
+          <a:p>
+            <a:pPr>
+              <a:spcBef>
+                <a:spcPts val="0"/>
+              </a:spcBef>
+              <a:spcAft>
+                <a:spcPts val="900"/>
+              </a:spcAft>
+              <a:defRPr sz="2700" b="1">
+                <a:solidFill>
+                  <a:srgbClr val="F4F1E9"/>
+                </a:solidFill>
+                <a:latin typeface="Noto Sans"/>
+              </a:defRPr>
+            </a:pPr>
+            <a:r>
+              <a:t>Контрольный макет 1,0 кг — PDF ТЗ</a:t>
+            </a:r>
+          </a:p>
+        </p:txBody>
+      </p:sp>
+      <p:sp>
+        <p:nvSpPr>
+          <p:cNvPr id="26" name="TextBox 25"/>
+          <p:cNvSpPr txBox="1"/>
+          <p:nvPr/>
+        </p:nvSpPr>
+        <p:spPr>
+          <a:xfrm>
+            <a:off x="10241280" y="2633472"/>
+            <a:ext cx="3657600" cy="731520"/>
+          </a:xfrm>
+          <a:prstGeom prst="rect">
+            <a:avLst/>
+          </a:prstGeom>
+          <a:noFill/>
+        </p:spPr>
+        <p:txBody>
+          <a:bodyPr wrap="square" lIns="0" rIns="0" tIns="0" bIns="0">
+            <a:spAutoFit/>
+          </a:bodyPr>
+          <a:lstStyle/>
+          <a:p>
+            <a:pPr>
+              <a:spcBef>
+                <a:spcPts val="0"/>
+              </a:spcBef>
+              <a:spcAft>
+                <a:spcPts val="900"/>
+              </a:spcAft>
+              <a:defRPr sz="4000" b="1">
+                <a:solidFill>
+                  <a:srgbClr val="FF793F"/>
+                </a:solidFill>
+                <a:latin typeface="Noto Sans"/>
+              </a:defRPr>
+            </a:pPr>
+            <a:r>
+              <a:t>5,287 кг</a:t>
+            </a:r>
+          </a:p>
+        </p:txBody>
+      </p:sp>
+      <p:sp>
+        <p:nvSpPr>
+          <p:cNvPr id="27" name="Rectangle 26"/>
+          <p:cNvSpPr/>
+          <p:nvPr/>
+        </p:nvSpPr>
+        <p:spPr>
+          <a:xfrm>
+            <a:off x="731520" y="3547872"/>
+            <a:ext cx="13167360" cy="310896"/>
+          </a:xfrm>
+          <a:prstGeom prst="rect">
+            <a:avLst/>
+          </a:prstGeom>
+          <a:solidFill>
+            <a:srgbClr val="354347"/>
+          </a:solidFill>
+          <a:ln>
+            <a:noFill/>
+          </a:ln>
+        </p:spPr>
+        <p:style>
+          <a:lnRef idx="1">
+            <a:schemeClr val="accent1"/>
+          </a:lnRef>
+          <a:fillRef idx="3">
+            <a:schemeClr val="accent1"/>
+          </a:fillRef>
+          <a:effectRef idx="2">
+            <a:schemeClr val="accent1"/>
+          </a:effectRef>
+          <a:fontRef idx="minor">
+            <a:schemeClr val="lt1"/>
+          </a:fontRef>
+        </p:style>
+        <p:txBody>
+          <a:bodyPr rtlCol="0" anchor="ctr"/>
+          <a:lstStyle/>
+          <a:p>
+            <a:pPr algn="ctr"/>
+          </a:p>
+        </p:txBody>
+      </p:sp>
+      <p:sp>
+        <p:nvSpPr>
+          <p:cNvPr id="28" name="Rectangle 27"/>
+          <p:cNvSpPr/>
+          <p:nvPr/>
+        </p:nvSpPr>
+        <p:spPr>
+          <a:xfrm>
+            <a:off x="731520" y="3547872"/>
+            <a:ext cx="11602638" cy="310896"/>
+          </a:xfrm>
+          <a:prstGeom prst="rect">
+            <a:avLst/>
+          </a:prstGeom>
+          <a:solidFill>
+            <a:srgbClr val="FF793F"/>
+          </a:solidFill>
+          <a:ln>
+            <a:noFill/>
+          </a:ln>
+        </p:spPr>
+        <p:style>
+          <a:lnRef idx="1">
+            <a:schemeClr val="accent1"/>
+          </a:lnRef>
+          <a:fillRef idx="3">
+            <a:schemeClr val="accent1"/>
+          </a:fillRef>
+          <a:effectRef idx="2">
+            <a:schemeClr val="accent1"/>
+          </a:effectRef>
+          <a:fontRef idx="minor">
+            <a:schemeClr val="lt1"/>
+          </a:fontRef>
+        </p:style>
+        <p:txBody>
+          <a:bodyPr rtlCol="0" anchor="ctr"/>
+          <a:lstStyle/>
+          <a:p>
+            <a:pPr algn="ctr"/>
+          </a:p>
+        </p:txBody>
+      </p:sp>
+      <p:sp>
+        <p:nvSpPr>
+          <p:cNvPr id="29" name="TextBox 28"/>
+          <p:cNvSpPr txBox="1"/>
+          <p:nvPr/>
+        </p:nvSpPr>
+        <p:spPr>
+          <a:xfrm>
+            <a:off x="731520" y="4023360"/>
+            <a:ext cx="9144000" cy="457200"/>
+          </a:xfrm>
+          <a:prstGeom prst="rect">
+            <a:avLst/>
+          </a:prstGeom>
+          <a:noFill/>
+        </p:spPr>
+        <p:txBody>
+          <a:bodyPr wrap="square" lIns="0" rIns="0" tIns="0" bIns="0">
+            <a:spAutoFit/>
+          </a:bodyPr>
+          <a:lstStyle/>
+          <a:p>
+            <a:pPr>
+              <a:spcBef>
+                <a:spcPts val="0"/>
+              </a:spcBef>
+              <a:spcAft>
+                <a:spcPts val="900"/>
+              </a:spcAft>
+              <a:defRPr sz="2000" b="0">
+                <a:solidFill>
+                  <a:srgbClr val="AFBDC0"/>
+                </a:solidFill>
+                <a:latin typeface="Noto Sans"/>
+              </a:defRPr>
+            </a:pPr>
+            <a:r>
+              <a:t>Полная стартовая масса; лимит по ТЗ не установлен.</a:t>
+            </a:r>
+          </a:p>
+        </p:txBody>
+      </p:sp>
+      <p:sp>
+        <p:nvSpPr>
+          <p:cNvPr id="30" name="TextBox 29"/>
+          <p:cNvSpPr txBox="1"/>
+          <p:nvPr/>
+        </p:nvSpPr>
+        <p:spPr>
+          <a:xfrm>
+            <a:off x="731520" y="4709160"/>
+            <a:ext cx="7315200" cy="548640"/>
+          </a:xfrm>
+          <a:prstGeom prst="rect">
+            <a:avLst/>
+          </a:prstGeom>
+          <a:noFill/>
+        </p:spPr>
+        <p:txBody>
+          <a:bodyPr wrap="square" lIns="0" rIns="0" tIns="0" bIns="0">
+            <a:spAutoFit/>
+          </a:bodyPr>
+          <a:lstStyle/>
+          <a:p>
+            <a:pPr>
+              <a:spcBef>
+                <a:spcPts val="0"/>
+              </a:spcBef>
+              <a:spcAft>
+                <a:spcPts val="900"/>
+              </a:spcAft>
+              <a:defRPr sz="2700" b="1">
+                <a:solidFill>
+                  <a:srgbClr val="F4F1E9"/>
+                </a:solidFill>
+                <a:latin typeface="Noto Sans"/>
+              </a:defRPr>
+            </a:pPr>
+            <a:r>
+              <a:t>Основной макет 1,5 кг — проект</a:t>
+            </a:r>
+          </a:p>
+        </p:txBody>
+      </p:sp>
+      <p:sp>
+        <p:nvSpPr>
+          <p:cNvPr id="31" name="TextBox 30"/>
+          <p:cNvSpPr txBox="1"/>
+          <p:nvPr/>
+        </p:nvSpPr>
+        <p:spPr>
+          <a:xfrm>
+            <a:off x="10241280" y="4553712"/>
+            <a:ext cx="3657600" cy="731520"/>
+          </a:xfrm>
+          <a:prstGeom prst="rect">
+            <a:avLst/>
+          </a:prstGeom>
+          <a:noFill/>
+        </p:spPr>
+        <p:txBody>
+          <a:bodyPr wrap="square" lIns="0" rIns="0" tIns="0" bIns="0">
+            <a:spAutoFit/>
+          </a:bodyPr>
+          <a:lstStyle/>
+          <a:p>
+            <a:pPr>
+              <a:spcBef>
+                <a:spcPts val="0"/>
+              </a:spcBef>
+              <a:spcAft>
+                <a:spcPts val="900"/>
+              </a:spcAft>
+              <a:defRPr sz="4000" b="1">
+                <a:solidFill>
+                  <a:srgbClr val="FF793F"/>
+                </a:solidFill>
+                <a:latin typeface="Noto Sans"/>
+              </a:defRPr>
+            </a:pPr>
+            <a:r>
+              <a:t>5,787 кг</a:t>
+            </a:r>
+          </a:p>
+        </p:txBody>
+      </p:sp>
+      <p:sp>
+        <p:nvSpPr>
+          <p:cNvPr id="32" name="Rectangle 31"/>
+          <p:cNvSpPr/>
+          <p:nvPr/>
+        </p:nvSpPr>
+        <p:spPr>
+          <a:xfrm>
+            <a:off x="731520" y="5468112"/>
+            <a:ext cx="13167360" cy="310896"/>
+          </a:xfrm>
+          <a:prstGeom prst="rect">
+            <a:avLst/>
+          </a:prstGeom>
+          <a:solidFill>
+            <a:srgbClr val="354347"/>
+          </a:solidFill>
+          <a:ln>
+            <a:noFill/>
+          </a:ln>
+        </p:spPr>
+        <p:style>
+          <a:lnRef idx="1">
+            <a:schemeClr val="accent1"/>
+          </a:lnRef>
+          <a:fillRef idx="3">
+            <a:schemeClr val="accent1"/>
+          </a:fillRef>
+          <a:effectRef idx="2">
+            <a:schemeClr val="accent1"/>
+          </a:effectRef>
+          <a:fontRef idx="minor">
+            <a:schemeClr val="lt1"/>
+          </a:fontRef>
+        </p:style>
+        <p:txBody>
+          <a:bodyPr rtlCol="0" anchor="ctr"/>
+          <a:lstStyle/>
+          <a:p>
+            <a:pPr algn="ctr"/>
+          </a:p>
+        </p:txBody>
+      </p:sp>
+      <p:sp>
+        <p:nvSpPr>
+          <p:cNvPr id="33" name="Rectangle 32"/>
+          <p:cNvSpPr/>
+          <p:nvPr/>
+        </p:nvSpPr>
+        <p:spPr>
+          <a:xfrm>
+            <a:off x="731520" y="5468112"/>
+            <a:ext cx="12699918" cy="310896"/>
+          </a:xfrm>
+          <a:prstGeom prst="rect">
+            <a:avLst/>
+          </a:prstGeom>
+          <a:solidFill>
+            <a:srgbClr val="FF793F"/>
+          </a:solidFill>
+          <a:ln>
+            <a:noFill/>
+          </a:ln>
+        </p:spPr>
+        <p:style>
+          <a:lnRef idx="1">
+            <a:schemeClr val="accent1"/>
+          </a:lnRef>
+          <a:fillRef idx="3">
+            <a:schemeClr val="accent1"/>
+          </a:fillRef>
+          <a:effectRef idx="2">
+            <a:schemeClr val="accent1"/>
+          </a:effectRef>
+          <a:fontRef idx="minor">
+            <a:schemeClr val="lt1"/>
+          </a:fontRef>
+        </p:style>
+        <p:txBody>
+          <a:bodyPr rtlCol="0" anchor="ctr"/>
+          <a:lstStyle/>
+          <a:p>
+            <a:pPr algn="ctr"/>
+          </a:p>
+        </p:txBody>
+      </p:sp>
+      <p:sp>
+        <p:nvSpPr>
+          <p:cNvPr id="34" name="TextBox 33"/>
+          <p:cNvSpPr txBox="1"/>
+          <p:nvPr/>
+        </p:nvSpPr>
+        <p:spPr>
+          <a:xfrm>
+            <a:off x="731520" y="5943600"/>
+            <a:ext cx="9144000" cy="457200"/>
+          </a:xfrm>
+          <a:prstGeom prst="rect">
+            <a:avLst/>
+          </a:prstGeom>
+          <a:noFill/>
+        </p:spPr>
+        <p:txBody>
+          <a:bodyPr wrap="square" lIns="0" rIns="0" tIns="0" bIns="0">
+            <a:spAutoFit/>
+          </a:bodyPr>
+          <a:lstStyle/>
+          <a:p>
+            <a:pPr>
+              <a:spcBef>
+                <a:spcPts val="0"/>
+              </a:spcBef>
+              <a:spcAft>
+                <a:spcPts val="900"/>
+              </a:spcAft>
+              <a:defRPr sz="2000" b="0">
+                <a:solidFill>
+                  <a:srgbClr val="AFBDC0"/>
+                </a:solidFill>
+                <a:latin typeface="Noto Sans"/>
+              </a:defRPr>
+            </a:pPr>
+            <a:r>
+              <a:t>Полная стартовая масса; лимит по ТЗ не установлен.</a:t>
+            </a:r>
+          </a:p>
+        </p:txBody>
+      </p:sp>
+    </p:spTree>
+  </p:cSld>
+  <p:clrMapOvr>
+    <a:masterClrMapping/>
+  </p:clrMapOvr>
+</p:sld>
+</file>
+
+<file path=ppt/slides/slide14.xml><?xml version="1.0" encoding="utf-8"?>
+<p:sld xmlns:a="http://schemas.openxmlformats.org/drawingml/2006/main" xmlns:p="http://schemas.openxmlformats.org/presentationml/2006/main" xmlns:r="http://schemas.openxmlformats.org/officeDocument/2006/relationships">
+  <p:cSld>
+    <p:bg>
+      <p:bgPr>
+        <a:solidFill>
+          <a:srgbClr val="101719"/>
+        </a:solidFill>
+        <a:effectLst/>
+      </p:bgPr>
+    </p:bg>
+    <p:spTree>
+      <p:nvGrpSpPr>
+        <p:cNvPr id="1" name=""/>
+        <p:cNvGrpSpPr/>
+        <p:nvPr/>
+      </p:nvGrpSpPr>
+      <p:grpSpPr/>
+      <p:sp>
+        <p:nvSpPr>
+          <p:cNvPr id="2" name="Rectangle 1"/>
+          <p:cNvSpPr/>
+          <p:nvPr/>
+        </p:nvSpPr>
+        <p:spPr>
+          <a:xfrm>
+            <a:off x="914400" y="0"/>
+            <a:ext cx="5486" cy="8229600"/>
+          </a:xfrm>
+          <a:prstGeom prst="rect">
+            <a:avLst/>
+          </a:prstGeom>
+          <a:solidFill>
+            <a:srgbClr val="182124"/>
+          </a:solidFill>
+          <a:ln>
+            <a:noFill/>
+          </a:ln>
+        </p:spPr>
+        <p:style>
+          <a:lnRef idx="1">
+            <a:schemeClr val="accent1"/>
+          </a:lnRef>
+          <a:fillRef idx="3">
+            <a:schemeClr val="accent1"/>
+          </a:fillRef>
+          <a:effectRef idx="2">
+            <a:schemeClr val="accent1"/>
+          </a:effectRef>
+          <a:fontRef idx="minor">
+            <a:schemeClr val="lt1"/>
+          </a:fontRef>
+        </p:style>
+        <p:txBody>
+          <a:bodyPr rtlCol="0" anchor="ctr"/>
+          <a:lstStyle/>
+          <a:p>
+            <a:pPr algn="ctr"/>
+          </a:p>
+        </p:txBody>
+      </p:sp>
+      <p:sp>
+        <p:nvSpPr>
+          <p:cNvPr id="3" name="Rectangle 2"/>
+          <p:cNvSpPr/>
+          <p:nvPr/>
+        </p:nvSpPr>
+        <p:spPr>
+          <a:xfrm>
+            <a:off x="1828800" y="0"/>
+            <a:ext cx="5486" cy="8229600"/>
+          </a:xfrm>
+          <a:prstGeom prst="rect">
+            <a:avLst/>
+          </a:prstGeom>
+          <a:solidFill>
+            <a:srgbClr val="182124"/>
+          </a:solidFill>
+          <a:ln>
+            <a:noFill/>
+          </a:ln>
+        </p:spPr>
+        <p:style>
+          <a:lnRef idx="1">
+            <a:schemeClr val="accent1"/>
+          </a:lnRef>
+          <a:fillRef idx="3">
+            <a:schemeClr val="accent1"/>
+          </a:fillRef>
+          <a:effectRef idx="2">
+            <a:schemeClr val="accent1"/>
+          </a:effectRef>
+          <a:fontRef idx="minor">
+            <a:schemeClr val="lt1"/>
+          </a:fontRef>
+        </p:style>
+        <p:txBody>
+          <a:bodyPr rtlCol="0" anchor="ctr"/>
+          <a:lstStyle/>
+          <a:p>
+            <a:pPr algn="ctr"/>
+          </a:p>
+        </p:txBody>
+      </p:sp>
+      <p:sp>
+        <p:nvSpPr>
+          <p:cNvPr id="4" name="Rectangle 3"/>
+          <p:cNvSpPr/>
+          <p:nvPr/>
+        </p:nvSpPr>
+        <p:spPr>
+          <a:xfrm>
+            <a:off x="2743200" y="0"/>
+            <a:ext cx="5486" cy="8229600"/>
+          </a:xfrm>
+          <a:prstGeom prst="rect">
+            <a:avLst/>
+          </a:prstGeom>
+          <a:solidFill>
+            <a:srgbClr val="182124"/>
+          </a:solidFill>
+          <a:ln>
+            <a:noFill/>
+          </a:ln>
+        </p:spPr>
+        <p:style>
+          <a:lnRef idx="1">
+            <a:schemeClr val="accent1"/>
+          </a:lnRef>
+          <a:fillRef idx="3">
+            <a:schemeClr val="accent1"/>
+          </a:fillRef>
+          <a:effectRef idx="2">
+            <a:schemeClr val="accent1"/>
+          </a:effectRef>
+          <a:fontRef idx="minor">
+            <a:schemeClr val="lt1"/>
+          </a:fontRef>
+        </p:style>
+        <p:txBody>
+          <a:bodyPr rtlCol="0" anchor="ctr"/>
+          <a:lstStyle/>
+          <a:p>
+            <a:pPr algn="ctr"/>
+          </a:p>
+        </p:txBody>
+      </p:sp>
+      <p:sp>
+        <p:nvSpPr>
+          <p:cNvPr id="5" name="Rectangle 4"/>
+          <p:cNvSpPr/>
+          <p:nvPr/>
+        </p:nvSpPr>
+        <p:spPr>
+          <a:xfrm>
+            <a:off x="3657600" y="0"/>
+            <a:ext cx="5486" cy="8229600"/>
+          </a:xfrm>
+          <a:prstGeom prst="rect">
+            <a:avLst/>
+          </a:prstGeom>
+          <a:solidFill>
+            <a:srgbClr val="182124"/>
+          </a:solidFill>
+          <a:ln>
+            <a:noFill/>
+          </a:ln>
+        </p:spPr>
+        <p:style>
+          <a:lnRef idx="1">
+            <a:schemeClr val="accent1"/>
+          </a:lnRef>
+          <a:fillRef idx="3">
+            <a:schemeClr val="accent1"/>
+          </a:fillRef>
+          <a:effectRef idx="2">
+            <a:schemeClr val="accent1"/>
+          </a:effectRef>
+          <a:fontRef idx="minor">
+            <a:schemeClr val="lt1"/>
+          </a:fontRef>
+        </p:style>
+        <p:txBody>
+          <a:bodyPr rtlCol="0" anchor="ctr"/>
+          <a:lstStyle/>
+          <a:p>
+            <a:pPr algn="ctr"/>
+          </a:p>
+        </p:txBody>
+      </p:sp>
+      <p:sp>
+        <p:nvSpPr>
+          <p:cNvPr id="6" name="Rectangle 5"/>
+          <p:cNvSpPr/>
+          <p:nvPr/>
+        </p:nvSpPr>
+        <p:spPr>
+          <a:xfrm>
+            <a:off x="4572000" y="0"/>
+            <a:ext cx="5486" cy="8229600"/>
+          </a:xfrm>
+          <a:prstGeom prst="rect">
+            <a:avLst/>
+          </a:prstGeom>
+          <a:solidFill>
+            <a:srgbClr val="182124"/>
+          </a:solidFill>
+          <a:ln>
+            <a:noFill/>
+          </a:ln>
+        </p:spPr>
+        <p:style>
+          <a:lnRef idx="1">
+            <a:schemeClr val="accent1"/>
+          </a:lnRef>
+          <a:fillRef idx="3">
+            <a:schemeClr val="accent1"/>
+          </a:fillRef>
+          <a:effectRef idx="2">
+            <a:schemeClr val="accent1"/>
+          </a:effectRef>
+          <a:fontRef idx="minor">
+            <a:schemeClr val="lt1"/>
+          </a:fontRef>
+        </p:style>
+        <p:txBody>
+          <a:bodyPr rtlCol="0" anchor="ctr"/>
+          <a:lstStyle/>
+          <a:p>
+            <a:pPr algn="ctr"/>
+          </a:p>
+        </p:txBody>
+      </p:sp>
+      <p:sp>
+        <p:nvSpPr>
+          <p:cNvPr id="7" name="Rectangle 6"/>
+          <p:cNvSpPr/>
+          <p:nvPr/>
+        </p:nvSpPr>
+        <p:spPr>
+          <a:xfrm>
+            <a:off x="5486400" y="0"/>
+            <a:ext cx="5486" cy="8229600"/>
+          </a:xfrm>
+          <a:prstGeom prst="rect">
+            <a:avLst/>
+          </a:prstGeom>
+          <a:solidFill>
+            <a:srgbClr val="182124"/>
+          </a:solidFill>
+          <a:ln>
+            <a:noFill/>
+          </a:ln>
+        </p:spPr>
+        <p:style>
+          <a:lnRef idx="1">
+            <a:schemeClr val="accent1"/>
+          </a:lnRef>
+          <a:fillRef idx="3">
+            <a:schemeClr val="accent1"/>
+          </a:fillRef>
+          <a:effectRef idx="2">
+            <a:schemeClr val="accent1"/>
+          </a:effectRef>
+          <a:fontRef idx="minor">
+            <a:schemeClr val="lt1"/>
+          </a:fontRef>
+        </p:style>
+        <p:txBody>
+          <a:bodyPr rtlCol="0" anchor="ctr"/>
+          <a:lstStyle/>
+          <a:p>
+            <a:pPr algn="ctr"/>
+          </a:p>
+        </p:txBody>
+      </p:sp>
+      <p:sp>
+        <p:nvSpPr>
+          <p:cNvPr id="8" name="Rectangle 7"/>
+          <p:cNvSpPr/>
+          <p:nvPr/>
+        </p:nvSpPr>
+        <p:spPr>
+          <a:xfrm>
+            <a:off x="6400800" y="0"/>
+            <a:ext cx="5486" cy="8229600"/>
+          </a:xfrm>
+          <a:prstGeom prst="rect">
+            <a:avLst/>
+          </a:prstGeom>
+          <a:solidFill>
+            <a:srgbClr val="182124"/>
+          </a:solidFill>
+          <a:ln>
+            <a:noFill/>
+          </a:ln>
+        </p:spPr>
+        <p:style>
+          <a:lnRef idx="1">
+            <a:schemeClr val="accent1"/>
+          </a:lnRef>
+          <a:fillRef idx="3">
+            <a:schemeClr val="accent1"/>
+          </a:fillRef>
+          <a:effectRef idx="2">
+            <a:schemeClr val="accent1"/>
+          </a:effectRef>
+          <a:fontRef idx="minor">
+            <a:schemeClr val="lt1"/>
+          </a:fontRef>
+        </p:style>
+        <p:txBody>
+          <a:bodyPr rtlCol="0" anchor="ctr"/>
+          <a:lstStyle/>
+          <a:p>
+            <a:pPr algn="ctr"/>
+          </a:p>
+        </p:txBody>
+      </p:sp>
+      <p:sp>
+        <p:nvSpPr>
+          <p:cNvPr id="9" name="Rectangle 8"/>
+          <p:cNvSpPr/>
+          <p:nvPr/>
+        </p:nvSpPr>
+        <p:spPr>
+          <a:xfrm>
+            <a:off x="7315200" y="0"/>
+            <a:ext cx="5486" cy="8229600"/>
+          </a:xfrm>
+          <a:prstGeom prst="rect">
+            <a:avLst/>
+          </a:prstGeom>
+          <a:solidFill>
+            <a:srgbClr val="182124"/>
+          </a:solidFill>
+          <a:ln>
+            <a:noFill/>
+          </a:ln>
+        </p:spPr>
+        <p:style>
+          <a:lnRef idx="1">
+            <a:schemeClr val="accent1"/>
+          </a:lnRef>
+          <a:fillRef idx="3">
+            <a:schemeClr val="accent1"/>
+          </a:fillRef>
+          <a:effectRef idx="2">
+            <a:schemeClr val="accent1"/>
+          </a:effectRef>
+          <a:fontRef idx="minor">
+            <a:schemeClr val="lt1"/>
+          </a:fontRef>
+        </p:style>
+        <p:txBody>
+          <a:bodyPr rtlCol="0" anchor="ctr"/>
+          <a:lstStyle/>
+          <a:p>
+            <a:pPr algn="ctr"/>
+          </a:p>
+        </p:txBody>
+      </p:sp>
+      <p:sp>
+        <p:nvSpPr>
+          <p:cNvPr id="10" name="Rectangle 9"/>
+          <p:cNvSpPr/>
+          <p:nvPr/>
+        </p:nvSpPr>
+        <p:spPr>
+          <a:xfrm>
+            <a:off x="8229600" y="0"/>
+            <a:ext cx="5486" cy="8229600"/>
+          </a:xfrm>
+          <a:prstGeom prst="rect">
+            <a:avLst/>
+          </a:prstGeom>
+          <a:solidFill>
+            <a:srgbClr val="182124"/>
+          </a:solidFill>
+          <a:ln>
+            <a:noFill/>
+          </a:ln>
+        </p:spPr>
+        <p:style>
+          <a:lnRef idx="1">
+            <a:schemeClr val="accent1"/>
+          </a:lnRef>
+          <a:fillRef idx="3">
+            <a:schemeClr val="accent1"/>
+          </a:fillRef>
+          <a:effectRef idx="2">
+            <a:schemeClr val="accent1"/>
+          </a:effectRef>
+          <a:fontRef idx="minor">
+            <a:schemeClr val="lt1"/>
+          </a:fontRef>
+        </p:style>
+        <p:txBody>
+          <a:bodyPr rtlCol="0" anchor="ctr"/>
+          <a:lstStyle/>
+          <a:p>
+            <a:pPr algn="ctr"/>
+          </a:p>
+        </p:txBody>
+      </p:sp>
+      <p:sp>
+        <p:nvSpPr>
+          <p:cNvPr id="11" name="Rectangle 10"/>
+          <p:cNvSpPr/>
+          <p:nvPr/>
+        </p:nvSpPr>
+        <p:spPr>
+          <a:xfrm>
+            <a:off x="9144000" y="0"/>
+            <a:ext cx="5486" cy="8229600"/>
+          </a:xfrm>
+          <a:prstGeom prst="rect">
+            <a:avLst/>
+          </a:prstGeom>
+          <a:solidFill>
+            <a:srgbClr val="182124"/>
+          </a:solidFill>
+          <a:ln>
+            <a:noFill/>
+          </a:ln>
+        </p:spPr>
+        <p:style>
+          <a:lnRef idx="1">
+            <a:schemeClr val="accent1"/>
+          </a:lnRef>
+          <a:fillRef idx="3">
+            <a:schemeClr val="accent1"/>
+          </a:fillRef>
+          <a:effectRef idx="2">
+            <a:schemeClr val="accent1"/>
+          </a:effectRef>
+          <a:fontRef idx="minor">
+            <a:schemeClr val="lt1"/>
+          </a:fontRef>
+        </p:style>
+        <p:txBody>
+          <a:bodyPr rtlCol="0" anchor="ctr"/>
+          <a:lstStyle/>
+          <a:p>
+            <a:pPr algn="ctr"/>
+          </a:p>
+        </p:txBody>
+      </p:sp>
+      <p:sp>
+        <p:nvSpPr>
+          <p:cNvPr id="12" name="Rectangle 11"/>
+          <p:cNvSpPr/>
+          <p:nvPr/>
+        </p:nvSpPr>
+        <p:spPr>
+          <a:xfrm>
+            <a:off x="10058400" y="0"/>
+            <a:ext cx="5486" cy="8229600"/>
+          </a:xfrm>
+          <a:prstGeom prst="rect">
+            <a:avLst/>
+          </a:prstGeom>
+          <a:solidFill>
+            <a:srgbClr val="182124"/>
+          </a:solidFill>
+          <a:ln>
+            <a:noFill/>
+          </a:ln>
+        </p:spPr>
+        <p:style>
+          <a:lnRef idx="1">
+            <a:schemeClr val="accent1"/>
+          </a:lnRef>
+          <a:fillRef idx="3">
+            <a:schemeClr val="accent1"/>
+          </a:fillRef>
+          <a:effectRef idx="2">
+            <a:schemeClr val="accent1"/>
+          </a:effectRef>
+          <a:fontRef idx="minor">
+            <a:schemeClr val="lt1"/>
+          </a:fontRef>
+        </p:style>
+        <p:txBody>
+          <a:bodyPr rtlCol="0" anchor="ctr"/>
+          <a:lstStyle/>
+          <a:p>
+            <a:pPr algn="ctr"/>
+          </a:p>
+        </p:txBody>
+      </p:sp>
+      <p:sp>
+        <p:nvSpPr>
+          <p:cNvPr id="13" name="Rectangle 12"/>
+          <p:cNvSpPr/>
+          <p:nvPr/>
+        </p:nvSpPr>
+        <p:spPr>
+          <a:xfrm>
+            <a:off x="10972800" y="0"/>
+            <a:ext cx="5486" cy="8229600"/>
+          </a:xfrm>
+          <a:prstGeom prst="rect">
+            <a:avLst/>
+          </a:prstGeom>
+          <a:solidFill>
+            <a:srgbClr val="182124"/>
+          </a:solidFill>
+          <a:ln>
+            <a:noFill/>
+          </a:ln>
+        </p:spPr>
+        <p:style>
+          <a:lnRef idx="1">
+            <a:schemeClr val="accent1"/>
+          </a:lnRef>
+          <a:fillRef idx="3">
+            <a:schemeClr val="accent1"/>
+          </a:fillRef>
+          <a:effectRef idx="2">
+            <a:schemeClr val="accent1"/>
+          </a:effectRef>
+          <a:fontRef idx="minor">
+            <a:schemeClr val="lt1"/>
+          </a:fontRef>
+        </p:style>
+        <p:txBody>
+          <a:bodyPr rtlCol="0" anchor="ctr"/>
+          <a:lstStyle/>
+          <a:p>
+            <a:pPr algn="ctr"/>
+          </a:p>
+        </p:txBody>
+      </p:sp>
+      <p:sp>
+        <p:nvSpPr>
+          <p:cNvPr id="14" name="Rectangle 13"/>
+          <p:cNvSpPr/>
+          <p:nvPr/>
+        </p:nvSpPr>
+        <p:spPr>
+          <a:xfrm>
+            <a:off x="11887200" y="0"/>
+            <a:ext cx="5486" cy="8229600"/>
+          </a:xfrm>
+          <a:prstGeom prst="rect">
+            <a:avLst/>
+          </a:prstGeom>
+          <a:solidFill>
+            <a:srgbClr val="182124"/>
+          </a:solidFill>
+          <a:ln>
+            <a:noFill/>
+          </a:ln>
+        </p:spPr>
+        <p:style>
+          <a:lnRef idx="1">
+            <a:schemeClr val="accent1"/>
+          </a:lnRef>
+          <a:fillRef idx="3">
+            <a:schemeClr val="accent1"/>
+          </a:fillRef>
+          <a:effectRef idx="2">
+            <a:schemeClr val="accent1"/>
+          </a:effectRef>
+          <a:fontRef idx="minor">
+            <a:schemeClr val="lt1"/>
+          </a:fontRef>
+        </p:style>
+        <p:txBody>
+          <a:bodyPr rtlCol="0" anchor="ctr"/>
+          <a:lstStyle/>
+          <a:p>
+            <a:pPr algn="ctr"/>
+          </a:p>
+        </p:txBody>
+      </p:sp>
+      <p:sp>
+        <p:nvSpPr>
+          <p:cNvPr id="15" name="Rectangle 14"/>
+          <p:cNvSpPr/>
+          <p:nvPr/>
+        </p:nvSpPr>
+        <p:spPr>
+          <a:xfrm>
+            <a:off x="12801600" y="0"/>
+            <a:ext cx="5486" cy="8229600"/>
+          </a:xfrm>
+          <a:prstGeom prst="rect">
+            <a:avLst/>
+          </a:prstGeom>
+          <a:solidFill>
+            <a:srgbClr val="182124"/>
+          </a:solidFill>
+          <a:ln>
+            <a:noFill/>
+          </a:ln>
+        </p:spPr>
+        <p:style>
+          <a:lnRef idx="1">
+            <a:schemeClr val="accent1"/>
+          </a:lnRef>
+          <a:fillRef idx="3">
+            <a:schemeClr val="accent1"/>
+          </a:fillRef>
+          <a:effectRef idx="2">
+            <a:schemeClr val="accent1"/>
+          </a:effectRef>
+          <a:fontRef idx="minor">
+            <a:schemeClr val="lt1"/>
+          </a:fontRef>
+        </p:style>
+        <p:txBody>
+          <a:bodyPr rtlCol="0" anchor="ctr"/>
+          <a:lstStyle/>
+          <a:p>
+            <a:pPr algn="ctr"/>
+          </a:p>
+        </p:txBody>
+      </p:sp>
+      <p:sp>
+        <p:nvSpPr>
+          <p:cNvPr id="16" name="Rectangle 15"/>
+          <p:cNvSpPr/>
+          <p:nvPr/>
+        </p:nvSpPr>
+        <p:spPr>
+          <a:xfrm>
+            <a:off x="13716000" y="0"/>
+            <a:ext cx="5486" cy="8229600"/>
+          </a:xfrm>
+          <a:prstGeom prst="rect">
+            <a:avLst/>
+          </a:prstGeom>
+          <a:solidFill>
+            <a:srgbClr val="182124"/>
+          </a:solidFill>
+          <a:ln>
+            <a:noFill/>
+          </a:ln>
+        </p:spPr>
+        <p:style>
+          <a:lnRef idx="1">
+            <a:schemeClr val="accent1"/>
+          </a:lnRef>
+          <a:fillRef idx="3">
+            <a:schemeClr val="accent1"/>
+          </a:fillRef>
+          <a:effectRef idx="2">
+            <a:schemeClr val="accent1"/>
+          </a:effectRef>
+          <a:fontRef idx="minor">
+            <a:schemeClr val="lt1"/>
+          </a:fontRef>
+        </p:style>
+        <p:txBody>
+          <a:bodyPr rtlCol="0" anchor="ctr"/>
+          <a:lstStyle/>
+          <a:p>
+            <a:pPr algn="ctr"/>
+          </a:p>
+        </p:txBody>
+      </p:sp>
+      <p:sp>
+        <p:nvSpPr>
+          <p:cNvPr id="17" name="TextBox 16"/>
+          <p:cNvSpPr txBox="1"/>
+          <p:nvPr/>
+        </p:nvSpPr>
+        <p:spPr>
+          <a:xfrm>
+            <a:off x="658368" y="393192"/>
+            <a:ext cx="10972800" cy="274320"/>
+          </a:xfrm>
+          <a:prstGeom prst="rect">
+            <a:avLst/>
+          </a:prstGeom>
+          <a:noFill/>
+        </p:spPr>
+        <p:txBody>
+          <a:bodyPr wrap="square" lIns="0" rIns="0" tIns="0" bIns="0">
+            <a:spAutoFit/>
+          </a:bodyPr>
+          <a:lstStyle/>
+          <a:p>
+            <a:pPr>
+              <a:spcBef>
+                <a:spcPts val="0"/>
+              </a:spcBef>
+              <a:spcAft>
+                <a:spcPts val="900"/>
+              </a:spcAft>
+              <a:defRPr sz="1100" b="0">
+                <a:solidFill>
+                  <a:srgbClr val="AFBDC0"/>
+                </a:solidFill>
+                <a:latin typeface="Noto Sans"/>
+              </a:defRPr>
+            </a:pPr>
+            <a:r>
+              <a:t>10 / РЕЗУЛЬТАТЫ ПРОЕКТА</a:t>
+            </a:r>
+          </a:p>
+        </p:txBody>
+      </p:sp>
+      <p:sp>
+        <p:nvSpPr>
+          <p:cNvPr id="18" name="TextBox 17"/>
+          <p:cNvSpPr txBox="1"/>
+          <p:nvPr/>
+        </p:nvSpPr>
+        <p:spPr>
+          <a:xfrm>
+            <a:off x="12390120" y="393192"/>
+            <a:ext cx="1828800" cy="274320"/>
+          </a:xfrm>
+          <a:prstGeom prst="rect">
+            <a:avLst/>
+          </a:prstGeom>
+          <a:noFill/>
+        </p:spPr>
+        <p:txBody>
+          <a:bodyPr wrap="square" lIns="0" rIns="0" tIns="0" bIns="0">
+            <a:spAutoFit/>
+          </a:bodyPr>
+          <a:lstStyle/>
+          <a:p>
+            <a:pPr>
+              <a:spcBef>
+                <a:spcPts val="0"/>
+              </a:spcBef>
+              <a:spcAft>
+                <a:spcPts val="900"/>
+              </a:spcAft>
+              <a:defRPr sz="1100" b="1">
+                <a:solidFill>
+                  <a:srgbClr val="FF793F"/>
+                </a:solidFill>
+                <a:latin typeface="Noto Sans"/>
+              </a:defRPr>
+            </a:pPr>
+            <a:r>
+              <a:t>PLBP / SG1</a:t>
+            </a:r>
+          </a:p>
+        </p:txBody>
+      </p:sp>
+      <p:sp>
+        <p:nvSpPr>
+          <p:cNvPr id="19" name="Rectangle 18"/>
+          <p:cNvSpPr/>
+          <p:nvPr/>
+        </p:nvSpPr>
+        <p:spPr>
+          <a:xfrm>
+            <a:off x="658368" y="914400"/>
+            <a:ext cx="13313664" cy="10972"/>
+          </a:xfrm>
+          <a:prstGeom prst="rect">
+            <a:avLst/>
+          </a:prstGeom>
+          <a:solidFill>
+            <a:srgbClr val="354347"/>
+          </a:solidFill>
+          <a:ln>
+            <a:noFill/>
+          </a:ln>
+        </p:spPr>
+        <p:style>
+          <a:lnRef idx="1">
+            <a:schemeClr val="accent1"/>
+          </a:lnRef>
+          <a:fillRef idx="3">
+            <a:schemeClr val="accent1"/>
+          </a:fillRef>
+          <a:effectRef idx="2">
+            <a:schemeClr val="accent1"/>
+          </a:effectRef>
+          <a:fontRef idx="minor">
+            <a:schemeClr val="lt1"/>
+          </a:fontRef>
+        </p:style>
+        <p:txBody>
+          <a:bodyPr rtlCol="0" anchor="ctr"/>
+          <a:lstStyle/>
+          <a:p>
+            <a:pPr algn="ctr"/>
+          </a:p>
+        </p:txBody>
+      </p:sp>
+      <p:sp>
+        <p:nvSpPr>
+          <p:cNvPr id="20" name="TextBox 19"/>
+          <p:cNvSpPr txBox="1"/>
+          <p:nvPr/>
+        </p:nvSpPr>
+        <p:spPr>
+          <a:xfrm>
+            <a:off x="658368" y="1243584"/>
+            <a:ext cx="13213080" cy="1097280"/>
+          </a:xfrm>
+          <a:prstGeom prst="rect">
+            <a:avLst/>
+          </a:prstGeom>
+          <a:noFill/>
+        </p:spPr>
+        <p:txBody>
+          <a:bodyPr wrap="square" lIns="0" rIns="0" tIns="0" bIns="0">
+            <a:spAutoFit/>
+          </a:bodyPr>
+          <a:lstStyle/>
+          <a:p>
+            <a:pPr>
+              <a:spcBef>
+                <a:spcPts val="0"/>
+              </a:spcBef>
+              <a:spcAft>
+                <a:spcPts val="900"/>
+              </a:spcAft>
+              <a:defRPr sz="3700" b="1">
+                <a:solidFill>
+                  <a:srgbClr val="F4F1E9"/>
+                </a:solidFill>
+                <a:latin typeface="Noto Sans"/>
+              </a:defRPr>
+            </a:pPr>
+            <a:r>
+              <a:t>Материалы и честное облегчение</a:t>
+            </a:r>
+          </a:p>
+        </p:txBody>
+      </p:sp>
+      <p:sp>
+        <p:nvSpPr>
+          <p:cNvPr id="21" name="Rectangle 20"/>
+          <p:cNvSpPr/>
+          <p:nvPr/>
+        </p:nvSpPr>
+        <p:spPr>
+          <a:xfrm>
+            <a:off x="658368" y="7159752"/>
+            <a:ext cx="13313664" cy="10972"/>
+          </a:xfrm>
+          <a:prstGeom prst="rect">
+            <a:avLst/>
+          </a:prstGeom>
+          <a:solidFill>
+            <a:srgbClr val="354347"/>
+          </a:solidFill>
+          <a:ln>
+            <a:noFill/>
+          </a:ln>
+        </p:spPr>
+        <p:style>
+          <a:lnRef idx="1">
+            <a:schemeClr val="accent1"/>
+          </a:lnRef>
+          <a:fillRef idx="3">
+            <a:schemeClr val="accent1"/>
+          </a:fillRef>
+          <a:effectRef idx="2">
+            <a:schemeClr val="accent1"/>
+          </a:effectRef>
+          <a:fontRef idx="minor">
+            <a:schemeClr val="lt1"/>
+          </a:fontRef>
+        </p:style>
+        <p:txBody>
+          <a:bodyPr rtlCol="0" anchor="ctr"/>
+          <a:lstStyle/>
+          <a:p>
+            <a:pPr algn="ctr"/>
+          </a:p>
+        </p:txBody>
+      </p:sp>
+      <p:sp>
+        <p:nvSpPr>
+          <p:cNvPr id="22" name="TextBox 21"/>
+          <p:cNvSpPr txBox="1"/>
+          <p:nvPr/>
+        </p:nvSpPr>
+        <p:spPr>
+          <a:xfrm>
+            <a:off x="658368" y="7342631"/>
+            <a:ext cx="12344400" cy="621792"/>
+          </a:xfrm>
+          <a:prstGeom prst="rect">
+            <a:avLst/>
+          </a:prstGeom>
+          <a:noFill/>
+        </p:spPr>
+        <p:txBody>
+          <a:bodyPr wrap="square" lIns="0" rIns="0" tIns="0" bIns="0">
+            <a:spAutoFit/>
+          </a:bodyPr>
+          <a:lstStyle/>
+          <a:p>
+            <a:pPr>
+              <a:spcBef>
+                <a:spcPts val="0"/>
+              </a:spcBef>
+              <a:spcAft>
+                <a:spcPts val="900"/>
+              </a:spcAft>
+              <a:defRPr sz="1200" b="0">
+                <a:solidFill>
+                  <a:srgbClr val="AFBDC0"/>
+                </a:solidFill>
+                <a:latin typeface="Noto Sans"/>
+              </a:defRPr>
+            </a:pPr>
+            <a:r>
+              <a:t>MassAudit и просмотрщик раскрывают каждую массу. Подтверждённая экономия без потерь: 0 г.</a:t>
+            </a:r>
+          </a:p>
+        </p:txBody>
+      </p:sp>
+      <p:sp>
+        <p:nvSpPr>
+          <p:cNvPr id="23" name="TextBox 22"/>
+          <p:cNvSpPr txBox="1"/>
+          <p:nvPr/>
+        </p:nvSpPr>
+        <p:spPr>
+          <a:xfrm>
+            <a:off x="13121640" y="7507224"/>
+            <a:ext cx="914400" cy="365760"/>
+          </a:xfrm>
+          <a:prstGeom prst="rect">
+            <a:avLst/>
+          </a:prstGeom>
+          <a:noFill/>
+        </p:spPr>
+        <p:txBody>
+          <a:bodyPr wrap="square" lIns="0" rIns="0" tIns="0" bIns="0">
+            <a:spAutoFit/>
+          </a:bodyPr>
+          <a:lstStyle/>
+          <a:p>
+            <a:pPr>
+              <a:spcBef>
+                <a:spcPts val="0"/>
+              </a:spcBef>
+              <a:spcAft>
+                <a:spcPts val="900"/>
+              </a:spcAft>
+              <a:defRPr sz="1100" b="0">
+                <a:solidFill>
+                  <a:srgbClr val="FF793F"/>
+                </a:solidFill>
+                <a:latin typeface="Noto Sans"/>
+              </a:defRPr>
+            </a:pPr>
+            <a:r>
+              <a:t>14 / 16</a:t>
+            </a:r>
+          </a:p>
+        </p:txBody>
+      </p:sp>
+      <p:sp>
+        <p:nvSpPr>
+          <p:cNvPr id="24" name="Rectangle 23"/>
+          <p:cNvSpPr/>
+          <p:nvPr/>
+        </p:nvSpPr>
+        <p:spPr>
+          <a:xfrm>
+            <a:off x="0" y="8183879"/>
+            <a:ext cx="12801600" cy="45720"/>
+          </a:xfrm>
+          <a:prstGeom prst="rect">
+            <a:avLst/>
+          </a:prstGeom>
+          <a:solidFill>
+            <a:srgbClr val="FF793F"/>
+          </a:solidFill>
+          <a:ln>
+            <a:noFill/>
+          </a:ln>
+        </p:spPr>
+        <p:style>
+          <a:lnRef idx="1">
+            <a:schemeClr val="accent1"/>
+          </a:lnRef>
+          <a:fillRef idx="3">
+            <a:schemeClr val="accent1"/>
+          </a:fillRef>
+          <a:effectRef idx="2">
+            <a:schemeClr val="accent1"/>
+          </a:effectRef>
+          <a:fontRef idx="minor">
+            <a:schemeClr val="lt1"/>
+          </a:fontRef>
+        </p:style>
+        <p:txBody>
+          <a:bodyPr rtlCol="0" anchor="ctr"/>
+          <a:lstStyle/>
+          <a:p>
+            <a:pPr algn="ctr"/>
+          </a:p>
+        </p:txBody>
+      </p:sp>
+      <p:sp>
+        <p:nvSpPr>
+          <p:cNvPr id="25" name="Rectangle 24"/>
+          <p:cNvSpPr/>
+          <p:nvPr/>
+        </p:nvSpPr>
+        <p:spPr>
+          <a:xfrm>
+            <a:off x="658368" y="2743200"/>
+            <a:ext cx="4285488" cy="3474720"/>
+          </a:xfrm>
+          <a:prstGeom prst="rect">
+            <a:avLst/>
+          </a:prstGeom>
+          <a:solidFill>
+            <a:srgbClr val="1A2427"/>
+          </a:solidFill>
+          <a:ln>
+            <a:noFill/>
+          </a:ln>
+        </p:spPr>
+        <p:style>
+          <a:lnRef idx="1">
+            <a:schemeClr val="accent1"/>
+          </a:lnRef>
+          <a:fillRef idx="3">
+            <a:schemeClr val="accent1"/>
+          </a:fillRef>
+          <a:effectRef idx="2">
+            <a:schemeClr val="accent1"/>
+          </a:effectRef>
+          <a:fontRef idx="minor">
+            <a:schemeClr val="lt1"/>
+          </a:fontRef>
+        </p:style>
+        <p:txBody>
+          <a:bodyPr rtlCol="0" anchor="ctr"/>
+          <a:lstStyle/>
+          <a:p>
+            <a:pPr algn="ctr"/>
+          </a:p>
+        </p:txBody>
+      </p:sp>
+      <p:sp>
+        <p:nvSpPr>
+          <p:cNvPr id="26" name="Rectangle 25"/>
+          <p:cNvSpPr/>
+          <p:nvPr/>
+        </p:nvSpPr>
+        <p:spPr>
+          <a:xfrm>
+            <a:off x="658368" y="2743200"/>
+            <a:ext cx="4285488" cy="32004"/>
+          </a:xfrm>
+          <a:prstGeom prst="rect">
+            <a:avLst/>
+          </a:prstGeom>
+          <a:solidFill>
+            <a:srgbClr val="FF793F"/>
+          </a:solidFill>
+          <a:ln>
+            <a:noFill/>
+          </a:ln>
+        </p:spPr>
+        <p:style>
+          <a:lnRef idx="1">
+            <a:schemeClr val="accent1"/>
+          </a:lnRef>
+          <a:fillRef idx="3">
+            <a:schemeClr val="accent1"/>
+          </a:fillRef>
+          <a:effectRef idx="2">
+            <a:schemeClr val="accent1"/>
+          </a:effectRef>
+          <a:fontRef idx="minor">
+            <a:schemeClr val="lt1"/>
+          </a:fontRef>
+        </p:style>
+        <p:txBody>
+          <a:bodyPr rtlCol="0" anchor="ctr"/>
+          <a:lstStyle/>
+          <a:p>
+            <a:pPr algn="ctr"/>
+          </a:p>
+        </p:txBody>
+      </p:sp>
+      <p:sp>
+        <p:nvSpPr>
+          <p:cNvPr id="27" name="TextBox 26"/>
+          <p:cNvSpPr txBox="1"/>
+          <p:nvPr/>
+        </p:nvSpPr>
+        <p:spPr>
+          <a:xfrm>
+            <a:off x="886968" y="2971800"/>
+            <a:ext cx="3828288" cy="694944"/>
+          </a:xfrm>
+          <a:prstGeom prst="rect">
+            <a:avLst/>
+          </a:prstGeom>
+          <a:noFill/>
+        </p:spPr>
+        <p:txBody>
+          <a:bodyPr wrap="square" lIns="0" rIns="0" tIns="0" bIns="0">
+            <a:spAutoFit/>
+          </a:bodyPr>
+          <a:lstStyle/>
+          <a:p>
+            <a:pPr>
+              <a:spcBef>
+                <a:spcPts val="0"/>
+              </a:spcBef>
+              <a:spcAft>
+                <a:spcPts val="900"/>
+              </a:spcAft>
+              <a:defRPr sz="2300" b="1">
+                <a:solidFill>
+                  <a:srgbClr val="F4F1E9"/>
+                </a:solidFill>
+                <a:latin typeface="Noto Sans"/>
+              </a:defRPr>
+            </a:pPr>
+            <a:r>
+              <a:t>Стеклопластик</a:t>
+            </a:r>
+          </a:p>
+        </p:txBody>
+      </p:sp>
+      <p:sp>
+        <p:nvSpPr>
+          <p:cNvPr id="28" name="TextBox 27"/>
+          <p:cNvSpPr txBox="1"/>
+          <p:nvPr/>
+        </p:nvSpPr>
+        <p:spPr>
+          <a:xfrm>
+            <a:off x="886968" y="3685032"/>
+            <a:ext cx="3828288" cy="2423160"/>
+          </a:xfrm>
+          <a:prstGeom prst="rect">
+            <a:avLst/>
+          </a:prstGeom>
+          <a:noFill/>
+        </p:spPr>
+        <p:txBody>
+          <a:bodyPr wrap="square" lIns="0" rIns="0" tIns="0" bIns="0">
+            <a:spAutoFit/>
+          </a:bodyPr>
+          <a:lstStyle/>
+          <a:p>
+            <a:pPr>
+              <a:spcBef>
+                <a:spcPts val="0"/>
+              </a:spcBef>
+              <a:spcAft>
+                <a:spcPts val="900"/>
+              </a:spcAft>
+              <a:defRPr sz="2100" b="0">
+                <a:solidFill>
+                  <a:srgbClr val="AFBDC0"/>
+                </a:solidFill>
+                <a:latin typeface="Noto Sans"/>
+              </a:defRPr>
+            </a:pPr>
+            <a:r>
+              <a:t>1850 кг/м³ — принятая плотность. Марка и укладка открыты.</a:t>
+            </a:r>
+          </a:p>
+        </p:txBody>
+      </p:sp>
+      <p:sp>
+        <p:nvSpPr>
+          <p:cNvPr id="29" name="Rectangle 28"/>
+          <p:cNvSpPr/>
+          <p:nvPr/>
+        </p:nvSpPr>
+        <p:spPr>
+          <a:xfrm>
+            <a:off x="5172456" y="2743200"/>
+            <a:ext cx="4285488" cy="3474720"/>
+          </a:xfrm>
+          <a:prstGeom prst="rect">
+            <a:avLst/>
+          </a:prstGeom>
+          <a:solidFill>
+            <a:srgbClr val="1A2427"/>
+          </a:solidFill>
+          <a:ln>
+            <a:noFill/>
+          </a:ln>
+        </p:spPr>
+        <p:style>
+          <a:lnRef idx="1">
+            <a:schemeClr val="accent1"/>
+          </a:lnRef>
+          <a:fillRef idx="3">
+            <a:schemeClr val="accent1"/>
+          </a:fillRef>
+          <a:effectRef idx="2">
+            <a:schemeClr val="accent1"/>
+          </a:effectRef>
+          <a:fontRef idx="minor">
+            <a:schemeClr val="lt1"/>
+          </a:fontRef>
+        </p:style>
+        <p:txBody>
+          <a:bodyPr rtlCol="0" anchor="ctr"/>
+          <a:lstStyle/>
+          <a:p>
+            <a:pPr algn="ctr"/>
+          </a:p>
+        </p:txBody>
+      </p:sp>
+      <p:sp>
+        <p:nvSpPr>
+          <p:cNvPr id="30" name="Rectangle 29"/>
+          <p:cNvSpPr/>
+          <p:nvPr/>
+        </p:nvSpPr>
+        <p:spPr>
+          <a:xfrm>
+            <a:off x="5172456" y="2743200"/>
+            <a:ext cx="4285488" cy="32004"/>
+          </a:xfrm>
+          <a:prstGeom prst="rect">
+            <a:avLst/>
+          </a:prstGeom>
+          <a:solidFill>
+            <a:srgbClr val="FF793F"/>
+          </a:solidFill>
+          <a:ln>
+            <a:noFill/>
+          </a:ln>
+        </p:spPr>
+        <p:style>
+          <a:lnRef idx="1">
+            <a:schemeClr val="accent1"/>
+          </a:lnRef>
+          <a:fillRef idx="3">
+            <a:schemeClr val="accent1"/>
+          </a:fillRef>
+          <a:effectRef idx="2">
+            <a:schemeClr val="accent1"/>
+          </a:effectRef>
+          <a:fontRef idx="minor">
+            <a:schemeClr val="lt1"/>
+          </a:fontRef>
+        </p:style>
+        <p:txBody>
+          <a:bodyPr rtlCol="0" anchor="ctr"/>
+          <a:lstStyle/>
+          <a:p>
+            <a:pPr algn="ctr"/>
+          </a:p>
+        </p:txBody>
+      </p:sp>
+      <p:sp>
+        <p:nvSpPr>
+          <p:cNvPr id="31" name="TextBox 30"/>
+          <p:cNvSpPr txBox="1"/>
+          <p:nvPr/>
+        </p:nvSpPr>
+        <p:spPr>
+          <a:xfrm>
+            <a:off x="5401056" y="2971800"/>
+            <a:ext cx="3828288" cy="694944"/>
+          </a:xfrm>
+          <a:prstGeom prst="rect">
+            <a:avLst/>
+          </a:prstGeom>
+          <a:noFill/>
+        </p:spPr>
+        <p:txBody>
+          <a:bodyPr wrap="square" lIns="0" rIns="0" tIns="0" bIns="0">
+            <a:spAutoFit/>
+          </a:bodyPr>
+          <a:lstStyle/>
+          <a:p>
+            <a:pPr>
+              <a:spcBef>
+                <a:spcPts val="0"/>
+              </a:spcBef>
+              <a:spcAft>
+                <a:spcPts val="900"/>
+              </a:spcAft>
+              <a:defRPr sz="2300" b="1">
+                <a:solidFill>
+                  <a:srgbClr val="F4F1E9"/>
+                </a:solidFill>
+                <a:latin typeface="Noto Sans"/>
+              </a:defRPr>
+            </a:pPr>
+            <a:r>
+              <a:t>Полимер</a:t>
+            </a:r>
+          </a:p>
+        </p:txBody>
+      </p:sp>
+      <p:sp>
+        <p:nvSpPr>
+          <p:cNvPr id="32" name="TextBox 31"/>
+          <p:cNvSpPr txBox="1"/>
+          <p:nvPr/>
+        </p:nvSpPr>
+        <p:spPr>
+          <a:xfrm>
+            <a:off x="5401056" y="3685032"/>
+            <a:ext cx="3828288" cy="2423160"/>
+          </a:xfrm>
+          <a:prstGeom prst="rect">
+            <a:avLst/>
+          </a:prstGeom>
+          <a:noFill/>
+        </p:spPr>
+        <p:txBody>
+          <a:bodyPr wrap="square" lIns="0" rIns="0" tIns="0" bIns="0">
+            <a:spAutoFit/>
+          </a:bodyPr>
+          <a:lstStyle/>
+          <a:p>
+            <a:pPr>
+              <a:spcBef>
+                <a:spcPts val="0"/>
+              </a:spcBef>
+              <a:spcAft>
+                <a:spcPts val="900"/>
+              </a:spcAft>
+              <a:defRPr sz="2100" b="0">
+                <a:solidFill>
+                  <a:srgbClr val="AFBDC0"/>
+                </a:solidFill>
+                <a:latin typeface="Noto Sans"/>
+              </a:defRPr>
+            </a:pPr>
+            <a:r>
+              <a:t>1270 кг/м³ — допущение для обтекателя.</a:t>
+            </a:r>
+          </a:p>
+        </p:txBody>
+      </p:sp>
+      <p:sp>
+        <p:nvSpPr>
+          <p:cNvPr id="33" name="Rectangle 32"/>
+          <p:cNvSpPr/>
+          <p:nvPr/>
+        </p:nvSpPr>
+        <p:spPr>
+          <a:xfrm>
+            <a:off x="9686544" y="2743200"/>
+            <a:ext cx="4285488" cy="3474720"/>
+          </a:xfrm>
+          <a:prstGeom prst="rect">
+            <a:avLst/>
+          </a:prstGeom>
+          <a:solidFill>
+            <a:srgbClr val="1A2427"/>
+          </a:solidFill>
+          <a:ln>
+            <a:noFill/>
+          </a:ln>
+        </p:spPr>
+        <p:style>
+          <a:lnRef idx="1">
+            <a:schemeClr val="accent1"/>
+          </a:lnRef>
+          <a:fillRef idx="3">
+            <a:schemeClr val="accent1"/>
+          </a:fillRef>
+          <a:effectRef idx="2">
+            <a:schemeClr val="accent1"/>
+          </a:effectRef>
+          <a:fontRef idx="minor">
+            <a:schemeClr val="lt1"/>
+          </a:fontRef>
+        </p:style>
+        <p:txBody>
+          <a:bodyPr rtlCol="0" anchor="ctr"/>
+          <a:lstStyle/>
+          <a:p>
+            <a:pPr algn="ctr"/>
+          </a:p>
+        </p:txBody>
+      </p:sp>
+      <p:sp>
+        <p:nvSpPr>
+          <p:cNvPr id="34" name="Rectangle 33"/>
+          <p:cNvSpPr/>
+          <p:nvPr/>
+        </p:nvSpPr>
+        <p:spPr>
+          <a:xfrm>
+            <a:off x="9686544" y="2743200"/>
+            <a:ext cx="4285488" cy="32004"/>
+          </a:xfrm>
+          <a:prstGeom prst="rect">
+            <a:avLst/>
+          </a:prstGeom>
+          <a:solidFill>
+            <a:srgbClr val="FF793F"/>
+          </a:solidFill>
+          <a:ln>
+            <a:noFill/>
+          </a:ln>
+        </p:spPr>
+        <p:style>
+          <a:lnRef idx="1">
+            <a:schemeClr val="accent1"/>
+          </a:lnRef>
+          <a:fillRef idx="3">
+            <a:schemeClr val="accent1"/>
+          </a:fillRef>
+          <a:effectRef idx="2">
+            <a:schemeClr val="accent1"/>
+          </a:effectRef>
+          <a:fontRef idx="minor">
+            <a:schemeClr val="lt1"/>
+          </a:fontRef>
+        </p:style>
+        <p:txBody>
+          <a:bodyPr rtlCol="0" anchor="ctr"/>
+          <a:lstStyle/>
+          <a:p>
+            <a:pPr algn="ctr"/>
+          </a:p>
+        </p:txBody>
+      </p:sp>
+      <p:sp>
+        <p:nvSpPr>
+          <p:cNvPr id="35" name="TextBox 34"/>
+          <p:cNvSpPr txBox="1"/>
+          <p:nvPr/>
+        </p:nvSpPr>
+        <p:spPr>
+          <a:xfrm>
+            <a:off x="9915144" y="2971800"/>
+            <a:ext cx="3828288" cy="694944"/>
+          </a:xfrm>
+          <a:prstGeom prst="rect">
+            <a:avLst/>
+          </a:prstGeom>
+          <a:noFill/>
+        </p:spPr>
+        <p:txBody>
+          <a:bodyPr wrap="square" lIns="0" rIns="0" tIns="0" bIns="0">
+            <a:spAutoFit/>
+          </a:bodyPr>
+          <a:lstStyle/>
+          <a:p>
+            <a:pPr>
+              <a:spcBef>
+                <a:spcPts val="0"/>
+              </a:spcBef>
+              <a:spcAft>
+                <a:spcPts val="900"/>
+              </a:spcAft>
+              <a:defRPr sz="2300" b="1">
+                <a:solidFill>
+                  <a:srgbClr val="F4F1E9"/>
+                </a:solidFill>
+                <a:latin typeface="Noto Sans"/>
+              </a:defRPr>
+            </a:pPr>
+            <a:r>
+              <a:t>−630 г условно</a:t>
+            </a:r>
+          </a:p>
+        </p:txBody>
+      </p:sp>
+      <p:sp>
+        <p:nvSpPr>
+          <p:cNvPr id="36" name="TextBox 35"/>
+          <p:cNvSpPr txBox="1"/>
+          <p:nvPr/>
+        </p:nvSpPr>
+        <p:spPr>
+          <a:xfrm>
+            <a:off x="9915144" y="3685032"/>
+            <a:ext cx="3828288" cy="2423160"/>
+          </a:xfrm>
+          <a:prstGeom prst="rect">
+            <a:avLst/>
+          </a:prstGeom>
+          <a:noFill/>
+        </p:spPr>
+        <p:txBody>
+          <a:bodyPr wrap="square" lIns="0" rIns="0" tIns="0" bIns="0">
+            <a:spAutoFit/>
+          </a:bodyPr>
+          <a:lstStyle/>
+          <a:p>
+            <a:pPr>
+              <a:spcBef>
+                <a:spcPts val="0"/>
+              </a:spcBef>
+              <a:spcAft>
+                <a:spcPts val="900"/>
+              </a:spcAft>
+              <a:defRPr sz="2100" b="0">
+                <a:solidFill>
+                  <a:srgbClr val="AFBDC0"/>
+                </a:solidFill>
+                <a:latin typeface="Noto Sans"/>
+              </a:defRPr>
+            </a:pPr>
+            <a:r>
+              <a:t>Варианты стенок, материала и плат; без проверки не применены.</a:t>
+            </a:r>
+          </a:p>
+        </p:txBody>
+      </p:sp>
+    </p:spTree>
+  </p:cSld>
+  <p:clrMapOvr>
+    <a:masterClrMapping/>
+  </p:clrMapOvr>
+</p:sld>
+</file>
+
+<file path=ppt/slides/slide15.xml><?xml version="1.0" encoding="utf-8"?>
+<p:sld xmlns:a="http://schemas.openxmlformats.org/drawingml/2006/main" xmlns:p="http://schemas.openxmlformats.org/presentationml/2006/main" xmlns:r="http://schemas.openxmlformats.org/officeDocument/2006/relationships">
+  <p:cSld>
+    <p:bg>
+      <p:bgPr>
+        <a:solidFill>
+          <a:srgbClr val="101719"/>
+        </a:solidFill>
+        <a:effectLst/>
+      </p:bgPr>
+    </p:bg>
+    <p:spTree>
+      <p:nvGrpSpPr>
+        <p:cNvPr id="1" name=""/>
+        <p:cNvGrpSpPr/>
+        <p:nvPr/>
+      </p:nvGrpSpPr>
+      <p:grpSpPr/>
+      <p:sp>
+        <p:nvSpPr>
+          <p:cNvPr id="2" name="Rectangle 1"/>
+          <p:cNvSpPr/>
+          <p:nvPr/>
+        </p:nvSpPr>
+        <p:spPr>
+          <a:xfrm>
+            <a:off x="914400" y="0"/>
+            <a:ext cx="5486" cy="8229600"/>
+          </a:xfrm>
+          <a:prstGeom prst="rect">
+            <a:avLst/>
+          </a:prstGeom>
+          <a:solidFill>
+            <a:srgbClr val="182124"/>
+          </a:solidFill>
+          <a:ln>
+            <a:noFill/>
+          </a:ln>
+        </p:spPr>
+        <p:style>
+          <a:lnRef idx="1">
+            <a:schemeClr val="accent1"/>
+          </a:lnRef>
+          <a:fillRef idx="3">
+            <a:schemeClr val="accent1"/>
+          </a:fillRef>
+          <a:effectRef idx="2">
+            <a:schemeClr val="accent1"/>
+          </a:effectRef>
+          <a:fontRef idx="minor">
+            <a:schemeClr val="lt1"/>
+          </a:fontRef>
+        </p:style>
+        <p:txBody>
+          <a:bodyPr rtlCol="0" anchor="ctr"/>
+          <a:lstStyle/>
+          <a:p>
+            <a:pPr algn="ctr"/>
+          </a:p>
+        </p:txBody>
+      </p:sp>
+      <p:sp>
+        <p:nvSpPr>
+          <p:cNvPr id="3" name="Rectangle 2"/>
+          <p:cNvSpPr/>
+          <p:nvPr/>
+        </p:nvSpPr>
+        <p:spPr>
+          <a:xfrm>
+            <a:off x="1828800" y="0"/>
+            <a:ext cx="5486" cy="8229600"/>
+          </a:xfrm>
+          <a:prstGeom prst="rect">
+            <a:avLst/>
+          </a:prstGeom>
+          <a:solidFill>
+            <a:srgbClr val="182124"/>
+          </a:solidFill>
+          <a:ln>
+            <a:noFill/>
+          </a:ln>
+        </p:spPr>
+        <p:style>
+          <a:lnRef idx="1">
+            <a:schemeClr val="accent1"/>
+          </a:lnRef>
+          <a:fillRef idx="3">
+            <a:schemeClr val="accent1"/>
+          </a:fillRef>
+          <a:effectRef idx="2">
+            <a:schemeClr val="accent1"/>
+          </a:effectRef>
+          <a:fontRef idx="minor">
+            <a:schemeClr val="lt1"/>
+          </a:fontRef>
+        </p:style>
+        <p:txBody>
+          <a:bodyPr rtlCol="0" anchor="ctr"/>
+          <a:lstStyle/>
+          <a:p>
+            <a:pPr algn="ctr"/>
+          </a:p>
+        </p:txBody>
+      </p:sp>
+      <p:sp>
+        <p:nvSpPr>
+          <p:cNvPr id="4" name="Rectangle 3"/>
+          <p:cNvSpPr/>
+          <p:nvPr/>
+        </p:nvSpPr>
+        <p:spPr>
+          <a:xfrm>
+            <a:off x="2743200" y="0"/>
+            <a:ext cx="5486" cy="8229600"/>
+          </a:xfrm>
+          <a:prstGeom prst="rect">
+            <a:avLst/>
+          </a:prstGeom>
+          <a:solidFill>
+            <a:srgbClr val="182124"/>
+          </a:solidFill>
+          <a:ln>
+            <a:noFill/>
+          </a:ln>
+        </p:spPr>
+        <p:style>
+          <a:lnRef idx="1">
+            <a:schemeClr val="accent1"/>
+          </a:lnRef>
+          <a:fillRef idx="3">
+            <a:schemeClr val="accent1"/>
+          </a:fillRef>
+          <a:effectRef idx="2">
+            <a:schemeClr val="accent1"/>
+          </a:effectRef>
+          <a:fontRef idx="minor">
+            <a:schemeClr val="lt1"/>
+          </a:fontRef>
+        </p:style>
+        <p:txBody>
+          <a:bodyPr rtlCol="0" anchor="ctr"/>
+          <a:lstStyle/>
+          <a:p>
+            <a:pPr algn="ctr"/>
+          </a:p>
+        </p:txBody>
+      </p:sp>
+      <p:sp>
+        <p:nvSpPr>
+          <p:cNvPr id="5" name="Rectangle 4"/>
+          <p:cNvSpPr/>
+          <p:nvPr/>
+        </p:nvSpPr>
+        <p:spPr>
+          <a:xfrm>
+            <a:off x="3657600" y="0"/>
+            <a:ext cx="5486" cy="8229600"/>
+          </a:xfrm>
+          <a:prstGeom prst="rect">
+            <a:avLst/>
+          </a:prstGeom>
+          <a:solidFill>
+            <a:srgbClr val="182124"/>
+          </a:solidFill>
+          <a:ln>
+            <a:noFill/>
+          </a:ln>
+        </p:spPr>
+        <p:style>
+          <a:lnRef idx="1">
+            <a:schemeClr val="accent1"/>
+          </a:lnRef>
+          <a:fillRef idx="3">
+            <a:schemeClr val="accent1"/>
+          </a:fillRef>
+          <a:effectRef idx="2">
+            <a:schemeClr val="accent1"/>
+          </a:effectRef>
+          <a:fontRef idx="minor">
+            <a:schemeClr val="lt1"/>
+          </a:fontRef>
+        </p:style>
+        <p:txBody>
+          <a:bodyPr rtlCol="0" anchor="ctr"/>
+          <a:lstStyle/>
+          <a:p>
+            <a:pPr algn="ctr"/>
+          </a:p>
+        </p:txBody>
+      </p:sp>
+      <p:sp>
+        <p:nvSpPr>
+          <p:cNvPr id="6" name="Rectangle 5"/>
+          <p:cNvSpPr/>
+          <p:nvPr/>
+        </p:nvSpPr>
+        <p:spPr>
+          <a:xfrm>
+            <a:off x="4572000" y="0"/>
+            <a:ext cx="5486" cy="8229600"/>
+          </a:xfrm>
+          <a:prstGeom prst="rect">
+            <a:avLst/>
+          </a:prstGeom>
+          <a:solidFill>
+            <a:srgbClr val="182124"/>
+          </a:solidFill>
+          <a:ln>
+            <a:noFill/>
+          </a:ln>
+        </p:spPr>
+        <p:style>
+          <a:lnRef idx="1">
+            <a:schemeClr val="accent1"/>
+          </a:lnRef>
+          <a:fillRef idx="3">
+            <a:schemeClr val="accent1"/>
+          </a:fillRef>
+          <a:effectRef idx="2">
+            <a:schemeClr val="accent1"/>
+          </a:effectRef>
+          <a:fontRef idx="minor">
+            <a:schemeClr val="lt1"/>
+          </a:fontRef>
+        </p:style>
+        <p:txBody>
+          <a:bodyPr rtlCol="0" anchor="ctr"/>
+          <a:lstStyle/>
+          <a:p>
+            <a:pPr algn="ctr"/>
+          </a:p>
+        </p:txBody>
+      </p:sp>
+      <p:sp>
+        <p:nvSpPr>
+          <p:cNvPr id="7" name="Rectangle 6"/>
+          <p:cNvSpPr/>
+          <p:nvPr/>
+        </p:nvSpPr>
+        <p:spPr>
+          <a:xfrm>
+            <a:off x="5486400" y="0"/>
+            <a:ext cx="5486" cy="8229600"/>
+          </a:xfrm>
+          <a:prstGeom prst="rect">
+            <a:avLst/>
+          </a:prstGeom>
+          <a:solidFill>
+            <a:srgbClr val="182124"/>
+          </a:solidFill>
+          <a:ln>
+            <a:noFill/>
+          </a:ln>
+        </p:spPr>
+        <p:style>
+          <a:lnRef idx="1">
+            <a:schemeClr val="accent1"/>
+          </a:lnRef>
+          <a:fillRef idx="3">
+            <a:schemeClr val="accent1"/>
+          </a:fillRef>
+          <a:effectRef idx="2">
+            <a:schemeClr val="accent1"/>
+          </a:effectRef>
+          <a:fontRef idx="minor">
+            <a:schemeClr val="lt1"/>
+          </a:fontRef>
+        </p:style>
+        <p:txBody>
+          <a:bodyPr rtlCol="0" anchor="ctr"/>
+          <a:lstStyle/>
+          <a:p>
+            <a:pPr algn="ctr"/>
+          </a:p>
+        </p:txBody>
+      </p:sp>
+      <p:sp>
+        <p:nvSpPr>
+          <p:cNvPr id="8" name="Rectangle 7"/>
+          <p:cNvSpPr/>
+          <p:nvPr/>
+        </p:nvSpPr>
+        <p:spPr>
+          <a:xfrm>
+            <a:off x="6400800" y="0"/>
+            <a:ext cx="5486" cy="8229600"/>
+          </a:xfrm>
+          <a:prstGeom prst="rect">
+            <a:avLst/>
+          </a:prstGeom>
+          <a:solidFill>
+            <a:srgbClr val="182124"/>
+          </a:solidFill>
+          <a:ln>
+            <a:noFill/>
+          </a:ln>
+        </p:spPr>
+        <p:style>
+          <a:lnRef idx="1">
+            <a:schemeClr val="accent1"/>
+          </a:lnRef>
+          <a:fillRef idx="3">
+            <a:schemeClr val="accent1"/>
+          </a:fillRef>
+          <a:effectRef idx="2">
+            <a:schemeClr val="accent1"/>
+          </a:effectRef>
+          <a:fontRef idx="minor">
+            <a:schemeClr val="lt1"/>
+          </a:fontRef>
+        </p:style>
+        <p:txBody>
+          <a:bodyPr rtlCol="0" anchor="ctr"/>
+          <a:lstStyle/>
+          <a:p>
+            <a:pPr algn="ctr"/>
+          </a:p>
+        </p:txBody>
+      </p:sp>
+      <p:sp>
+        <p:nvSpPr>
+          <p:cNvPr id="9" name="Rectangle 8"/>
+          <p:cNvSpPr/>
+          <p:nvPr/>
+        </p:nvSpPr>
+        <p:spPr>
+          <a:xfrm>
+            <a:off x="7315200" y="0"/>
+            <a:ext cx="5486" cy="8229600"/>
+          </a:xfrm>
+          <a:prstGeom prst="rect">
+            <a:avLst/>
+          </a:prstGeom>
+          <a:solidFill>
+            <a:srgbClr val="182124"/>
+          </a:solidFill>
+          <a:ln>
+            <a:noFill/>
+          </a:ln>
+        </p:spPr>
+        <p:style>
+          <a:lnRef idx="1">
+            <a:schemeClr val="accent1"/>
+          </a:lnRef>
+          <a:fillRef idx="3">
+            <a:schemeClr val="accent1"/>
+          </a:fillRef>
+          <a:effectRef idx="2">
+            <a:schemeClr val="accent1"/>
+          </a:effectRef>
+          <a:fontRef idx="minor">
+            <a:schemeClr val="lt1"/>
+          </a:fontRef>
+        </p:style>
+        <p:txBody>
+          <a:bodyPr rtlCol="0" anchor="ctr"/>
+          <a:lstStyle/>
+          <a:p>
+            <a:pPr algn="ctr"/>
+          </a:p>
+        </p:txBody>
+      </p:sp>
+      <p:sp>
+        <p:nvSpPr>
+          <p:cNvPr id="10" name="Rectangle 9"/>
+          <p:cNvSpPr/>
+          <p:nvPr/>
+        </p:nvSpPr>
+        <p:spPr>
+          <a:xfrm>
+            <a:off x="8229600" y="0"/>
+            <a:ext cx="5486" cy="8229600"/>
+          </a:xfrm>
+          <a:prstGeom prst="rect">
+            <a:avLst/>
+          </a:prstGeom>
+          <a:solidFill>
+            <a:srgbClr val="182124"/>
+          </a:solidFill>
+          <a:ln>
+            <a:noFill/>
+          </a:ln>
+        </p:spPr>
+        <p:style>
+          <a:lnRef idx="1">
+            <a:schemeClr val="accent1"/>
+          </a:lnRef>
+          <a:fillRef idx="3">
+            <a:schemeClr val="accent1"/>
+          </a:fillRef>
+          <a:effectRef idx="2">
+            <a:schemeClr val="accent1"/>
+          </a:effectRef>
+          <a:fontRef idx="minor">
+            <a:schemeClr val="lt1"/>
+          </a:fontRef>
+        </p:style>
+        <p:txBody>
+          <a:bodyPr rtlCol="0" anchor="ctr"/>
+          <a:lstStyle/>
+          <a:p>
+            <a:pPr algn="ctr"/>
+          </a:p>
+        </p:txBody>
+      </p:sp>
+      <p:sp>
+        <p:nvSpPr>
+          <p:cNvPr id="11" name="Rectangle 10"/>
+          <p:cNvSpPr/>
+          <p:nvPr/>
+        </p:nvSpPr>
+        <p:spPr>
+          <a:xfrm>
+            <a:off x="9144000" y="0"/>
+            <a:ext cx="5486" cy="8229600"/>
+          </a:xfrm>
+          <a:prstGeom prst="rect">
+            <a:avLst/>
+          </a:prstGeom>
+          <a:solidFill>
+            <a:srgbClr val="182124"/>
+          </a:solidFill>
+          <a:ln>
+            <a:noFill/>
+          </a:ln>
+        </p:spPr>
+        <p:style>
+          <a:lnRef idx="1">
+            <a:schemeClr val="accent1"/>
+          </a:lnRef>
+          <a:fillRef idx="3">
+            <a:schemeClr val="accent1"/>
+          </a:fillRef>
+          <a:effectRef idx="2">
+            <a:schemeClr val="accent1"/>
+          </a:effectRef>
+          <a:fontRef idx="minor">
+            <a:schemeClr val="lt1"/>
+          </a:fontRef>
+        </p:style>
+        <p:txBody>
+          <a:bodyPr rtlCol="0" anchor="ctr"/>
+          <a:lstStyle/>
+          <a:p>
+            <a:pPr algn="ctr"/>
+          </a:p>
+        </p:txBody>
+      </p:sp>
+      <p:sp>
+        <p:nvSpPr>
+          <p:cNvPr id="12" name="Rectangle 11"/>
+          <p:cNvSpPr/>
+          <p:nvPr/>
+        </p:nvSpPr>
+        <p:spPr>
+          <a:xfrm>
+            <a:off x="10058400" y="0"/>
+            <a:ext cx="5486" cy="8229600"/>
+          </a:xfrm>
+          <a:prstGeom prst="rect">
+            <a:avLst/>
+          </a:prstGeom>
+          <a:solidFill>
+            <a:srgbClr val="182124"/>
+          </a:solidFill>
+          <a:ln>
+            <a:noFill/>
+          </a:ln>
+        </p:spPr>
+        <p:style>
+          <a:lnRef idx="1">
+            <a:schemeClr val="accent1"/>
+          </a:lnRef>
+          <a:fillRef idx="3">
+            <a:schemeClr val="accent1"/>
+          </a:fillRef>
+          <a:effectRef idx="2">
+            <a:schemeClr val="accent1"/>
+          </a:effectRef>
+          <a:fontRef idx="minor">
+            <a:schemeClr val="lt1"/>
+          </a:fontRef>
+        </p:style>
+        <p:txBody>
+          <a:bodyPr rtlCol="0" anchor="ctr"/>
+          <a:lstStyle/>
+          <a:p>
+            <a:pPr algn="ctr"/>
+          </a:p>
+        </p:txBody>
+      </p:sp>
+      <p:sp>
+        <p:nvSpPr>
+          <p:cNvPr id="13" name="Rectangle 12"/>
+          <p:cNvSpPr/>
+          <p:nvPr/>
+        </p:nvSpPr>
+        <p:spPr>
+          <a:xfrm>
+            <a:off x="10972800" y="0"/>
+            <a:ext cx="5486" cy="8229600"/>
+          </a:xfrm>
+          <a:prstGeom prst="rect">
+            <a:avLst/>
+          </a:prstGeom>
+          <a:solidFill>
+            <a:srgbClr val="182124"/>
+          </a:solidFill>
+          <a:ln>
+            <a:noFill/>
+          </a:ln>
+        </p:spPr>
+        <p:style>
+          <a:lnRef idx="1">
+            <a:schemeClr val="accent1"/>
+          </a:lnRef>
+          <a:fillRef idx="3">
+            <a:schemeClr val="accent1"/>
+          </a:fillRef>
+          <a:effectRef idx="2">
+            <a:schemeClr val="accent1"/>
+          </a:effectRef>
+          <a:fontRef idx="minor">
+            <a:schemeClr val="lt1"/>
+          </a:fontRef>
+        </p:style>
+        <p:txBody>
+          <a:bodyPr rtlCol="0" anchor="ctr"/>
+          <a:lstStyle/>
+          <a:p>
+            <a:pPr algn="ctr"/>
+          </a:p>
+        </p:txBody>
+      </p:sp>
+      <p:sp>
+        <p:nvSpPr>
+          <p:cNvPr id="14" name="Rectangle 13"/>
+          <p:cNvSpPr/>
+          <p:nvPr/>
+        </p:nvSpPr>
+        <p:spPr>
+          <a:xfrm>
+            <a:off x="11887200" y="0"/>
+            <a:ext cx="5486" cy="8229600"/>
+          </a:xfrm>
+          <a:prstGeom prst="rect">
+            <a:avLst/>
+          </a:prstGeom>
+          <a:solidFill>
+            <a:srgbClr val="182124"/>
+          </a:solidFill>
+          <a:ln>
+            <a:noFill/>
+          </a:ln>
+        </p:spPr>
+        <p:style>
+          <a:lnRef idx="1">
+            <a:schemeClr val="accent1"/>
+          </a:lnRef>
+          <a:fillRef idx="3">
+            <a:schemeClr val="accent1"/>
+          </a:fillRef>
+          <a:effectRef idx="2">
+            <a:schemeClr val="accent1"/>
+          </a:effectRef>
+          <a:fontRef idx="minor">
+            <a:schemeClr val="lt1"/>
+          </a:fontRef>
+        </p:style>
+        <p:txBody>
+          <a:bodyPr rtlCol="0" anchor="ctr"/>
+          <a:lstStyle/>
+          <a:p>
+            <a:pPr algn="ctr"/>
+          </a:p>
+        </p:txBody>
+      </p:sp>
+      <p:sp>
+        <p:nvSpPr>
+          <p:cNvPr id="15" name="Rectangle 14"/>
+          <p:cNvSpPr/>
+          <p:nvPr/>
+        </p:nvSpPr>
+        <p:spPr>
+          <a:xfrm>
+            <a:off x="12801600" y="0"/>
+            <a:ext cx="5486" cy="8229600"/>
+          </a:xfrm>
+          <a:prstGeom prst="rect">
+            <a:avLst/>
+          </a:prstGeom>
+          <a:solidFill>
+            <a:srgbClr val="182124"/>
+          </a:solidFill>
+          <a:ln>
+            <a:noFill/>
+          </a:ln>
+        </p:spPr>
+        <p:style>
+          <a:lnRef idx="1">
+            <a:schemeClr val="accent1"/>
+          </a:lnRef>
+          <a:fillRef idx="3">
+            <a:schemeClr val="accent1"/>
+          </a:fillRef>
+          <a:effectRef idx="2">
+            <a:schemeClr val="accent1"/>
+          </a:effectRef>
+          <a:fontRef idx="minor">
+            <a:schemeClr val="lt1"/>
+          </a:fontRef>
+        </p:style>
+        <p:txBody>
+          <a:bodyPr rtlCol="0" anchor="ctr"/>
+          <a:lstStyle/>
+          <a:p>
+            <a:pPr algn="ctr"/>
+          </a:p>
+        </p:txBody>
+      </p:sp>
+      <p:sp>
+        <p:nvSpPr>
+          <p:cNvPr id="16" name="Rectangle 15"/>
+          <p:cNvSpPr/>
+          <p:nvPr/>
+        </p:nvSpPr>
+        <p:spPr>
+          <a:xfrm>
+            <a:off x="13716000" y="0"/>
+            <a:ext cx="5486" cy="8229600"/>
+          </a:xfrm>
+          <a:prstGeom prst="rect">
+            <a:avLst/>
+          </a:prstGeom>
+          <a:solidFill>
+            <a:srgbClr val="182124"/>
+          </a:solidFill>
+          <a:ln>
+            <a:noFill/>
+          </a:ln>
+        </p:spPr>
+        <p:style>
+          <a:lnRef idx="1">
+            <a:schemeClr val="accent1"/>
+          </a:lnRef>
+          <a:fillRef idx="3">
+            <a:schemeClr val="accent1"/>
+          </a:fillRef>
+          <a:effectRef idx="2">
+            <a:schemeClr val="accent1"/>
+          </a:effectRef>
+          <a:fontRef idx="minor">
+            <a:schemeClr val="lt1"/>
+          </a:fontRef>
+        </p:style>
+        <p:txBody>
+          <a:bodyPr rtlCol="0" anchor="ctr"/>
+          <a:lstStyle/>
+          <a:p>
+            <a:pPr algn="ctr"/>
+          </a:p>
+        </p:txBody>
+      </p:sp>
+      <p:sp>
+        <p:nvSpPr>
+          <p:cNvPr id="17" name="TextBox 16"/>
+          <p:cNvSpPr txBox="1"/>
+          <p:nvPr/>
+        </p:nvSpPr>
+        <p:spPr>
+          <a:xfrm>
+            <a:off x="658368" y="393192"/>
+            <a:ext cx="10972800" cy="274320"/>
+          </a:xfrm>
+          <a:prstGeom prst="rect">
+            <a:avLst/>
+          </a:prstGeom>
+          <a:noFill/>
+        </p:spPr>
+        <p:txBody>
+          <a:bodyPr wrap="square" lIns="0" rIns="0" tIns="0" bIns="0">
+            <a:spAutoFit/>
+          </a:bodyPr>
+          <a:lstStyle/>
+          <a:p>
+            <a:pPr>
+              <a:spcBef>
+                <a:spcPts val="0"/>
+              </a:spcBef>
+              <a:spcAft>
+                <a:spcPts val="900"/>
+              </a:spcAft>
+              <a:defRPr sz="1100" b="0">
+                <a:solidFill>
+                  <a:srgbClr val="AFBDC0"/>
+                </a:solidFill>
+                <a:latin typeface="Noto Sans"/>
+              </a:defRPr>
+            </a:pPr>
+            <a:r>
+              <a:t>11 / РЕЗУЛЬТАТЫ ПРОЕКТА</a:t>
+            </a:r>
+          </a:p>
+        </p:txBody>
+      </p:sp>
+      <p:sp>
+        <p:nvSpPr>
+          <p:cNvPr id="18" name="TextBox 17"/>
+          <p:cNvSpPr txBox="1"/>
+          <p:nvPr/>
+        </p:nvSpPr>
+        <p:spPr>
+          <a:xfrm>
+            <a:off x="12390120" y="393192"/>
+            <a:ext cx="1828800" cy="274320"/>
+          </a:xfrm>
+          <a:prstGeom prst="rect">
+            <a:avLst/>
+          </a:prstGeom>
+          <a:noFill/>
+        </p:spPr>
+        <p:txBody>
+          <a:bodyPr wrap="square" lIns="0" rIns="0" tIns="0" bIns="0">
+            <a:spAutoFit/>
+          </a:bodyPr>
+          <a:lstStyle/>
+          <a:p>
+            <a:pPr>
+              <a:spcBef>
+                <a:spcPts val="0"/>
+              </a:spcBef>
+              <a:spcAft>
+                <a:spcPts val="900"/>
+              </a:spcAft>
+              <a:defRPr sz="1100" b="1">
+                <a:solidFill>
+                  <a:srgbClr val="FF793F"/>
+                </a:solidFill>
+                <a:latin typeface="Noto Sans"/>
+              </a:defRPr>
+            </a:pPr>
+            <a:r>
+              <a:t>PLBP / SG1</a:t>
+            </a:r>
+          </a:p>
+        </p:txBody>
+      </p:sp>
+      <p:sp>
+        <p:nvSpPr>
+          <p:cNvPr id="19" name="Rectangle 18"/>
+          <p:cNvSpPr/>
+          <p:nvPr/>
+        </p:nvSpPr>
+        <p:spPr>
+          <a:xfrm>
+            <a:off x="658368" y="914400"/>
+            <a:ext cx="13313664" cy="10972"/>
+          </a:xfrm>
+          <a:prstGeom prst="rect">
+            <a:avLst/>
+          </a:prstGeom>
+          <a:solidFill>
+            <a:srgbClr val="354347"/>
+          </a:solidFill>
+          <a:ln>
+            <a:noFill/>
+          </a:ln>
+        </p:spPr>
+        <p:style>
+          <a:lnRef idx="1">
+            <a:schemeClr val="accent1"/>
+          </a:lnRef>
+          <a:fillRef idx="3">
+            <a:schemeClr val="accent1"/>
+          </a:fillRef>
+          <a:effectRef idx="2">
+            <a:schemeClr val="accent1"/>
+          </a:effectRef>
+          <a:fontRef idx="minor">
+            <a:schemeClr val="lt1"/>
+          </a:fontRef>
+        </p:style>
+        <p:txBody>
+          <a:bodyPr rtlCol="0" anchor="ctr"/>
+          <a:lstStyle/>
+          <a:p>
+            <a:pPr algn="ctr"/>
+          </a:p>
+        </p:txBody>
+      </p:sp>
+      <p:sp>
+        <p:nvSpPr>
+          <p:cNvPr id="20" name="TextBox 19"/>
+          <p:cNvSpPr txBox="1"/>
+          <p:nvPr/>
+        </p:nvSpPr>
+        <p:spPr>
+          <a:xfrm>
+            <a:off x="658368" y="1243584"/>
+            <a:ext cx="13213080" cy="1097280"/>
+          </a:xfrm>
+          <a:prstGeom prst="rect">
+            <a:avLst/>
+          </a:prstGeom>
+          <a:noFill/>
+        </p:spPr>
+        <p:txBody>
+          <a:bodyPr wrap="square" lIns="0" rIns="0" tIns="0" bIns="0">
+            <a:spAutoFit/>
+          </a:bodyPr>
+          <a:lstStyle/>
+          <a:p>
+            <a:pPr>
+              <a:spcBef>
+                <a:spcPts val="0"/>
+              </a:spcBef>
+              <a:spcAft>
+                <a:spcPts val="900"/>
+              </a:spcAft>
+              <a:defRPr sz="3700" b="1">
+                <a:solidFill>
+                  <a:srgbClr val="F4F1E9"/>
+                </a:solidFill>
+                <a:latin typeface="Noto Sans"/>
+              </a:defRPr>
+            </a:pPr>
+            <a:r>
+              <a:t>Что подтверждено на этой итерации</a:t>
+            </a:r>
+          </a:p>
+        </p:txBody>
+      </p:sp>
+      <p:sp>
+        <p:nvSpPr>
+          <p:cNvPr id="21" name="Rectangle 20"/>
+          <p:cNvSpPr/>
+          <p:nvPr/>
+        </p:nvSpPr>
+        <p:spPr>
+          <a:xfrm>
+            <a:off x="658368" y="7159752"/>
+            <a:ext cx="13313664" cy="10972"/>
+          </a:xfrm>
+          <a:prstGeom prst="rect">
+            <a:avLst/>
+          </a:prstGeom>
+          <a:solidFill>
+            <a:srgbClr val="354347"/>
+          </a:solidFill>
+          <a:ln>
+            <a:noFill/>
+          </a:ln>
+        </p:spPr>
+        <p:style>
+          <a:lnRef idx="1">
+            <a:schemeClr val="accent1"/>
+          </a:lnRef>
+          <a:fillRef idx="3">
+            <a:schemeClr val="accent1"/>
+          </a:fillRef>
+          <a:effectRef idx="2">
+            <a:schemeClr val="accent1"/>
+          </a:effectRef>
+          <a:fontRef idx="minor">
+            <a:schemeClr val="lt1"/>
+          </a:fontRef>
+        </p:style>
+        <p:txBody>
+          <a:bodyPr rtlCol="0" anchor="ctr"/>
+          <a:lstStyle/>
+          <a:p>
+            <a:pPr algn="ctr"/>
+          </a:p>
+        </p:txBody>
+      </p:sp>
+      <p:sp>
+        <p:nvSpPr>
+          <p:cNvPr id="22" name="TextBox 21"/>
+          <p:cNvSpPr txBox="1"/>
+          <p:nvPr/>
+        </p:nvSpPr>
+        <p:spPr>
+          <a:xfrm>
+            <a:off x="658368" y="7342631"/>
+            <a:ext cx="12344400" cy="621792"/>
+          </a:xfrm>
+          <a:prstGeom prst="rect">
+            <a:avLst/>
+          </a:prstGeom>
+          <a:noFill/>
+        </p:spPr>
+        <p:txBody>
+          <a:bodyPr wrap="square" lIns="0" rIns="0" tIns="0" bIns="0">
+            <a:spAutoFit/>
+          </a:bodyPr>
+          <a:lstStyle/>
+          <a:p>
+            <a:pPr>
+              <a:spcBef>
+                <a:spcPts val="0"/>
+              </a:spcBef>
+              <a:spcAft>
+                <a:spcPts val="900"/>
+              </a:spcAft>
+              <a:defRPr sz="1200" b="0">
+                <a:solidFill>
+                  <a:srgbClr val="AFBDC0"/>
+                </a:solidFill>
+                <a:latin typeface="Noto Sans"/>
+              </a:defRPr>
+            </a:pPr>
+            <a:r>
+              <a:t>24 тела; стабилизаторы видны после повторного открытия в FreeCAD. Физических испытаний нет.</a:t>
+            </a:r>
+          </a:p>
+        </p:txBody>
+      </p:sp>
+      <p:sp>
+        <p:nvSpPr>
+          <p:cNvPr id="23" name="TextBox 22"/>
+          <p:cNvSpPr txBox="1"/>
+          <p:nvPr/>
+        </p:nvSpPr>
+        <p:spPr>
+          <a:xfrm>
+            <a:off x="13121640" y="7507224"/>
+            <a:ext cx="914400" cy="365760"/>
+          </a:xfrm>
+          <a:prstGeom prst="rect">
+            <a:avLst/>
+          </a:prstGeom>
+          <a:noFill/>
+        </p:spPr>
+        <p:txBody>
+          <a:bodyPr wrap="square" lIns="0" rIns="0" tIns="0" bIns="0">
+            <a:spAutoFit/>
+          </a:bodyPr>
+          <a:lstStyle/>
+          <a:p>
+            <a:pPr>
+              <a:spcBef>
+                <a:spcPts val="0"/>
+              </a:spcBef>
+              <a:spcAft>
+                <a:spcPts val="900"/>
+              </a:spcAft>
+              <a:defRPr sz="1100" b="0">
+                <a:solidFill>
+                  <a:srgbClr val="FF793F"/>
+                </a:solidFill>
+                <a:latin typeface="Noto Sans"/>
+              </a:defRPr>
+            </a:pPr>
+            <a:r>
+              <a:t>15 / 16</a:t>
+            </a:r>
+          </a:p>
+        </p:txBody>
+      </p:sp>
+      <p:sp>
+        <p:nvSpPr>
+          <p:cNvPr id="24" name="Rectangle 23"/>
+          <p:cNvSpPr/>
+          <p:nvPr/>
+        </p:nvSpPr>
+        <p:spPr>
+          <a:xfrm>
+            <a:off x="0" y="8183879"/>
+            <a:ext cx="13716000" cy="45720"/>
+          </a:xfrm>
+          <a:prstGeom prst="rect">
+            <a:avLst/>
+          </a:prstGeom>
+          <a:solidFill>
+            <a:srgbClr val="FF793F"/>
+          </a:solidFill>
+          <a:ln>
+            <a:noFill/>
+          </a:ln>
+        </p:spPr>
+        <p:style>
+          <a:lnRef idx="1">
+            <a:schemeClr val="accent1"/>
+          </a:lnRef>
+          <a:fillRef idx="3">
+            <a:schemeClr val="accent1"/>
+          </a:fillRef>
+          <a:effectRef idx="2">
+            <a:schemeClr val="accent1"/>
+          </a:effectRef>
+          <a:fontRef idx="minor">
+            <a:schemeClr val="lt1"/>
+          </a:fontRef>
+        </p:style>
+        <p:txBody>
+          <a:bodyPr rtlCol="0" anchor="ctr"/>
+          <a:lstStyle/>
+          <a:p>
+            <a:pPr algn="ctr"/>
+          </a:p>
+        </p:txBody>
+      </p:sp>
+      <p:sp>
+        <p:nvSpPr>
+          <p:cNvPr id="25" name="Rectangle 24"/>
+          <p:cNvSpPr/>
+          <p:nvPr/>
+        </p:nvSpPr>
+        <p:spPr>
+          <a:xfrm>
+            <a:off x="658368" y="2743200"/>
+            <a:ext cx="6542532" cy="3474720"/>
+          </a:xfrm>
+          <a:prstGeom prst="rect">
+            <a:avLst/>
+          </a:prstGeom>
+          <a:solidFill>
+            <a:srgbClr val="1A2427"/>
+          </a:solidFill>
+          <a:ln>
+            <a:noFill/>
+          </a:ln>
+        </p:spPr>
+        <p:style>
+          <a:lnRef idx="1">
+            <a:schemeClr val="accent1"/>
+          </a:lnRef>
+          <a:fillRef idx="3">
+            <a:schemeClr val="accent1"/>
+          </a:fillRef>
+          <a:effectRef idx="2">
+            <a:schemeClr val="accent1"/>
+          </a:effectRef>
+          <a:fontRef idx="minor">
+            <a:schemeClr val="lt1"/>
+          </a:fontRef>
+        </p:style>
+        <p:txBody>
+          <a:bodyPr rtlCol="0" anchor="ctr"/>
+          <a:lstStyle/>
+          <a:p>
+            <a:pPr algn="ctr"/>
+          </a:p>
+        </p:txBody>
+      </p:sp>
+      <p:sp>
+        <p:nvSpPr>
+          <p:cNvPr id="26" name="Rectangle 25"/>
+          <p:cNvSpPr/>
+          <p:nvPr/>
+        </p:nvSpPr>
+        <p:spPr>
+          <a:xfrm>
+            <a:off x="658368" y="2743200"/>
+            <a:ext cx="6542532" cy="32004"/>
+          </a:xfrm>
+          <a:prstGeom prst="rect">
+            <a:avLst/>
+          </a:prstGeom>
+          <a:solidFill>
+            <a:srgbClr val="FF793F"/>
+          </a:solidFill>
+          <a:ln>
+            <a:noFill/>
+          </a:ln>
+        </p:spPr>
+        <p:style>
+          <a:lnRef idx="1">
+            <a:schemeClr val="accent1"/>
+          </a:lnRef>
+          <a:fillRef idx="3">
+            <a:schemeClr val="accent1"/>
+          </a:fillRef>
+          <a:effectRef idx="2">
+            <a:schemeClr val="accent1"/>
+          </a:effectRef>
+          <a:fontRef idx="minor">
+            <a:schemeClr val="lt1"/>
+          </a:fontRef>
+        </p:style>
+        <p:txBody>
+          <a:bodyPr rtlCol="0" anchor="ctr"/>
+          <a:lstStyle/>
+          <a:p>
+            <a:pPr algn="ctr"/>
+          </a:p>
+        </p:txBody>
+      </p:sp>
+      <p:sp>
+        <p:nvSpPr>
+          <p:cNvPr id="27" name="TextBox 26"/>
+          <p:cNvSpPr txBox="1"/>
+          <p:nvPr/>
+        </p:nvSpPr>
+        <p:spPr>
+          <a:xfrm>
+            <a:off x="886968" y="2971800"/>
+            <a:ext cx="6085332" cy="694944"/>
+          </a:xfrm>
+          <a:prstGeom prst="rect">
+            <a:avLst/>
+          </a:prstGeom>
+          <a:noFill/>
+        </p:spPr>
+        <p:txBody>
+          <a:bodyPr wrap="square" lIns="0" rIns="0" tIns="0" bIns="0">
+            <a:spAutoFit/>
+          </a:bodyPr>
+          <a:lstStyle/>
+          <a:p>
+            <a:pPr>
+              <a:spcBef>
+                <a:spcPts val="0"/>
+              </a:spcBef>
+              <a:spcAft>
+                <a:spcPts val="900"/>
+              </a:spcAft>
+              <a:defRPr sz="2300" b="1">
+                <a:solidFill>
+                  <a:srgbClr val="F4F1E9"/>
+                </a:solidFill>
+                <a:latin typeface="Noto Sans"/>
+              </a:defRPr>
+            </a:pPr>
+            <a:r>
+              <a:t>Сделано</a:t>
+            </a:r>
+          </a:p>
+        </p:txBody>
+      </p:sp>
+      <p:sp>
+        <p:nvSpPr>
+          <p:cNvPr id="28" name="TextBox 27"/>
+          <p:cNvSpPr txBox="1"/>
+          <p:nvPr/>
+        </p:nvSpPr>
+        <p:spPr>
+          <a:xfrm>
+            <a:off x="886968" y="3685032"/>
+            <a:ext cx="6085332" cy="2423160"/>
+          </a:xfrm>
+          <a:prstGeom prst="rect">
+            <a:avLst/>
+          </a:prstGeom>
+          <a:noFill/>
+        </p:spPr>
+        <p:txBody>
+          <a:bodyPr wrap="square" lIns="0" rIns="0" tIns="0" bIns="0">
+            <a:spAutoFit/>
+          </a:bodyPr>
+          <a:lstStyle/>
+          <a:p>
+            <a:pPr>
+              <a:spcBef>
+                <a:spcPts val="0"/>
+              </a:spcBef>
+              <a:spcAft>
+                <a:spcPts val="900"/>
+              </a:spcAft>
+              <a:defRPr sz="2100" b="0">
+                <a:solidFill>
+                  <a:srgbClr val="AFBDC0"/>
+                </a:solidFill>
+                <a:latin typeface="Noto Sans"/>
+              </a:defRPr>
+            </a:pPr>
+            <a:r>
+              <a:t>CAD A04, материалы, STEP и просмотр.</a:t>
+            </a:r>
+          </a:p>
+          <a:p>
+            <a:pPr>
+              <a:spcBef>
+                <a:spcPts val="0"/>
+              </a:spcBef>
+              <a:spcAft>
+                <a:spcPts val="900"/>
+              </a:spcAft>
+              <a:defRPr sz="2100" b="0">
+                <a:solidFill>
+                  <a:srgbClr val="AFBDC0"/>
+                </a:solidFill>
+                <a:latin typeface="Noto Sans"/>
+              </a:defRPr>
+            </a:pPr>
+            <a:r>
+              <a:t>GUI, ведомость и предварительные расчёты.</a:t>
+            </a:r>
+          </a:p>
+        </p:txBody>
+      </p:sp>
+      <p:sp>
+        <p:nvSpPr>
+          <p:cNvPr id="29" name="Rectangle 28"/>
+          <p:cNvSpPr/>
+          <p:nvPr/>
+        </p:nvSpPr>
+        <p:spPr>
+          <a:xfrm>
+            <a:off x="7429500" y="2743200"/>
+            <a:ext cx="6542532" cy="3474720"/>
+          </a:xfrm>
+          <a:prstGeom prst="rect">
+            <a:avLst/>
+          </a:prstGeom>
+          <a:solidFill>
+            <a:srgbClr val="1A2427"/>
+          </a:solidFill>
+          <a:ln>
+            <a:noFill/>
+          </a:ln>
+        </p:spPr>
+        <p:style>
+          <a:lnRef idx="1">
+            <a:schemeClr val="accent1"/>
+          </a:lnRef>
+          <a:fillRef idx="3">
+            <a:schemeClr val="accent1"/>
+          </a:fillRef>
+          <a:effectRef idx="2">
+            <a:schemeClr val="accent1"/>
+          </a:effectRef>
+          <a:fontRef idx="minor">
+            <a:schemeClr val="lt1"/>
+          </a:fontRef>
+        </p:style>
+        <p:txBody>
+          <a:bodyPr rtlCol="0" anchor="ctr"/>
+          <a:lstStyle/>
+          <a:p>
+            <a:pPr algn="ctr"/>
+          </a:p>
+        </p:txBody>
+      </p:sp>
+      <p:sp>
+        <p:nvSpPr>
+          <p:cNvPr id="30" name="Rectangle 29"/>
+          <p:cNvSpPr/>
+          <p:nvPr/>
+        </p:nvSpPr>
+        <p:spPr>
+          <a:xfrm>
+            <a:off x="7429500" y="2743200"/>
+            <a:ext cx="6542532" cy="32004"/>
+          </a:xfrm>
+          <a:prstGeom prst="rect">
+            <a:avLst/>
+          </a:prstGeom>
+          <a:solidFill>
+            <a:srgbClr val="FF793F"/>
+          </a:solidFill>
+          <a:ln>
+            <a:noFill/>
+          </a:ln>
+        </p:spPr>
+        <p:style>
+          <a:lnRef idx="1">
+            <a:schemeClr val="accent1"/>
+          </a:lnRef>
+          <a:fillRef idx="3">
+            <a:schemeClr val="accent1"/>
+          </a:fillRef>
+          <a:effectRef idx="2">
+            <a:schemeClr val="accent1"/>
+          </a:effectRef>
+          <a:fontRef idx="minor">
+            <a:schemeClr val="lt1"/>
+          </a:fontRef>
+        </p:style>
+        <p:txBody>
+          <a:bodyPr rtlCol="0" anchor="ctr"/>
+          <a:lstStyle/>
+          <a:p>
+            <a:pPr algn="ctr"/>
+          </a:p>
+        </p:txBody>
+      </p:sp>
+      <p:sp>
+        <p:nvSpPr>
+          <p:cNvPr id="31" name="TextBox 30"/>
+          <p:cNvSpPr txBox="1"/>
+          <p:nvPr/>
+        </p:nvSpPr>
+        <p:spPr>
+          <a:xfrm>
+            <a:off x="7658100" y="2971800"/>
+            <a:ext cx="6085332" cy="694944"/>
+          </a:xfrm>
+          <a:prstGeom prst="rect">
+            <a:avLst/>
+          </a:prstGeom>
+          <a:noFill/>
+        </p:spPr>
+        <p:txBody>
+          <a:bodyPr wrap="square" lIns="0" rIns="0" tIns="0" bIns="0">
+            <a:spAutoFit/>
+          </a:bodyPr>
+          <a:lstStyle/>
+          <a:p>
+            <a:pPr>
+              <a:spcBef>
+                <a:spcPts val="0"/>
+              </a:spcBef>
+              <a:spcAft>
+                <a:spcPts val="900"/>
+              </a:spcAft>
+              <a:defRPr sz="2300" b="1">
+                <a:solidFill>
+                  <a:srgbClr val="F4F1E9"/>
+                </a:solidFill>
+                <a:latin typeface="Noto Sans"/>
+              </a:defRPr>
+            </a:pPr>
+            <a:r>
+              <a:t>Открыто</a:t>
+            </a:r>
+          </a:p>
+        </p:txBody>
+      </p:sp>
+      <p:sp>
+        <p:nvSpPr>
+          <p:cNvPr id="32" name="TextBox 31"/>
+          <p:cNvSpPr txBox="1"/>
+          <p:nvPr/>
+        </p:nvSpPr>
+        <p:spPr>
+          <a:xfrm>
+            <a:off x="7658100" y="3685032"/>
+            <a:ext cx="6085332" cy="2423160"/>
+          </a:xfrm>
+          <a:prstGeom prst="rect">
+            <a:avLst/>
+          </a:prstGeom>
+          <a:noFill/>
+        </p:spPr>
+        <p:txBody>
+          <a:bodyPr wrap="square" lIns="0" rIns="0" tIns="0" bIns="0">
+            <a:spAutoFit/>
+          </a:bodyPr>
+          <a:lstStyle/>
+          <a:p>
+            <a:pPr>
+              <a:spcBef>
+                <a:spcPts val="0"/>
+              </a:spcBef>
+              <a:spcAft>
+                <a:spcPts val="900"/>
+              </a:spcAft>
+              <a:defRPr sz="2100" b="0">
+                <a:solidFill>
+                  <a:srgbClr val="AFBDC0"/>
+                </a:solidFill>
+                <a:latin typeface="Noto Sans"/>
+              </a:defRPr>
+            </a:pPr>
+            <a:r>
+              <a:t>Рабочие соединения и компоненты.</a:t>
+            </a:r>
+          </a:p>
+          <a:p>
+            <a:pPr>
+              <a:spcBef>
+                <a:spcPts val="0"/>
+              </a:spcBef>
+              <a:spcAft>
+                <a:spcPts val="900"/>
+              </a:spcAft>
+              <a:defRPr sz="2100" b="0">
+                <a:solidFill>
+                  <a:srgbClr val="AFBDC0"/>
+                </a:solidFill>
+                <a:latin typeface="Noto Sans"/>
+              </a:defRPr>
+            </a:pPr>
+            <a:r>
+              <a:t>Прочность, стенды и полёт.</a:t>
+            </a:r>
+          </a:p>
+        </p:txBody>
+      </p:sp>
+    </p:spTree>
+  </p:cSld>
+  <p:clrMapOvr>
+    <a:masterClrMapping/>
+  </p:clrMapOvr>
+</p:sld>
+</file>
+
+<file path=ppt/slides/slide16.xml><?xml version="1.0" encoding="utf-8"?>
+<p:sld xmlns:a="http://schemas.openxmlformats.org/drawingml/2006/main" xmlns:p="http://schemas.openxmlformats.org/presentationml/2006/main" xmlns:r="http://schemas.openxmlformats.org/officeDocument/2006/relationships">
+  <p:cSld>
+    <p:bg>
+      <p:bgPr>
+        <a:solidFill>
+          <a:srgbClr val="101719"/>
+        </a:solidFill>
+        <a:effectLst/>
+      </p:bgPr>
+    </p:bg>
+    <p:spTree>
+      <p:nvGrpSpPr>
+        <p:cNvPr id="1" name=""/>
+        <p:cNvGrpSpPr/>
+        <p:nvPr/>
+      </p:nvGrpSpPr>
+      <p:grpSpPr/>
+      <p:sp>
+        <p:nvSpPr>
+          <p:cNvPr id="2" name="Rectangle 1"/>
+          <p:cNvSpPr/>
+          <p:nvPr/>
+        </p:nvSpPr>
+        <p:spPr>
+          <a:xfrm>
+            <a:off x="914400" y="0"/>
+            <a:ext cx="5486" cy="8229600"/>
+          </a:xfrm>
+          <a:prstGeom prst="rect">
+            <a:avLst/>
+          </a:prstGeom>
+          <a:solidFill>
+            <a:srgbClr val="182124"/>
+          </a:solidFill>
+          <a:ln>
+            <a:noFill/>
+          </a:ln>
+        </p:spPr>
+        <p:style>
+          <a:lnRef idx="1">
+            <a:schemeClr val="accent1"/>
+          </a:lnRef>
+          <a:fillRef idx="3">
+            <a:schemeClr val="accent1"/>
+          </a:fillRef>
+          <a:effectRef idx="2">
+            <a:schemeClr val="accent1"/>
+          </a:effectRef>
+          <a:fontRef idx="minor">
+            <a:schemeClr val="lt1"/>
+          </a:fontRef>
+        </p:style>
+        <p:txBody>
+          <a:bodyPr rtlCol="0" anchor="ctr"/>
+          <a:lstStyle/>
+          <a:p>
+            <a:pPr algn="ctr"/>
+          </a:p>
+        </p:txBody>
+      </p:sp>
+      <p:sp>
+        <p:nvSpPr>
+          <p:cNvPr id="3" name="Rectangle 2"/>
+          <p:cNvSpPr/>
+          <p:nvPr/>
+        </p:nvSpPr>
+        <p:spPr>
+          <a:xfrm>
+            <a:off x="1828800" y="0"/>
+            <a:ext cx="5486" cy="8229600"/>
+          </a:xfrm>
+          <a:prstGeom prst="rect">
+            <a:avLst/>
+          </a:prstGeom>
+          <a:solidFill>
+            <a:srgbClr val="182124"/>
+          </a:solidFill>
+          <a:ln>
+            <a:noFill/>
+          </a:ln>
+        </p:spPr>
+        <p:style>
+          <a:lnRef idx="1">
+            <a:schemeClr val="accent1"/>
+          </a:lnRef>
+          <a:fillRef idx="3">
+            <a:schemeClr val="accent1"/>
+          </a:fillRef>
+          <a:effectRef idx="2">
+            <a:schemeClr val="accent1"/>
+          </a:effectRef>
+          <a:fontRef idx="minor">
+            <a:schemeClr val="lt1"/>
+          </a:fontRef>
+        </p:style>
+        <p:txBody>
+          <a:bodyPr rtlCol="0" anchor="ctr"/>
+          <a:lstStyle/>
+          <a:p>
+            <a:pPr algn="ctr"/>
+          </a:p>
+        </p:txBody>
+      </p:sp>
+      <p:sp>
+        <p:nvSpPr>
+          <p:cNvPr id="4" name="Rectangle 3"/>
+          <p:cNvSpPr/>
+          <p:nvPr/>
+        </p:nvSpPr>
+        <p:spPr>
+          <a:xfrm>
+            <a:off x="2743200" y="0"/>
+            <a:ext cx="5486" cy="8229600"/>
+          </a:xfrm>
+          <a:prstGeom prst="rect">
+            <a:avLst/>
+          </a:prstGeom>
+          <a:solidFill>
+            <a:srgbClr val="182124"/>
+          </a:solidFill>
+          <a:ln>
+            <a:noFill/>
+          </a:ln>
+        </p:spPr>
+        <p:style>
+          <a:lnRef idx="1">
+            <a:schemeClr val="accent1"/>
+          </a:lnRef>
+          <a:fillRef idx="3">
+            <a:schemeClr val="accent1"/>
+          </a:fillRef>
+          <a:effectRef idx="2">
+            <a:schemeClr val="accent1"/>
+          </a:effectRef>
+          <a:fontRef idx="minor">
+            <a:schemeClr val="lt1"/>
+          </a:fontRef>
+        </p:style>
+        <p:txBody>
+          <a:bodyPr rtlCol="0" anchor="ctr"/>
+          <a:lstStyle/>
+          <a:p>
+            <a:pPr algn="ctr"/>
+          </a:p>
+        </p:txBody>
+      </p:sp>
+      <p:sp>
+        <p:nvSpPr>
+          <p:cNvPr id="5" name="Rectangle 4"/>
+          <p:cNvSpPr/>
+          <p:nvPr/>
+        </p:nvSpPr>
+        <p:spPr>
+          <a:xfrm>
+            <a:off x="3657600" y="0"/>
+            <a:ext cx="5486" cy="8229600"/>
+          </a:xfrm>
+          <a:prstGeom prst="rect">
+            <a:avLst/>
+          </a:prstGeom>
+          <a:solidFill>
+            <a:srgbClr val="182124"/>
+          </a:solidFill>
+          <a:ln>
+            <a:noFill/>
+          </a:ln>
+        </p:spPr>
+        <p:style>
+          <a:lnRef idx="1">
+            <a:schemeClr val="accent1"/>
+          </a:lnRef>
+          <a:fillRef idx="3">
+            <a:schemeClr val="accent1"/>
+          </a:fillRef>
+          <a:effectRef idx="2">
+            <a:schemeClr val="accent1"/>
+          </a:effectRef>
+          <a:fontRef idx="minor">
+            <a:schemeClr val="lt1"/>
+          </a:fontRef>
+        </p:style>
+        <p:txBody>
+          <a:bodyPr rtlCol="0" anchor="ctr"/>
+          <a:lstStyle/>
+          <a:p>
+            <a:pPr algn="ctr"/>
+          </a:p>
+        </p:txBody>
+      </p:sp>
+      <p:sp>
+        <p:nvSpPr>
+          <p:cNvPr id="6" name="Rectangle 5"/>
+          <p:cNvSpPr/>
+          <p:nvPr/>
+        </p:nvSpPr>
+        <p:spPr>
+          <a:xfrm>
+            <a:off x="4572000" y="0"/>
+            <a:ext cx="5486" cy="8229600"/>
+          </a:xfrm>
+          <a:prstGeom prst="rect">
+            <a:avLst/>
+          </a:prstGeom>
+          <a:solidFill>
+            <a:srgbClr val="182124"/>
+          </a:solidFill>
+          <a:ln>
+            <a:noFill/>
+          </a:ln>
+        </p:spPr>
+        <p:style>
+          <a:lnRef idx="1">
+            <a:schemeClr val="accent1"/>
+          </a:lnRef>
+          <a:fillRef idx="3">
+            <a:schemeClr val="accent1"/>
+          </a:fillRef>
+          <a:effectRef idx="2">
+            <a:schemeClr val="accent1"/>
+          </a:effectRef>
+          <a:fontRef idx="minor">
+            <a:schemeClr val="lt1"/>
+          </a:fontRef>
+        </p:style>
+        <p:txBody>
+          <a:bodyPr rtlCol="0" anchor="ctr"/>
+          <a:lstStyle/>
+          <a:p>
+            <a:pPr algn="ctr"/>
+          </a:p>
+        </p:txBody>
+      </p:sp>
+      <p:sp>
+        <p:nvSpPr>
+          <p:cNvPr id="7" name="Rectangle 6"/>
+          <p:cNvSpPr/>
+          <p:nvPr/>
+        </p:nvSpPr>
+        <p:spPr>
+          <a:xfrm>
+            <a:off x="5486400" y="0"/>
+            <a:ext cx="5486" cy="8229600"/>
+          </a:xfrm>
+          <a:prstGeom prst="rect">
+            <a:avLst/>
+          </a:prstGeom>
+          <a:solidFill>
+            <a:srgbClr val="182124"/>
+          </a:solidFill>
+          <a:ln>
+            <a:noFill/>
+          </a:ln>
+        </p:spPr>
+        <p:style>
+          <a:lnRef idx="1">
+            <a:schemeClr val="accent1"/>
+          </a:lnRef>
+          <a:fillRef idx="3">
+            <a:schemeClr val="accent1"/>
+          </a:fillRef>
+          <a:effectRef idx="2">
+            <a:schemeClr val="accent1"/>
+          </a:effectRef>
+          <a:fontRef idx="minor">
+            <a:schemeClr val="lt1"/>
+          </a:fontRef>
+        </p:style>
+        <p:txBody>
+          <a:bodyPr rtlCol="0" anchor="ctr"/>
+          <a:lstStyle/>
+          <a:p>
+            <a:pPr algn="ctr"/>
+          </a:p>
+        </p:txBody>
+      </p:sp>
+      <p:sp>
+        <p:nvSpPr>
+          <p:cNvPr id="8" name="Rectangle 7"/>
+          <p:cNvSpPr/>
+          <p:nvPr/>
+        </p:nvSpPr>
+        <p:spPr>
+          <a:xfrm>
+            <a:off x="6400800" y="0"/>
+            <a:ext cx="5486" cy="8229600"/>
+          </a:xfrm>
+          <a:prstGeom prst="rect">
+            <a:avLst/>
+          </a:prstGeom>
+          <a:solidFill>
+            <a:srgbClr val="182124"/>
+          </a:solidFill>
+          <a:ln>
+            <a:noFill/>
+          </a:ln>
+        </p:spPr>
+        <p:style>
+          <a:lnRef idx="1">
+            <a:schemeClr val="accent1"/>
+          </a:lnRef>
+          <a:fillRef idx="3">
+            <a:schemeClr val="accent1"/>
+          </a:fillRef>
+          <a:effectRef idx="2">
+            <a:schemeClr val="accent1"/>
+          </a:effectRef>
+          <a:fontRef idx="minor">
+            <a:schemeClr val="lt1"/>
+          </a:fontRef>
+        </p:style>
+        <p:txBody>
+          <a:bodyPr rtlCol="0" anchor="ctr"/>
+          <a:lstStyle/>
+          <a:p>
+            <a:pPr algn="ctr"/>
+          </a:p>
+        </p:txBody>
+      </p:sp>
+      <p:sp>
+        <p:nvSpPr>
+          <p:cNvPr id="9" name="Rectangle 8"/>
+          <p:cNvSpPr/>
+          <p:nvPr/>
+        </p:nvSpPr>
+        <p:spPr>
+          <a:xfrm>
+            <a:off x="7315200" y="0"/>
+            <a:ext cx="5486" cy="8229600"/>
+          </a:xfrm>
+          <a:prstGeom prst="rect">
+            <a:avLst/>
+          </a:prstGeom>
+          <a:solidFill>
+            <a:srgbClr val="182124"/>
+          </a:solidFill>
+          <a:ln>
+            <a:noFill/>
+          </a:ln>
+        </p:spPr>
+        <p:style>
+          <a:lnRef idx="1">
+            <a:schemeClr val="accent1"/>
+          </a:lnRef>
+          <a:fillRef idx="3">
+            <a:schemeClr val="accent1"/>
+          </a:fillRef>
+          <a:effectRef idx="2">
+            <a:schemeClr val="accent1"/>
+          </a:effectRef>
+          <a:fontRef idx="minor">
+            <a:schemeClr val="lt1"/>
+          </a:fontRef>
+        </p:style>
+        <p:txBody>
+          <a:bodyPr rtlCol="0" anchor="ctr"/>
+          <a:lstStyle/>
+          <a:p>
+            <a:pPr algn="ctr"/>
+          </a:p>
+        </p:txBody>
+      </p:sp>
+      <p:sp>
+        <p:nvSpPr>
+          <p:cNvPr id="10" name="Rectangle 9"/>
+          <p:cNvSpPr/>
+          <p:nvPr/>
+        </p:nvSpPr>
+        <p:spPr>
+          <a:xfrm>
+            <a:off x="8229600" y="0"/>
+            <a:ext cx="5486" cy="8229600"/>
+          </a:xfrm>
+          <a:prstGeom prst="rect">
+            <a:avLst/>
+          </a:prstGeom>
+          <a:solidFill>
+            <a:srgbClr val="182124"/>
+          </a:solidFill>
+          <a:ln>
+            <a:noFill/>
+          </a:ln>
+        </p:spPr>
+        <p:style>
+          <a:lnRef idx="1">
+            <a:schemeClr val="accent1"/>
+          </a:lnRef>
+          <a:fillRef idx="3">
+            <a:schemeClr val="accent1"/>
+          </a:fillRef>
+          <a:effectRef idx="2">
+            <a:schemeClr val="accent1"/>
+          </a:effectRef>
+          <a:fontRef idx="minor">
+            <a:schemeClr val="lt1"/>
+          </a:fontRef>
+        </p:style>
+        <p:txBody>
+          <a:bodyPr rtlCol="0" anchor="ctr"/>
+          <a:lstStyle/>
+          <a:p>
+            <a:pPr algn="ctr"/>
+          </a:p>
+        </p:txBody>
+      </p:sp>
+      <p:sp>
+        <p:nvSpPr>
+          <p:cNvPr id="11" name="Rectangle 10"/>
+          <p:cNvSpPr/>
+          <p:nvPr/>
+        </p:nvSpPr>
+        <p:spPr>
+          <a:xfrm>
+            <a:off x="9144000" y="0"/>
+            <a:ext cx="5486" cy="8229600"/>
+          </a:xfrm>
+          <a:prstGeom prst="rect">
+            <a:avLst/>
+          </a:prstGeom>
+          <a:solidFill>
+            <a:srgbClr val="182124"/>
+          </a:solidFill>
+          <a:ln>
+            <a:noFill/>
+          </a:ln>
+        </p:spPr>
+        <p:style>
+          <a:lnRef idx="1">
+            <a:schemeClr val="accent1"/>
+          </a:lnRef>
+          <a:fillRef idx="3">
+            <a:schemeClr val="accent1"/>
+          </a:fillRef>
+          <a:effectRef idx="2">
+            <a:schemeClr val="accent1"/>
+          </a:effectRef>
+          <a:fontRef idx="minor">
+            <a:schemeClr val="lt1"/>
+          </a:fontRef>
+        </p:style>
+        <p:txBody>
+          <a:bodyPr rtlCol="0" anchor="ctr"/>
+          <a:lstStyle/>
+          <a:p>
+            <a:pPr algn="ctr"/>
+          </a:p>
+        </p:txBody>
+      </p:sp>
+      <p:sp>
+        <p:nvSpPr>
+          <p:cNvPr id="12" name="Rectangle 11"/>
+          <p:cNvSpPr/>
+          <p:nvPr/>
+        </p:nvSpPr>
+        <p:spPr>
+          <a:xfrm>
+            <a:off x="10058400" y="0"/>
+            <a:ext cx="5486" cy="8229600"/>
+          </a:xfrm>
+          <a:prstGeom prst="rect">
+            <a:avLst/>
+          </a:prstGeom>
+          <a:solidFill>
+            <a:srgbClr val="182124"/>
+          </a:solidFill>
+          <a:ln>
+            <a:noFill/>
+          </a:ln>
+        </p:spPr>
+        <p:style>
+          <a:lnRef idx="1">
+            <a:schemeClr val="accent1"/>
+          </a:lnRef>
+          <a:fillRef idx="3">
+            <a:schemeClr val="accent1"/>
+          </a:fillRef>
+          <a:effectRef idx="2">
+            <a:schemeClr val="accent1"/>
+          </a:effectRef>
+          <a:fontRef idx="minor">
+            <a:schemeClr val="lt1"/>
+          </a:fontRef>
+        </p:style>
+        <p:txBody>
+          <a:bodyPr rtlCol="0" anchor="ctr"/>
+          <a:lstStyle/>
+          <a:p>
+            <a:pPr algn="ctr"/>
+          </a:p>
+        </p:txBody>
+      </p:sp>
+      <p:sp>
+        <p:nvSpPr>
+          <p:cNvPr id="13" name="Rectangle 12"/>
+          <p:cNvSpPr/>
+          <p:nvPr/>
+        </p:nvSpPr>
+        <p:spPr>
+          <a:xfrm>
+            <a:off x="10972800" y="0"/>
+            <a:ext cx="5486" cy="8229600"/>
+          </a:xfrm>
+          <a:prstGeom prst="rect">
+            <a:avLst/>
+          </a:prstGeom>
+          <a:solidFill>
+            <a:srgbClr val="182124"/>
+          </a:solidFill>
+          <a:ln>
+            <a:noFill/>
+          </a:ln>
+        </p:spPr>
+        <p:style>
+          <a:lnRef idx="1">
+            <a:schemeClr val="accent1"/>
+          </a:lnRef>
+          <a:fillRef idx="3">
+            <a:schemeClr val="accent1"/>
+          </a:fillRef>
+          <a:effectRef idx="2">
+            <a:schemeClr val="accent1"/>
+          </a:effectRef>
+          <a:fontRef idx="minor">
+            <a:schemeClr val="lt1"/>
+          </a:fontRef>
+        </p:style>
+        <p:txBody>
+          <a:bodyPr rtlCol="0" anchor="ctr"/>
+          <a:lstStyle/>
+          <a:p>
+            <a:pPr algn="ctr"/>
+          </a:p>
+        </p:txBody>
+      </p:sp>
+      <p:sp>
+        <p:nvSpPr>
+          <p:cNvPr id="14" name="Rectangle 13"/>
+          <p:cNvSpPr/>
+          <p:nvPr/>
+        </p:nvSpPr>
+        <p:spPr>
+          <a:xfrm>
+            <a:off x="11887200" y="0"/>
+            <a:ext cx="5486" cy="8229600"/>
+          </a:xfrm>
+          <a:prstGeom prst="rect">
+            <a:avLst/>
+          </a:prstGeom>
+          <a:solidFill>
+            <a:srgbClr val="182124"/>
+          </a:solidFill>
+          <a:ln>
+            <a:noFill/>
+          </a:ln>
+        </p:spPr>
+        <p:style>
+          <a:lnRef idx="1">
+            <a:schemeClr val="accent1"/>
+          </a:lnRef>
+          <a:fillRef idx="3">
+            <a:schemeClr val="accent1"/>
+          </a:fillRef>
+          <a:effectRef idx="2">
+            <a:schemeClr val="accent1"/>
+          </a:effectRef>
+          <a:fontRef idx="minor">
+            <a:schemeClr val="lt1"/>
+          </a:fontRef>
+        </p:style>
+        <p:txBody>
+          <a:bodyPr rtlCol="0" anchor="ctr"/>
+          <a:lstStyle/>
+          <a:p>
+            <a:pPr algn="ctr"/>
+          </a:p>
+        </p:txBody>
+      </p:sp>
+      <p:sp>
+        <p:nvSpPr>
+          <p:cNvPr id="15" name="Rectangle 14"/>
+          <p:cNvSpPr/>
+          <p:nvPr/>
+        </p:nvSpPr>
+        <p:spPr>
+          <a:xfrm>
+            <a:off x="12801600" y="0"/>
+            <a:ext cx="5486" cy="8229600"/>
+          </a:xfrm>
+          <a:prstGeom prst="rect">
+            <a:avLst/>
+          </a:prstGeom>
+          <a:solidFill>
+            <a:srgbClr val="182124"/>
+          </a:solidFill>
+          <a:ln>
+            <a:noFill/>
+          </a:ln>
+        </p:spPr>
+        <p:style>
+          <a:lnRef idx="1">
+            <a:schemeClr val="accent1"/>
+          </a:lnRef>
+          <a:fillRef idx="3">
+            <a:schemeClr val="accent1"/>
+          </a:fillRef>
+          <a:effectRef idx="2">
+            <a:schemeClr val="accent1"/>
+          </a:effectRef>
+          <a:fontRef idx="minor">
+            <a:schemeClr val="lt1"/>
+          </a:fontRef>
+        </p:style>
+        <p:txBody>
+          <a:bodyPr rtlCol="0" anchor="ctr"/>
+          <a:lstStyle/>
+          <a:p>
+            <a:pPr algn="ctr"/>
+          </a:p>
+        </p:txBody>
+      </p:sp>
+      <p:sp>
+        <p:nvSpPr>
+          <p:cNvPr id="16" name="Rectangle 15"/>
+          <p:cNvSpPr/>
+          <p:nvPr/>
+        </p:nvSpPr>
+        <p:spPr>
+          <a:xfrm>
+            <a:off x="13716000" y="0"/>
+            <a:ext cx="5486" cy="8229600"/>
+          </a:xfrm>
+          <a:prstGeom prst="rect">
+            <a:avLst/>
+          </a:prstGeom>
+          <a:solidFill>
+            <a:srgbClr val="182124"/>
+          </a:solidFill>
+          <a:ln>
+            <a:noFill/>
+          </a:ln>
+        </p:spPr>
+        <p:style>
+          <a:lnRef idx="1">
+            <a:schemeClr val="accent1"/>
+          </a:lnRef>
+          <a:fillRef idx="3">
+            <a:schemeClr val="accent1"/>
+          </a:fillRef>
+          <a:effectRef idx="2">
+            <a:schemeClr val="accent1"/>
+          </a:effectRef>
+          <a:fontRef idx="minor">
+            <a:schemeClr val="lt1"/>
+          </a:fontRef>
+        </p:style>
+        <p:txBody>
+          <a:bodyPr rtlCol="0" anchor="ctr"/>
+          <a:lstStyle/>
+          <a:p>
+            <a:pPr algn="ctr"/>
+          </a:p>
+        </p:txBody>
+      </p:sp>
+      <p:sp>
+        <p:nvSpPr>
+          <p:cNvPr id="17" name="TextBox 16"/>
+          <p:cNvSpPr txBox="1"/>
+          <p:nvPr/>
+        </p:nvSpPr>
+        <p:spPr>
+          <a:xfrm>
+            <a:off x="658368" y="393192"/>
+            <a:ext cx="10972800" cy="274320"/>
+          </a:xfrm>
+          <a:prstGeom prst="rect">
+            <a:avLst/>
+          </a:prstGeom>
+          <a:noFill/>
+        </p:spPr>
+        <p:txBody>
+          <a:bodyPr wrap="square" lIns="0" rIns="0" tIns="0" bIns="0">
+            <a:spAutoFit/>
+          </a:bodyPr>
+          <a:lstStyle/>
+          <a:p>
+            <a:pPr>
+              <a:spcBef>
+                <a:spcPts val="0"/>
+              </a:spcBef>
+              <a:spcAft>
+                <a:spcPts val="900"/>
+              </a:spcAft>
+              <a:defRPr sz="1100" b="0">
+                <a:solidFill>
+                  <a:srgbClr val="AFBDC0"/>
+                </a:solidFill>
+                <a:latin typeface="Noto Sans"/>
+              </a:defRPr>
+            </a:pPr>
+            <a:r>
+              <a:t>ИСТОЧНИКИ</a:t>
+            </a:r>
+          </a:p>
+        </p:txBody>
+      </p:sp>
+      <p:sp>
+        <p:nvSpPr>
+          <p:cNvPr id="18" name="TextBox 17"/>
+          <p:cNvSpPr txBox="1"/>
+          <p:nvPr/>
+        </p:nvSpPr>
+        <p:spPr>
+          <a:xfrm>
+            <a:off x="12390120" y="393192"/>
+            <a:ext cx="1828800" cy="274320"/>
+          </a:xfrm>
+          <a:prstGeom prst="rect">
+            <a:avLst/>
+          </a:prstGeom>
+          <a:noFill/>
+        </p:spPr>
+        <p:txBody>
+          <a:bodyPr wrap="square" lIns="0" rIns="0" tIns="0" bIns="0">
+            <a:spAutoFit/>
+          </a:bodyPr>
+          <a:lstStyle/>
+          <a:p>
+            <a:pPr>
+              <a:spcBef>
+                <a:spcPts val="0"/>
+              </a:spcBef>
+              <a:spcAft>
+                <a:spcPts val="900"/>
+              </a:spcAft>
+              <a:defRPr sz="1100" b="1">
+                <a:solidFill>
+                  <a:srgbClr val="FF793F"/>
+                </a:solidFill>
+                <a:latin typeface="Noto Sans"/>
+              </a:defRPr>
+            </a:pPr>
+            <a:r>
+              <a:t>PLBP / SG1</a:t>
+            </a:r>
+          </a:p>
+        </p:txBody>
+      </p:sp>
+      <p:sp>
+        <p:nvSpPr>
+          <p:cNvPr id="19" name="Rectangle 18"/>
+          <p:cNvSpPr/>
+          <p:nvPr/>
+        </p:nvSpPr>
+        <p:spPr>
+          <a:xfrm>
+            <a:off x="658368" y="914400"/>
+            <a:ext cx="13313664" cy="10972"/>
+          </a:xfrm>
+          <a:prstGeom prst="rect">
+            <a:avLst/>
+          </a:prstGeom>
+          <a:solidFill>
+            <a:srgbClr val="354347"/>
+          </a:solidFill>
+          <a:ln>
+            <a:noFill/>
+          </a:ln>
+        </p:spPr>
+        <p:style>
+          <a:lnRef idx="1">
+            <a:schemeClr val="accent1"/>
+          </a:lnRef>
+          <a:fillRef idx="3">
+            <a:schemeClr val="accent1"/>
+          </a:fillRef>
+          <a:effectRef idx="2">
+            <a:schemeClr val="accent1"/>
+          </a:effectRef>
+          <a:fontRef idx="minor">
+            <a:schemeClr val="lt1"/>
+          </a:fontRef>
+        </p:style>
+        <p:txBody>
+          <a:bodyPr rtlCol="0" anchor="ctr"/>
+          <a:lstStyle/>
+          <a:p>
+            <a:pPr algn="ctr"/>
+          </a:p>
+        </p:txBody>
+      </p:sp>
+      <p:sp>
+        <p:nvSpPr>
+          <p:cNvPr id="20" name="TextBox 19"/>
+          <p:cNvSpPr txBox="1"/>
+          <p:nvPr/>
+        </p:nvSpPr>
+        <p:spPr>
+          <a:xfrm>
+            <a:off x="658368" y="1243584"/>
+            <a:ext cx="13213080" cy="1097280"/>
+          </a:xfrm>
+          <a:prstGeom prst="rect">
+            <a:avLst/>
+          </a:prstGeom>
+          <a:noFill/>
+        </p:spPr>
+        <p:txBody>
+          <a:bodyPr wrap="square" lIns="0" rIns="0" tIns="0" bIns="0">
+            <a:spAutoFit/>
+          </a:bodyPr>
+          <a:lstStyle/>
+          <a:p>
+            <a:pPr>
+              <a:spcBef>
+                <a:spcPts val="0"/>
+              </a:spcBef>
+              <a:spcAft>
+                <a:spcPts val="900"/>
+              </a:spcAft>
+              <a:defRPr sz="3700" b="1">
+                <a:solidFill>
+                  <a:srgbClr val="F4F1E9"/>
+                </a:solidFill>
+                <a:latin typeface="Noto Sans"/>
+              </a:defRPr>
+            </a:pPr>
+            <a:r>
               <a:t>Основания и допущения</a:t>
             </a:r>
           </a:p>
@@ -10988,7 +15601,7 @@
               </a:defRPr>
             </a:pPr>
             <a:r>
-              <a:t>13 / 13</a:t>
+              <a:t>16 / 16</a:t>
             </a:r>
           </a:p>
         </p:txBody>
@@ -12514,7 +17127,7 @@
               </a:defRPr>
             </a:pPr>
             <a:r>
-              <a:t>02 / 13</a:t>
+              <a:t>02 / 16</a:t>
             </a:r>
           </a:p>
         </p:txBody>
@@ -12528,7 +17141,7 @@
         <p:spPr>
           <a:xfrm>
             <a:off x="0" y="8183879"/>
-            <a:ext cx="2250830" cy="45720"/>
+            <a:ext cx="1828800" cy="45720"/>
           </a:xfrm>
           <a:prstGeom prst="rect">
             <a:avLst/>
@@ -14031,7 +18644,7 @@
               </a:defRPr>
             </a:pPr>
             <a:r>
-              <a:t>03 / 13</a:t>
+              <a:t>03 / 16</a:t>
             </a:r>
           </a:p>
         </p:txBody>
@@ -14045,7 +18658,7 @@
         <p:spPr>
           <a:xfrm>
             <a:off x="0" y="8183879"/>
-            <a:ext cx="3376246" cy="45720"/>
+            <a:ext cx="2743200" cy="45720"/>
           </a:xfrm>
           <a:prstGeom prst="rect">
             <a:avLst/>
@@ -15551,7 +20164,7 @@
               </a:defRPr>
             </a:pPr>
             <a:r>
-              <a:t>04 / 13</a:t>
+              <a:t>04 / 16</a:t>
             </a:r>
           </a:p>
         </p:txBody>
@@ -15565,7 +20178,7 @@
         <p:spPr>
           <a:xfrm>
             <a:off x="0" y="8183879"/>
-            <a:ext cx="4501661" cy="45720"/>
+            <a:ext cx="3657600" cy="45720"/>
           </a:xfrm>
           <a:prstGeom prst="rect">
             <a:avLst/>
@@ -16585,7 +21198,7 @@
               </a:defRPr>
             </a:pPr>
             <a:r>
-              <a:t>05 / 13</a:t>
+              <a:t>05 / 16</a:t>
             </a:r>
           </a:p>
         </p:txBody>
@@ -16599,7 +21212,7 @@
         <p:spPr>
           <a:xfrm>
             <a:off x="0" y="8183879"/>
-            <a:ext cx="5627076" cy="45720"/>
+            <a:ext cx="4572000" cy="45720"/>
           </a:xfrm>
           <a:prstGeom prst="rect">
             <a:avLst/>
@@ -17619,7 +22232,7 @@
               </a:defRPr>
             </a:pPr>
             <a:r>
-              <a:t>06 / 13</a:t>
+              <a:t>06 / 16</a:t>
             </a:r>
           </a:p>
         </p:txBody>
@@ -17633,7 +22246,7 @@
         <p:spPr>
           <a:xfrm>
             <a:off x="0" y="8183879"/>
-            <a:ext cx="6752492" cy="45720"/>
+            <a:ext cx="5486400" cy="45720"/>
           </a:xfrm>
           <a:prstGeom prst="rect">
             <a:avLst/>
@@ -18611,7 +23224,7 @@
               </a:defRPr>
             </a:pPr>
             <a:r>
-              <a:t>При контрольном макете 1 кг: CG 984 мм, запас 1,845 D. Геометрия одинакова.</a:t>
+              <a:t>CP зависит от скорости и угла атаки. Ручная низкоскоростная оценка: 1169 мм.</a:t>
             </a:r>
           </a:p>
         </p:txBody>
@@ -18653,7 +23266,7 @@
               </a:defRPr>
             </a:pPr>
             <a:r>
-              <a:t>07 / 13</a:t>
+              <a:t>07 / 16</a:t>
             </a:r>
           </a:p>
         </p:txBody>
@@ -18667,7 +23280,7 @@
         <p:spPr>
           <a:xfrm>
             <a:off x="0" y="8183879"/>
-            <a:ext cx="7877907" cy="45720"/>
+            <a:ext cx="6400800" cy="45720"/>
           </a:xfrm>
           <a:prstGeom prst="rect">
             <a:avLst/>
@@ -19036,7 +23649,7 @@
               </a:defRPr>
             </a:pPr>
             <a:r>
-              <a:t>Линейная низкоскоростная оценка.</a:t>
+              <a:t>OpenRocket: M=0,05; угол атаки 0°.</a:t>
             </a:r>
           </a:p>
         </p:txBody>
@@ -19206,7 +23819,7 @@
               </a:defRPr>
             </a:pPr>
             <a:r>
-              <a:t>Флаттер и динамика ещё не проверены.</a:t>
+              <a:t>Статическая оценка; флаттер не проверен.</a:t>
             </a:r>
           </a:p>
         </p:txBody>
@@ -20046,7 +24659,7 @@
               </a:defRPr>
             </a:pPr>
             <a:r>
-              <a:t>Высота: первая оценка чувствительности</a:t>
+              <a:t>1D: влияние принятого Cd</a:t>
             </a:r>
           </a:p>
         </p:txBody>
@@ -20173,7 +24786,7 @@
               </a:defRPr>
             </a:pPr>
             <a:r>
-              <a:t>08 / 13</a:t>
+              <a:t>08 / 16</a:t>
             </a:r>
           </a:p>
         </p:txBody>
@@ -20187,7 +24800,7 @@
         <p:spPr>
           <a:xfrm>
             <a:off x="0" y="8183879"/>
-            <a:ext cx="9003323" cy="45720"/>
+            <a:ext cx="7315200" cy="45720"/>
           </a:xfrm>
           <a:prstGeom prst="rect">
             <a:avLst/>
@@ -20953,7 +25566,7 @@
               </a:defRPr>
             </a:pPr>
             <a:r>
-              <a:t>08 / РЕЗУЛЬТАТЫ ПРОЕКТА</a:t>
+              <a:t>OPENROCKET / OR01</a:t>
             </a:r>
           </a:p>
         </p:txBody>
@@ -21080,7 +25693,7 @@
               </a:defRPr>
             </a:pPr>
             <a:r>
-              <a:t>Модульная конструкция</a:t>
+              <a:t>OpenRocket: пять тестовых сценариев</a:t>
             </a:r>
           </a:p>
         </p:txBody>
@@ -21165,7 +25778,7 @@
               </a:defRPr>
             </a:pPr>
             <a:r>
-              <a:t>A04: последовательность отсеков задана. Крепления, разделение и обслуживание требуют разработки.</a:t>
+              <a:t>Штиль: 1514 м. Ветер и направляющая — тестовые; расчёт заканчивается у апогея.</a:t>
             </a:r>
           </a:p>
         </p:txBody>
@@ -21207,7 +25820,7 @@
               </a:defRPr>
             </a:pPr>
             <a:r>
-              <a:t>09 / 13</a:t>
+              <a:t>09 / 16</a:t>
             </a:r>
           </a:p>
         </p:txBody>
@@ -21221,7 +25834,7 @@
         <p:spPr>
           <a:xfrm>
             <a:off x="0" y="8183879"/>
-            <a:ext cx="10128738" cy="45720"/>
+            <a:ext cx="8229600" cy="45720"/>
           </a:xfrm>
           <a:prstGeom prst="rect">
             <a:avLst/>
@@ -21255,854 +25868,30 @@
           </a:p>
         </p:txBody>
       </p:sp>
-      <p:sp>
-        <p:nvSpPr>
-          <p:cNvPr id="25" name="Rectangle 24"/>
-          <p:cNvSpPr/>
-          <p:nvPr/>
-        </p:nvSpPr>
-        <p:spPr>
-          <a:xfrm>
-            <a:off x="658368" y="2697480"/>
-            <a:ext cx="6565392" cy="1627632"/>
-          </a:xfrm>
-          <a:prstGeom prst="rect">
-            <a:avLst/>
-          </a:prstGeom>
-          <a:solidFill>
-            <a:srgbClr val="1A2427"/>
-          </a:solidFill>
-          <a:ln>
-            <a:noFill/>
-          </a:ln>
-        </p:spPr>
-        <p:style>
-          <a:lnRef idx="1">
-            <a:schemeClr val="accent1"/>
-          </a:lnRef>
-          <a:fillRef idx="3">
-            <a:schemeClr val="accent1"/>
-          </a:fillRef>
-          <a:effectRef idx="2">
-            <a:schemeClr val="accent1"/>
-          </a:effectRef>
-          <a:fontRef idx="minor">
-            <a:schemeClr val="lt1"/>
-          </a:fontRef>
-        </p:style>
-        <p:txBody>
-          <a:bodyPr rtlCol="0" anchor="ctr"/>
-          <a:lstStyle/>
-          <a:p>
-            <a:pPr algn="ctr"/>
-          </a:p>
-        </p:txBody>
-      </p:sp>
-      <p:sp>
-        <p:nvSpPr>
-          <p:cNvPr id="26" name="Rectangle 25"/>
-          <p:cNvSpPr/>
-          <p:nvPr/>
-        </p:nvSpPr>
-        <p:spPr>
-          <a:xfrm>
-            <a:off x="658368" y="2697480"/>
-            <a:ext cx="36576" cy="1627632"/>
-          </a:xfrm>
-          <a:prstGeom prst="rect">
-            <a:avLst/>
-          </a:prstGeom>
-          <a:solidFill>
-            <a:srgbClr val="FF793F"/>
-          </a:solidFill>
-          <a:ln>
-            <a:noFill/>
-          </a:ln>
-        </p:spPr>
-        <p:style>
-          <a:lnRef idx="1">
-            <a:schemeClr val="accent1"/>
-          </a:lnRef>
-          <a:fillRef idx="3">
-            <a:schemeClr val="accent1"/>
-          </a:fillRef>
-          <a:effectRef idx="2">
-            <a:schemeClr val="accent1"/>
-          </a:effectRef>
-          <a:fontRef idx="minor">
-            <a:schemeClr val="lt1"/>
-          </a:fontRef>
-        </p:style>
-        <p:txBody>
-          <a:bodyPr rtlCol="0" anchor="ctr"/>
-          <a:lstStyle/>
-          <a:p>
-            <a:pPr algn="ctr"/>
-          </a:p>
-        </p:txBody>
-      </p:sp>
-      <p:sp>
-        <p:nvSpPr>
-          <p:cNvPr id="27" name="TextBox 26"/>
-          <p:cNvSpPr txBox="1"/>
-          <p:nvPr/>
-        </p:nvSpPr>
-        <p:spPr>
-          <a:xfrm>
-            <a:off x="905256" y="3035808"/>
-            <a:ext cx="868680" cy="868680"/>
-          </a:xfrm>
-          <a:prstGeom prst="rect">
-            <a:avLst/>
-          </a:prstGeom>
-          <a:noFill/>
-        </p:spPr>
-        <p:txBody>
-          <a:bodyPr wrap="square" lIns="0" rIns="0" tIns="0" bIns="0">
-            <a:spAutoFit/>
-          </a:bodyPr>
-          <a:lstStyle/>
-          <a:p>
-            <a:pPr>
-              <a:spcBef>
-                <a:spcPts val="0"/>
-              </a:spcBef>
-              <a:spcAft>
-                <a:spcPts val="900"/>
-              </a:spcAft>
-              <a:defRPr sz="4000" b="1">
-                <a:solidFill>
-                  <a:srgbClr val="FF793F"/>
-                </a:solidFill>
-                <a:latin typeface="Noto Sans"/>
-              </a:defRPr>
-            </a:pPr>
-            <a:r>
-              <a:t>01</a:t>
-            </a:r>
-          </a:p>
-        </p:txBody>
-      </p:sp>
-      <p:sp>
-        <p:nvSpPr>
-          <p:cNvPr id="28" name="TextBox 27"/>
-          <p:cNvSpPr txBox="1"/>
-          <p:nvPr/>
-        </p:nvSpPr>
-        <p:spPr>
-          <a:xfrm>
-            <a:off x="1938528" y="2971800"/>
-            <a:ext cx="4956048" cy="566928"/>
-          </a:xfrm>
-          <a:prstGeom prst="rect">
-            <a:avLst/>
-          </a:prstGeom>
-          <a:noFill/>
-        </p:spPr>
-        <p:txBody>
-          <a:bodyPr wrap="square" lIns="0" rIns="0" tIns="0" bIns="0">
-            <a:spAutoFit/>
-          </a:bodyPr>
-          <a:lstStyle/>
-          <a:p>
-            <a:pPr>
-              <a:spcBef>
-                <a:spcPts val="0"/>
-              </a:spcBef>
-              <a:spcAft>
-                <a:spcPts val="900"/>
-              </a:spcAft>
-              <a:defRPr sz="2300" b="1">
-                <a:solidFill>
-                  <a:srgbClr val="F4F1E9"/>
-                </a:solidFill>
-                <a:latin typeface="Noto Sans"/>
-              </a:defRPr>
-            </a:pPr>
-            <a:r>
-              <a:t>Учебный макет</a:t>
-            </a:r>
-          </a:p>
-        </p:txBody>
-      </p:sp>
-      <p:sp>
-        <p:nvSpPr>
-          <p:cNvPr id="29" name="TextBox 28"/>
-          <p:cNvSpPr txBox="1"/>
-          <p:nvPr/>
-        </p:nvSpPr>
-        <p:spPr>
-          <a:xfrm>
-            <a:off x="1938528" y="3602736"/>
-            <a:ext cx="4956048" cy="576072"/>
-          </a:xfrm>
-          <a:prstGeom prst="rect">
-            <a:avLst/>
-          </a:prstGeom>
-          <a:noFill/>
-        </p:spPr>
-        <p:txBody>
-          <a:bodyPr wrap="square" lIns="0" rIns="0" tIns="0" bIns="0">
-            <a:spAutoFit/>
-          </a:bodyPr>
-          <a:lstStyle/>
-          <a:p>
-            <a:pPr>
-              <a:spcBef>
-                <a:spcPts val="0"/>
-              </a:spcBef>
-              <a:spcAft>
-                <a:spcPts val="900"/>
-              </a:spcAft>
-              <a:defRPr sz="1800" b="0">
-                <a:solidFill>
-                  <a:srgbClr val="AFBDC0"/>
-                </a:solidFill>
-                <a:latin typeface="Noto Sans"/>
-              </a:defRPr>
-            </a:pPr>
-            <a:r>
-              <a:t>Собственная система спасения.</a:t>
-            </a:r>
-          </a:p>
-        </p:txBody>
-      </p:sp>
-      <p:sp>
-        <p:nvSpPr>
-          <p:cNvPr id="30" name="Rectangle 29"/>
-          <p:cNvSpPr/>
-          <p:nvPr/>
-        </p:nvSpPr>
-        <p:spPr>
-          <a:xfrm>
-            <a:off x="7452360" y="2697480"/>
-            <a:ext cx="6565392" cy="1627632"/>
-          </a:xfrm>
-          <a:prstGeom prst="rect">
-            <a:avLst/>
-          </a:prstGeom>
-          <a:solidFill>
-            <a:srgbClr val="1A2427"/>
-          </a:solidFill>
-          <a:ln>
-            <a:noFill/>
-          </a:ln>
-        </p:spPr>
-        <p:style>
-          <a:lnRef idx="1">
-            <a:schemeClr val="accent1"/>
-          </a:lnRef>
-          <a:fillRef idx="3">
-            <a:schemeClr val="accent1"/>
-          </a:fillRef>
-          <a:effectRef idx="2">
-            <a:schemeClr val="accent1"/>
-          </a:effectRef>
-          <a:fontRef idx="minor">
-            <a:schemeClr val="lt1"/>
-          </a:fontRef>
-        </p:style>
-        <p:txBody>
-          <a:bodyPr rtlCol="0" anchor="ctr"/>
-          <a:lstStyle/>
-          <a:p>
-            <a:pPr algn="ctr"/>
-          </a:p>
-        </p:txBody>
-      </p:sp>
-      <p:sp>
-        <p:nvSpPr>
-          <p:cNvPr id="31" name="Rectangle 30"/>
-          <p:cNvSpPr/>
-          <p:nvPr/>
-        </p:nvSpPr>
-        <p:spPr>
-          <a:xfrm>
-            <a:off x="7452360" y="2697480"/>
-            <a:ext cx="36576" cy="1627632"/>
-          </a:xfrm>
-          <a:prstGeom prst="rect">
-            <a:avLst/>
-          </a:prstGeom>
-          <a:solidFill>
-            <a:srgbClr val="FF793F"/>
-          </a:solidFill>
-          <a:ln>
-            <a:noFill/>
-          </a:ln>
-        </p:spPr>
-        <p:style>
-          <a:lnRef idx="1">
-            <a:schemeClr val="accent1"/>
-          </a:lnRef>
-          <a:fillRef idx="3">
-            <a:schemeClr val="accent1"/>
-          </a:fillRef>
-          <a:effectRef idx="2">
-            <a:schemeClr val="accent1"/>
-          </a:effectRef>
-          <a:fontRef idx="minor">
-            <a:schemeClr val="lt1"/>
-          </a:fontRef>
-        </p:style>
-        <p:txBody>
-          <a:bodyPr rtlCol="0" anchor="ctr"/>
-          <a:lstStyle/>
-          <a:p>
-            <a:pPr algn="ctr"/>
-          </a:p>
-        </p:txBody>
-      </p:sp>
-      <p:sp>
-        <p:nvSpPr>
-          <p:cNvPr id="32" name="TextBox 31"/>
-          <p:cNvSpPr txBox="1"/>
-          <p:nvPr/>
-        </p:nvSpPr>
-        <p:spPr>
-          <a:xfrm>
-            <a:off x="7699248" y="3035808"/>
-            <a:ext cx="868680" cy="868680"/>
-          </a:xfrm>
-          <a:prstGeom prst="rect">
-            <a:avLst/>
-          </a:prstGeom>
-          <a:noFill/>
-        </p:spPr>
-        <p:txBody>
-          <a:bodyPr wrap="square" lIns="0" rIns="0" tIns="0" bIns="0">
-            <a:spAutoFit/>
-          </a:bodyPr>
-          <a:lstStyle/>
-          <a:p>
-            <a:pPr>
-              <a:spcBef>
-                <a:spcPts val="0"/>
-              </a:spcBef>
-              <a:spcAft>
-                <a:spcPts val="900"/>
-              </a:spcAft>
-              <a:defRPr sz="4000" b="1">
-                <a:solidFill>
-                  <a:srgbClr val="FF793F"/>
-                </a:solidFill>
-                <a:latin typeface="Noto Sans"/>
-              </a:defRPr>
-            </a:pPr>
-            <a:r>
-              <a:t>02</a:t>
-            </a:r>
-          </a:p>
-        </p:txBody>
-      </p:sp>
-      <p:sp>
-        <p:nvSpPr>
-          <p:cNvPr id="33" name="TextBox 32"/>
-          <p:cNvSpPr txBox="1"/>
-          <p:nvPr/>
-        </p:nvSpPr>
-        <p:spPr>
-          <a:xfrm>
-            <a:off x="8732520" y="2971800"/>
-            <a:ext cx="4956048" cy="566928"/>
-          </a:xfrm>
-          <a:prstGeom prst="rect">
-            <a:avLst/>
-          </a:prstGeom>
-          <a:noFill/>
-        </p:spPr>
-        <p:txBody>
-          <a:bodyPr wrap="square" lIns="0" rIns="0" tIns="0" bIns="0">
-            <a:spAutoFit/>
-          </a:bodyPr>
-          <a:lstStyle/>
-          <a:p>
-            <a:pPr>
-              <a:spcBef>
-                <a:spcPts val="0"/>
-              </a:spcBef>
-              <a:spcAft>
-                <a:spcPts val="900"/>
-              </a:spcAft>
-              <a:defRPr sz="2300" b="1">
-                <a:solidFill>
-                  <a:srgbClr val="F4F1E9"/>
-                </a:solidFill>
-                <a:latin typeface="Noto Sans"/>
-              </a:defRPr>
-            </a:pPr>
-            <a:r>
-              <a:t>Возврат носителя</a:t>
-            </a:r>
-          </a:p>
-        </p:txBody>
-      </p:sp>
-      <p:sp>
-        <p:nvSpPr>
-          <p:cNvPr id="34" name="TextBox 33"/>
-          <p:cNvSpPr txBox="1"/>
-          <p:nvPr/>
-        </p:nvSpPr>
-        <p:spPr>
-          <a:xfrm>
-            <a:off x="8732520" y="3602736"/>
-            <a:ext cx="4956048" cy="576072"/>
-          </a:xfrm>
-          <a:prstGeom prst="rect">
-            <a:avLst/>
-          </a:prstGeom>
-          <a:noFill/>
-        </p:spPr>
-        <p:txBody>
-          <a:bodyPr wrap="square" lIns="0" rIns="0" tIns="0" bIns="0">
-            <a:spAutoFit/>
-          </a:bodyPr>
-          <a:lstStyle/>
-          <a:p>
-            <a:pPr>
-              <a:spcBef>
-                <a:spcPts val="0"/>
-              </a:spcBef>
-              <a:spcAft>
-                <a:spcPts val="900"/>
-              </a:spcAft>
-              <a:defRPr sz="1800" b="0">
-                <a:solidFill>
-                  <a:srgbClr val="AFBDC0"/>
-                </a:solidFill>
-                <a:latin typeface="Noto Sans"/>
-              </a:defRPr>
-            </a:pPr>
-            <a:r>
-              <a:t>Спасение и обслуживаемые крепления.</a:t>
-            </a:r>
-          </a:p>
-        </p:txBody>
-      </p:sp>
-      <p:sp>
-        <p:nvSpPr>
-          <p:cNvPr id="35" name="Rectangle 34"/>
-          <p:cNvSpPr/>
-          <p:nvPr/>
-        </p:nvSpPr>
-        <p:spPr>
-          <a:xfrm>
-            <a:off x="658368" y="4544568"/>
-            <a:ext cx="6565392" cy="1627632"/>
-          </a:xfrm>
-          <a:prstGeom prst="rect">
-            <a:avLst/>
-          </a:prstGeom>
-          <a:solidFill>
-            <a:srgbClr val="1A2427"/>
-          </a:solidFill>
-          <a:ln>
-            <a:noFill/>
-          </a:ln>
-        </p:spPr>
-        <p:style>
-          <a:lnRef idx="1">
-            <a:schemeClr val="accent1"/>
-          </a:lnRef>
-          <a:fillRef idx="3">
-            <a:schemeClr val="accent1"/>
-          </a:fillRef>
-          <a:effectRef idx="2">
-            <a:schemeClr val="accent1"/>
-          </a:effectRef>
-          <a:fontRef idx="minor">
-            <a:schemeClr val="lt1"/>
-          </a:fontRef>
-        </p:style>
-        <p:txBody>
-          <a:bodyPr rtlCol="0" anchor="ctr"/>
-          <a:lstStyle/>
-          <a:p>
-            <a:pPr algn="ctr"/>
-          </a:p>
-        </p:txBody>
-      </p:sp>
-      <p:sp>
-        <p:nvSpPr>
-          <p:cNvPr id="36" name="Rectangle 35"/>
-          <p:cNvSpPr/>
-          <p:nvPr/>
-        </p:nvSpPr>
-        <p:spPr>
-          <a:xfrm>
-            <a:off x="658368" y="4544568"/>
-            <a:ext cx="36576" cy="1627632"/>
-          </a:xfrm>
-          <a:prstGeom prst="rect">
-            <a:avLst/>
-          </a:prstGeom>
-          <a:solidFill>
-            <a:srgbClr val="FF793F"/>
-          </a:solidFill>
-          <a:ln>
-            <a:noFill/>
-          </a:ln>
-        </p:spPr>
-        <p:style>
-          <a:lnRef idx="1">
-            <a:schemeClr val="accent1"/>
-          </a:lnRef>
-          <a:fillRef idx="3">
-            <a:schemeClr val="accent1"/>
-          </a:fillRef>
-          <a:effectRef idx="2">
-            <a:schemeClr val="accent1"/>
-          </a:effectRef>
-          <a:fontRef idx="minor">
-            <a:schemeClr val="lt1"/>
-          </a:fontRef>
-        </p:style>
-        <p:txBody>
-          <a:bodyPr rtlCol="0" anchor="ctr"/>
-          <a:lstStyle/>
-          <a:p>
-            <a:pPr algn="ctr"/>
-          </a:p>
-        </p:txBody>
-      </p:sp>
-      <p:sp>
-        <p:nvSpPr>
-          <p:cNvPr id="37" name="TextBox 36"/>
-          <p:cNvSpPr txBox="1"/>
-          <p:nvPr/>
-        </p:nvSpPr>
-        <p:spPr>
-          <a:xfrm>
-            <a:off x="905256" y="4882896"/>
-            <a:ext cx="868680" cy="868680"/>
-          </a:xfrm>
-          <a:prstGeom prst="rect">
-            <a:avLst/>
-          </a:prstGeom>
-          <a:noFill/>
-        </p:spPr>
-        <p:txBody>
-          <a:bodyPr wrap="square" lIns="0" rIns="0" tIns="0" bIns="0">
-            <a:spAutoFit/>
-          </a:bodyPr>
-          <a:lstStyle/>
-          <a:p>
-            <a:pPr>
-              <a:spcBef>
-                <a:spcPts val="0"/>
-              </a:spcBef>
-              <a:spcAft>
-                <a:spcPts val="900"/>
-              </a:spcAft>
-              <a:defRPr sz="4000" b="1">
-                <a:solidFill>
-                  <a:srgbClr val="FF793F"/>
-                </a:solidFill>
-                <a:latin typeface="Noto Sans"/>
-              </a:defRPr>
-            </a:pPr>
-            <a:r>
-              <a:t>03</a:t>
-            </a:r>
-          </a:p>
-        </p:txBody>
-      </p:sp>
-      <p:sp>
-        <p:nvSpPr>
-          <p:cNvPr id="38" name="TextBox 37"/>
-          <p:cNvSpPr txBox="1"/>
-          <p:nvPr/>
-        </p:nvSpPr>
-        <p:spPr>
-          <a:xfrm>
-            <a:off x="1938528" y="4818888"/>
-            <a:ext cx="4956048" cy="566928"/>
-          </a:xfrm>
-          <a:prstGeom prst="rect">
-            <a:avLst/>
-          </a:prstGeom>
-          <a:noFill/>
-        </p:spPr>
-        <p:txBody>
-          <a:bodyPr wrap="square" lIns="0" rIns="0" tIns="0" bIns="0">
-            <a:spAutoFit/>
-          </a:bodyPr>
-          <a:lstStyle/>
-          <a:p>
-            <a:pPr>
-              <a:spcBef>
-                <a:spcPts val="0"/>
-              </a:spcBef>
-              <a:spcAft>
-                <a:spcPts val="900"/>
-              </a:spcAft>
-              <a:defRPr sz="2300" b="1">
-                <a:solidFill>
-                  <a:srgbClr val="F4F1E9"/>
-                </a:solidFill>
-                <a:latin typeface="Noto Sans"/>
-              </a:defRPr>
-            </a:pPr>
-            <a:r>
-              <a:t>Бортовая система</a:t>
-            </a:r>
-          </a:p>
-        </p:txBody>
-      </p:sp>
-      <p:sp>
-        <p:nvSpPr>
-          <p:cNvPr id="39" name="TextBox 38"/>
-          <p:cNvSpPr txBox="1"/>
-          <p:nvPr/>
-        </p:nvSpPr>
-        <p:spPr>
-          <a:xfrm>
-            <a:off x="1938528" y="5449824"/>
-            <a:ext cx="4956048" cy="576072"/>
-          </a:xfrm>
-          <a:prstGeom prst="rect">
-            <a:avLst/>
-          </a:prstGeom>
-          <a:noFill/>
-        </p:spPr>
-        <p:txBody>
-          <a:bodyPr wrap="square" lIns="0" rIns="0" tIns="0" bIns="0">
-            <a:spAutoFit/>
-          </a:bodyPr>
-          <a:lstStyle/>
-          <a:p>
-            <a:pPr>
-              <a:spcBef>
-                <a:spcPts val="0"/>
-              </a:spcBef>
-              <a:spcAft>
-                <a:spcPts val="900"/>
-              </a:spcAft>
-              <a:defRPr sz="1800" b="0">
-                <a:solidFill>
-                  <a:srgbClr val="AFBDC0"/>
-                </a:solidFill>
-                <a:latin typeface="Noto Sans"/>
-              </a:defRPr>
-            </a:pPr>
-            <a:r>
-              <a:t>Измерения, запись, радио, самописец.</a:t>
-            </a:r>
-          </a:p>
-        </p:txBody>
-      </p:sp>
-      <p:sp>
-        <p:nvSpPr>
-          <p:cNvPr id="40" name="Rectangle 39"/>
-          <p:cNvSpPr/>
-          <p:nvPr/>
-        </p:nvSpPr>
-        <p:spPr>
-          <a:xfrm>
-            <a:off x="7452360" y="4544568"/>
-            <a:ext cx="6565392" cy="1627632"/>
-          </a:xfrm>
-          <a:prstGeom prst="rect">
-            <a:avLst/>
-          </a:prstGeom>
-          <a:solidFill>
-            <a:srgbClr val="1A2427"/>
-          </a:solidFill>
-          <a:ln>
-            <a:noFill/>
-          </a:ln>
-        </p:spPr>
-        <p:style>
-          <a:lnRef idx="1">
-            <a:schemeClr val="accent1"/>
-          </a:lnRef>
-          <a:fillRef idx="3">
-            <a:schemeClr val="accent1"/>
-          </a:fillRef>
-          <a:effectRef idx="2">
-            <a:schemeClr val="accent1"/>
-          </a:effectRef>
-          <a:fontRef idx="minor">
-            <a:schemeClr val="lt1"/>
-          </a:fontRef>
-        </p:style>
-        <p:txBody>
-          <a:bodyPr rtlCol="0" anchor="ctr"/>
-          <a:lstStyle/>
-          <a:p>
-            <a:pPr algn="ctr"/>
-          </a:p>
-        </p:txBody>
-      </p:sp>
-      <p:sp>
-        <p:nvSpPr>
-          <p:cNvPr id="41" name="Rectangle 40"/>
-          <p:cNvSpPr/>
-          <p:nvPr/>
-        </p:nvSpPr>
-        <p:spPr>
-          <a:xfrm>
-            <a:off x="7452360" y="4544568"/>
-            <a:ext cx="36576" cy="1627632"/>
-          </a:xfrm>
-          <a:prstGeom prst="rect">
-            <a:avLst/>
-          </a:prstGeom>
-          <a:solidFill>
-            <a:srgbClr val="FF793F"/>
-          </a:solidFill>
-          <a:ln>
-            <a:noFill/>
-          </a:ln>
-        </p:spPr>
-        <p:style>
-          <a:lnRef idx="1">
-            <a:schemeClr val="accent1"/>
-          </a:lnRef>
-          <a:fillRef idx="3">
-            <a:schemeClr val="accent1"/>
-          </a:fillRef>
-          <a:effectRef idx="2">
-            <a:schemeClr val="accent1"/>
-          </a:effectRef>
-          <a:fontRef idx="minor">
-            <a:schemeClr val="lt1"/>
-          </a:fontRef>
-        </p:style>
-        <p:txBody>
-          <a:bodyPr rtlCol="0" anchor="ctr"/>
-          <a:lstStyle/>
-          <a:p>
-            <a:pPr algn="ctr"/>
-          </a:p>
-        </p:txBody>
-      </p:sp>
-      <p:sp>
-        <p:nvSpPr>
-          <p:cNvPr id="42" name="TextBox 41"/>
-          <p:cNvSpPr txBox="1"/>
-          <p:nvPr/>
-        </p:nvSpPr>
-        <p:spPr>
-          <a:xfrm>
-            <a:off x="7699248" y="4882896"/>
-            <a:ext cx="868680" cy="868680"/>
-          </a:xfrm>
-          <a:prstGeom prst="rect">
-            <a:avLst/>
-          </a:prstGeom>
-          <a:noFill/>
-        </p:spPr>
-        <p:txBody>
-          <a:bodyPr wrap="square" lIns="0" rIns="0" tIns="0" bIns="0">
-            <a:spAutoFit/>
-          </a:bodyPr>
-          <a:lstStyle/>
-          <a:p>
-            <a:pPr>
-              <a:spcBef>
-                <a:spcPts val="0"/>
-              </a:spcBef>
-              <a:spcAft>
-                <a:spcPts val="900"/>
-              </a:spcAft>
-              <a:defRPr sz="4000" b="1">
-                <a:solidFill>
-                  <a:srgbClr val="FF793F"/>
-                </a:solidFill>
-                <a:latin typeface="Noto Sans"/>
-              </a:defRPr>
-            </a:pPr>
-            <a:r>
-              <a:t>04</a:t>
-            </a:r>
-          </a:p>
-        </p:txBody>
-      </p:sp>
-      <p:sp>
-        <p:nvSpPr>
-          <p:cNvPr id="43" name="TextBox 42"/>
-          <p:cNvSpPr txBox="1"/>
-          <p:nvPr/>
-        </p:nvSpPr>
-        <p:spPr>
-          <a:xfrm>
-            <a:off x="8732520" y="4818888"/>
-            <a:ext cx="4956048" cy="566928"/>
-          </a:xfrm>
-          <a:prstGeom prst="rect">
-            <a:avLst/>
-          </a:prstGeom>
-          <a:noFill/>
-        </p:spPr>
-        <p:txBody>
-          <a:bodyPr wrap="square" lIns="0" rIns="0" tIns="0" bIns="0">
-            <a:spAutoFit/>
-          </a:bodyPr>
-          <a:lstStyle/>
-          <a:p>
-            <a:pPr>
-              <a:spcBef>
-                <a:spcPts val="0"/>
-              </a:spcBef>
-              <a:spcAft>
-                <a:spcPts val="900"/>
-              </a:spcAft>
-              <a:defRPr sz="2300" b="1">
-                <a:solidFill>
-                  <a:srgbClr val="F4F1E9"/>
-                </a:solidFill>
-                <a:latin typeface="Noto Sans"/>
-              </a:defRPr>
-            </a:pPr>
-            <a:r>
-              <a:t>Двигательный модуль</a:t>
-            </a:r>
-          </a:p>
-        </p:txBody>
-      </p:sp>
-      <p:sp>
-        <p:nvSpPr>
-          <p:cNvPr id="44" name="TextBox 43"/>
-          <p:cNvSpPr txBox="1"/>
-          <p:nvPr/>
-        </p:nvSpPr>
-        <p:spPr>
-          <a:xfrm>
-            <a:off x="8732520" y="5449824"/>
-            <a:ext cx="4956048" cy="576072"/>
-          </a:xfrm>
-          <a:prstGeom prst="rect">
-            <a:avLst/>
-          </a:prstGeom>
-          <a:noFill/>
-        </p:spPr>
-        <p:txBody>
-          <a:bodyPr wrap="square" lIns="0" rIns="0" tIns="0" bIns="0">
-            <a:spAutoFit/>
-          </a:bodyPr>
-          <a:lstStyle/>
-          <a:p>
-            <a:pPr>
-              <a:spcBef>
-                <a:spcPts val="0"/>
-              </a:spcBef>
-              <a:spcAft>
-                <a:spcPts val="900"/>
-              </a:spcAft>
-              <a:defRPr sz="1800" b="0">
-                <a:solidFill>
-                  <a:srgbClr val="AFBDC0"/>
-                </a:solidFill>
-                <a:latin typeface="Noto Sans"/>
-              </a:defRPr>
-            </a:pPr>
-            <a:r>
-              <a:t>Справочный интерфейс Ø54 × 358 мм.</a:t>
-            </a:r>
-          </a:p>
-        </p:txBody>
-      </p:sp>
+      <p:pic>
+        <p:nvPicPr>
+          <p:cNvPr id="25" name="Picture 24" descr="or-flight.png"/>
+          <p:cNvPicPr>
+            <a:picLocks noChangeAspect="1"/>
+          </p:cNvPicPr>
+          <p:nvPr/>
+        </p:nvPicPr>
+        <p:blipFill>
+          <a:blip r:embed="rId3"/>
+          <a:stretch>
+            <a:fillRect/>
+          </a:stretch>
+        </p:blipFill>
+        <p:spPr>
+          <a:xfrm>
+            <a:off x="1447799" y="2395728"/>
+            <a:ext cx="11734800" cy="4526280"/>
+          </a:xfrm>
+          <a:prstGeom prst="rect">
+            <a:avLst/>
+          </a:prstGeom>
+        </p:spPr>
+      </p:pic>
     </p:spTree>
   </p:cSld>
   <p:clrMapOvr>

--- a/presentation/PLBP-SG1.pptx
+++ b/presentation/PLBP-SG1.pptx
@@ -21,6 +21,11 @@
     <p:sldId id="269" r:id="rId21"/>
     <p:sldId id="270" r:id="rId22"/>
     <p:sldId id="271" r:id="rId23"/>
+    <p:sldId id="272" r:id="rId24"/>
+    <p:sldId id="273" r:id="rId25"/>
+    <p:sldId id="274" r:id="rId26"/>
+    <p:sldId id="275" r:id="rId27"/>
+    <p:sldId id="276" r:id="rId28"/>
   </p:sldIdLst>
   <p:sldSz cx="14630400" cy="8229600" type="screen4x3"/>
   <p:notesSz cx="6858000" cy="9144000"/>
@@ -1000,7 +1005,337 @@
 </p:notes>
 </file>
 
+<file path=ppt/notesSlides/notesSlide17.xml><?xml version="1.0" encoding="utf-8"?>
+<p:notes xmlns:a="http://schemas.openxmlformats.org/drawingml/2006/main" xmlns:p="http://schemas.openxmlformats.org/presentationml/2006/main" xmlns:r="http://schemas.openxmlformats.org/officeDocument/2006/relationships">
+  <p:cSld>
+    <p:spTree>
+      <p:nvGrpSpPr>
+        <p:cNvPr id="1" name=""/>
+        <p:cNvGrpSpPr/>
+        <p:nvPr/>
+      </p:nvGrpSpPr>
+      <p:grpSpPr>
+        <a:xfrm>
+          <a:off x="0" y="0"/>
+          <a:ext cx="0" cy="0"/>
+          <a:chOff x="0" y="0"/>
+          <a:chExt cx="0" cy="0"/>
+        </a:xfrm>
+      </p:grpSpPr>
+      <p:sp>
+        <p:nvSpPr>
+          <p:cNvPr id="2" name="Slide Image Placeholder 1"/>
+          <p:cNvSpPr>
+            <a:spLocks noGrp="1"/>
+          </p:cNvSpPr>
+          <p:nvPr>
+            <p:ph type="sldImg" idx="2"/>
+          </p:nvPr>
+        </p:nvSpPr>
+        <p:spPr/>
+      </p:sp>
+      <p:sp>
+        <p:nvSpPr>
+          <p:cNvPr id="3" name="Notes Placeholder 2"/>
+          <p:cNvSpPr>
+            <a:spLocks noGrp="1"/>
+          </p:cNvSpPr>
+          <p:nvPr>
+            <p:ph type="body" idx="3" sz="quarter"/>
+          </p:nvPr>
+        </p:nvSpPr>
+        <p:spPr/>
+        <p:txBody>
+          <a:bodyPr/>
+          <a:lstStyle/>
+          <a:p/>
+        </p:txBody>
+      </p:sp>
+      <p:sp>
+        <p:nvSpPr>
+          <p:cNvPr id="4" name="Slide Number Placeholder 3"/>
+          <p:cNvSpPr>
+            <a:spLocks noGrp="1"/>
+          </p:cNvSpPr>
+          <p:nvPr>
+            <p:ph type="sldNum" idx="5" sz="quarter"/>
+          </p:nvPr>
+        </p:nvSpPr>
+        <p:spPr/>
+      </p:sp>
+    </p:spTree>
+  </p:cSld>
+  <p:clrMapOvr>
+    <a:masterClrMapping/>
+  </p:clrMapOvr>
+</p:notes>
+</file>
+
+<file path=ppt/notesSlides/notesSlide18.xml><?xml version="1.0" encoding="utf-8"?>
+<p:notes xmlns:a="http://schemas.openxmlformats.org/drawingml/2006/main" xmlns:p="http://schemas.openxmlformats.org/presentationml/2006/main" xmlns:r="http://schemas.openxmlformats.org/officeDocument/2006/relationships">
+  <p:cSld>
+    <p:spTree>
+      <p:nvGrpSpPr>
+        <p:cNvPr id="1" name=""/>
+        <p:cNvGrpSpPr/>
+        <p:nvPr/>
+      </p:nvGrpSpPr>
+      <p:grpSpPr>
+        <a:xfrm>
+          <a:off x="0" y="0"/>
+          <a:ext cx="0" cy="0"/>
+          <a:chOff x="0" y="0"/>
+          <a:chExt cx="0" cy="0"/>
+        </a:xfrm>
+      </p:grpSpPr>
+      <p:sp>
+        <p:nvSpPr>
+          <p:cNvPr id="2" name="Slide Image Placeholder 1"/>
+          <p:cNvSpPr>
+            <a:spLocks noGrp="1"/>
+          </p:cNvSpPr>
+          <p:nvPr>
+            <p:ph type="sldImg" idx="2"/>
+          </p:nvPr>
+        </p:nvSpPr>
+        <p:spPr/>
+      </p:sp>
+      <p:sp>
+        <p:nvSpPr>
+          <p:cNvPr id="3" name="Notes Placeholder 2"/>
+          <p:cNvSpPr>
+            <a:spLocks noGrp="1"/>
+          </p:cNvSpPr>
+          <p:nvPr>
+            <p:ph type="body" idx="3" sz="quarter"/>
+          </p:nvPr>
+        </p:nvSpPr>
+        <p:spPr/>
+        <p:txBody>
+          <a:bodyPr/>
+          <a:lstStyle/>
+          <a:p/>
+        </p:txBody>
+      </p:sp>
+      <p:sp>
+        <p:nvSpPr>
+          <p:cNvPr id="4" name="Slide Number Placeholder 3"/>
+          <p:cNvSpPr>
+            <a:spLocks noGrp="1"/>
+          </p:cNvSpPr>
+          <p:nvPr>
+            <p:ph type="sldNum" idx="5" sz="quarter"/>
+          </p:nvPr>
+        </p:nvSpPr>
+        <p:spPr/>
+      </p:sp>
+    </p:spTree>
+  </p:cSld>
+  <p:clrMapOvr>
+    <a:masterClrMapping/>
+  </p:clrMapOvr>
+</p:notes>
+</file>
+
+<file path=ppt/notesSlides/notesSlide19.xml><?xml version="1.0" encoding="utf-8"?>
+<p:notes xmlns:a="http://schemas.openxmlformats.org/drawingml/2006/main" xmlns:p="http://schemas.openxmlformats.org/presentationml/2006/main" xmlns:r="http://schemas.openxmlformats.org/officeDocument/2006/relationships">
+  <p:cSld>
+    <p:spTree>
+      <p:nvGrpSpPr>
+        <p:cNvPr id="1" name=""/>
+        <p:cNvGrpSpPr/>
+        <p:nvPr/>
+      </p:nvGrpSpPr>
+      <p:grpSpPr>
+        <a:xfrm>
+          <a:off x="0" y="0"/>
+          <a:ext cx="0" cy="0"/>
+          <a:chOff x="0" y="0"/>
+          <a:chExt cx="0" cy="0"/>
+        </a:xfrm>
+      </p:grpSpPr>
+      <p:sp>
+        <p:nvSpPr>
+          <p:cNvPr id="2" name="Slide Image Placeholder 1"/>
+          <p:cNvSpPr>
+            <a:spLocks noGrp="1"/>
+          </p:cNvSpPr>
+          <p:nvPr>
+            <p:ph type="sldImg" idx="2"/>
+          </p:nvPr>
+        </p:nvSpPr>
+        <p:spPr/>
+      </p:sp>
+      <p:sp>
+        <p:nvSpPr>
+          <p:cNvPr id="3" name="Notes Placeholder 2"/>
+          <p:cNvSpPr>
+            <a:spLocks noGrp="1"/>
+          </p:cNvSpPr>
+          <p:nvPr>
+            <p:ph type="body" idx="3" sz="quarter"/>
+          </p:nvPr>
+        </p:nvSpPr>
+        <p:spPr/>
+        <p:txBody>
+          <a:bodyPr/>
+          <a:lstStyle/>
+          <a:p/>
+        </p:txBody>
+      </p:sp>
+      <p:sp>
+        <p:nvSpPr>
+          <p:cNvPr id="4" name="Slide Number Placeholder 3"/>
+          <p:cNvSpPr>
+            <a:spLocks noGrp="1"/>
+          </p:cNvSpPr>
+          <p:nvPr>
+            <p:ph type="sldNum" idx="5" sz="quarter"/>
+          </p:nvPr>
+        </p:nvSpPr>
+        <p:spPr/>
+      </p:sp>
+    </p:spTree>
+  </p:cSld>
+  <p:clrMapOvr>
+    <a:masterClrMapping/>
+  </p:clrMapOvr>
+</p:notes>
+</file>
+
 <file path=ppt/notesSlides/notesSlide2.xml><?xml version="1.0" encoding="utf-8"?>
+<p:notes xmlns:a="http://schemas.openxmlformats.org/drawingml/2006/main" xmlns:p="http://schemas.openxmlformats.org/presentationml/2006/main" xmlns:r="http://schemas.openxmlformats.org/officeDocument/2006/relationships">
+  <p:cSld>
+    <p:spTree>
+      <p:nvGrpSpPr>
+        <p:cNvPr id="1" name=""/>
+        <p:cNvGrpSpPr/>
+        <p:nvPr/>
+      </p:nvGrpSpPr>
+      <p:grpSpPr>
+        <a:xfrm>
+          <a:off x="0" y="0"/>
+          <a:ext cx="0" cy="0"/>
+          <a:chOff x="0" y="0"/>
+          <a:chExt cx="0" cy="0"/>
+        </a:xfrm>
+      </p:grpSpPr>
+      <p:sp>
+        <p:nvSpPr>
+          <p:cNvPr id="2" name="Slide Image Placeholder 1"/>
+          <p:cNvSpPr>
+            <a:spLocks noGrp="1"/>
+          </p:cNvSpPr>
+          <p:nvPr>
+            <p:ph type="sldImg" idx="2"/>
+          </p:nvPr>
+        </p:nvSpPr>
+        <p:spPr/>
+      </p:sp>
+      <p:sp>
+        <p:nvSpPr>
+          <p:cNvPr id="3" name="Notes Placeholder 2"/>
+          <p:cNvSpPr>
+            <a:spLocks noGrp="1"/>
+          </p:cNvSpPr>
+          <p:nvPr>
+            <p:ph type="body" idx="3" sz="quarter"/>
+          </p:nvPr>
+        </p:nvSpPr>
+        <p:spPr/>
+        <p:txBody>
+          <a:bodyPr/>
+          <a:lstStyle/>
+          <a:p/>
+        </p:txBody>
+      </p:sp>
+      <p:sp>
+        <p:nvSpPr>
+          <p:cNvPr id="4" name="Slide Number Placeholder 3"/>
+          <p:cNvSpPr>
+            <a:spLocks noGrp="1"/>
+          </p:cNvSpPr>
+          <p:nvPr>
+            <p:ph type="sldNum" idx="5" sz="quarter"/>
+          </p:nvPr>
+        </p:nvSpPr>
+        <p:spPr/>
+      </p:sp>
+    </p:spTree>
+  </p:cSld>
+  <p:clrMapOvr>
+    <a:masterClrMapping/>
+  </p:clrMapOvr>
+</p:notes>
+</file>
+
+<file path=ppt/notesSlides/notesSlide20.xml><?xml version="1.0" encoding="utf-8"?>
+<p:notes xmlns:a="http://schemas.openxmlformats.org/drawingml/2006/main" xmlns:p="http://schemas.openxmlformats.org/presentationml/2006/main" xmlns:r="http://schemas.openxmlformats.org/officeDocument/2006/relationships">
+  <p:cSld>
+    <p:spTree>
+      <p:nvGrpSpPr>
+        <p:cNvPr id="1" name=""/>
+        <p:cNvGrpSpPr/>
+        <p:nvPr/>
+      </p:nvGrpSpPr>
+      <p:grpSpPr>
+        <a:xfrm>
+          <a:off x="0" y="0"/>
+          <a:ext cx="0" cy="0"/>
+          <a:chOff x="0" y="0"/>
+          <a:chExt cx="0" cy="0"/>
+        </a:xfrm>
+      </p:grpSpPr>
+      <p:sp>
+        <p:nvSpPr>
+          <p:cNvPr id="2" name="Slide Image Placeholder 1"/>
+          <p:cNvSpPr>
+            <a:spLocks noGrp="1"/>
+          </p:cNvSpPr>
+          <p:nvPr>
+            <p:ph type="sldImg" idx="2"/>
+          </p:nvPr>
+        </p:nvSpPr>
+        <p:spPr/>
+      </p:sp>
+      <p:sp>
+        <p:nvSpPr>
+          <p:cNvPr id="3" name="Notes Placeholder 2"/>
+          <p:cNvSpPr>
+            <a:spLocks noGrp="1"/>
+          </p:cNvSpPr>
+          <p:nvPr>
+            <p:ph type="body" idx="3" sz="quarter"/>
+          </p:nvPr>
+        </p:nvSpPr>
+        <p:spPr/>
+        <p:txBody>
+          <a:bodyPr/>
+          <a:lstStyle/>
+          <a:p/>
+        </p:txBody>
+      </p:sp>
+      <p:sp>
+        <p:nvSpPr>
+          <p:cNvPr id="4" name="Slide Number Placeholder 3"/>
+          <p:cNvSpPr>
+            <a:spLocks noGrp="1"/>
+          </p:cNvSpPr>
+          <p:nvPr>
+            <p:ph type="sldNum" idx="5" sz="quarter"/>
+          </p:nvPr>
+        </p:nvSpPr>
+        <p:spPr/>
+      </p:sp>
+    </p:spTree>
+  </p:cSld>
+  <p:clrMapOvr>
+    <a:masterClrMapping/>
+  </p:clrMapOvr>
+</p:notes>
+</file>
+
+<file path=ppt/notesSlides/notesSlide21.xml><?xml version="1.0" encoding="utf-8"?>
 <p:notes xmlns:a="http://schemas.openxmlformats.org/drawingml/2006/main" xmlns:p="http://schemas.openxmlformats.org/presentationml/2006/main" xmlns:r="http://schemas.openxmlformats.org/officeDocument/2006/relationships">
   <p:cSld>
     <p:spTree>
@@ -5411,7 +5746,7 @@
               </a:defRPr>
             </a:pPr>
             <a:r>
-              <a:t>01 / 16</a:t>
+              <a:t>01 / 21</a:t>
             </a:r>
           </a:p>
         </p:txBody>
@@ -5425,7 +5760,7 @@
         <p:spPr>
           <a:xfrm>
             <a:off x="0" y="8183879"/>
-            <a:ext cx="914400" cy="45720"/>
+            <a:ext cx="696685" cy="45720"/>
           </a:xfrm>
           <a:prstGeom prst="rect">
             <a:avLst/>
@@ -6847,7 +7182,7 @@
               </a:defRPr>
             </a:pPr>
             <a:r>
-              <a:t>10 / 16</a:t>
+              <a:t>10 / 21</a:t>
             </a:r>
           </a:p>
         </p:txBody>
@@ -6861,7 +7196,7 @@
         <p:spPr>
           <a:xfrm>
             <a:off x="0" y="8183879"/>
-            <a:ext cx="9144000" cy="45720"/>
+            <a:ext cx="6966857" cy="45720"/>
           </a:xfrm>
           <a:prstGeom prst="rect">
             <a:avLst/>
@@ -7881,7 +8216,7 @@
               </a:defRPr>
             </a:pPr>
             <a:r>
-              <a:t>11 / 16</a:t>
+              <a:t>11 / 21</a:t>
             </a:r>
           </a:p>
         </p:txBody>
@@ -7895,7 +8230,7 @@
         <p:spPr>
           <a:xfrm>
             <a:off x="0" y="8183879"/>
-            <a:ext cx="10058400" cy="45720"/>
+            <a:ext cx="7663542" cy="45720"/>
           </a:xfrm>
           <a:prstGeom prst="rect">
             <a:avLst/>
@@ -9401,7 +9736,7 @@
               </a:defRPr>
             </a:pPr>
             <a:r>
-              <a:t>12 / 16</a:t>
+              <a:t>12 / 21</a:t>
             </a:r>
           </a:p>
         </p:txBody>
@@ -9415,7 +9750,7 @@
         <p:spPr>
           <a:xfrm>
             <a:off x="0" y="8183879"/>
-            <a:ext cx="10972800" cy="45720"/>
+            <a:ext cx="8360228" cy="45720"/>
           </a:xfrm>
           <a:prstGeom prst="rect">
             <a:avLst/>
@@ -11259,7 +11594,7 @@
               </a:defRPr>
             </a:pPr>
             <a:r>
-              <a:t>13 / 16</a:t>
+              <a:t>13 / 21</a:t>
             </a:r>
           </a:p>
         </p:txBody>
@@ -11273,7 +11608,7 @@
         <p:spPr>
           <a:xfrm>
             <a:off x="0" y="8183879"/>
-            <a:ext cx="11887200" cy="45720"/>
+            <a:ext cx="9056914" cy="45720"/>
           </a:xfrm>
           <a:prstGeom prst="rect">
             <a:avLst/>
@@ -12693,7 +13028,7 @@
               </a:defRPr>
             </a:pPr>
             <a:r>
-              <a:t>14 / 16</a:t>
+              <a:t>14 / 21</a:t>
             </a:r>
           </a:p>
         </p:txBody>
@@ -12707,7 +13042,7 @@
         <p:spPr>
           <a:xfrm>
             <a:off x="0" y="8183879"/>
-            <a:ext cx="12801600" cy="45720"/>
+            <a:ext cx="9753600" cy="45720"/>
           </a:xfrm>
           <a:prstGeom prst="rect">
             <a:avLst/>
@@ -14213,7 +14548,7 @@
               </a:defRPr>
             </a:pPr>
             <a:r>
-              <a:t>15 / 16</a:t>
+              <a:t>15 / 21</a:t>
             </a:r>
           </a:p>
         </p:txBody>
@@ -14227,7 +14562,7 @@
         <p:spPr>
           <a:xfrm>
             <a:off x="0" y="8183879"/>
-            <a:ext cx="13716000" cy="45720"/>
+            <a:ext cx="10450285" cy="45720"/>
           </a:xfrm>
           <a:prstGeom prst="rect">
             <a:avLst/>
@@ -15347,7 +15682,7 @@
               </a:defRPr>
             </a:pPr>
             <a:r>
-              <a:t>ИСТОЧНИКИ</a:t>
+              <a:t>OR02 / E01 · ИССЛЕДОВАНИЕ</a:t>
             </a:r>
           </a:p>
         </p:txBody>
@@ -15474,7 +15809,7 @@
               </a:defRPr>
             </a:pPr>
             <a:r>
-              <a:t>Основания и допущения</a:t>
+              <a:t>Что влияет на расчётную высоту</a:t>
             </a:r>
           </a:p>
         </p:txBody>
@@ -15559,7 +15894,7 @@
               </a:defRPr>
             </a:pPr>
             <a:r>
-              <a:t>Официальные документы ВИШ и источники расчётных данных. Проверено 30.09.2026.</a:t>
+              <a:t>OR02: 15 тестовых случаев, включая базу. Диапазоны допущений не являются вероятностными границами.</a:t>
             </a:r>
           </a:p>
         </p:txBody>
@@ -15601,7 +15936,7 @@
               </a:defRPr>
             </a:pPr>
             <a:r>
-              <a:t>16 / 16</a:t>
+              <a:t>16 / 21</a:t>
             </a:r>
           </a:p>
         </p:txBody>
@@ -15615,7 +15950,7 @@
         <p:spPr>
           <a:xfrm>
             <a:off x="0" y="8183879"/>
-            <a:ext cx="14630400" cy="45720"/>
+            <a:ext cx="11146971" cy="45720"/>
           </a:xfrm>
           <a:prstGeom prst="rect">
             <a:avLst/>
@@ -15649,59 +15984,711 @@
           </a:p>
         </p:txBody>
       </p:sp>
-      <p:sp>
-        <p:nvSpPr>
-          <p:cNvPr id="25" name="Rectangle 24"/>
-          <p:cNvSpPr/>
-          <p:nvPr/>
-        </p:nvSpPr>
-        <p:spPr>
-          <a:xfrm>
-            <a:off x="658368" y="2743200"/>
-            <a:ext cx="4279392" cy="3474720"/>
-          </a:xfrm>
-          <a:prstGeom prst="rect">
-            <a:avLst/>
-          </a:prstGeom>
-          <a:solidFill>
-            <a:srgbClr val="1A2427"/>
-          </a:solidFill>
-          <a:ln>
-            <a:noFill/>
-          </a:ln>
-        </p:spPr>
-        <p:style>
-          <a:lnRef idx="1">
-            <a:schemeClr val="accent1"/>
-          </a:lnRef>
-          <a:fillRef idx="3">
-            <a:schemeClr val="accent1"/>
-          </a:fillRef>
-          <a:effectRef idx="2">
-            <a:schemeClr val="accent1"/>
-          </a:effectRef>
-          <a:fontRef idx="minor">
-            <a:schemeClr val="lt1"/>
-          </a:fontRef>
-        </p:style>
-        <p:txBody>
-          <a:bodyPr rtlCol="0" anchor="ctr"/>
-          <a:lstStyle/>
-          <a:p>
-            <a:pPr algn="ctr"/>
-          </a:p>
-        </p:txBody>
-      </p:sp>
-      <p:sp>
-        <p:nvSpPr>
-          <p:cNvPr id="26" name="TextBox 25"/>
+      <p:pic>
+        <p:nvPicPr>
+          <p:cNvPr id="25" name="Picture 24" descr="or02-sensitivity.png"/>
+          <p:cNvPicPr>
+            <a:picLocks noChangeAspect="1"/>
+          </p:cNvPicPr>
+          <p:nvPr/>
+        </p:nvPicPr>
+        <p:blipFill>
+          <a:blip r:embed="rId3"/>
+          <a:stretch>
+            <a:fillRect/>
+          </a:stretch>
+        </p:blipFill>
+        <p:spPr>
+          <a:xfrm>
+            <a:off x="2853581" y="2395728"/>
+            <a:ext cx="8923237" cy="4526280"/>
+          </a:xfrm>
+          <a:prstGeom prst="rect">
+            <a:avLst/>
+          </a:prstGeom>
+        </p:spPr>
+      </p:pic>
+    </p:spTree>
+  </p:cSld>
+  <p:clrMapOvr>
+    <a:masterClrMapping/>
+  </p:clrMapOvr>
+</p:sld>
+</file>
+
+<file path=ppt/slides/slide17.xml><?xml version="1.0" encoding="utf-8"?>
+<p:sld xmlns:a="http://schemas.openxmlformats.org/drawingml/2006/main" xmlns:p="http://schemas.openxmlformats.org/presentationml/2006/main" xmlns:r="http://schemas.openxmlformats.org/officeDocument/2006/relationships">
+  <p:cSld>
+    <p:bg>
+      <p:bgPr>
+        <a:solidFill>
+          <a:srgbClr val="101719"/>
+        </a:solidFill>
+        <a:effectLst/>
+      </p:bgPr>
+    </p:bg>
+    <p:spTree>
+      <p:nvGrpSpPr>
+        <p:cNvPr id="1" name=""/>
+        <p:cNvGrpSpPr/>
+        <p:nvPr/>
+      </p:nvGrpSpPr>
+      <p:grpSpPr/>
+      <p:sp>
+        <p:nvSpPr>
+          <p:cNvPr id="2" name="Rectangle 1"/>
+          <p:cNvSpPr/>
+          <p:nvPr/>
+        </p:nvSpPr>
+        <p:spPr>
+          <a:xfrm>
+            <a:off x="914400" y="0"/>
+            <a:ext cx="5486" cy="8229600"/>
+          </a:xfrm>
+          <a:prstGeom prst="rect">
+            <a:avLst/>
+          </a:prstGeom>
+          <a:solidFill>
+            <a:srgbClr val="182124"/>
+          </a:solidFill>
+          <a:ln>
+            <a:noFill/>
+          </a:ln>
+        </p:spPr>
+        <p:style>
+          <a:lnRef idx="1">
+            <a:schemeClr val="accent1"/>
+          </a:lnRef>
+          <a:fillRef idx="3">
+            <a:schemeClr val="accent1"/>
+          </a:fillRef>
+          <a:effectRef idx="2">
+            <a:schemeClr val="accent1"/>
+          </a:effectRef>
+          <a:fontRef idx="minor">
+            <a:schemeClr val="lt1"/>
+          </a:fontRef>
+        </p:style>
+        <p:txBody>
+          <a:bodyPr rtlCol="0" anchor="ctr"/>
+          <a:lstStyle/>
+          <a:p>
+            <a:pPr algn="ctr"/>
+          </a:p>
+        </p:txBody>
+      </p:sp>
+      <p:sp>
+        <p:nvSpPr>
+          <p:cNvPr id="3" name="Rectangle 2"/>
+          <p:cNvSpPr/>
+          <p:nvPr/>
+        </p:nvSpPr>
+        <p:spPr>
+          <a:xfrm>
+            <a:off x="1828800" y="0"/>
+            <a:ext cx="5486" cy="8229600"/>
+          </a:xfrm>
+          <a:prstGeom prst="rect">
+            <a:avLst/>
+          </a:prstGeom>
+          <a:solidFill>
+            <a:srgbClr val="182124"/>
+          </a:solidFill>
+          <a:ln>
+            <a:noFill/>
+          </a:ln>
+        </p:spPr>
+        <p:style>
+          <a:lnRef idx="1">
+            <a:schemeClr val="accent1"/>
+          </a:lnRef>
+          <a:fillRef idx="3">
+            <a:schemeClr val="accent1"/>
+          </a:fillRef>
+          <a:effectRef idx="2">
+            <a:schemeClr val="accent1"/>
+          </a:effectRef>
+          <a:fontRef idx="minor">
+            <a:schemeClr val="lt1"/>
+          </a:fontRef>
+        </p:style>
+        <p:txBody>
+          <a:bodyPr rtlCol="0" anchor="ctr"/>
+          <a:lstStyle/>
+          <a:p>
+            <a:pPr algn="ctr"/>
+          </a:p>
+        </p:txBody>
+      </p:sp>
+      <p:sp>
+        <p:nvSpPr>
+          <p:cNvPr id="4" name="Rectangle 3"/>
+          <p:cNvSpPr/>
+          <p:nvPr/>
+        </p:nvSpPr>
+        <p:spPr>
+          <a:xfrm>
+            <a:off x="2743200" y="0"/>
+            <a:ext cx="5486" cy="8229600"/>
+          </a:xfrm>
+          <a:prstGeom prst="rect">
+            <a:avLst/>
+          </a:prstGeom>
+          <a:solidFill>
+            <a:srgbClr val="182124"/>
+          </a:solidFill>
+          <a:ln>
+            <a:noFill/>
+          </a:ln>
+        </p:spPr>
+        <p:style>
+          <a:lnRef idx="1">
+            <a:schemeClr val="accent1"/>
+          </a:lnRef>
+          <a:fillRef idx="3">
+            <a:schemeClr val="accent1"/>
+          </a:fillRef>
+          <a:effectRef idx="2">
+            <a:schemeClr val="accent1"/>
+          </a:effectRef>
+          <a:fontRef idx="minor">
+            <a:schemeClr val="lt1"/>
+          </a:fontRef>
+        </p:style>
+        <p:txBody>
+          <a:bodyPr rtlCol="0" anchor="ctr"/>
+          <a:lstStyle/>
+          <a:p>
+            <a:pPr algn="ctr"/>
+          </a:p>
+        </p:txBody>
+      </p:sp>
+      <p:sp>
+        <p:nvSpPr>
+          <p:cNvPr id="5" name="Rectangle 4"/>
+          <p:cNvSpPr/>
+          <p:nvPr/>
+        </p:nvSpPr>
+        <p:spPr>
+          <a:xfrm>
+            <a:off x="3657600" y="0"/>
+            <a:ext cx="5486" cy="8229600"/>
+          </a:xfrm>
+          <a:prstGeom prst="rect">
+            <a:avLst/>
+          </a:prstGeom>
+          <a:solidFill>
+            <a:srgbClr val="182124"/>
+          </a:solidFill>
+          <a:ln>
+            <a:noFill/>
+          </a:ln>
+        </p:spPr>
+        <p:style>
+          <a:lnRef idx="1">
+            <a:schemeClr val="accent1"/>
+          </a:lnRef>
+          <a:fillRef idx="3">
+            <a:schemeClr val="accent1"/>
+          </a:fillRef>
+          <a:effectRef idx="2">
+            <a:schemeClr val="accent1"/>
+          </a:effectRef>
+          <a:fontRef idx="minor">
+            <a:schemeClr val="lt1"/>
+          </a:fontRef>
+        </p:style>
+        <p:txBody>
+          <a:bodyPr rtlCol="0" anchor="ctr"/>
+          <a:lstStyle/>
+          <a:p>
+            <a:pPr algn="ctr"/>
+          </a:p>
+        </p:txBody>
+      </p:sp>
+      <p:sp>
+        <p:nvSpPr>
+          <p:cNvPr id="6" name="Rectangle 5"/>
+          <p:cNvSpPr/>
+          <p:nvPr/>
+        </p:nvSpPr>
+        <p:spPr>
+          <a:xfrm>
+            <a:off x="4572000" y="0"/>
+            <a:ext cx="5486" cy="8229600"/>
+          </a:xfrm>
+          <a:prstGeom prst="rect">
+            <a:avLst/>
+          </a:prstGeom>
+          <a:solidFill>
+            <a:srgbClr val="182124"/>
+          </a:solidFill>
+          <a:ln>
+            <a:noFill/>
+          </a:ln>
+        </p:spPr>
+        <p:style>
+          <a:lnRef idx="1">
+            <a:schemeClr val="accent1"/>
+          </a:lnRef>
+          <a:fillRef idx="3">
+            <a:schemeClr val="accent1"/>
+          </a:fillRef>
+          <a:effectRef idx="2">
+            <a:schemeClr val="accent1"/>
+          </a:effectRef>
+          <a:fontRef idx="minor">
+            <a:schemeClr val="lt1"/>
+          </a:fontRef>
+        </p:style>
+        <p:txBody>
+          <a:bodyPr rtlCol="0" anchor="ctr"/>
+          <a:lstStyle/>
+          <a:p>
+            <a:pPr algn="ctr"/>
+          </a:p>
+        </p:txBody>
+      </p:sp>
+      <p:sp>
+        <p:nvSpPr>
+          <p:cNvPr id="7" name="Rectangle 6"/>
+          <p:cNvSpPr/>
+          <p:nvPr/>
+        </p:nvSpPr>
+        <p:spPr>
+          <a:xfrm>
+            <a:off x="5486400" y="0"/>
+            <a:ext cx="5486" cy="8229600"/>
+          </a:xfrm>
+          <a:prstGeom prst="rect">
+            <a:avLst/>
+          </a:prstGeom>
+          <a:solidFill>
+            <a:srgbClr val="182124"/>
+          </a:solidFill>
+          <a:ln>
+            <a:noFill/>
+          </a:ln>
+        </p:spPr>
+        <p:style>
+          <a:lnRef idx="1">
+            <a:schemeClr val="accent1"/>
+          </a:lnRef>
+          <a:fillRef idx="3">
+            <a:schemeClr val="accent1"/>
+          </a:fillRef>
+          <a:effectRef idx="2">
+            <a:schemeClr val="accent1"/>
+          </a:effectRef>
+          <a:fontRef idx="minor">
+            <a:schemeClr val="lt1"/>
+          </a:fontRef>
+        </p:style>
+        <p:txBody>
+          <a:bodyPr rtlCol="0" anchor="ctr"/>
+          <a:lstStyle/>
+          <a:p>
+            <a:pPr algn="ctr"/>
+          </a:p>
+        </p:txBody>
+      </p:sp>
+      <p:sp>
+        <p:nvSpPr>
+          <p:cNvPr id="8" name="Rectangle 7"/>
+          <p:cNvSpPr/>
+          <p:nvPr/>
+        </p:nvSpPr>
+        <p:spPr>
+          <a:xfrm>
+            <a:off x="6400800" y="0"/>
+            <a:ext cx="5486" cy="8229600"/>
+          </a:xfrm>
+          <a:prstGeom prst="rect">
+            <a:avLst/>
+          </a:prstGeom>
+          <a:solidFill>
+            <a:srgbClr val="182124"/>
+          </a:solidFill>
+          <a:ln>
+            <a:noFill/>
+          </a:ln>
+        </p:spPr>
+        <p:style>
+          <a:lnRef idx="1">
+            <a:schemeClr val="accent1"/>
+          </a:lnRef>
+          <a:fillRef idx="3">
+            <a:schemeClr val="accent1"/>
+          </a:fillRef>
+          <a:effectRef idx="2">
+            <a:schemeClr val="accent1"/>
+          </a:effectRef>
+          <a:fontRef idx="minor">
+            <a:schemeClr val="lt1"/>
+          </a:fontRef>
+        </p:style>
+        <p:txBody>
+          <a:bodyPr rtlCol="0" anchor="ctr"/>
+          <a:lstStyle/>
+          <a:p>
+            <a:pPr algn="ctr"/>
+          </a:p>
+        </p:txBody>
+      </p:sp>
+      <p:sp>
+        <p:nvSpPr>
+          <p:cNvPr id="9" name="Rectangle 8"/>
+          <p:cNvSpPr/>
+          <p:nvPr/>
+        </p:nvSpPr>
+        <p:spPr>
+          <a:xfrm>
+            <a:off x="7315200" y="0"/>
+            <a:ext cx="5486" cy="8229600"/>
+          </a:xfrm>
+          <a:prstGeom prst="rect">
+            <a:avLst/>
+          </a:prstGeom>
+          <a:solidFill>
+            <a:srgbClr val="182124"/>
+          </a:solidFill>
+          <a:ln>
+            <a:noFill/>
+          </a:ln>
+        </p:spPr>
+        <p:style>
+          <a:lnRef idx="1">
+            <a:schemeClr val="accent1"/>
+          </a:lnRef>
+          <a:fillRef idx="3">
+            <a:schemeClr val="accent1"/>
+          </a:fillRef>
+          <a:effectRef idx="2">
+            <a:schemeClr val="accent1"/>
+          </a:effectRef>
+          <a:fontRef idx="minor">
+            <a:schemeClr val="lt1"/>
+          </a:fontRef>
+        </p:style>
+        <p:txBody>
+          <a:bodyPr rtlCol="0" anchor="ctr"/>
+          <a:lstStyle/>
+          <a:p>
+            <a:pPr algn="ctr"/>
+          </a:p>
+        </p:txBody>
+      </p:sp>
+      <p:sp>
+        <p:nvSpPr>
+          <p:cNvPr id="10" name="Rectangle 9"/>
+          <p:cNvSpPr/>
+          <p:nvPr/>
+        </p:nvSpPr>
+        <p:spPr>
+          <a:xfrm>
+            <a:off x="8229600" y="0"/>
+            <a:ext cx="5486" cy="8229600"/>
+          </a:xfrm>
+          <a:prstGeom prst="rect">
+            <a:avLst/>
+          </a:prstGeom>
+          <a:solidFill>
+            <a:srgbClr val="182124"/>
+          </a:solidFill>
+          <a:ln>
+            <a:noFill/>
+          </a:ln>
+        </p:spPr>
+        <p:style>
+          <a:lnRef idx="1">
+            <a:schemeClr val="accent1"/>
+          </a:lnRef>
+          <a:fillRef idx="3">
+            <a:schemeClr val="accent1"/>
+          </a:fillRef>
+          <a:effectRef idx="2">
+            <a:schemeClr val="accent1"/>
+          </a:effectRef>
+          <a:fontRef idx="minor">
+            <a:schemeClr val="lt1"/>
+          </a:fontRef>
+        </p:style>
+        <p:txBody>
+          <a:bodyPr rtlCol="0" anchor="ctr"/>
+          <a:lstStyle/>
+          <a:p>
+            <a:pPr algn="ctr"/>
+          </a:p>
+        </p:txBody>
+      </p:sp>
+      <p:sp>
+        <p:nvSpPr>
+          <p:cNvPr id="11" name="Rectangle 10"/>
+          <p:cNvSpPr/>
+          <p:nvPr/>
+        </p:nvSpPr>
+        <p:spPr>
+          <a:xfrm>
+            <a:off x="9144000" y="0"/>
+            <a:ext cx="5486" cy="8229600"/>
+          </a:xfrm>
+          <a:prstGeom prst="rect">
+            <a:avLst/>
+          </a:prstGeom>
+          <a:solidFill>
+            <a:srgbClr val="182124"/>
+          </a:solidFill>
+          <a:ln>
+            <a:noFill/>
+          </a:ln>
+        </p:spPr>
+        <p:style>
+          <a:lnRef idx="1">
+            <a:schemeClr val="accent1"/>
+          </a:lnRef>
+          <a:fillRef idx="3">
+            <a:schemeClr val="accent1"/>
+          </a:fillRef>
+          <a:effectRef idx="2">
+            <a:schemeClr val="accent1"/>
+          </a:effectRef>
+          <a:fontRef idx="minor">
+            <a:schemeClr val="lt1"/>
+          </a:fontRef>
+        </p:style>
+        <p:txBody>
+          <a:bodyPr rtlCol="0" anchor="ctr"/>
+          <a:lstStyle/>
+          <a:p>
+            <a:pPr algn="ctr"/>
+          </a:p>
+        </p:txBody>
+      </p:sp>
+      <p:sp>
+        <p:nvSpPr>
+          <p:cNvPr id="12" name="Rectangle 11"/>
+          <p:cNvSpPr/>
+          <p:nvPr/>
+        </p:nvSpPr>
+        <p:spPr>
+          <a:xfrm>
+            <a:off x="10058400" y="0"/>
+            <a:ext cx="5486" cy="8229600"/>
+          </a:xfrm>
+          <a:prstGeom prst="rect">
+            <a:avLst/>
+          </a:prstGeom>
+          <a:solidFill>
+            <a:srgbClr val="182124"/>
+          </a:solidFill>
+          <a:ln>
+            <a:noFill/>
+          </a:ln>
+        </p:spPr>
+        <p:style>
+          <a:lnRef idx="1">
+            <a:schemeClr val="accent1"/>
+          </a:lnRef>
+          <a:fillRef idx="3">
+            <a:schemeClr val="accent1"/>
+          </a:fillRef>
+          <a:effectRef idx="2">
+            <a:schemeClr val="accent1"/>
+          </a:effectRef>
+          <a:fontRef idx="minor">
+            <a:schemeClr val="lt1"/>
+          </a:fontRef>
+        </p:style>
+        <p:txBody>
+          <a:bodyPr rtlCol="0" anchor="ctr"/>
+          <a:lstStyle/>
+          <a:p>
+            <a:pPr algn="ctr"/>
+          </a:p>
+        </p:txBody>
+      </p:sp>
+      <p:sp>
+        <p:nvSpPr>
+          <p:cNvPr id="13" name="Rectangle 12"/>
+          <p:cNvSpPr/>
+          <p:nvPr/>
+        </p:nvSpPr>
+        <p:spPr>
+          <a:xfrm>
+            <a:off x="10972800" y="0"/>
+            <a:ext cx="5486" cy="8229600"/>
+          </a:xfrm>
+          <a:prstGeom prst="rect">
+            <a:avLst/>
+          </a:prstGeom>
+          <a:solidFill>
+            <a:srgbClr val="182124"/>
+          </a:solidFill>
+          <a:ln>
+            <a:noFill/>
+          </a:ln>
+        </p:spPr>
+        <p:style>
+          <a:lnRef idx="1">
+            <a:schemeClr val="accent1"/>
+          </a:lnRef>
+          <a:fillRef idx="3">
+            <a:schemeClr val="accent1"/>
+          </a:fillRef>
+          <a:effectRef idx="2">
+            <a:schemeClr val="accent1"/>
+          </a:effectRef>
+          <a:fontRef idx="minor">
+            <a:schemeClr val="lt1"/>
+          </a:fontRef>
+        </p:style>
+        <p:txBody>
+          <a:bodyPr rtlCol="0" anchor="ctr"/>
+          <a:lstStyle/>
+          <a:p>
+            <a:pPr algn="ctr"/>
+          </a:p>
+        </p:txBody>
+      </p:sp>
+      <p:sp>
+        <p:nvSpPr>
+          <p:cNvPr id="14" name="Rectangle 13"/>
+          <p:cNvSpPr/>
+          <p:nvPr/>
+        </p:nvSpPr>
+        <p:spPr>
+          <a:xfrm>
+            <a:off x="11887200" y="0"/>
+            <a:ext cx="5486" cy="8229600"/>
+          </a:xfrm>
+          <a:prstGeom prst="rect">
+            <a:avLst/>
+          </a:prstGeom>
+          <a:solidFill>
+            <a:srgbClr val="182124"/>
+          </a:solidFill>
+          <a:ln>
+            <a:noFill/>
+          </a:ln>
+        </p:spPr>
+        <p:style>
+          <a:lnRef idx="1">
+            <a:schemeClr val="accent1"/>
+          </a:lnRef>
+          <a:fillRef idx="3">
+            <a:schemeClr val="accent1"/>
+          </a:fillRef>
+          <a:effectRef idx="2">
+            <a:schemeClr val="accent1"/>
+          </a:effectRef>
+          <a:fontRef idx="minor">
+            <a:schemeClr val="lt1"/>
+          </a:fontRef>
+        </p:style>
+        <p:txBody>
+          <a:bodyPr rtlCol="0" anchor="ctr"/>
+          <a:lstStyle/>
+          <a:p>
+            <a:pPr algn="ctr"/>
+          </a:p>
+        </p:txBody>
+      </p:sp>
+      <p:sp>
+        <p:nvSpPr>
+          <p:cNvPr id="15" name="Rectangle 14"/>
+          <p:cNvSpPr/>
+          <p:nvPr/>
+        </p:nvSpPr>
+        <p:spPr>
+          <a:xfrm>
+            <a:off x="12801600" y="0"/>
+            <a:ext cx="5486" cy="8229600"/>
+          </a:xfrm>
+          <a:prstGeom prst="rect">
+            <a:avLst/>
+          </a:prstGeom>
+          <a:solidFill>
+            <a:srgbClr val="182124"/>
+          </a:solidFill>
+          <a:ln>
+            <a:noFill/>
+          </a:ln>
+        </p:spPr>
+        <p:style>
+          <a:lnRef idx="1">
+            <a:schemeClr val="accent1"/>
+          </a:lnRef>
+          <a:fillRef idx="3">
+            <a:schemeClr val="accent1"/>
+          </a:fillRef>
+          <a:effectRef idx="2">
+            <a:schemeClr val="accent1"/>
+          </a:effectRef>
+          <a:fontRef idx="minor">
+            <a:schemeClr val="lt1"/>
+          </a:fontRef>
+        </p:style>
+        <p:txBody>
+          <a:bodyPr rtlCol="0" anchor="ctr"/>
+          <a:lstStyle/>
+          <a:p>
+            <a:pPr algn="ctr"/>
+          </a:p>
+        </p:txBody>
+      </p:sp>
+      <p:sp>
+        <p:nvSpPr>
+          <p:cNvPr id="16" name="Rectangle 15"/>
+          <p:cNvSpPr/>
+          <p:nvPr/>
+        </p:nvSpPr>
+        <p:spPr>
+          <a:xfrm>
+            <a:off x="13716000" y="0"/>
+            <a:ext cx="5486" cy="8229600"/>
+          </a:xfrm>
+          <a:prstGeom prst="rect">
+            <a:avLst/>
+          </a:prstGeom>
+          <a:solidFill>
+            <a:srgbClr val="182124"/>
+          </a:solidFill>
+          <a:ln>
+            <a:noFill/>
+          </a:ln>
+        </p:spPr>
+        <p:style>
+          <a:lnRef idx="1">
+            <a:schemeClr val="accent1"/>
+          </a:lnRef>
+          <a:fillRef idx="3">
+            <a:schemeClr val="accent1"/>
+          </a:fillRef>
+          <a:effectRef idx="2">
+            <a:schemeClr val="accent1"/>
+          </a:effectRef>
+          <a:fontRef idx="minor">
+            <a:schemeClr val="lt1"/>
+          </a:fontRef>
+        </p:style>
+        <p:txBody>
+          <a:bodyPr rtlCol="0" anchor="ctr"/>
+          <a:lstStyle/>
+          <a:p>
+            <a:pPr algn="ctr"/>
+          </a:p>
+        </p:txBody>
+      </p:sp>
+      <p:sp>
+        <p:nvSpPr>
+          <p:cNvPr id="17" name="TextBox 16"/>
           <p:cNvSpPr txBox="1"/>
           <p:nvPr/>
         </p:nvSpPr>
         <p:spPr>
           <a:xfrm>
-            <a:off x="886968" y="3017520"/>
-            <a:ext cx="3822191" cy="914400"/>
+            <a:off x="658368" y="393192"/>
+            <a:ext cx="10972800" cy="274320"/>
           </a:xfrm>
           <a:prstGeom prst="rect">
             <a:avLst/>
@@ -15721,7 +16708,134 @@
               <a:spcAft>
                 <a:spcPts val="900"/>
               </a:spcAft>
-              <a:defRPr sz="2500" b="1">
+              <a:defRPr sz="1100" b="0">
+                <a:solidFill>
+                  <a:srgbClr val="AFBDC0"/>
+                </a:solidFill>
+                <a:latin typeface="Noto Sans"/>
+              </a:defRPr>
+            </a:pPr>
+            <a:r>
+              <a:t>OR02 / E01 · ИССЛЕДОВАНИЕ</a:t>
+            </a:r>
+          </a:p>
+        </p:txBody>
+      </p:sp>
+      <p:sp>
+        <p:nvSpPr>
+          <p:cNvPr id="18" name="TextBox 17"/>
+          <p:cNvSpPr txBox="1"/>
+          <p:nvPr/>
+        </p:nvSpPr>
+        <p:spPr>
+          <a:xfrm>
+            <a:off x="12390120" y="393192"/>
+            <a:ext cx="1828800" cy="274320"/>
+          </a:xfrm>
+          <a:prstGeom prst="rect">
+            <a:avLst/>
+          </a:prstGeom>
+          <a:noFill/>
+        </p:spPr>
+        <p:txBody>
+          <a:bodyPr wrap="square" lIns="0" rIns="0" tIns="0" bIns="0">
+            <a:spAutoFit/>
+          </a:bodyPr>
+          <a:lstStyle/>
+          <a:p>
+            <a:pPr>
+              <a:spcBef>
+                <a:spcPts val="0"/>
+              </a:spcBef>
+              <a:spcAft>
+                <a:spcPts val="900"/>
+              </a:spcAft>
+              <a:defRPr sz="1100" b="1">
+                <a:solidFill>
+                  <a:srgbClr val="FF793F"/>
+                </a:solidFill>
+                <a:latin typeface="Noto Sans"/>
+              </a:defRPr>
+            </a:pPr>
+            <a:r>
+              <a:t>PLBP / SG1</a:t>
+            </a:r>
+          </a:p>
+        </p:txBody>
+      </p:sp>
+      <p:sp>
+        <p:nvSpPr>
+          <p:cNvPr id="19" name="Rectangle 18"/>
+          <p:cNvSpPr/>
+          <p:nvPr/>
+        </p:nvSpPr>
+        <p:spPr>
+          <a:xfrm>
+            <a:off x="658368" y="914400"/>
+            <a:ext cx="13313664" cy="10972"/>
+          </a:xfrm>
+          <a:prstGeom prst="rect">
+            <a:avLst/>
+          </a:prstGeom>
+          <a:solidFill>
+            <a:srgbClr val="354347"/>
+          </a:solidFill>
+          <a:ln>
+            <a:noFill/>
+          </a:ln>
+        </p:spPr>
+        <p:style>
+          <a:lnRef idx="1">
+            <a:schemeClr val="accent1"/>
+          </a:lnRef>
+          <a:fillRef idx="3">
+            <a:schemeClr val="accent1"/>
+          </a:fillRef>
+          <a:effectRef idx="2">
+            <a:schemeClr val="accent1"/>
+          </a:effectRef>
+          <a:fontRef idx="minor">
+            <a:schemeClr val="lt1"/>
+          </a:fontRef>
+        </p:style>
+        <p:txBody>
+          <a:bodyPr rtlCol="0" anchor="ctr"/>
+          <a:lstStyle/>
+          <a:p>
+            <a:pPr algn="ctr"/>
+          </a:p>
+        </p:txBody>
+      </p:sp>
+      <p:sp>
+        <p:nvSpPr>
+          <p:cNvPr id="20" name="TextBox 19"/>
+          <p:cNvSpPr txBox="1"/>
+          <p:nvPr/>
+        </p:nvSpPr>
+        <p:spPr>
+          <a:xfrm>
+            <a:off x="658368" y="1243584"/>
+            <a:ext cx="13213080" cy="1097280"/>
+          </a:xfrm>
+          <a:prstGeom prst="rect">
+            <a:avLst/>
+          </a:prstGeom>
+          <a:noFill/>
+        </p:spPr>
+        <p:txBody>
+          <a:bodyPr wrap="square" lIns="0" rIns="0" tIns="0" bIns="0">
+            <a:spAutoFit/>
+          </a:bodyPr>
+          <a:lstStyle/>
+          <a:p>
+            <a:pPr>
+              <a:spcBef>
+                <a:spcPts val="0"/>
+              </a:spcBef>
+              <a:spcAft>
+                <a:spcPts val="900"/>
+              </a:spcAft>
+              <a:defRPr sz="3700" b="1">
                 <a:solidFill>
                   <a:srgbClr val="F4F1E9"/>
                 </a:solidFill>
@@ -15729,63 +16843,64 @@
               </a:defRPr>
             </a:pPr>
             <a:r>
-              <a:t>ВИШ</a:t>
+              <a:t>Вариант креплений E01</a:t>
             </a:r>
           </a:p>
         </p:txBody>
       </p:sp>
       <p:sp>
         <p:nvSpPr>
-          <p:cNvPr id="27" name="TextBox 26"/>
+          <p:cNvPr id="21" name="Rectangle 20"/>
+          <p:cNvSpPr/>
+          <p:nvPr/>
+        </p:nvSpPr>
+        <p:spPr>
+          <a:xfrm>
+            <a:off x="658368" y="7159752"/>
+            <a:ext cx="13313664" cy="10972"/>
+          </a:xfrm>
+          <a:prstGeom prst="rect">
+            <a:avLst/>
+          </a:prstGeom>
+          <a:solidFill>
+            <a:srgbClr val="354347"/>
+          </a:solidFill>
+          <a:ln>
+            <a:noFill/>
+          </a:ln>
+        </p:spPr>
+        <p:style>
+          <a:lnRef idx="1">
+            <a:schemeClr val="accent1"/>
+          </a:lnRef>
+          <a:fillRef idx="3">
+            <a:schemeClr val="accent1"/>
+          </a:fillRef>
+          <a:effectRef idx="2">
+            <a:schemeClr val="accent1"/>
+          </a:effectRef>
+          <a:fontRef idx="minor">
+            <a:schemeClr val="lt1"/>
+          </a:fontRef>
+        </p:style>
+        <p:txBody>
+          <a:bodyPr rtlCol="0" anchor="ctr"/>
+          <a:lstStyle/>
+          <a:p>
+            <a:pPr algn="ctr"/>
+          </a:p>
+        </p:txBody>
+      </p:sp>
+      <p:sp>
+        <p:nvSpPr>
+          <p:cNvPr id="22" name="TextBox 21"/>
           <p:cNvSpPr txBox="1"/>
           <p:nvPr/>
         </p:nvSpPr>
         <p:spPr>
           <a:xfrm>
-            <a:off x="886968" y="4133087"/>
-            <a:ext cx="3822191" cy="1097280"/>
-          </a:xfrm>
-          <a:prstGeom prst="rect">
-            <a:avLst/>
-          </a:prstGeom>
-          <a:noFill/>
-        </p:spPr>
-        <p:txBody>
-          <a:bodyPr wrap="square" lIns="0" rIns="0" tIns="0" bIns="0">
-            <a:spAutoFit/>
-          </a:bodyPr>
-          <a:lstStyle/>
-          <a:p>
-            <a:pPr>
-              <a:spcBef>
-                <a:spcPts val="0"/>
-              </a:spcBef>
-              <a:spcAft>
-                <a:spcPts val="900"/>
-              </a:spcAft>
-              <a:defRPr sz="1900" b="0">
-                <a:solidFill>
-                  <a:srgbClr val="AFBDC0"/>
-                </a:solidFill>
-                <a:latin typeface="Noto Sans"/>
-              </a:defRPr>
-            </a:pPr>
-            <a:r>
-              <a:t>Полное положение и приложения 1–7; ТЗ СГ.</a:t>
-            </a:r>
-          </a:p>
-        </p:txBody>
-      </p:sp>
-      <p:sp>
-        <p:nvSpPr>
-          <p:cNvPr id="28" name="TextBox 27"/>
-          <p:cNvSpPr txBox="1"/>
-          <p:nvPr/>
-        </p:nvSpPr>
-        <p:spPr>
-          <a:xfrm>
-            <a:off x="886968" y="5504688"/>
-            <a:ext cx="3822191" cy="594360"/>
+            <a:off x="658368" y="7342631"/>
+            <a:ext cx="12344400" cy="621792"/>
           </a:xfrm>
           <a:prstGeom prst="rect">
             <a:avLst/>
@@ -15807,73 +16922,27 @@
               </a:spcAft>
               <a:defRPr sz="1200" b="0">
                 <a:solidFill>
-                  <a:srgbClr val="FF793F"/>
+                  <a:srgbClr val="AFBDC0"/>
                 </a:solidFill>
                 <a:latin typeface="Noto Sans"/>
               </a:defRPr>
             </a:pPr>
             <a:r>
-              <a:rPr>
-                <a:hlinkClick r:id="rId3"/>
-              </a:rPr>
-              <a:t>https://aesa.tech/documentation</a:t>
+              <a:t>Прибавка к A04: 51,9 г. Проверены геометрия и зазоры; прочность и удержание ещё не испытаны.</a:t>
             </a:r>
           </a:p>
         </p:txBody>
       </p:sp>
       <p:sp>
         <p:nvSpPr>
-          <p:cNvPr id="29" name="Rectangle 28"/>
-          <p:cNvSpPr/>
-          <p:nvPr/>
-        </p:nvSpPr>
-        <p:spPr>
-          <a:xfrm>
-            <a:off x="5175504" y="2743200"/>
-            <a:ext cx="4279392" cy="3474720"/>
-          </a:xfrm>
-          <a:prstGeom prst="rect">
-            <a:avLst/>
-          </a:prstGeom>
-          <a:solidFill>
-            <a:srgbClr val="1A2427"/>
-          </a:solidFill>
-          <a:ln>
-            <a:noFill/>
-          </a:ln>
-        </p:spPr>
-        <p:style>
-          <a:lnRef idx="1">
-            <a:schemeClr val="accent1"/>
-          </a:lnRef>
-          <a:fillRef idx="3">
-            <a:schemeClr val="accent1"/>
-          </a:fillRef>
-          <a:effectRef idx="2">
-            <a:schemeClr val="accent1"/>
-          </a:effectRef>
-          <a:fontRef idx="minor">
-            <a:schemeClr val="lt1"/>
-          </a:fontRef>
-        </p:style>
-        <p:txBody>
-          <a:bodyPr rtlCol="0" anchor="ctr"/>
-          <a:lstStyle/>
-          <a:p>
-            <a:pPr algn="ctr"/>
-          </a:p>
-        </p:txBody>
-      </p:sp>
-      <p:sp>
-        <p:nvSpPr>
-          <p:cNvPr id="30" name="TextBox 29"/>
+          <p:cNvPr id="23" name="TextBox 22"/>
           <p:cNvSpPr txBox="1"/>
           <p:nvPr/>
         </p:nvSpPr>
         <p:spPr>
           <a:xfrm>
-            <a:off x="5404104" y="3017520"/>
-            <a:ext cx="3822191" cy="914400"/>
+            <a:off x="13121640" y="7507224"/>
+            <a:ext cx="914400" cy="365760"/>
           </a:xfrm>
           <a:prstGeom prst="rect">
             <a:avLst/>
@@ -15893,7 +16962,914 @@
               <a:spcAft>
                 <a:spcPts val="900"/>
               </a:spcAft>
-              <a:defRPr sz="2500" b="1">
+              <a:defRPr sz="1100" b="0">
+                <a:solidFill>
+                  <a:srgbClr val="FF793F"/>
+                </a:solidFill>
+                <a:latin typeface="Noto Sans"/>
+              </a:defRPr>
+            </a:pPr>
+            <a:r>
+              <a:t>17 / 21</a:t>
+            </a:r>
+          </a:p>
+        </p:txBody>
+      </p:sp>
+      <p:sp>
+        <p:nvSpPr>
+          <p:cNvPr id="24" name="Rectangle 23"/>
+          <p:cNvSpPr/>
+          <p:nvPr/>
+        </p:nvSpPr>
+        <p:spPr>
+          <a:xfrm>
+            <a:off x="0" y="8183879"/>
+            <a:ext cx="11843657" cy="45720"/>
+          </a:xfrm>
+          <a:prstGeom prst="rect">
+            <a:avLst/>
+          </a:prstGeom>
+          <a:solidFill>
+            <a:srgbClr val="FF793F"/>
+          </a:solidFill>
+          <a:ln>
+            <a:noFill/>
+          </a:ln>
+        </p:spPr>
+        <p:style>
+          <a:lnRef idx="1">
+            <a:schemeClr val="accent1"/>
+          </a:lnRef>
+          <a:fillRef idx="3">
+            <a:schemeClr val="accent1"/>
+          </a:fillRef>
+          <a:effectRef idx="2">
+            <a:schemeClr val="accent1"/>
+          </a:effectRef>
+          <a:fontRef idx="minor">
+            <a:schemeClr val="lt1"/>
+          </a:fontRef>
+        </p:style>
+        <p:txBody>
+          <a:bodyPr rtlCol="0" anchor="ctr"/>
+          <a:lstStyle/>
+          <a:p>
+            <a:pPr algn="ctr"/>
+          </a:p>
+        </p:txBody>
+      </p:sp>
+      <p:pic>
+        <p:nvPicPr>
+          <p:cNvPr id="25" name="Picture 24" descr="e01-assembly.png"/>
+          <p:cNvPicPr>
+            <a:picLocks noChangeAspect="1"/>
+          </p:cNvPicPr>
+          <p:nvPr/>
+        </p:nvPicPr>
+        <p:blipFill>
+          <a:blip r:embed="rId3"/>
+          <a:stretch>
+            <a:fillRect/>
+          </a:stretch>
+        </p:blipFill>
+        <p:spPr>
+          <a:xfrm>
+            <a:off x="3071812" y="2395728"/>
+            <a:ext cx="8486775" cy="4526280"/>
+          </a:xfrm>
+          <a:prstGeom prst="rect">
+            <a:avLst/>
+          </a:prstGeom>
+        </p:spPr>
+      </p:pic>
+    </p:spTree>
+  </p:cSld>
+  <p:clrMapOvr>
+    <a:masterClrMapping/>
+  </p:clrMapOvr>
+</p:sld>
+</file>
+
+<file path=ppt/slides/slide18.xml><?xml version="1.0" encoding="utf-8"?>
+<p:sld xmlns:a="http://schemas.openxmlformats.org/drawingml/2006/main" xmlns:p="http://schemas.openxmlformats.org/presentationml/2006/main" xmlns:r="http://schemas.openxmlformats.org/officeDocument/2006/relationships">
+  <p:cSld>
+    <p:bg>
+      <p:bgPr>
+        <a:solidFill>
+          <a:srgbClr val="101719"/>
+        </a:solidFill>
+        <a:effectLst/>
+      </p:bgPr>
+    </p:bg>
+    <p:spTree>
+      <p:nvGrpSpPr>
+        <p:cNvPr id="1" name=""/>
+        <p:cNvGrpSpPr/>
+        <p:nvPr/>
+      </p:nvGrpSpPr>
+      <p:grpSpPr/>
+      <p:sp>
+        <p:nvSpPr>
+          <p:cNvPr id="2" name="Rectangle 1"/>
+          <p:cNvSpPr/>
+          <p:nvPr/>
+        </p:nvSpPr>
+        <p:spPr>
+          <a:xfrm>
+            <a:off x="914400" y="0"/>
+            <a:ext cx="5486" cy="8229600"/>
+          </a:xfrm>
+          <a:prstGeom prst="rect">
+            <a:avLst/>
+          </a:prstGeom>
+          <a:solidFill>
+            <a:srgbClr val="182124"/>
+          </a:solidFill>
+          <a:ln>
+            <a:noFill/>
+          </a:ln>
+        </p:spPr>
+        <p:style>
+          <a:lnRef idx="1">
+            <a:schemeClr val="accent1"/>
+          </a:lnRef>
+          <a:fillRef idx="3">
+            <a:schemeClr val="accent1"/>
+          </a:fillRef>
+          <a:effectRef idx="2">
+            <a:schemeClr val="accent1"/>
+          </a:effectRef>
+          <a:fontRef idx="minor">
+            <a:schemeClr val="lt1"/>
+          </a:fontRef>
+        </p:style>
+        <p:txBody>
+          <a:bodyPr rtlCol="0" anchor="ctr"/>
+          <a:lstStyle/>
+          <a:p>
+            <a:pPr algn="ctr"/>
+          </a:p>
+        </p:txBody>
+      </p:sp>
+      <p:sp>
+        <p:nvSpPr>
+          <p:cNvPr id="3" name="Rectangle 2"/>
+          <p:cNvSpPr/>
+          <p:nvPr/>
+        </p:nvSpPr>
+        <p:spPr>
+          <a:xfrm>
+            <a:off x="1828800" y="0"/>
+            <a:ext cx="5486" cy="8229600"/>
+          </a:xfrm>
+          <a:prstGeom prst="rect">
+            <a:avLst/>
+          </a:prstGeom>
+          <a:solidFill>
+            <a:srgbClr val="182124"/>
+          </a:solidFill>
+          <a:ln>
+            <a:noFill/>
+          </a:ln>
+        </p:spPr>
+        <p:style>
+          <a:lnRef idx="1">
+            <a:schemeClr val="accent1"/>
+          </a:lnRef>
+          <a:fillRef idx="3">
+            <a:schemeClr val="accent1"/>
+          </a:fillRef>
+          <a:effectRef idx="2">
+            <a:schemeClr val="accent1"/>
+          </a:effectRef>
+          <a:fontRef idx="minor">
+            <a:schemeClr val="lt1"/>
+          </a:fontRef>
+        </p:style>
+        <p:txBody>
+          <a:bodyPr rtlCol="0" anchor="ctr"/>
+          <a:lstStyle/>
+          <a:p>
+            <a:pPr algn="ctr"/>
+          </a:p>
+        </p:txBody>
+      </p:sp>
+      <p:sp>
+        <p:nvSpPr>
+          <p:cNvPr id="4" name="Rectangle 3"/>
+          <p:cNvSpPr/>
+          <p:nvPr/>
+        </p:nvSpPr>
+        <p:spPr>
+          <a:xfrm>
+            <a:off x="2743200" y="0"/>
+            <a:ext cx="5486" cy="8229600"/>
+          </a:xfrm>
+          <a:prstGeom prst="rect">
+            <a:avLst/>
+          </a:prstGeom>
+          <a:solidFill>
+            <a:srgbClr val="182124"/>
+          </a:solidFill>
+          <a:ln>
+            <a:noFill/>
+          </a:ln>
+        </p:spPr>
+        <p:style>
+          <a:lnRef idx="1">
+            <a:schemeClr val="accent1"/>
+          </a:lnRef>
+          <a:fillRef idx="3">
+            <a:schemeClr val="accent1"/>
+          </a:fillRef>
+          <a:effectRef idx="2">
+            <a:schemeClr val="accent1"/>
+          </a:effectRef>
+          <a:fontRef idx="minor">
+            <a:schemeClr val="lt1"/>
+          </a:fontRef>
+        </p:style>
+        <p:txBody>
+          <a:bodyPr rtlCol="0" anchor="ctr"/>
+          <a:lstStyle/>
+          <a:p>
+            <a:pPr algn="ctr"/>
+          </a:p>
+        </p:txBody>
+      </p:sp>
+      <p:sp>
+        <p:nvSpPr>
+          <p:cNvPr id="5" name="Rectangle 4"/>
+          <p:cNvSpPr/>
+          <p:nvPr/>
+        </p:nvSpPr>
+        <p:spPr>
+          <a:xfrm>
+            <a:off x="3657600" y="0"/>
+            <a:ext cx="5486" cy="8229600"/>
+          </a:xfrm>
+          <a:prstGeom prst="rect">
+            <a:avLst/>
+          </a:prstGeom>
+          <a:solidFill>
+            <a:srgbClr val="182124"/>
+          </a:solidFill>
+          <a:ln>
+            <a:noFill/>
+          </a:ln>
+        </p:spPr>
+        <p:style>
+          <a:lnRef idx="1">
+            <a:schemeClr val="accent1"/>
+          </a:lnRef>
+          <a:fillRef idx="3">
+            <a:schemeClr val="accent1"/>
+          </a:fillRef>
+          <a:effectRef idx="2">
+            <a:schemeClr val="accent1"/>
+          </a:effectRef>
+          <a:fontRef idx="minor">
+            <a:schemeClr val="lt1"/>
+          </a:fontRef>
+        </p:style>
+        <p:txBody>
+          <a:bodyPr rtlCol="0" anchor="ctr"/>
+          <a:lstStyle/>
+          <a:p>
+            <a:pPr algn="ctr"/>
+          </a:p>
+        </p:txBody>
+      </p:sp>
+      <p:sp>
+        <p:nvSpPr>
+          <p:cNvPr id="6" name="Rectangle 5"/>
+          <p:cNvSpPr/>
+          <p:nvPr/>
+        </p:nvSpPr>
+        <p:spPr>
+          <a:xfrm>
+            <a:off x="4572000" y="0"/>
+            <a:ext cx="5486" cy="8229600"/>
+          </a:xfrm>
+          <a:prstGeom prst="rect">
+            <a:avLst/>
+          </a:prstGeom>
+          <a:solidFill>
+            <a:srgbClr val="182124"/>
+          </a:solidFill>
+          <a:ln>
+            <a:noFill/>
+          </a:ln>
+        </p:spPr>
+        <p:style>
+          <a:lnRef idx="1">
+            <a:schemeClr val="accent1"/>
+          </a:lnRef>
+          <a:fillRef idx="3">
+            <a:schemeClr val="accent1"/>
+          </a:fillRef>
+          <a:effectRef idx="2">
+            <a:schemeClr val="accent1"/>
+          </a:effectRef>
+          <a:fontRef idx="minor">
+            <a:schemeClr val="lt1"/>
+          </a:fontRef>
+        </p:style>
+        <p:txBody>
+          <a:bodyPr rtlCol="0" anchor="ctr"/>
+          <a:lstStyle/>
+          <a:p>
+            <a:pPr algn="ctr"/>
+          </a:p>
+        </p:txBody>
+      </p:sp>
+      <p:sp>
+        <p:nvSpPr>
+          <p:cNvPr id="7" name="Rectangle 6"/>
+          <p:cNvSpPr/>
+          <p:nvPr/>
+        </p:nvSpPr>
+        <p:spPr>
+          <a:xfrm>
+            <a:off x="5486400" y="0"/>
+            <a:ext cx="5486" cy="8229600"/>
+          </a:xfrm>
+          <a:prstGeom prst="rect">
+            <a:avLst/>
+          </a:prstGeom>
+          <a:solidFill>
+            <a:srgbClr val="182124"/>
+          </a:solidFill>
+          <a:ln>
+            <a:noFill/>
+          </a:ln>
+        </p:spPr>
+        <p:style>
+          <a:lnRef idx="1">
+            <a:schemeClr val="accent1"/>
+          </a:lnRef>
+          <a:fillRef idx="3">
+            <a:schemeClr val="accent1"/>
+          </a:fillRef>
+          <a:effectRef idx="2">
+            <a:schemeClr val="accent1"/>
+          </a:effectRef>
+          <a:fontRef idx="minor">
+            <a:schemeClr val="lt1"/>
+          </a:fontRef>
+        </p:style>
+        <p:txBody>
+          <a:bodyPr rtlCol="0" anchor="ctr"/>
+          <a:lstStyle/>
+          <a:p>
+            <a:pPr algn="ctr"/>
+          </a:p>
+        </p:txBody>
+      </p:sp>
+      <p:sp>
+        <p:nvSpPr>
+          <p:cNvPr id="8" name="Rectangle 7"/>
+          <p:cNvSpPr/>
+          <p:nvPr/>
+        </p:nvSpPr>
+        <p:spPr>
+          <a:xfrm>
+            <a:off x="6400800" y="0"/>
+            <a:ext cx="5486" cy="8229600"/>
+          </a:xfrm>
+          <a:prstGeom prst="rect">
+            <a:avLst/>
+          </a:prstGeom>
+          <a:solidFill>
+            <a:srgbClr val="182124"/>
+          </a:solidFill>
+          <a:ln>
+            <a:noFill/>
+          </a:ln>
+        </p:spPr>
+        <p:style>
+          <a:lnRef idx="1">
+            <a:schemeClr val="accent1"/>
+          </a:lnRef>
+          <a:fillRef idx="3">
+            <a:schemeClr val="accent1"/>
+          </a:fillRef>
+          <a:effectRef idx="2">
+            <a:schemeClr val="accent1"/>
+          </a:effectRef>
+          <a:fontRef idx="minor">
+            <a:schemeClr val="lt1"/>
+          </a:fontRef>
+        </p:style>
+        <p:txBody>
+          <a:bodyPr rtlCol="0" anchor="ctr"/>
+          <a:lstStyle/>
+          <a:p>
+            <a:pPr algn="ctr"/>
+          </a:p>
+        </p:txBody>
+      </p:sp>
+      <p:sp>
+        <p:nvSpPr>
+          <p:cNvPr id="9" name="Rectangle 8"/>
+          <p:cNvSpPr/>
+          <p:nvPr/>
+        </p:nvSpPr>
+        <p:spPr>
+          <a:xfrm>
+            <a:off x="7315200" y="0"/>
+            <a:ext cx="5486" cy="8229600"/>
+          </a:xfrm>
+          <a:prstGeom prst="rect">
+            <a:avLst/>
+          </a:prstGeom>
+          <a:solidFill>
+            <a:srgbClr val="182124"/>
+          </a:solidFill>
+          <a:ln>
+            <a:noFill/>
+          </a:ln>
+        </p:spPr>
+        <p:style>
+          <a:lnRef idx="1">
+            <a:schemeClr val="accent1"/>
+          </a:lnRef>
+          <a:fillRef idx="3">
+            <a:schemeClr val="accent1"/>
+          </a:fillRef>
+          <a:effectRef idx="2">
+            <a:schemeClr val="accent1"/>
+          </a:effectRef>
+          <a:fontRef idx="minor">
+            <a:schemeClr val="lt1"/>
+          </a:fontRef>
+        </p:style>
+        <p:txBody>
+          <a:bodyPr rtlCol="0" anchor="ctr"/>
+          <a:lstStyle/>
+          <a:p>
+            <a:pPr algn="ctr"/>
+          </a:p>
+        </p:txBody>
+      </p:sp>
+      <p:sp>
+        <p:nvSpPr>
+          <p:cNvPr id="10" name="Rectangle 9"/>
+          <p:cNvSpPr/>
+          <p:nvPr/>
+        </p:nvSpPr>
+        <p:spPr>
+          <a:xfrm>
+            <a:off x="8229600" y="0"/>
+            <a:ext cx="5486" cy="8229600"/>
+          </a:xfrm>
+          <a:prstGeom prst="rect">
+            <a:avLst/>
+          </a:prstGeom>
+          <a:solidFill>
+            <a:srgbClr val="182124"/>
+          </a:solidFill>
+          <a:ln>
+            <a:noFill/>
+          </a:ln>
+        </p:spPr>
+        <p:style>
+          <a:lnRef idx="1">
+            <a:schemeClr val="accent1"/>
+          </a:lnRef>
+          <a:fillRef idx="3">
+            <a:schemeClr val="accent1"/>
+          </a:fillRef>
+          <a:effectRef idx="2">
+            <a:schemeClr val="accent1"/>
+          </a:effectRef>
+          <a:fontRef idx="minor">
+            <a:schemeClr val="lt1"/>
+          </a:fontRef>
+        </p:style>
+        <p:txBody>
+          <a:bodyPr rtlCol="0" anchor="ctr"/>
+          <a:lstStyle/>
+          <a:p>
+            <a:pPr algn="ctr"/>
+          </a:p>
+        </p:txBody>
+      </p:sp>
+      <p:sp>
+        <p:nvSpPr>
+          <p:cNvPr id="11" name="Rectangle 10"/>
+          <p:cNvSpPr/>
+          <p:nvPr/>
+        </p:nvSpPr>
+        <p:spPr>
+          <a:xfrm>
+            <a:off x="9144000" y="0"/>
+            <a:ext cx="5486" cy="8229600"/>
+          </a:xfrm>
+          <a:prstGeom prst="rect">
+            <a:avLst/>
+          </a:prstGeom>
+          <a:solidFill>
+            <a:srgbClr val="182124"/>
+          </a:solidFill>
+          <a:ln>
+            <a:noFill/>
+          </a:ln>
+        </p:spPr>
+        <p:style>
+          <a:lnRef idx="1">
+            <a:schemeClr val="accent1"/>
+          </a:lnRef>
+          <a:fillRef idx="3">
+            <a:schemeClr val="accent1"/>
+          </a:fillRef>
+          <a:effectRef idx="2">
+            <a:schemeClr val="accent1"/>
+          </a:effectRef>
+          <a:fontRef idx="minor">
+            <a:schemeClr val="lt1"/>
+          </a:fontRef>
+        </p:style>
+        <p:txBody>
+          <a:bodyPr rtlCol="0" anchor="ctr"/>
+          <a:lstStyle/>
+          <a:p>
+            <a:pPr algn="ctr"/>
+          </a:p>
+        </p:txBody>
+      </p:sp>
+      <p:sp>
+        <p:nvSpPr>
+          <p:cNvPr id="12" name="Rectangle 11"/>
+          <p:cNvSpPr/>
+          <p:nvPr/>
+        </p:nvSpPr>
+        <p:spPr>
+          <a:xfrm>
+            <a:off x="10058400" y="0"/>
+            <a:ext cx="5486" cy="8229600"/>
+          </a:xfrm>
+          <a:prstGeom prst="rect">
+            <a:avLst/>
+          </a:prstGeom>
+          <a:solidFill>
+            <a:srgbClr val="182124"/>
+          </a:solidFill>
+          <a:ln>
+            <a:noFill/>
+          </a:ln>
+        </p:spPr>
+        <p:style>
+          <a:lnRef idx="1">
+            <a:schemeClr val="accent1"/>
+          </a:lnRef>
+          <a:fillRef idx="3">
+            <a:schemeClr val="accent1"/>
+          </a:fillRef>
+          <a:effectRef idx="2">
+            <a:schemeClr val="accent1"/>
+          </a:effectRef>
+          <a:fontRef idx="minor">
+            <a:schemeClr val="lt1"/>
+          </a:fontRef>
+        </p:style>
+        <p:txBody>
+          <a:bodyPr rtlCol="0" anchor="ctr"/>
+          <a:lstStyle/>
+          <a:p>
+            <a:pPr algn="ctr"/>
+          </a:p>
+        </p:txBody>
+      </p:sp>
+      <p:sp>
+        <p:nvSpPr>
+          <p:cNvPr id="13" name="Rectangle 12"/>
+          <p:cNvSpPr/>
+          <p:nvPr/>
+        </p:nvSpPr>
+        <p:spPr>
+          <a:xfrm>
+            <a:off x="10972800" y="0"/>
+            <a:ext cx="5486" cy="8229600"/>
+          </a:xfrm>
+          <a:prstGeom prst="rect">
+            <a:avLst/>
+          </a:prstGeom>
+          <a:solidFill>
+            <a:srgbClr val="182124"/>
+          </a:solidFill>
+          <a:ln>
+            <a:noFill/>
+          </a:ln>
+        </p:spPr>
+        <p:style>
+          <a:lnRef idx="1">
+            <a:schemeClr val="accent1"/>
+          </a:lnRef>
+          <a:fillRef idx="3">
+            <a:schemeClr val="accent1"/>
+          </a:fillRef>
+          <a:effectRef idx="2">
+            <a:schemeClr val="accent1"/>
+          </a:effectRef>
+          <a:fontRef idx="minor">
+            <a:schemeClr val="lt1"/>
+          </a:fontRef>
+        </p:style>
+        <p:txBody>
+          <a:bodyPr rtlCol="0" anchor="ctr"/>
+          <a:lstStyle/>
+          <a:p>
+            <a:pPr algn="ctr"/>
+          </a:p>
+        </p:txBody>
+      </p:sp>
+      <p:sp>
+        <p:nvSpPr>
+          <p:cNvPr id="14" name="Rectangle 13"/>
+          <p:cNvSpPr/>
+          <p:nvPr/>
+        </p:nvSpPr>
+        <p:spPr>
+          <a:xfrm>
+            <a:off x="11887200" y="0"/>
+            <a:ext cx="5486" cy="8229600"/>
+          </a:xfrm>
+          <a:prstGeom prst="rect">
+            <a:avLst/>
+          </a:prstGeom>
+          <a:solidFill>
+            <a:srgbClr val="182124"/>
+          </a:solidFill>
+          <a:ln>
+            <a:noFill/>
+          </a:ln>
+        </p:spPr>
+        <p:style>
+          <a:lnRef idx="1">
+            <a:schemeClr val="accent1"/>
+          </a:lnRef>
+          <a:fillRef idx="3">
+            <a:schemeClr val="accent1"/>
+          </a:fillRef>
+          <a:effectRef idx="2">
+            <a:schemeClr val="accent1"/>
+          </a:effectRef>
+          <a:fontRef idx="minor">
+            <a:schemeClr val="lt1"/>
+          </a:fontRef>
+        </p:style>
+        <p:txBody>
+          <a:bodyPr rtlCol="0" anchor="ctr"/>
+          <a:lstStyle/>
+          <a:p>
+            <a:pPr algn="ctr"/>
+          </a:p>
+        </p:txBody>
+      </p:sp>
+      <p:sp>
+        <p:nvSpPr>
+          <p:cNvPr id="15" name="Rectangle 14"/>
+          <p:cNvSpPr/>
+          <p:nvPr/>
+        </p:nvSpPr>
+        <p:spPr>
+          <a:xfrm>
+            <a:off x="12801600" y="0"/>
+            <a:ext cx="5486" cy="8229600"/>
+          </a:xfrm>
+          <a:prstGeom prst="rect">
+            <a:avLst/>
+          </a:prstGeom>
+          <a:solidFill>
+            <a:srgbClr val="182124"/>
+          </a:solidFill>
+          <a:ln>
+            <a:noFill/>
+          </a:ln>
+        </p:spPr>
+        <p:style>
+          <a:lnRef idx="1">
+            <a:schemeClr val="accent1"/>
+          </a:lnRef>
+          <a:fillRef idx="3">
+            <a:schemeClr val="accent1"/>
+          </a:fillRef>
+          <a:effectRef idx="2">
+            <a:schemeClr val="accent1"/>
+          </a:effectRef>
+          <a:fontRef idx="minor">
+            <a:schemeClr val="lt1"/>
+          </a:fontRef>
+        </p:style>
+        <p:txBody>
+          <a:bodyPr rtlCol="0" anchor="ctr"/>
+          <a:lstStyle/>
+          <a:p>
+            <a:pPr algn="ctr"/>
+          </a:p>
+        </p:txBody>
+      </p:sp>
+      <p:sp>
+        <p:nvSpPr>
+          <p:cNvPr id="16" name="Rectangle 15"/>
+          <p:cNvSpPr/>
+          <p:nvPr/>
+        </p:nvSpPr>
+        <p:spPr>
+          <a:xfrm>
+            <a:off x="13716000" y="0"/>
+            <a:ext cx="5486" cy="8229600"/>
+          </a:xfrm>
+          <a:prstGeom prst="rect">
+            <a:avLst/>
+          </a:prstGeom>
+          <a:solidFill>
+            <a:srgbClr val="182124"/>
+          </a:solidFill>
+          <a:ln>
+            <a:noFill/>
+          </a:ln>
+        </p:spPr>
+        <p:style>
+          <a:lnRef idx="1">
+            <a:schemeClr val="accent1"/>
+          </a:lnRef>
+          <a:fillRef idx="3">
+            <a:schemeClr val="accent1"/>
+          </a:fillRef>
+          <a:effectRef idx="2">
+            <a:schemeClr val="accent1"/>
+          </a:effectRef>
+          <a:fontRef idx="minor">
+            <a:schemeClr val="lt1"/>
+          </a:fontRef>
+        </p:style>
+        <p:txBody>
+          <a:bodyPr rtlCol="0" anchor="ctr"/>
+          <a:lstStyle/>
+          <a:p>
+            <a:pPr algn="ctr"/>
+          </a:p>
+        </p:txBody>
+      </p:sp>
+      <p:sp>
+        <p:nvSpPr>
+          <p:cNvPr id="17" name="TextBox 16"/>
+          <p:cNvSpPr txBox="1"/>
+          <p:nvPr/>
+        </p:nvSpPr>
+        <p:spPr>
+          <a:xfrm>
+            <a:off x="658368" y="393192"/>
+            <a:ext cx="10972800" cy="274320"/>
+          </a:xfrm>
+          <a:prstGeom prst="rect">
+            <a:avLst/>
+          </a:prstGeom>
+          <a:noFill/>
+        </p:spPr>
+        <p:txBody>
+          <a:bodyPr wrap="square" lIns="0" rIns="0" tIns="0" bIns="0">
+            <a:spAutoFit/>
+          </a:bodyPr>
+          <a:lstStyle/>
+          <a:p>
+            <a:pPr>
+              <a:spcBef>
+                <a:spcPts val="0"/>
+              </a:spcBef>
+              <a:spcAft>
+                <a:spcPts val="900"/>
+              </a:spcAft>
+              <a:defRPr sz="1100" b="0">
+                <a:solidFill>
+                  <a:srgbClr val="AFBDC0"/>
+                </a:solidFill>
+                <a:latin typeface="Noto Sans"/>
+              </a:defRPr>
+            </a:pPr>
+            <a:r>
+              <a:t>OR02 / E01 · ИССЛЕДОВАНИЕ</a:t>
+            </a:r>
+          </a:p>
+        </p:txBody>
+      </p:sp>
+      <p:sp>
+        <p:nvSpPr>
+          <p:cNvPr id="18" name="TextBox 17"/>
+          <p:cNvSpPr txBox="1"/>
+          <p:nvPr/>
+        </p:nvSpPr>
+        <p:spPr>
+          <a:xfrm>
+            <a:off x="12390120" y="393192"/>
+            <a:ext cx="1828800" cy="274320"/>
+          </a:xfrm>
+          <a:prstGeom prst="rect">
+            <a:avLst/>
+          </a:prstGeom>
+          <a:noFill/>
+        </p:spPr>
+        <p:txBody>
+          <a:bodyPr wrap="square" lIns="0" rIns="0" tIns="0" bIns="0">
+            <a:spAutoFit/>
+          </a:bodyPr>
+          <a:lstStyle/>
+          <a:p>
+            <a:pPr>
+              <a:spcBef>
+                <a:spcPts val="0"/>
+              </a:spcBef>
+              <a:spcAft>
+                <a:spcPts val="900"/>
+              </a:spcAft>
+              <a:defRPr sz="1100" b="1">
+                <a:solidFill>
+                  <a:srgbClr val="FF793F"/>
+                </a:solidFill>
+                <a:latin typeface="Noto Sans"/>
+              </a:defRPr>
+            </a:pPr>
+            <a:r>
+              <a:t>PLBP / SG1</a:t>
+            </a:r>
+          </a:p>
+        </p:txBody>
+      </p:sp>
+      <p:sp>
+        <p:nvSpPr>
+          <p:cNvPr id="19" name="Rectangle 18"/>
+          <p:cNvSpPr/>
+          <p:nvPr/>
+        </p:nvSpPr>
+        <p:spPr>
+          <a:xfrm>
+            <a:off x="658368" y="914400"/>
+            <a:ext cx="13313664" cy="10972"/>
+          </a:xfrm>
+          <a:prstGeom prst="rect">
+            <a:avLst/>
+          </a:prstGeom>
+          <a:solidFill>
+            <a:srgbClr val="354347"/>
+          </a:solidFill>
+          <a:ln>
+            <a:noFill/>
+          </a:ln>
+        </p:spPr>
+        <p:style>
+          <a:lnRef idx="1">
+            <a:schemeClr val="accent1"/>
+          </a:lnRef>
+          <a:fillRef idx="3">
+            <a:schemeClr val="accent1"/>
+          </a:fillRef>
+          <a:effectRef idx="2">
+            <a:schemeClr val="accent1"/>
+          </a:effectRef>
+          <a:fontRef idx="minor">
+            <a:schemeClr val="lt1"/>
+          </a:fontRef>
+        </p:style>
+        <p:txBody>
+          <a:bodyPr rtlCol="0" anchor="ctr"/>
+          <a:lstStyle/>
+          <a:p>
+            <a:pPr algn="ctr"/>
+          </a:p>
+        </p:txBody>
+      </p:sp>
+      <p:sp>
+        <p:nvSpPr>
+          <p:cNvPr id="20" name="TextBox 19"/>
+          <p:cNvSpPr txBox="1"/>
+          <p:nvPr/>
+        </p:nvSpPr>
+        <p:spPr>
+          <a:xfrm>
+            <a:off x="658368" y="1243584"/>
+            <a:ext cx="13213080" cy="1097280"/>
+          </a:xfrm>
+          <a:prstGeom prst="rect">
+            <a:avLst/>
+          </a:prstGeom>
+          <a:noFill/>
+        </p:spPr>
+        <p:txBody>
+          <a:bodyPr wrap="square" lIns="0" rIns="0" tIns="0" bIns="0">
+            <a:spAutoFit/>
+          </a:bodyPr>
+          <a:lstStyle/>
+          <a:p>
+            <a:pPr>
+              <a:spcBef>
+                <a:spcPts val="0"/>
+              </a:spcBef>
+              <a:spcAft>
+                <a:spcPts val="900"/>
+              </a:spcAft>
+              <a:defRPr sz="3700" b="1">
                 <a:solidFill>
                   <a:srgbClr val="F4F1E9"/>
                 </a:solidFill>
@@ -15901,63 +17877,64 @@
               </a:defRPr>
             </a:pPr>
             <a:r>
-              <a:t>AeroTech</a:t>
+              <a:t>Самописец: защита и воздух</a:t>
             </a:r>
           </a:p>
         </p:txBody>
       </p:sp>
       <p:sp>
         <p:nvSpPr>
-          <p:cNvPr id="31" name="TextBox 30"/>
+          <p:cNvPr id="21" name="Rectangle 20"/>
+          <p:cNvSpPr/>
+          <p:nvPr/>
+        </p:nvSpPr>
+        <p:spPr>
+          <a:xfrm>
+            <a:off x="658368" y="7159752"/>
+            <a:ext cx="13313664" cy="10972"/>
+          </a:xfrm>
+          <a:prstGeom prst="rect">
+            <a:avLst/>
+          </a:prstGeom>
+          <a:solidFill>
+            <a:srgbClr val="354347"/>
+          </a:solidFill>
+          <a:ln>
+            <a:noFill/>
+          </a:ln>
+        </p:spPr>
+        <p:style>
+          <a:lnRef idx="1">
+            <a:schemeClr val="accent1"/>
+          </a:lnRef>
+          <a:fillRef idx="3">
+            <a:schemeClr val="accent1"/>
+          </a:fillRef>
+          <a:effectRef idx="2">
+            <a:schemeClr val="accent1"/>
+          </a:effectRef>
+          <a:fontRef idx="minor">
+            <a:schemeClr val="lt1"/>
+          </a:fontRef>
+        </p:style>
+        <p:txBody>
+          <a:bodyPr rtlCol="0" anchor="ctr"/>
+          <a:lstStyle/>
+          <a:p>
+            <a:pPr algn="ctr"/>
+          </a:p>
+        </p:txBody>
+      </p:sp>
+      <p:sp>
+        <p:nvSpPr>
+          <p:cNvPr id="22" name="TextBox 21"/>
           <p:cNvSpPr txBox="1"/>
           <p:nvPr/>
         </p:nvSpPr>
         <p:spPr>
           <a:xfrm>
-            <a:off x="5404104" y="4133087"/>
-            <a:ext cx="3822191" cy="1097280"/>
-          </a:xfrm>
-          <a:prstGeom prst="rect">
-            <a:avLst/>
-          </a:prstGeom>
-          <a:noFill/>
-        </p:spPr>
-        <p:txBody>
-          <a:bodyPr wrap="square" lIns="0" rIns="0" tIns="0" bIns="0">
-            <a:spAutoFit/>
-          </a:bodyPr>
-          <a:lstStyle/>
-          <a:p>
-            <a:pPr>
-              <a:spcBef>
-                <a:spcPts val="0"/>
-              </a:spcBef>
-              <a:spcAft>
-                <a:spcPts val="900"/>
-              </a:spcAft>
-              <a:defRPr sz="1900" b="0">
-                <a:solidFill>
-                  <a:srgbClr val="AFBDC0"/>
-                </a:solidFill>
-                <a:latin typeface="Noto Sans"/>
-              </a:defRPr>
-            </a:pPr>
-            <a:r>
-              <a:t>Размеры, масса и график справочного двигателя.</a:t>
-            </a:r>
-          </a:p>
-        </p:txBody>
-      </p:sp>
-      <p:sp>
-        <p:nvSpPr>
-          <p:cNvPr id="32" name="TextBox 31"/>
-          <p:cNvSpPr txBox="1"/>
-          <p:nvPr/>
-        </p:nvSpPr>
-        <p:spPr>
-          <a:xfrm>
-            <a:off x="5404104" y="5504688"/>
-            <a:ext cx="3822191" cy="594360"/>
+            <a:off x="658368" y="7342631"/>
+            <a:ext cx="12344400" cy="621792"/>
           </a:xfrm>
           <a:prstGeom prst="rect">
             <a:avLst/>
@@ -15979,73 +17956,27 @@
               </a:spcAft>
               <a:defRPr sz="1200" b="0">
                 <a:solidFill>
-                  <a:srgbClr val="FF793F"/>
+                  <a:srgbClr val="AFBDC0"/>
                 </a:solidFill>
                 <a:latin typeface="Noto Sans"/>
               </a:defRPr>
             </a:pPr>
             <a:r>
-              <a:rPr>
-                <a:hlinkClick r:id="rId4"/>
-              </a:rPr>
-              <a:t>https://aerotech-rocketry.com/pages/catalogs-brochures</a:t>
+              <a:t>Полость 87×33×21 мм; максимальный прибор 85×31×19 мм. Ленты, прокладки и проводка ещё не выбраны.</a:t>
             </a:r>
           </a:p>
         </p:txBody>
       </p:sp>
       <p:sp>
         <p:nvSpPr>
-          <p:cNvPr id="33" name="Rectangle 32"/>
-          <p:cNvSpPr/>
-          <p:nvPr/>
-        </p:nvSpPr>
-        <p:spPr>
-          <a:xfrm>
-            <a:off x="9692640" y="2743200"/>
-            <a:ext cx="4279392" cy="3474720"/>
-          </a:xfrm>
-          <a:prstGeom prst="rect">
-            <a:avLst/>
-          </a:prstGeom>
-          <a:solidFill>
-            <a:srgbClr val="1A2427"/>
-          </a:solidFill>
-          <a:ln>
-            <a:noFill/>
-          </a:ln>
-        </p:spPr>
-        <p:style>
-          <a:lnRef idx="1">
-            <a:schemeClr val="accent1"/>
-          </a:lnRef>
-          <a:fillRef idx="3">
-            <a:schemeClr val="accent1"/>
-          </a:fillRef>
-          <a:effectRef idx="2">
-            <a:schemeClr val="accent1"/>
-          </a:effectRef>
-          <a:fontRef idx="minor">
-            <a:schemeClr val="lt1"/>
-          </a:fontRef>
-        </p:style>
-        <p:txBody>
-          <a:bodyPr rtlCol="0" anchor="ctr"/>
-          <a:lstStyle/>
-          <a:p>
-            <a:pPr algn="ctr"/>
-          </a:p>
-        </p:txBody>
-      </p:sp>
-      <p:sp>
-        <p:nvSpPr>
-          <p:cNvPr id="34" name="TextBox 33"/>
+          <p:cNvPr id="23" name="TextBox 22"/>
           <p:cNvSpPr txBox="1"/>
           <p:nvPr/>
         </p:nvSpPr>
         <p:spPr>
           <a:xfrm>
-            <a:off x="9921240" y="3017520"/>
-            <a:ext cx="3822191" cy="914400"/>
+            <a:off x="13121640" y="7507224"/>
+            <a:ext cx="914400" cy="365760"/>
           </a:xfrm>
           <a:prstGeom prst="rect">
             <a:avLst/>
@@ -16065,7 +17996,914 @@
               <a:spcAft>
                 <a:spcPts val="900"/>
               </a:spcAft>
-              <a:defRPr sz="2500" b="1">
+              <a:defRPr sz="1100" b="0">
+                <a:solidFill>
+                  <a:srgbClr val="FF793F"/>
+                </a:solidFill>
+                <a:latin typeface="Noto Sans"/>
+              </a:defRPr>
+            </a:pPr>
+            <a:r>
+              <a:t>18 / 21</a:t>
+            </a:r>
+          </a:p>
+        </p:txBody>
+      </p:sp>
+      <p:sp>
+        <p:nvSpPr>
+          <p:cNvPr id="24" name="Rectangle 23"/>
+          <p:cNvSpPr/>
+          <p:nvPr/>
+        </p:nvSpPr>
+        <p:spPr>
+          <a:xfrm>
+            <a:off x="0" y="8183879"/>
+            <a:ext cx="12540342" cy="45720"/>
+          </a:xfrm>
+          <a:prstGeom prst="rect">
+            <a:avLst/>
+          </a:prstGeom>
+          <a:solidFill>
+            <a:srgbClr val="FF793F"/>
+          </a:solidFill>
+          <a:ln>
+            <a:noFill/>
+          </a:ln>
+        </p:spPr>
+        <p:style>
+          <a:lnRef idx="1">
+            <a:schemeClr val="accent1"/>
+          </a:lnRef>
+          <a:fillRef idx="3">
+            <a:schemeClr val="accent1"/>
+          </a:fillRef>
+          <a:effectRef idx="2">
+            <a:schemeClr val="accent1"/>
+          </a:effectRef>
+          <a:fontRef idx="minor">
+            <a:schemeClr val="lt1"/>
+          </a:fontRef>
+        </p:style>
+        <p:txBody>
+          <a:bodyPr rtlCol="0" anchor="ctr"/>
+          <a:lstStyle/>
+          <a:p>
+            <a:pPr algn="ctr"/>
+          </a:p>
+        </p:txBody>
+      </p:sp>
+      <p:pic>
+        <p:nvPicPr>
+          <p:cNvPr id="25" name="Picture 24" descr="e01-underside.png"/>
+          <p:cNvPicPr>
+            <a:picLocks noChangeAspect="1"/>
+          </p:cNvPicPr>
+          <p:nvPr/>
+        </p:nvPicPr>
+        <p:blipFill>
+          <a:blip r:embed="rId3"/>
+          <a:stretch>
+            <a:fillRect/>
+          </a:stretch>
+        </p:blipFill>
+        <p:spPr>
+          <a:xfrm>
+            <a:off x="3071812" y="2395728"/>
+            <a:ext cx="8486775" cy="4526280"/>
+          </a:xfrm>
+          <a:prstGeom prst="rect">
+            <a:avLst/>
+          </a:prstGeom>
+        </p:spPr>
+      </p:pic>
+    </p:spTree>
+  </p:cSld>
+  <p:clrMapOvr>
+    <a:masterClrMapping/>
+  </p:clrMapOvr>
+</p:sld>
+</file>
+
+<file path=ppt/slides/slide19.xml><?xml version="1.0" encoding="utf-8"?>
+<p:sld xmlns:a="http://schemas.openxmlformats.org/drawingml/2006/main" xmlns:p="http://schemas.openxmlformats.org/presentationml/2006/main" xmlns:r="http://schemas.openxmlformats.org/officeDocument/2006/relationships">
+  <p:cSld>
+    <p:bg>
+      <p:bgPr>
+        <a:solidFill>
+          <a:srgbClr val="101719"/>
+        </a:solidFill>
+        <a:effectLst/>
+      </p:bgPr>
+    </p:bg>
+    <p:spTree>
+      <p:nvGrpSpPr>
+        <p:cNvPr id="1" name=""/>
+        <p:cNvGrpSpPr/>
+        <p:nvPr/>
+      </p:nvGrpSpPr>
+      <p:grpSpPr/>
+      <p:sp>
+        <p:nvSpPr>
+          <p:cNvPr id="2" name="Rectangle 1"/>
+          <p:cNvSpPr/>
+          <p:nvPr/>
+        </p:nvSpPr>
+        <p:spPr>
+          <a:xfrm>
+            <a:off x="914400" y="0"/>
+            <a:ext cx="5486" cy="8229600"/>
+          </a:xfrm>
+          <a:prstGeom prst="rect">
+            <a:avLst/>
+          </a:prstGeom>
+          <a:solidFill>
+            <a:srgbClr val="182124"/>
+          </a:solidFill>
+          <a:ln>
+            <a:noFill/>
+          </a:ln>
+        </p:spPr>
+        <p:style>
+          <a:lnRef idx="1">
+            <a:schemeClr val="accent1"/>
+          </a:lnRef>
+          <a:fillRef idx="3">
+            <a:schemeClr val="accent1"/>
+          </a:fillRef>
+          <a:effectRef idx="2">
+            <a:schemeClr val="accent1"/>
+          </a:effectRef>
+          <a:fontRef idx="minor">
+            <a:schemeClr val="lt1"/>
+          </a:fontRef>
+        </p:style>
+        <p:txBody>
+          <a:bodyPr rtlCol="0" anchor="ctr"/>
+          <a:lstStyle/>
+          <a:p>
+            <a:pPr algn="ctr"/>
+          </a:p>
+        </p:txBody>
+      </p:sp>
+      <p:sp>
+        <p:nvSpPr>
+          <p:cNvPr id="3" name="Rectangle 2"/>
+          <p:cNvSpPr/>
+          <p:nvPr/>
+        </p:nvSpPr>
+        <p:spPr>
+          <a:xfrm>
+            <a:off x="1828800" y="0"/>
+            <a:ext cx="5486" cy="8229600"/>
+          </a:xfrm>
+          <a:prstGeom prst="rect">
+            <a:avLst/>
+          </a:prstGeom>
+          <a:solidFill>
+            <a:srgbClr val="182124"/>
+          </a:solidFill>
+          <a:ln>
+            <a:noFill/>
+          </a:ln>
+        </p:spPr>
+        <p:style>
+          <a:lnRef idx="1">
+            <a:schemeClr val="accent1"/>
+          </a:lnRef>
+          <a:fillRef idx="3">
+            <a:schemeClr val="accent1"/>
+          </a:fillRef>
+          <a:effectRef idx="2">
+            <a:schemeClr val="accent1"/>
+          </a:effectRef>
+          <a:fontRef idx="minor">
+            <a:schemeClr val="lt1"/>
+          </a:fontRef>
+        </p:style>
+        <p:txBody>
+          <a:bodyPr rtlCol="0" anchor="ctr"/>
+          <a:lstStyle/>
+          <a:p>
+            <a:pPr algn="ctr"/>
+          </a:p>
+        </p:txBody>
+      </p:sp>
+      <p:sp>
+        <p:nvSpPr>
+          <p:cNvPr id="4" name="Rectangle 3"/>
+          <p:cNvSpPr/>
+          <p:nvPr/>
+        </p:nvSpPr>
+        <p:spPr>
+          <a:xfrm>
+            <a:off x="2743200" y="0"/>
+            <a:ext cx="5486" cy="8229600"/>
+          </a:xfrm>
+          <a:prstGeom prst="rect">
+            <a:avLst/>
+          </a:prstGeom>
+          <a:solidFill>
+            <a:srgbClr val="182124"/>
+          </a:solidFill>
+          <a:ln>
+            <a:noFill/>
+          </a:ln>
+        </p:spPr>
+        <p:style>
+          <a:lnRef idx="1">
+            <a:schemeClr val="accent1"/>
+          </a:lnRef>
+          <a:fillRef idx="3">
+            <a:schemeClr val="accent1"/>
+          </a:fillRef>
+          <a:effectRef idx="2">
+            <a:schemeClr val="accent1"/>
+          </a:effectRef>
+          <a:fontRef idx="minor">
+            <a:schemeClr val="lt1"/>
+          </a:fontRef>
+        </p:style>
+        <p:txBody>
+          <a:bodyPr rtlCol="0" anchor="ctr"/>
+          <a:lstStyle/>
+          <a:p>
+            <a:pPr algn="ctr"/>
+          </a:p>
+        </p:txBody>
+      </p:sp>
+      <p:sp>
+        <p:nvSpPr>
+          <p:cNvPr id="5" name="Rectangle 4"/>
+          <p:cNvSpPr/>
+          <p:nvPr/>
+        </p:nvSpPr>
+        <p:spPr>
+          <a:xfrm>
+            <a:off x="3657600" y="0"/>
+            <a:ext cx="5486" cy="8229600"/>
+          </a:xfrm>
+          <a:prstGeom prst="rect">
+            <a:avLst/>
+          </a:prstGeom>
+          <a:solidFill>
+            <a:srgbClr val="182124"/>
+          </a:solidFill>
+          <a:ln>
+            <a:noFill/>
+          </a:ln>
+        </p:spPr>
+        <p:style>
+          <a:lnRef idx="1">
+            <a:schemeClr val="accent1"/>
+          </a:lnRef>
+          <a:fillRef idx="3">
+            <a:schemeClr val="accent1"/>
+          </a:fillRef>
+          <a:effectRef idx="2">
+            <a:schemeClr val="accent1"/>
+          </a:effectRef>
+          <a:fontRef idx="minor">
+            <a:schemeClr val="lt1"/>
+          </a:fontRef>
+        </p:style>
+        <p:txBody>
+          <a:bodyPr rtlCol="0" anchor="ctr"/>
+          <a:lstStyle/>
+          <a:p>
+            <a:pPr algn="ctr"/>
+          </a:p>
+        </p:txBody>
+      </p:sp>
+      <p:sp>
+        <p:nvSpPr>
+          <p:cNvPr id="6" name="Rectangle 5"/>
+          <p:cNvSpPr/>
+          <p:nvPr/>
+        </p:nvSpPr>
+        <p:spPr>
+          <a:xfrm>
+            <a:off x="4572000" y="0"/>
+            <a:ext cx="5486" cy="8229600"/>
+          </a:xfrm>
+          <a:prstGeom prst="rect">
+            <a:avLst/>
+          </a:prstGeom>
+          <a:solidFill>
+            <a:srgbClr val="182124"/>
+          </a:solidFill>
+          <a:ln>
+            <a:noFill/>
+          </a:ln>
+        </p:spPr>
+        <p:style>
+          <a:lnRef idx="1">
+            <a:schemeClr val="accent1"/>
+          </a:lnRef>
+          <a:fillRef idx="3">
+            <a:schemeClr val="accent1"/>
+          </a:fillRef>
+          <a:effectRef idx="2">
+            <a:schemeClr val="accent1"/>
+          </a:effectRef>
+          <a:fontRef idx="minor">
+            <a:schemeClr val="lt1"/>
+          </a:fontRef>
+        </p:style>
+        <p:txBody>
+          <a:bodyPr rtlCol="0" anchor="ctr"/>
+          <a:lstStyle/>
+          <a:p>
+            <a:pPr algn="ctr"/>
+          </a:p>
+        </p:txBody>
+      </p:sp>
+      <p:sp>
+        <p:nvSpPr>
+          <p:cNvPr id="7" name="Rectangle 6"/>
+          <p:cNvSpPr/>
+          <p:nvPr/>
+        </p:nvSpPr>
+        <p:spPr>
+          <a:xfrm>
+            <a:off x="5486400" y="0"/>
+            <a:ext cx="5486" cy="8229600"/>
+          </a:xfrm>
+          <a:prstGeom prst="rect">
+            <a:avLst/>
+          </a:prstGeom>
+          <a:solidFill>
+            <a:srgbClr val="182124"/>
+          </a:solidFill>
+          <a:ln>
+            <a:noFill/>
+          </a:ln>
+        </p:spPr>
+        <p:style>
+          <a:lnRef idx="1">
+            <a:schemeClr val="accent1"/>
+          </a:lnRef>
+          <a:fillRef idx="3">
+            <a:schemeClr val="accent1"/>
+          </a:fillRef>
+          <a:effectRef idx="2">
+            <a:schemeClr val="accent1"/>
+          </a:effectRef>
+          <a:fontRef idx="minor">
+            <a:schemeClr val="lt1"/>
+          </a:fontRef>
+        </p:style>
+        <p:txBody>
+          <a:bodyPr rtlCol="0" anchor="ctr"/>
+          <a:lstStyle/>
+          <a:p>
+            <a:pPr algn="ctr"/>
+          </a:p>
+        </p:txBody>
+      </p:sp>
+      <p:sp>
+        <p:nvSpPr>
+          <p:cNvPr id="8" name="Rectangle 7"/>
+          <p:cNvSpPr/>
+          <p:nvPr/>
+        </p:nvSpPr>
+        <p:spPr>
+          <a:xfrm>
+            <a:off x="6400800" y="0"/>
+            <a:ext cx="5486" cy="8229600"/>
+          </a:xfrm>
+          <a:prstGeom prst="rect">
+            <a:avLst/>
+          </a:prstGeom>
+          <a:solidFill>
+            <a:srgbClr val="182124"/>
+          </a:solidFill>
+          <a:ln>
+            <a:noFill/>
+          </a:ln>
+        </p:spPr>
+        <p:style>
+          <a:lnRef idx="1">
+            <a:schemeClr val="accent1"/>
+          </a:lnRef>
+          <a:fillRef idx="3">
+            <a:schemeClr val="accent1"/>
+          </a:fillRef>
+          <a:effectRef idx="2">
+            <a:schemeClr val="accent1"/>
+          </a:effectRef>
+          <a:fontRef idx="minor">
+            <a:schemeClr val="lt1"/>
+          </a:fontRef>
+        </p:style>
+        <p:txBody>
+          <a:bodyPr rtlCol="0" anchor="ctr"/>
+          <a:lstStyle/>
+          <a:p>
+            <a:pPr algn="ctr"/>
+          </a:p>
+        </p:txBody>
+      </p:sp>
+      <p:sp>
+        <p:nvSpPr>
+          <p:cNvPr id="9" name="Rectangle 8"/>
+          <p:cNvSpPr/>
+          <p:nvPr/>
+        </p:nvSpPr>
+        <p:spPr>
+          <a:xfrm>
+            <a:off x="7315200" y="0"/>
+            <a:ext cx="5486" cy="8229600"/>
+          </a:xfrm>
+          <a:prstGeom prst="rect">
+            <a:avLst/>
+          </a:prstGeom>
+          <a:solidFill>
+            <a:srgbClr val="182124"/>
+          </a:solidFill>
+          <a:ln>
+            <a:noFill/>
+          </a:ln>
+        </p:spPr>
+        <p:style>
+          <a:lnRef idx="1">
+            <a:schemeClr val="accent1"/>
+          </a:lnRef>
+          <a:fillRef idx="3">
+            <a:schemeClr val="accent1"/>
+          </a:fillRef>
+          <a:effectRef idx="2">
+            <a:schemeClr val="accent1"/>
+          </a:effectRef>
+          <a:fontRef idx="minor">
+            <a:schemeClr val="lt1"/>
+          </a:fontRef>
+        </p:style>
+        <p:txBody>
+          <a:bodyPr rtlCol="0" anchor="ctr"/>
+          <a:lstStyle/>
+          <a:p>
+            <a:pPr algn="ctr"/>
+          </a:p>
+        </p:txBody>
+      </p:sp>
+      <p:sp>
+        <p:nvSpPr>
+          <p:cNvPr id="10" name="Rectangle 9"/>
+          <p:cNvSpPr/>
+          <p:nvPr/>
+        </p:nvSpPr>
+        <p:spPr>
+          <a:xfrm>
+            <a:off x="8229600" y="0"/>
+            <a:ext cx="5486" cy="8229600"/>
+          </a:xfrm>
+          <a:prstGeom prst="rect">
+            <a:avLst/>
+          </a:prstGeom>
+          <a:solidFill>
+            <a:srgbClr val="182124"/>
+          </a:solidFill>
+          <a:ln>
+            <a:noFill/>
+          </a:ln>
+        </p:spPr>
+        <p:style>
+          <a:lnRef idx="1">
+            <a:schemeClr val="accent1"/>
+          </a:lnRef>
+          <a:fillRef idx="3">
+            <a:schemeClr val="accent1"/>
+          </a:fillRef>
+          <a:effectRef idx="2">
+            <a:schemeClr val="accent1"/>
+          </a:effectRef>
+          <a:fontRef idx="minor">
+            <a:schemeClr val="lt1"/>
+          </a:fontRef>
+        </p:style>
+        <p:txBody>
+          <a:bodyPr rtlCol="0" anchor="ctr"/>
+          <a:lstStyle/>
+          <a:p>
+            <a:pPr algn="ctr"/>
+          </a:p>
+        </p:txBody>
+      </p:sp>
+      <p:sp>
+        <p:nvSpPr>
+          <p:cNvPr id="11" name="Rectangle 10"/>
+          <p:cNvSpPr/>
+          <p:nvPr/>
+        </p:nvSpPr>
+        <p:spPr>
+          <a:xfrm>
+            <a:off x="9144000" y="0"/>
+            <a:ext cx="5486" cy="8229600"/>
+          </a:xfrm>
+          <a:prstGeom prst="rect">
+            <a:avLst/>
+          </a:prstGeom>
+          <a:solidFill>
+            <a:srgbClr val="182124"/>
+          </a:solidFill>
+          <a:ln>
+            <a:noFill/>
+          </a:ln>
+        </p:spPr>
+        <p:style>
+          <a:lnRef idx="1">
+            <a:schemeClr val="accent1"/>
+          </a:lnRef>
+          <a:fillRef idx="3">
+            <a:schemeClr val="accent1"/>
+          </a:fillRef>
+          <a:effectRef idx="2">
+            <a:schemeClr val="accent1"/>
+          </a:effectRef>
+          <a:fontRef idx="minor">
+            <a:schemeClr val="lt1"/>
+          </a:fontRef>
+        </p:style>
+        <p:txBody>
+          <a:bodyPr rtlCol="0" anchor="ctr"/>
+          <a:lstStyle/>
+          <a:p>
+            <a:pPr algn="ctr"/>
+          </a:p>
+        </p:txBody>
+      </p:sp>
+      <p:sp>
+        <p:nvSpPr>
+          <p:cNvPr id="12" name="Rectangle 11"/>
+          <p:cNvSpPr/>
+          <p:nvPr/>
+        </p:nvSpPr>
+        <p:spPr>
+          <a:xfrm>
+            <a:off x="10058400" y="0"/>
+            <a:ext cx="5486" cy="8229600"/>
+          </a:xfrm>
+          <a:prstGeom prst="rect">
+            <a:avLst/>
+          </a:prstGeom>
+          <a:solidFill>
+            <a:srgbClr val="182124"/>
+          </a:solidFill>
+          <a:ln>
+            <a:noFill/>
+          </a:ln>
+        </p:spPr>
+        <p:style>
+          <a:lnRef idx="1">
+            <a:schemeClr val="accent1"/>
+          </a:lnRef>
+          <a:fillRef idx="3">
+            <a:schemeClr val="accent1"/>
+          </a:fillRef>
+          <a:effectRef idx="2">
+            <a:schemeClr val="accent1"/>
+          </a:effectRef>
+          <a:fontRef idx="minor">
+            <a:schemeClr val="lt1"/>
+          </a:fontRef>
+        </p:style>
+        <p:txBody>
+          <a:bodyPr rtlCol="0" anchor="ctr"/>
+          <a:lstStyle/>
+          <a:p>
+            <a:pPr algn="ctr"/>
+          </a:p>
+        </p:txBody>
+      </p:sp>
+      <p:sp>
+        <p:nvSpPr>
+          <p:cNvPr id="13" name="Rectangle 12"/>
+          <p:cNvSpPr/>
+          <p:nvPr/>
+        </p:nvSpPr>
+        <p:spPr>
+          <a:xfrm>
+            <a:off x="10972800" y="0"/>
+            <a:ext cx="5486" cy="8229600"/>
+          </a:xfrm>
+          <a:prstGeom prst="rect">
+            <a:avLst/>
+          </a:prstGeom>
+          <a:solidFill>
+            <a:srgbClr val="182124"/>
+          </a:solidFill>
+          <a:ln>
+            <a:noFill/>
+          </a:ln>
+        </p:spPr>
+        <p:style>
+          <a:lnRef idx="1">
+            <a:schemeClr val="accent1"/>
+          </a:lnRef>
+          <a:fillRef idx="3">
+            <a:schemeClr val="accent1"/>
+          </a:fillRef>
+          <a:effectRef idx="2">
+            <a:schemeClr val="accent1"/>
+          </a:effectRef>
+          <a:fontRef idx="minor">
+            <a:schemeClr val="lt1"/>
+          </a:fontRef>
+        </p:style>
+        <p:txBody>
+          <a:bodyPr rtlCol="0" anchor="ctr"/>
+          <a:lstStyle/>
+          <a:p>
+            <a:pPr algn="ctr"/>
+          </a:p>
+        </p:txBody>
+      </p:sp>
+      <p:sp>
+        <p:nvSpPr>
+          <p:cNvPr id="14" name="Rectangle 13"/>
+          <p:cNvSpPr/>
+          <p:nvPr/>
+        </p:nvSpPr>
+        <p:spPr>
+          <a:xfrm>
+            <a:off x="11887200" y="0"/>
+            <a:ext cx="5486" cy="8229600"/>
+          </a:xfrm>
+          <a:prstGeom prst="rect">
+            <a:avLst/>
+          </a:prstGeom>
+          <a:solidFill>
+            <a:srgbClr val="182124"/>
+          </a:solidFill>
+          <a:ln>
+            <a:noFill/>
+          </a:ln>
+        </p:spPr>
+        <p:style>
+          <a:lnRef idx="1">
+            <a:schemeClr val="accent1"/>
+          </a:lnRef>
+          <a:fillRef idx="3">
+            <a:schemeClr val="accent1"/>
+          </a:fillRef>
+          <a:effectRef idx="2">
+            <a:schemeClr val="accent1"/>
+          </a:effectRef>
+          <a:fontRef idx="minor">
+            <a:schemeClr val="lt1"/>
+          </a:fontRef>
+        </p:style>
+        <p:txBody>
+          <a:bodyPr rtlCol="0" anchor="ctr"/>
+          <a:lstStyle/>
+          <a:p>
+            <a:pPr algn="ctr"/>
+          </a:p>
+        </p:txBody>
+      </p:sp>
+      <p:sp>
+        <p:nvSpPr>
+          <p:cNvPr id="15" name="Rectangle 14"/>
+          <p:cNvSpPr/>
+          <p:nvPr/>
+        </p:nvSpPr>
+        <p:spPr>
+          <a:xfrm>
+            <a:off x="12801600" y="0"/>
+            <a:ext cx="5486" cy="8229600"/>
+          </a:xfrm>
+          <a:prstGeom prst="rect">
+            <a:avLst/>
+          </a:prstGeom>
+          <a:solidFill>
+            <a:srgbClr val="182124"/>
+          </a:solidFill>
+          <a:ln>
+            <a:noFill/>
+          </a:ln>
+        </p:spPr>
+        <p:style>
+          <a:lnRef idx="1">
+            <a:schemeClr val="accent1"/>
+          </a:lnRef>
+          <a:fillRef idx="3">
+            <a:schemeClr val="accent1"/>
+          </a:fillRef>
+          <a:effectRef idx="2">
+            <a:schemeClr val="accent1"/>
+          </a:effectRef>
+          <a:fontRef idx="minor">
+            <a:schemeClr val="lt1"/>
+          </a:fontRef>
+        </p:style>
+        <p:txBody>
+          <a:bodyPr rtlCol="0" anchor="ctr"/>
+          <a:lstStyle/>
+          <a:p>
+            <a:pPr algn="ctr"/>
+          </a:p>
+        </p:txBody>
+      </p:sp>
+      <p:sp>
+        <p:nvSpPr>
+          <p:cNvPr id="16" name="Rectangle 15"/>
+          <p:cNvSpPr/>
+          <p:nvPr/>
+        </p:nvSpPr>
+        <p:spPr>
+          <a:xfrm>
+            <a:off x="13716000" y="0"/>
+            <a:ext cx="5486" cy="8229600"/>
+          </a:xfrm>
+          <a:prstGeom prst="rect">
+            <a:avLst/>
+          </a:prstGeom>
+          <a:solidFill>
+            <a:srgbClr val="182124"/>
+          </a:solidFill>
+          <a:ln>
+            <a:noFill/>
+          </a:ln>
+        </p:spPr>
+        <p:style>
+          <a:lnRef idx="1">
+            <a:schemeClr val="accent1"/>
+          </a:lnRef>
+          <a:fillRef idx="3">
+            <a:schemeClr val="accent1"/>
+          </a:fillRef>
+          <a:effectRef idx="2">
+            <a:schemeClr val="accent1"/>
+          </a:effectRef>
+          <a:fontRef idx="minor">
+            <a:schemeClr val="lt1"/>
+          </a:fontRef>
+        </p:style>
+        <p:txBody>
+          <a:bodyPr rtlCol="0" anchor="ctr"/>
+          <a:lstStyle/>
+          <a:p>
+            <a:pPr algn="ctr"/>
+          </a:p>
+        </p:txBody>
+      </p:sp>
+      <p:sp>
+        <p:nvSpPr>
+          <p:cNvPr id="17" name="TextBox 16"/>
+          <p:cNvSpPr txBox="1"/>
+          <p:nvPr/>
+        </p:nvSpPr>
+        <p:spPr>
+          <a:xfrm>
+            <a:off x="658368" y="393192"/>
+            <a:ext cx="10972800" cy="274320"/>
+          </a:xfrm>
+          <a:prstGeom prst="rect">
+            <a:avLst/>
+          </a:prstGeom>
+          <a:noFill/>
+        </p:spPr>
+        <p:txBody>
+          <a:bodyPr wrap="square" lIns="0" rIns="0" tIns="0" bIns="0">
+            <a:spAutoFit/>
+          </a:bodyPr>
+          <a:lstStyle/>
+          <a:p>
+            <a:pPr>
+              <a:spcBef>
+                <a:spcPts val="0"/>
+              </a:spcBef>
+              <a:spcAft>
+                <a:spcPts val="900"/>
+              </a:spcAft>
+              <a:defRPr sz="1100" b="0">
+                <a:solidFill>
+                  <a:srgbClr val="AFBDC0"/>
+                </a:solidFill>
+                <a:latin typeface="Noto Sans"/>
+              </a:defRPr>
+            </a:pPr>
+            <a:r>
+              <a:t>OR02 / E01 · ИССЛЕДОВАНИЕ</a:t>
+            </a:r>
+          </a:p>
+        </p:txBody>
+      </p:sp>
+      <p:sp>
+        <p:nvSpPr>
+          <p:cNvPr id="18" name="TextBox 17"/>
+          <p:cNvSpPr txBox="1"/>
+          <p:nvPr/>
+        </p:nvSpPr>
+        <p:spPr>
+          <a:xfrm>
+            <a:off x="12390120" y="393192"/>
+            <a:ext cx="1828800" cy="274320"/>
+          </a:xfrm>
+          <a:prstGeom prst="rect">
+            <a:avLst/>
+          </a:prstGeom>
+          <a:noFill/>
+        </p:spPr>
+        <p:txBody>
+          <a:bodyPr wrap="square" lIns="0" rIns="0" tIns="0" bIns="0">
+            <a:spAutoFit/>
+          </a:bodyPr>
+          <a:lstStyle/>
+          <a:p>
+            <a:pPr>
+              <a:spcBef>
+                <a:spcPts val="0"/>
+              </a:spcBef>
+              <a:spcAft>
+                <a:spcPts val="900"/>
+              </a:spcAft>
+              <a:defRPr sz="1100" b="1">
+                <a:solidFill>
+                  <a:srgbClr val="FF793F"/>
+                </a:solidFill>
+                <a:latin typeface="Noto Sans"/>
+              </a:defRPr>
+            </a:pPr>
+            <a:r>
+              <a:t>PLBP / SG1</a:t>
+            </a:r>
+          </a:p>
+        </p:txBody>
+      </p:sp>
+      <p:sp>
+        <p:nvSpPr>
+          <p:cNvPr id="19" name="Rectangle 18"/>
+          <p:cNvSpPr/>
+          <p:nvPr/>
+        </p:nvSpPr>
+        <p:spPr>
+          <a:xfrm>
+            <a:off x="658368" y="914400"/>
+            <a:ext cx="13313664" cy="10972"/>
+          </a:xfrm>
+          <a:prstGeom prst="rect">
+            <a:avLst/>
+          </a:prstGeom>
+          <a:solidFill>
+            <a:srgbClr val="354347"/>
+          </a:solidFill>
+          <a:ln>
+            <a:noFill/>
+          </a:ln>
+        </p:spPr>
+        <p:style>
+          <a:lnRef idx="1">
+            <a:schemeClr val="accent1"/>
+          </a:lnRef>
+          <a:fillRef idx="3">
+            <a:schemeClr val="accent1"/>
+          </a:fillRef>
+          <a:effectRef idx="2">
+            <a:schemeClr val="accent1"/>
+          </a:effectRef>
+          <a:fontRef idx="minor">
+            <a:schemeClr val="lt1"/>
+          </a:fontRef>
+        </p:style>
+        <p:txBody>
+          <a:bodyPr rtlCol="0" anchor="ctr"/>
+          <a:lstStyle/>
+          <a:p>
+            <a:pPr algn="ctr"/>
+          </a:p>
+        </p:txBody>
+      </p:sp>
+      <p:sp>
+        <p:nvSpPr>
+          <p:cNvPr id="20" name="TextBox 19"/>
+          <p:cNvSpPr txBox="1"/>
+          <p:nvPr/>
+        </p:nvSpPr>
+        <p:spPr>
+          <a:xfrm>
+            <a:off x="658368" y="1243584"/>
+            <a:ext cx="13213080" cy="1097280"/>
+          </a:xfrm>
+          <a:prstGeom prst="rect">
+            <a:avLst/>
+          </a:prstGeom>
+          <a:noFill/>
+        </p:spPr>
+        <p:txBody>
+          <a:bodyPr wrap="square" lIns="0" rIns="0" tIns="0" bIns="0">
+            <a:spAutoFit/>
+          </a:bodyPr>
+          <a:lstStyle/>
+          <a:p>
+            <a:pPr>
+              <a:spcBef>
+                <a:spcPts val="0"/>
+              </a:spcBef>
+              <a:spcAft>
+                <a:spcPts val="900"/>
+              </a:spcAft>
+              <a:defRPr sz="3700" b="1">
                 <a:solidFill>
                   <a:srgbClr val="F4F1E9"/>
                 </a:solidFill>
@@ -16073,63 +18911,64 @@
               </a:defRPr>
             </a:pPr>
             <a:r>
-              <a:t>NASA / Barrowman</a:t>
+              <a:t>Измерению давления нужен стенд</a:t>
             </a:r>
           </a:p>
         </p:txBody>
       </p:sp>
       <p:sp>
         <p:nvSpPr>
-          <p:cNvPr id="35" name="TextBox 34"/>
+          <p:cNvPr id="21" name="Rectangle 20"/>
+          <p:cNvSpPr/>
+          <p:nvPr/>
+        </p:nvSpPr>
+        <p:spPr>
+          <a:xfrm>
+            <a:off x="658368" y="7159752"/>
+            <a:ext cx="13313664" cy="10972"/>
+          </a:xfrm>
+          <a:prstGeom prst="rect">
+            <a:avLst/>
+          </a:prstGeom>
+          <a:solidFill>
+            <a:srgbClr val="354347"/>
+          </a:solidFill>
+          <a:ln>
+            <a:noFill/>
+          </a:ln>
+        </p:spPr>
+        <p:style>
+          <a:lnRef idx="1">
+            <a:schemeClr val="accent1"/>
+          </a:lnRef>
+          <a:fillRef idx="3">
+            <a:schemeClr val="accent1"/>
+          </a:fillRef>
+          <a:effectRef idx="2">
+            <a:schemeClr val="accent1"/>
+          </a:effectRef>
+          <a:fontRef idx="minor">
+            <a:schemeClr val="lt1"/>
+          </a:fontRef>
+        </p:style>
+        <p:txBody>
+          <a:bodyPr rtlCol="0" anchor="ctr"/>
+          <a:lstStyle/>
+          <a:p>
+            <a:pPr algn="ctr"/>
+          </a:p>
+        </p:txBody>
+      </p:sp>
+      <p:sp>
+        <p:nvSpPr>
+          <p:cNvPr id="22" name="TextBox 21"/>
           <p:cNvSpPr txBox="1"/>
           <p:nvPr/>
         </p:nvSpPr>
         <p:spPr>
           <a:xfrm>
-            <a:off x="9921240" y="4133087"/>
-            <a:ext cx="3822191" cy="1097280"/>
-          </a:xfrm>
-          <a:prstGeom prst="rect">
-            <a:avLst/>
-          </a:prstGeom>
-          <a:noFill/>
-        </p:spPr>
-        <p:txBody>
-          <a:bodyPr wrap="square" lIns="0" rIns="0" tIns="0" bIns="0">
-            <a:spAutoFit/>
-          </a:bodyPr>
-          <a:lstStyle/>
-          <a:p>
-            <a:pPr>
-              <a:spcBef>
-                <a:spcPts val="0"/>
-              </a:spcBef>
-              <a:spcAft>
-                <a:spcPts val="900"/>
-              </a:spcAft>
-              <a:defRPr sz="1900" b="0">
-                <a:solidFill>
-                  <a:srgbClr val="AFBDC0"/>
-                </a:solidFill>
-                <a:latin typeface="Noto Sans"/>
-              </a:defRPr>
-            </a:pPr>
-            <a:r>
-              <a:t>Метод линейной оценки и ограничения применимости.</a:t>
-            </a:r>
-          </a:p>
-        </p:txBody>
-      </p:sp>
-      <p:sp>
-        <p:nvSpPr>
-          <p:cNvPr id="36" name="TextBox 35"/>
-          <p:cNvSpPr txBox="1"/>
-          <p:nvPr/>
-        </p:nvSpPr>
-        <p:spPr>
-          <a:xfrm>
-            <a:off x="9921240" y="5504688"/>
-            <a:ext cx="3822191" cy="594360"/>
+            <a:off x="658368" y="7342631"/>
+            <a:ext cx="12344400" cy="621792"/>
           </a:xfrm>
           <a:prstGeom prst="rect">
             <a:avLst/>
@@ -16151,20 +18990,126 @@
               </a:spcAft>
               <a:defRPr sz="1200" b="0">
                 <a:solidFill>
+                  <a:srgbClr val="AFBDC0"/>
+                </a:solidFill>
+                <a:latin typeface="Noto Sans"/>
+              </a:defRPr>
+            </a:pPr>
+            <a:r>
+              <a:t>τ = 0,02 / 0,1 / 0,5 с — допущения для сравнения, не измеренные характеристики самописца.</a:t>
+            </a:r>
+          </a:p>
+        </p:txBody>
+      </p:sp>
+      <p:sp>
+        <p:nvSpPr>
+          <p:cNvPr id="23" name="TextBox 22"/>
+          <p:cNvSpPr txBox="1"/>
+          <p:nvPr/>
+        </p:nvSpPr>
+        <p:spPr>
+          <a:xfrm>
+            <a:off x="13121640" y="7507224"/>
+            <a:ext cx="914400" cy="365760"/>
+          </a:xfrm>
+          <a:prstGeom prst="rect">
+            <a:avLst/>
+          </a:prstGeom>
+          <a:noFill/>
+        </p:spPr>
+        <p:txBody>
+          <a:bodyPr wrap="square" lIns="0" rIns="0" tIns="0" bIns="0">
+            <a:spAutoFit/>
+          </a:bodyPr>
+          <a:lstStyle/>
+          <a:p>
+            <a:pPr>
+              <a:spcBef>
+                <a:spcPts val="0"/>
+              </a:spcBef>
+              <a:spcAft>
+                <a:spcPts val="900"/>
+              </a:spcAft>
+              <a:defRPr sz="1100" b="0">
+                <a:solidFill>
                   <a:srgbClr val="FF793F"/>
                 </a:solidFill>
                 <a:latin typeface="Noto Sans"/>
               </a:defRPr>
             </a:pPr>
             <a:r>
-              <a:rPr>
-                <a:hlinkClick r:id="rId5"/>
-              </a:rPr>
-              <a:t>https://ntrs.nasa.gov/citations/20010047838</a:t>
+              <a:t>19 / 21</a:t>
             </a:r>
           </a:p>
         </p:txBody>
       </p:sp>
+      <p:sp>
+        <p:nvSpPr>
+          <p:cNvPr id="24" name="Rectangle 23"/>
+          <p:cNvSpPr/>
+          <p:nvPr/>
+        </p:nvSpPr>
+        <p:spPr>
+          <a:xfrm>
+            <a:off x="0" y="8183879"/>
+            <a:ext cx="13237028" cy="45720"/>
+          </a:xfrm>
+          <a:prstGeom prst="rect">
+            <a:avLst/>
+          </a:prstGeom>
+          <a:solidFill>
+            <a:srgbClr val="FF793F"/>
+          </a:solidFill>
+          <a:ln>
+            <a:noFill/>
+          </a:ln>
+        </p:spPr>
+        <p:style>
+          <a:lnRef idx="1">
+            <a:schemeClr val="accent1"/>
+          </a:lnRef>
+          <a:fillRef idx="3">
+            <a:schemeClr val="accent1"/>
+          </a:fillRef>
+          <a:effectRef idx="2">
+            <a:schemeClr val="accent1"/>
+          </a:effectRef>
+          <a:fontRef idx="minor">
+            <a:schemeClr val="lt1"/>
+          </a:fontRef>
+        </p:style>
+        <p:txBody>
+          <a:bodyPr rtlCol="0" anchor="ctr"/>
+          <a:lstStyle/>
+          <a:p>
+            <a:pPr algn="ctr"/>
+          </a:p>
+        </p:txBody>
+      </p:sp>
+      <p:pic>
+        <p:nvPicPr>
+          <p:cNvPr id="25" name="Picture 24" descr="pressure-lag.png"/>
+          <p:cNvPicPr>
+            <a:picLocks noChangeAspect="1"/>
+          </p:cNvPicPr>
+          <p:nvPr/>
+        </p:nvPicPr>
+        <p:blipFill>
+          <a:blip r:embed="rId3"/>
+          <a:stretch>
+            <a:fillRect/>
+          </a:stretch>
+        </p:blipFill>
+        <p:spPr>
+          <a:xfrm>
+            <a:off x="1531619" y="2395728"/>
+            <a:ext cx="11567160" cy="4526280"/>
+          </a:xfrm>
+          <a:prstGeom prst="rect">
+            <a:avLst/>
+          </a:prstGeom>
+        </p:spPr>
+      </p:pic>
     </p:spTree>
   </p:cSld>
   <p:clrMapOvr>
@@ -17127,7 +20072,7 @@
               </a:defRPr>
             </a:pPr>
             <a:r>
-              <a:t>02 / 16</a:t>
+              <a:t>02 / 21</a:t>
             </a:r>
           </a:p>
         </p:txBody>
@@ -17141,7 +20086,7 @@
         <p:spPr>
           <a:xfrm>
             <a:off x="0" y="8183879"/>
-            <a:ext cx="1828800" cy="45720"/>
+            <a:ext cx="1393371" cy="45720"/>
           </a:xfrm>
           <a:prstGeom prst="rect">
             <a:avLst/>
@@ -17678,6 +20623,3052 @@
             </a:pPr>
             <a:r>
               <a:t>Измерения, события и сопоставление журналов.</a:t>
+            </a:r>
+          </a:p>
+        </p:txBody>
+      </p:sp>
+    </p:spTree>
+  </p:cSld>
+  <p:clrMapOvr>
+    <a:masterClrMapping/>
+  </p:clrMapOvr>
+</p:sld>
+</file>
+
+<file path=ppt/slides/slide20.xml><?xml version="1.0" encoding="utf-8"?>
+<p:sld xmlns:a="http://schemas.openxmlformats.org/drawingml/2006/main" xmlns:p="http://schemas.openxmlformats.org/presentationml/2006/main" xmlns:r="http://schemas.openxmlformats.org/officeDocument/2006/relationships">
+  <p:cSld>
+    <p:bg>
+      <p:bgPr>
+        <a:solidFill>
+          <a:srgbClr val="101719"/>
+        </a:solidFill>
+        <a:effectLst/>
+      </p:bgPr>
+    </p:bg>
+    <p:spTree>
+      <p:nvGrpSpPr>
+        <p:cNvPr id="1" name=""/>
+        <p:cNvGrpSpPr/>
+        <p:nvPr/>
+      </p:nvGrpSpPr>
+      <p:grpSpPr/>
+      <p:sp>
+        <p:nvSpPr>
+          <p:cNvPr id="2" name="Rectangle 1"/>
+          <p:cNvSpPr/>
+          <p:nvPr/>
+        </p:nvSpPr>
+        <p:spPr>
+          <a:xfrm>
+            <a:off x="914400" y="0"/>
+            <a:ext cx="5486" cy="8229600"/>
+          </a:xfrm>
+          <a:prstGeom prst="rect">
+            <a:avLst/>
+          </a:prstGeom>
+          <a:solidFill>
+            <a:srgbClr val="182124"/>
+          </a:solidFill>
+          <a:ln>
+            <a:noFill/>
+          </a:ln>
+        </p:spPr>
+        <p:style>
+          <a:lnRef idx="1">
+            <a:schemeClr val="accent1"/>
+          </a:lnRef>
+          <a:fillRef idx="3">
+            <a:schemeClr val="accent1"/>
+          </a:fillRef>
+          <a:effectRef idx="2">
+            <a:schemeClr val="accent1"/>
+          </a:effectRef>
+          <a:fontRef idx="minor">
+            <a:schemeClr val="lt1"/>
+          </a:fontRef>
+        </p:style>
+        <p:txBody>
+          <a:bodyPr rtlCol="0" anchor="ctr"/>
+          <a:lstStyle/>
+          <a:p>
+            <a:pPr algn="ctr"/>
+          </a:p>
+        </p:txBody>
+      </p:sp>
+      <p:sp>
+        <p:nvSpPr>
+          <p:cNvPr id="3" name="Rectangle 2"/>
+          <p:cNvSpPr/>
+          <p:nvPr/>
+        </p:nvSpPr>
+        <p:spPr>
+          <a:xfrm>
+            <a:off x="1828800" y="0"/>
+            <a:ext cx="5486" cy="8229600"/>
+          </a:xfrm>
+          <a:prstGeom prst="rect">
+            <a:avLst/>
+          </a:prstGeom>
+          <a:solidFill>
+            <a:srgbClr val="182124"/>
+          </a:solidFill>
+          <a:ln>
+            <a:noFill/>
+          </a:ln>
+        </p:spPr>
+        <p:style>
+          <a:lnRef idx="1">
+            <a:schemeClr val="accent1"/>
+          </a:lnRef>
+          <a:fillRef idx="3">
+            <a:schemeClr val="accent1"/>
+          </a:fillRef>
+          <a:effectRef idx="2">
+            <a:schemeClr val="accent1"/>
+          </a:effectRef>
+          <a:fontRef idx="minor">
+            <a:schemeClr val="lt1"/>
+          </a:fontRef>
+        </p:style>
+        <p:txBody>
+          <a:bodyPr rtlCol="0" anchor="ctr"/>
+          <a:lstStyle/>
+          <a:p>
+            <a:pPr algn="ctr"/>
+          </a:p>
+        </p:txBody>
+      </p:sp>
+      <p:sp>
+        <p:nvSpPr>
+          <p:cNvPr id="4" name="Rectangle 3"/>
+          <p:cNvSpPr/>
+          <p:nvPr/>
+        </p:nvSpPr>
+        <p:spPr>
+          <a:xfrm>
+            <a:off x="2743200" y="0"/>
+            <a:ext cx="5486" cy="8229600"/>
+          </a:xfrm>
+          <a:prstGeom prst="rect">
+            <a:avLst/>
+          </a:prstGeom>
+          <a:solidFill>
+            <a:srgbClr val="182124"/>
+          </a:solidFill>
+          <a:ln>
+            <a:noFill/>
+          </a:ln>
+        </p:spPr>
+        <p:style>
+          <a:lnRef idx="1">
+            <a:schemeClr val="accent1"/>
+          </a:lnRef>
+          <a:fillRef idx="3">
+            <a:schemeClr val="accent1"/>
+          </a:fillRef>
+          <a:effectRef idx="2">
+            <a:schemeClr val="accent1"/>
+          </a:effectRef>
+          <a:fontRef idx="minor">
+            <a:schemeClr val="lt1"/>
+          </a:fontRef>
+        </p:style>
+        <p:txBody>
+          <a:bodyPr rtlCol="0" anchor="ctr"/>
+          <a:lstStyle/>
+          <a:p>
+            <a:pPr algn="ctr"/>
+          </a:p>
+        </p:txBody>
+      </p:sp>
+      <p:sp>
+        <p:nvSpPr>
+          <p:cNvPr id="5" name="Rectangle 4"/>
+          <p:cNvSpPr/>
+          <p:nvPr/>
+        </p:nvSpPr>
+        <p:spPr>
+          <a:xfrm>
+            <a:off x="3657600" y="0"/>
+            <a:ext cx="5486" cy="8229600"/>
+          </a:xfrm>
+          <a:prstGeom prst="rect">
+            <a:avLst/>
+          </a:prstGeom>
+          <a:solidFill>
+            <a:srgbClr val="182124"/>
+          </a:solidFill>
+          <a:ln>
+            <a:noFill/>
+          </a:ln>
+        </p:spPr>
+        <p:style>
+          <a:lnRef idx="1">
+            <a:schemeClr val="accent1"/>
+          </a:lnRef>
+          <a:fillRef idx="3">
+            <a:schemeClr val="accent1"/>
+          </a:fillRef>
+          <a:effectRef idx="2">
+            <a:schemeClr val="accent1"/>
+          </a:effectRef>
+          <a:fontRef idx="minor">
+            <a:schemeClr val="lt1"/>
+          </a:fontRef>
+        </p:style>
+        <p:txBody>
+          <a:bodyPr rtlCol="0" anchor="ctr"/>
+          <a:lstStyle/>
+          <a:p>
+            <a:pPr algn="ctr"/>
+          </a:p>
+        </p:txBody>
+      </p:sp>
+      <p:sp>
+        <p:nvSpPr>
+          <p:cNvPr id="6" name="Rectangle 5"/>
+          <p:cNvSpPr/>
+          <p:nvPr/>
+        </p:nvSpPr>
+        <p:spPr>
+          <a:xfrm>
+            <a:off x="4572000" y="0"/>
+            <a:ext cx="5486" cy="8229600"/>
+          </a:xfrm>
+          <a:prstGeom prst="rect">
+            <a:avLst/>
+          </a:prstGeom>
+          <a:solidFill>
+            <a:srgbClr val="182124"/>
+          </a:solidFill>
+          <a:ln>
+            <a:noFill/>
+          </a:ln>
+        </p:spPr>
+        <p:style>
+          <a:lnRef idx="1">
+            <a:schemeClr val="accent1"/>
+          </a:lnRef>
+          <a:fillRef idx="3">
+            <a:schemeClr val="accent1"/>
+          </a:fillRef>
+          <a:effectRef idx="2">
+            <a:schemeClr val="accent1"/>
+          </a:effectRef>
+          <a:fontRef idx="minor">
+            <a:schemeClr val="lt1"/>
+          </a:fontRef>
+        </p:style>
+        <p:txBody>
+          <a:bodyPr rtlCol="0" anchor="ctr"/>
+          <a:lstStyle/>
+          <a:p>
+            <a:pPr algn="ctr"/>
+          </a:p>
+        </p:txBody>
+      </p:sp>
+      <p:sp>
+        <p:nvSpPr>
+          <p:cNvPr id="7" name="Rectangle 6"/>
+          <p:cNvSpPr/>
+          <p:nvPr/>
+        </p:nvSpPr>
+        <p:spPr>
+          <a:xfrm>
+            <a:off x="5486400" y="0"/>
+            <a:ext cx="5486" cy="8229600"/>
+          </a:xfrm>
+          <a:prstGeom prst="rect">
+            <a:avLst/>
+          </a:prstGeom>
+          <a:solidFill>
+            <a:srgbClr val="182124"/>
+          </a:solidFill>
+          <a:ln>
+            <a:noFill/>
+          </a:ln>
+        </p:spPr>
+        <p:style>
+          <a:lnRef idx="1">
+            <a:schemeClr val="accent1"/>
+          </a:lnRef>
+          <a:fillRef idx="3">
+            <a:schemeClr val="accent1"/>
+          </a:fillRef>
+          <a:effectRef idx="2">
+            <a:schemeClr val="accent1"/>
+          </a:effectRef>
+          <a:fontRef idx="minor">
+            <a:schemeClr val="lt1"/>
+          </a:fontRef>
+        </p:style>
+        <p:txBody>
+          <a:bodyPr rtlCol="0" anchor="ctr"/>
+          <a:lstStyle/>
+          <a:p>
+            <a:pPr algn="ctr"/>
+          </a:p>
+        </p:txBody>
+      </p:sp>
+      <p:sp>
+        <p:nvSpPr>
+          <p:cNvPr id="8" name="Rectangle 7"/>
+          <p:cNvSpPr/>
+          <p:nvPr/>
+        </p:nvSpPr>
+        <p:spPr>
+          <a:xfrm>
+            <a:off x="6400800" y="0"/>
+            <a:ext cx="5486" cy="8229600"/>
+          </a:xfrm>
+          <a:prstGeom prst="rect">
+            <a:avLst/>
+          </a:prstGeom>
+          <a:solidFill>
+            <a:srgbClr val="182124"/>
+          </a:solidFill>
+          <a:ln>
+            <a:noFill/>
+          </a:ln>
+        </p:spPr>
+        <p:style>
+          <a:lnRef idx="1">
+            <a:schemeClr val="accent1"/>
+          </a:lnRef>
+          <a:fillRef idx="3">
+            <a:schemeClr val="accent1"/>
+          </a:fillRef>
+          <a:effectRef idx="2">
+            <a:schemeClr val="accent1"/>
+          </a:effectRef>
+          <a:fontRef idx="minor">
+            <a:schemeClr val="lt1"/>
+          </a:fontRef>
+        </p:style>
+        <p:txBody>
+          <a:bodyPr rtlCol="0" anchor="ctr"/>
+          <a:lstStyle/>
+          <a:p>
+            <a:pPr algn="ctr"/>
+          </a:p>
+        </p:txBody>
+      </p:sp>
+      <p:sp>
+        <p:nvSpPr>
+          <p:cNvPr id="9" name="Rectangle 8"/>
+          <p:cNvSpPr/>
+          <p:nvPr/>
+        </p:nvSpPr>
+        <p:spPr>
+          <a:xfrm>
+            <a:off x="7315200" y="0"/>
+            <a:ext cx="5486" cy="8229600"/>
+          </a:xfrm>
+          <a:prstGeom prst="rect">
+            <a:avLst/>
+          </a:prstGeom>
+          <a:solidFill>
+            <a:srgbClr val="182124"/>
+          </a:solidFill>
+          <a:ln>
+            <a:noFill/>
+          </a:ln>
+        </p:spPr>
+        <p:style>
+          <a:lnRef idx="1">
+            <a:schemeClr val="accent1"/>
+          </a:lnRef>
+          <a:fillRef idx="3">
+            <a:schemeClr val="accent1"/>
+          </a:fillRef>
+          <a:effectRef idx="2">
+            <a:schemeClr val="accent1"/>
+          </a:effectRef>
+          <a:fontRef idx="minor">
+            <a:schemeClr val="lt1"/>
+          </a:fontRef>
+        </p:style>
+        <p:txBody>
+          <a:bodyPr rtlCol="0" anchor="ctr"/>
+          <a:lstStyle/>
+          <a:p>
+            <a:pPr algn="ctr"/>
+          </a:p>
+        </p:txBody>
+      </p:sp>
+      <p:sp>
+        <p:nvSpPr>
+          <p:cNvPr id="10" name="Rectangle 9"/>
+          <p:cNvSpPr/>
+          <p:nvPr/>
+        </p:nvSpPr>
+        <p:spPr>
+          <a:xfrm>
+            <a:off x="8229600" y="0"/>
+            <a:ext cx="5486" cy="8229600"/>
+          </a:xfrm>
+          <a:prstGeom prst="rect">
+            <a:avLst/>
+          </a:prstGeom>
+          <a:solidFill>
+            <a:srgbClr val="182124"/>
+          </a:solidFill>
+          <a:ln>
+            <a:noFill/>
+          </a:ln>
+        </p:spPr>
+        <p:style>
+          <a:lnRef idx="1">
+            <a:schemeClr val="accent1"/>
+          </a:lnRef>
+          <a:fillRef idx="3">
+            <a:schemeClr val="accent1"/>
+          </a:fillRef>
+          <a:effectRef idx="2">
+            <a:schemeClr val="accent1"/>
+          </a:effectRef>
+          <a:fontRef idx="minor">
+            <a:schemeClr val="lt1"/>
+          </a:fontRef>
+        </p:style>
+        <p:txBody>
+          <a:bodyPr rtlCol="0" anchor="ctr"/>
+          <a:lstStyle/>
+          <a:p>
+            <a:pPr algn="ctr"/>
+          </a:p>
+        </p:txBody>
+      </p:sp>
+      <p:sp>
+        <p:nvSpPr>
+          <p:cNvPr id="11" name="Rectangle 10"/>
+          <p:cNvSpPr/>
+          <p:nvPr/>
+        </p:nvSpPr>
+        <p:spPr>
+          <a:xfrm>
+            <a:off x="9144000" y="0"/>
+            <a:ext cx="5486" cy="8229600"/>
+          </a:xfrm>
+          <a:prstGeom prst="rect">
+            <a:avLst/>
+          </a:prstGeom>
+          <a:solidFill>
+            <a:srgbClr val="182124"/>
+          </a:solidFill>
+          <a:ln>
+            <a:noFill/>
+          </a:ln>
+        </p:spPr>
+        <p:style>
+          <a:lnRef idx="1">
+            <a:schemeClr val="accent1"/>
+          </a:lnRef>
+          <a:fillRef idx="3">
+            <a:schemeClr val="accent1"/>
+          </a:fillRef>
+          <a:effectRef idx="2">
+            <a:schemeClr val="accent1"/>
+          </a:effectRef>
+          <a:fontRef idx="minor">
+            <a:schemeClr val="lt1"/>
+          </a:fontRef>
+        </p:style>
+        <p:txBody>
+          <a:bodyPr rtlCol="0" anchor="ctr"/>
+          <a:lstStyle/>
+          <a:p>
+            <a:pPr algn="ctr"/>
+          </a:p>
+        </p:txBody>
+      </p:sp>
+      <p:sp>
+        <p:nvSpPr>
+          <p:cNvPr id="12" name="Rectangle 11"/>
+          <p:cNvSpPr/>
+          <p:nvPr/>
+        </p:nvSpPr>
+        <p:spPr>
+          <a:xfrm>
+            <a:off x="10058400" y="0"/>
+            <a:ext cx="5486" cy="8229600"/>
+          </a:xfrm>
+          <a:prstGeom prst="rect">
+            <a:avLst/>
+          </a:prstGeom>
+          <a:solidFill>
+            <a:srgbClr val="182124"/>
+          </a:solidFill>
+          <a:ln>
+            <a:noFill/>
+          </a:ln>
+        </p:spPr>
+        <p:style>
+          <a:lnRef idx="1">
+            <a:schemeClr val="accent1"/>
+          </a:lnRef>
+          <a:fillRef idx="3">
+            <a:schemeClr val="accent1"/>
+          </a:fillRef>
+          <a:effectRef idx="2">
+            <a:schemeClr val="accent1"/>
+          </a:effectRef>
+          <a:fontRef idx="minor">
+            <a:schemeClr val="lt1"/>
+          </a:fontRef>
+        </p:style>
+        <p:txBody>
+          <a:bodyPr rtlCol="0" anchor="ctr"/>
+          <a:lstStyle/>
+          <a:p>
+            <a:pPr algn="ctr"/>
+          </a:p>
+        </p:txBody>
+      </p:sp>
+      <p:sp>
+        <p:nvSpPr>
+          <p:cNvPr id="13" name="Rectangle 12"/>
+          <p:cNvSpPr/>
+          <p:nvPr/>
+        </p:nvSpPr>
+        <p:spPr>
+          <a:xfrm>
+            <a:off x="10972800" y="0"/>
+            <a:ext cx="5486" cy="8229600"/>
+          </a:xfrm>
+          <a:prstGeom prst="rect">
+            <a:avLst/>
+          </a:prstGeom>
+          <a:solidFill>
+            <a:srgbClr val="182124"/>
+          </a:solidFill>
+          <a:ln>
+            <a:noFill/>
+          </a:ln>
+        </p:spPr>
+        <p:style>
+          <a:lnRef idx="1">
+            <a:schemeClr val="accent1"/>
+          </a:lnRef>
+          <a:fillRef idx="3">
+            <a:schemeClr val="accent1"/>
+          </a:fillRef>
+          <a:effectRef idx="2">
+            <a:schemeClr val="accent1"/>
+          </a:effectRef>
+          <a:fontRef idx="minor">
+            <a:schemeClr val="lt1"/>
+          </a:fontRef>
+        </p:style>
+        <p:txBody>
+          <a:bodyPr rtlCol="0" anchor="ctr"/>
+          <a:lstStyle/>
+          <a:p>
+            <a:pPr algn="ctr"/>
+          </a:p>
+        </p:txBody>
+      </p:sp>
+      <p:sp>
+        <p:nvSpPr>
+          <p:cNvPr id="14" name="Rectangle 13"/>
+          <p:cNvSpPr/>
+          <p:nvPr/>
+        </p:nvSpPr>
+        <p:spPr>
+          <a:xfrm>
+            <a:off x="11887200" y="0"/>
+            <a:ext cx="5486" cy="8229600"/>
+          </a:xfrm>
+          <a:prstGeom prst="rect">
+            <a:avLst/>
+          </a:prstGeom>
+          <a:solidFill>
+            <a:srgbClr val="182124"/>
+          </a:solidFill>
+          <a:ln>
+            <a:noFill/>
+          </a:ln>
+        </p:spPr>
+        <p:style>
+          <a:lnRef idx="1">
+            <a:schemeClr val="accent1"/>
+          </a:lnRef>
+          <a:fillRef idx="3">
+            <a:schemeClr val="accent1"/>
+          </a:fillRef>
+          <a:effectRef idx="2">
+            <a:schemeClr val="accent1"/>
+          </a:effectRef>
+          <a:fontRef idx="minor">
+            <a:schemeClr val="lt1"/>
+          </a:fontRef>
+        </p:style>
+        <p:txBody>
+          <a:bodyPr rtlCol="0" anchor="ctr"/>
+          <a:lstStyle/>
+          <a:p>
+            <a:pPr algn="ctr"/>
+          </a:p>
+        </p:txBody>
+      </p:sp>
+      <p:sp>
+        <p:nvSpPr>
+          <p:cNvPr id="15" name="Rectangle 14"/>
+          <p:cNvSpPr/>
+          <p:nvPr/>
+        </p:nvSpPr>
+        <p:spPr>
+          <a:xfrm>
+            <a:off x="12801600" y="0"/>
+            <a:ext cx="5486" cy="8229600"/>
+          </a:xfrm>
+          <a:prstGeom prst="rect">
+            <a:avLst/>
+          </a:prstGeom>
+          <a:solidFill>
+            <a:srgbClr val="182124"/>
+          </a:solidFill>
+          <a:ln>
+            <a:noFill/>
+          </a:ln>
+        </p:spPr>
+        <p:style>
+          <a:lnRef idx="1">
+            <a:schemeClr val="accent1"/>
+          </a:lnRef>
+          <a:fillRef idx="3">
+            <a:schemeClr val="accent1"/>
+          </a:fillRef>
+          <a:effectRef idx="2">
+            <a:schemeClr val="accent1"/>
+          </a:effectRef>
+          <a:fontRef idx="minor">
+            <a:schemeClr val="lt1"/>
+          </a:fontRef>
+        </p:style>
+        <p:txBody>
+          <a:bodyPr rtlCol="0" anchor="ctr"/>
+          <a:lstStyle/>
+          <a:p>
+            <a:pPr algn="ctr"/>
+          </a:p>
+        </p:txBody>
+      </p:sp>
+      <p:sp>
+        <p:nvSpPr>
+          <p:cNvPr id="16" name="Rectangle 15"/>
+          <p:cNvSpPr/>
+          <p:nvPr/>
+        </p:nvSpPr>
+        <p:spPr>
+          <a:xfrm>
+            <a:off x="13716000" y="0"/>
+            <a:ext cx="5486" cy="8229600"/>
+          </a:xfrm>
+          <a:prstGeom prst="rect">
+            <a:avLst/>
+          </a:prstGeom>
+          <a:solidFill>
+            <a:srgbClr val="182124"/>
+          </a:solidFill>
+          <a:ln>
+            <a:noFill/>
+          </a:ln>
+        </p:spPr>
+        <p:style>
+          <a:lnRef idx="1">
+            <a:schemeClr val="accent1"/>
+          </a:lnRef>
+          <a:fillRef idx="3">
+            <a:schemeClr val="accent1"/>
+          </a:fillRef>
+          <a:effectRef idx="2">
+            <a:schemeClr val="accent1"/>
+          </a:effectRef>
+          <a:fontRef idx="minor">
+            <a:schemeClr val="lt1"/>
+          </a:fontRef>
+        </p:style>
+        <p:txBody>
+          <a:bodyPr rtlCol="0" anchor="ctr"/>
+          <a:lstStyle/>
+          <a:p>
+            <a:pPr algn="ctr"/>
+          </a:p>
+        </p:txBody>
+      </p:sp>
+      <p:sp>
+        <p:nvSpPr>
+          <p:cNvPr id="17" name="TextBox 16"/>
+          <p:cNvSpPr txBox="1"/>
+          <p:nvPr/>
+        </p:nvSpPr>
+        <p:spPr>
+          <a:xfrm>
+            <a:off x="658368" y="393192"/>
+            <a:ext cx="10972800" cy="274320"/>
+          </a:xfrm>
+          <a:prstGeom prst="rect">
+            <a:avLst/>
+          </a:prstGeom>
+          <a:noFill/>
+        </p:spPr>
+        <p:txBody>
+          <a:bodyPr wrap="square" lIns="0" rIns="0" tIns="0" bIns="0">
+            <a:spAutoFit/>
+          </a:bodyPr>
+          <a:lstStyle/>
+          <a:p>
+            <a:pPr>
+              <a:spcBef>
+                <a:spcPts val="0"/>
+              </a:spcBef>
+              <a:spcAft>
+                <a:spcPts val="900"/>
+              </a:spcAft>
+              <a:defRPr sz="1100" b="0">
+                <a:solidFill>
+                  <a:srgbClr val="AFBDC0"/>
+                </a:solidFill>
+                <a:latin typeface="Noto Sans"/>
+              </a:defRPr>
+            </a:pPr>
+            <a:r>
+              <a:t>OR02 / E01 · ИССЛЕДОВАНИЕ</a:t>
+            </a:r>
+          </a:p>
+        </p:txBody>
+      </p:sp>
+      <p:sp>
+        <p:nvSpPr>
+          <p:cNvPr id="18" name="TextBox 17"/>
+          <p:cNvSpPr txBox="1"/>
+          <p:nvPr/>
+        </p:nvSpPr>
+        <p:spPr>
+          <a:xfrm>
+            <a:off x="12390120" y="393192"/>
+            <a:ext cx="1828800" cy="274320"/>
+          </a:xfrm>
+          <a:prstGeom prst="rect">
+            <a:avLst/>
+          </a:prstGeom>
+          <a:noFill/>
+        </p:spPr>
+        <p:txBody>
+          <a:bodyPr wrap="square" lIns="0" rIns="0" tIns="0" bIns="0">
+            <a:spAutoFit/>
+          </a:bodyPr>
+          <a:lstStyle/>
+          <a:p>
+            <a:pPr>
+              <a:spcBef>
+                <a:spcPts val="0"/>
+              </a:spcBef>
+              <a:spcAft>
+                <a:spcPts val="900"/>
+              </a:spcAft>
+              <a:defRPr sz="1100" b="1">
+                <a:solidFill>
+                  <a:srgbClr val="FF793F"/>
+                </a:solidFill>
+                <a:latin typeface="Noto Sans"/>
+              </a:defRPr>
+            </a:pPr>
+            <a:r>
+              <a:t>PLBP / SG1</a:t>
+            </a:r>
+          </a:p>
+        </p:txBody>
+      </p:sp>
+      <p:sp>
+        <p:nvSpPr>
+          <p:cNvPr id="19" name="Rectangle 18"/>
+          <p:cNvSpPr/>
+          <p:nvPr/>
+        </p:nvSpPr>
+        <p:spPr>
+          <a:xfrm>
+            <a:off x="658368" y="914400"/>
+            <a:ext cx="13313664" cy="10972"/>
+          </a:xfrm>
+          <a:prstGeom prst="rect">
+            <a:avLst/>
+          </a:prstGeom>
+          <a:solidFill>
+            <a:srgbClr val="354347"/>
+          </a:solidFill>
+          <a:ln>
+            <a:noFill/>
+          </a:ln>
+        </p:spPr>
+        <p:style>
+          <a:lnRef idx="1">
+            <a:schemeClr val="accent1"/>
+          </a:lnRef>
+          <a:fillRef idx="3">
+            <a:schemeClr val="accent1"/>
+          </a:fillRef>
+          <a:effectRef idx="2">
+            <a:schemeClr val="accent1"/>
+          </a:effectRef>
+          <a:fontRef idx="minor">
+            <a:schemeClr val="lt1"/>
+          </a:fontRef>
+        </p:style>
+        <p:txBody>
+          <a:bodyPr rtlCol="0" anchor="ctr"/>
+          <a:lstStyle/>
+          <a:p>
+            <a:pPr algn="ctr"/>
+          </a:p>
+        </p:txBody>
+      </p:sp>
+      <p:sp>
+        <p:nvSpPr>
+          <p:cNvPr id="20" name="TextBox 19"/>
+          <p:cNvSpPr txBox="1"/>
+          <p:nvPr/>
+        </p:nvSpPr>
+        <p:spPr>
+          <a:xfrm>
+            <a:off x="658368" y="1243584"/>
+            <a:ext cx="13213080" cy="1097280"/>
+          </a:xfrm>
+          <a:prstGeom prst="rect">
+            <a:avLst/>
+          </a:prstGeom>
+          <a:noFill/>
+        </p:spPr>
+        <p:txBody>
+          <a:bodyPr wrap="square" lIns="0" rIns="0" tIns="0" bIns="0">
+            <a:spAutoFit/>
+          </a:bodyPr>
+          <a:lstStyle/>
+          <a:p>
+            <a:pPr>
+              <a:spcBef>
+                <a:spcPts val="0"/>
+              </a:spcBef>
+              <a:spcAft>
+                <a:spcPts val="900"/>
+              </a:spcAft>
+              <a:defRPr sz="3700" b="1">
+                <a:solidFill>
+                  <a:srgbClr val="F4F1E9"/>
+                </a:solidFill>
+                <a:latin typeface="Noto Sans"/>
+              </a:defRPr>
+            </a:pPr>
+            <a:r>
+              <a:t>Следующие узлы определены</a:t>
+            </a:r>
+          </a:p>
+        </p:txBody>
+      </p:sp>
+      <p:sp>
+        <p:nvSpPr>
+          <p:cNvPr id="21" name="Rectangle 20"/>
+          <p:cNvSpPr/>
+          <p:nvPr/>
+        </p:nvSpPr>
+        <p:spPr>
+          <a:xfrm>
+            <a:off x="658368" y="7159752"/>
+            <a:ext cx="13313664" cy="10972"/>
+          </a:xfrm>
+          <a:prstGeom prst="rect">
+            <a:avLst/>
+          </a:prstGeom>
+          <a:solidFill>
+            <a:srgbClr val="354347"/>
+          </a:solidFill>
+          <a:ln>
+            <a:noFill/>
+          </a:ln>
+        </p:spPr>
+        <p:style>
+          <a:lnRef idx="1">
+            <a:schemeClr val="accent1"/>
+          </a:lnRef>
+          <a:fillRef idx="3">
+            <a:schemeClr val="accent1"/>
+          </a:fillRef>
+          <a:effectRef idx="2">
+            <a:schemeClr val="accent1"/>
+          </a:effectRef>
+          <a:fontRef idx="minor">
+            <a:schemeClr val="lt1"/>
+          </a:fontRef>
+        </p:style>
+        <p:txBody>
+          <a:bodyPr rtlCol="0" anchor="ctr"/>
+          <a:lstStyle/>
+          <a:p>
+            <a:pPr algn="ctr"/>
+          </a:p>
+        </p:txBody>
+      </p:sp>
+      <p:sp>
+        <p:nvSpPr>
+          <p:cNvPr id="22" name="TextBox 21"/>
+          <p:cNvSpPr txBox="1"/>
+          <p:nvPr/>
+        </p:nvSpPr>
+        <p:spPr>
+          <a:xfrm>
+            <a:off x="658368" y="7342631"/>
+            <a:ext cx="12344400" cy="621792"/>
+          </a:xfrm>
+          <a:prstGeom prst="rect">
+            <a:avLst/>
+          </a:prstGeom>
+          <a:noFill/>
+        </p:spPr>
+        <p:txBody>
+          <a:bodyPr wrap="square" lIns="0" rIns="0" tIns="0" bIns="0">
+            <a:spAutoFit/>
+          </a:bodyPr>
+          <a:lstStyle/>
+          <a:p>
+            <a:pPr>
+              <a:spcBef>
+                <a:spcPts val="0"/>
+              </a:spcBef>
+              <a:spcAft>
+                <a:spcPts val="900"/>
+              </a:spcAft>
+              <a:defRPr sz="1200" b="0">
+                <a:solidFill>
+                  <a:srgbClr val="AFBDC0"/>
+                </a:solidFill>
+                <a:latin typeface="Noto Sans"/>
+              </a:defRPr>
+            </a:pPr>
+            <a:r>
+              <a:t>Базовая A04 сохранена. E01 — примерочный вариант; OR02 оценивает чувствительность к его массе.</a:t>
+            </a:r>
+          </a:p>
+        </p:txBody>
+      </p:sp>
+      <p:sp>
+        <p:nvSpPr>
+          <p:cNvPr id="23" name="TextBox 22"/>
+          <p:cNvSpPr txBox="1"/>
+          <p:nvPr/>
+        </p:nvSpPr>
+        <p:spPr>
+          <a:xfrm>
+            <a:off x="13121640" y="7507224"/>
+            <a:ext cx="914400" cy="365760"/>
+          </a:xfrm>
+          <a:prstGeom prst="rect">
+            <a:avLst/>
+          </a:prstGeom>
+          <a:noFill/>
+        </p:spPr>
+        <p:txBody>
+          <a:bodyPr wrap="square" lIns="0" rIns="0" tIns="0" bIns="0">
+            <a:spAutoFit/>
+          </a:bodyPr>
+          <a:lstStyle/>
+          <a:p>
+            <a:pPr>
+              <a:spcBef>
+                <a:spcPts val="0"/>
+              </a:spcBef>
+              <a:spcAft>
+                <a:spcPts val="900"/>
+              </a:spcAft>
+              <a:defRPr sz="1100" b="0">
+                <a:solidFill>
+                  <a:srgbClr val="FF793F"/>
+                </a:solidFill>
+                <a:latin typeface="Noto Sans"/>
+              </a:defRPr>
+            </a:pPr>
+            <a:r>
+              <a:t>20 / 21</a:t>
+            </a:r>
+          </a:p>
+        </p:txBody>
+      </p:sp>
+      <p:sp>
+        <p:nvSpPr>
+          <p:cNvPr id="24" name="Rectangle 23"/>
+          <p:cNvSpPr/>
+          <p:nvPr/>
+        </p:nvSpPr>
+        <p:spPr>
+          <a:xfrm>
+            <a:off x="0" y="8183879"/>
+            <a:ext cx="13933714" cy="45720"/>
+          </a:xfrm>
+          <a:prstGeom prst="rect">
+            <a:avLst/>
+          </a:prstGeom>
+          <a:solidFill>
+            <a:srgbClr val="FF793F"/>
+          </a:solidFill>
+          <a:ln>
+            <a:noFill/>
+          </a:ln>
+        </p:spPr>
+        <p:style>
+          <a:lnRef idx="1">
+            <a:schemeClr val="accent1"/>
+          </a:lnRef>
+          <a:fillRef idx="3">
+            <a:schemeClr val="accent1"/>
+          </a:fillRef>
+          <a:effectRef idx="2">
+            <a:schemeClr val="accent1"/>
+          </a:effectRef>
+          <a:fontRef idx="minor">
+            <a:schemeClr val="lt1"/>
+          </a:fontRef>
+        </p:style>
+        <p:txBody>
+          <a:bodyPr rtlCol="0" anchor="ctr"/>
+          <a:lstStyle/>
+          <a:p>
+            <a:pPr algn="ctr"/>
+          </a:p>
+        </p:txBody>
+      </p:sp>
+      <p:sp>
+        <p:nvSpPr>
+          <p:cNvPr id="25" name="Rectangle 24"/>
+          <p:cNvSpPr/>
+          <p:nvPr/>
+        </p:nvSpPr>
+        <p:spPr>
+          <a:xfrm>
+            <a:off x="658368" y="2743200"/>
+            <a:ext cx="4285488" cy="3474720"/>
+          </a:xfrm>
+          <a:prstGeom prst="rect">
+            <a:avLst/>
+          </a:prstGeom>
+          <a:solidFill>
+            <a:srgbClr val="1A2427"/>
+          </a:solidFill>
+          <a:ln>
+            <a:noFill/>
+          </a:ln>
+        </p:spPr>
+        <p:style>
+          <a:lnRef idx="1">
+            <a:schemeClr val="accent1"/>
+          </a:lnRef>
+          <a:fillRef idx="3">
+            <a:schemeClr val="accent1"/>
+          </a:fillRef>
+          <a:effectRef idx="2">
+            <a:schemeClr val="accent1"/>
+          </a:effectRef>
+          <a:fontRef idx="minor">
+            <a:schemeClr val="lt1"/>
+          </a:fontRef>
+        </p:style>
+        <p:txBody>
+          <a:bodyPr rtlCol="0" anchor="ctr"/>
+          <a:lstStyle/>
+          <a:p>
+            <a:pPr algn="ctr"/>
+          </a:p>
+        </p:txBody>
+      </p:sp>
+      <p:sp>
+        <p:nvSpPr>
+          <p:cNvPr id="26" name="Rectangle 25"/>
+          <p:cNvSpPr/>
+          <p:nvPr/>
+        </p:nvSpPr>
+        <p:spPr>
+          <a:xfrm>
+            <a:off x="658368" y="2743200"/>
+            <a:ext cx="4285488" cy="32004"/>
+          </a:xfrm>
+          <a:prstGeom prst="rect">
+            <a:avLst/>
+          </a:prstGeom>
+          <a:solidFill>
+            <a:srgbClr val="FF793F"/>
+          </a:solidFill>
+          <a:ln>
+            <a:noFill/>
+          </a:ln>
+        </p:spPr>
+        <p:style>
+          <a:lnRef idx="1">
+            <a:schemeClr val="accent1"/>
+          </a:lnRef>
+          <a:fillRef idx="3">
+            <a:schemeClr val="accent1"/>
+          </a:fillRef>
+          <a:effectRef idx="2">
+            <a:schemeClr val="accent1"/>
+          </a:effectRef>
+          <a:fontRef idx="minor">
+            <a:schemeClr val="lt1"/>
+          </a:fontRef>
+        </p:style>
+        <p:txBody>
+          <a:bodyPr rtlCol="0" anchor="ctr"/>
+          <a:lstStyle/>
+          <a:p>
+            <a:pPr algn="ctr"/>
+          </a:p>
+        </p:txBody>
+      </p:sp>
+      <p:sp>
+        <p:nvSpPr>
+          <p:cNvPr id="27" name="TextBox 26"/>
+          <p:cNvSpPr txBox="1"/>
+          <p:nvPr/>
+        </p:nvSpPr>
+        <p:spPr>
+          <a:xfrm>
+            <a:off x="886968" y="2971800"/>
+            <a:ext cx="3828288" cy="694944"/>
+          </a:xfrm>
+          <a:prstGeom prst="rect">
+            <a:avLst/>
+          </a:prstGeom>
+          <a:noFill/>
+        </p:spPr>
+        <p:txBody>
+          <a:bodyPr wrap="square" lIns="0" rIns="0" tIns="0" bIns="0">
+            <a:spAutoFit/>
+          </a:bodyPr>
+          <a:lstStyle/>
+          <a:p>
+            <a:pPr>
+              <a:spcBef>
+                <a:spcPts val="0"/>
+              </a:spcBef>
+              <a:spcAft>
+                <a:spcPts val="900"/>
+              </a:spcAft>
+              <a:defRPr sz="2300" b="1">
+                <a:solidFill>
+                  <a:srgbClr val="F4F1E9"/>
+                </a:solidFill>
+                <a:latin typeface="Noto Sans"/>
+              </a:defRPr>
+            </a:pPr>
+            <a:r>
+              <a:t>Доступ к батарее</a:t>
+            </a:r>
+          </a:p>
+        </p:txBody>
+      </p:sp>
+      <p:sp>
+        <p:nvSpPr>
+          <p:cNvPr id="28" name="TextBox 27"/>
+          <p:cNvSpPr txBox="1"/>
+          <p:nvPr/>
+        </p:nvSpPr>
+        <p:spPr>
+          <a:xfrm>
+            <a:off x="886968" y="3685032"/>
+            <a:ext cx="3828288" cy="2423160"/>
+          </a:xfrm>
+          <a:prstGeom prst="rect">
+            <a:avLst/>
+          </a:prstGeom>
+          <a:noFill/>
+        </p:spPr>
+        <p:txBody>
+          <a:bodyPr wrap="square" lIns="0" rIns="0" tIns="0" bIns="0">
+            <a:spAutoFit/>
+          </a:bodyPr>
+          <a:lstStyle/>
+          <a:p>
+            <a:pPr>
+              <a:spcBef>
+                <a:spcPts val="0"/>
+              </a:spcBef>
+              <a:spcAft>
+                <a:spcPts val="900"/>
+              </a:spcAft>
+              <a:defRPr sz="2100" b="0">
+                <a:solidFill>
+                  <a:srgbClr val="AFBDC0"/>
+                </a:solidFill>
+                <a:latin typeface="Noto Sans"/>
+              </a:defRPr>
+            </a:pPr>
+            <a:r>
+              <a:t>Спроектировать обслуживание в собранном корпусе и измерить время замены.</a:t>
+            </a:r>
+          </a:p>
+        </p:txBody>
+      </p:sp>
+      <p:sp>
+        <p:nvSpPr>
+          <p:cNvPr id="29" name="Rectangle 28"/>
+          <p:cNvSpPr/>
+          <p:nvPr/>
+        </p:nvSpPr>
+        <p:spPr>
+          <a:xfrm>
+            <a:off x="5172456" y="2743200"/>
+            <a:ext cx="4285488" cy="3474720"/>
+          </a:xfrm>
+          <a:prstGeom prst="rect">
+            <a:avLst/>
+          </a:prstGeom>
+          <a:solidFill>
+            <a:srgbClr val="1A2427"/>
+          </a:solidFill>
+          <a:ln>
+            <a:noFill/>
+          </a:ln>
+        </p:spPr>
+        <p:style>
+          <a:lnRef idx="1">
+            <a:schemeClr val="accent1"/>
+          </a:lnRef>
+          <a:fillRef idx="3">
+            <a:schemeClr val="accent1"/>
+          </a:fillRef>
+          <a:effectRef idx="2">
+            <a:schemeClr val="accent1"/>
+          </a:effectRef>
+          <a:fontRef idx="minor">
+            <a:schemeClr val="lt1"/>
+          </a:fontRef>
+        </p:style>
+        <p:txBody>
+          <a:bodyPr rtlCol="0" anchor="ctr"/>
+          <a:lstStyle/>
+          <a:p>
+            <a:pPr algn="ctr"/>
+          </a:p>
+        </p:txBody>
+      </p:sp>
+      <p:sp>
+        <p:nvSpPr>
+          <p:cNvPr id="30" name="Rectangle 29"/>
+          <p:cNvSpPr/>
+          <p:nvPr/>
+        </p:nvSpPr>
+        <p:spPr>
+          <a:xfrm>
+            <a:off x="5172456" y="2743200"/>
+            <a:ext cx="4285488" cy="32004"/>
+          </a:xfrm>
+          <a:prstGeom prst="rect">
+            <a:avLst/>
+          </a:prstGeom>
+          <a:solidFill>
+            <a:srgbClr val="FF793F"/>
+          </a:solidFill>
+          <a:ln>
+            <a:noFill/>
+          </a:ln>
+        </p:spPr>
+        <p:style>
+          <a:lnRef idx="1">
+            <a:schemeClr val="accent1"/>
+          </a:lnRef>
+          <a:fillRef idx="3">
+            <a:schemeClr val="accent1"/>
+          </a:fillRef>
+          <a:effectRef idx="2">
+            <a:schemeClr val="accent1"/>
+          </a:effectRef>
+          <a:fontRef idx="minor">
+            <a:schemeClr val="lt1"/>
+          </a:fontRef>
+        </p:style>
+        <p:txBody>
+          <a:bodyPr rtlCol="0" anchor="ctr"/>
+          <a:lstStyle/>
+          <a:p>
+            <a:pPr algn="ctr"/>
+          </a:p>
+        </p:txBody>
+      </p:sp>
+      <p:sp>
+        <p:nvSpPr>
+          <p:cNvPr id="31" name="TextBox 30"/>
+          <p:cNvSpPr txBox="1"/>
+          <p:nvPr/>
+        </p:nvSpPr>
+        <p:spPr>
+          <a:xfrm>
+            <a:off x="5401056" y="2971800"/>
+            <a:ext cx="3828288" cy="694944"/>
+          </a:xfrm>
+          <a:prstGeom prst="rect">
+            <a:avLst/>
+          </a:prstGeom>
+          <a:noFill/>
+        </p:spPr>
+        <p:txBody>
+          <a:bodyPr wrap="square" lIns="0" rIns="0" tIns="0" bIns="0">
+            <a:spAutoFit/>
+          </a:bodyPr>
+          <a:lstStyle/>
+          <a:p>
+            <a:pPr>
+              <a:spcBef>
+                <a:spcPts val="0"/>
+              </a:spcBef>
+              <a:spcAft>
+                <a:spcPts val="900"/>
+              </a:spcAft>
+              <a:defRPr sz="2300" b="1">
+                <a:solidFill>
+                  <a:srgbClr val="F4F1E9"/>
+                </a:solidFill>
+                <a:latin typeface="Noto Sans"/>
+              </a:defRPr>
+            </a:pPr>
+            <a:r>
+              <a:t>Удержание и соединения</a:t>
+            </a:r>
+          </a:p>
+        </p:txBody>
+      </p:sp>
+      <p:sp>
+        <p:nvSpPr>
+          <p:cNvPr id="32" name="TextBox 31"/>
+          <p:cNvSpPr txBox="1"/>
+          <p:nvPr/>
+        </p:nvSpPr>
+        <p:spPr>
+          <a:xfrm>
+            <a:off x="5401056" y="3685032"/>
+            <a:ext cx="3828288" cy="2423160"/>
+          </a:xfrm>
+          <a:prstGeom prst="rect">
+            <a:avLst/>
+          </a:prstGeom>
+          <a:noFill/>
+        </p:spPr>
+        <p:txBody>
+          <a:bodyPr wrap="square" lIns="0" rIns="0" tIns="0" bIns="0">
+            <a:spAutoFit/>
+          </a:bodyPr>
+          <a:lstStyle/>
+          <a:p>
+            <a:pPr>
+              <a:spcBef>
+                <a:spcPts val="0"/>
+              </a:spcBef>
+              <a:spcAft>
+                <a:spcPts val="900"/>
+              </a:spcAft>
+              <a:defRPr sz="2100" b="0">
+                <a:solidFill>
+                  <a:srgbClr val="AFBDC0"/>
+                </a:solidFill>
+                <a:latin typeface="Noto Sans"/>
+              </a:defRPr>
+            </a:pPr>
+            <a:r>
+              <a:t>Крепление лотка, ленты, прокладки, проводка и стенд с массовыми макетами.</a:t>
+            </a:r>
+          </a:p>
+        </p:txBody>
+      </p:sp>
+      <p:sp>
+        <p:nvSpPr>
+          <p:cNvPr id="33" name="Rectangle 32"/>
+          <p:cNvSpPr/>
+          <p:nvPr/>
+        </p:nvSpPr>
+        <p:spPr>
+          <a:xfrm>
+            <a:off x="9686544" y="2743200"/>
+            <a:ext cx="4285488" cy="3474720"/>
+          </a:xfrm>
+          <a:prstGeom prst="rect">
+            <a:avLst/>
+          </a:prstGeom>
+          <a:solidFill>
+            <a:srgbClr val="1A2427"/>
+          </a:solidFill>
+          <a:ln>
+            <a:noFill/>
+          </a:ln>
+        </p:spPr>
+        <p:style>
+          <a:lnRef idx="1">
+            <a:schemeClr val="accent1"/>
+          </a:lnRef>
+          <a:fillRef idx="3">
+            <a:schemeClr val="accent1"/>
+          </a:fillRef>
+          <a:effectRef idx="2">
+            <a:schemeClr val="accent1"/>
+          </a:effectRef>
+          <a:fontRef idx="minor">
+            <a:schemeClr val="lt1"/>
+          </a:fontRef>
+        </p:style>
+        <p:txBody>
+          <a:bodyPr rtlCol="0" anchor="ctr"/>
+          <a:lstStyle/>
+          <a:p>
+            <a:pPr algn="ctr"/>
+          </a:p>
+        </p:txBody>
+      </p:sp>
+      <p:sp>
+        <p:nvSpPr>
+          <p:cNvPr id="34" name="Rectangle 33"/>
+          <p:cNvSpPr/>
+          <p:nvPr/>
+        </p:nvSpPr>
+        <p:spPr>
+          <a:xfrm>
+            <a:off x="9686544" y="2743200"/>
+            <a:ext cx="4285488" cy="32004"/>
+          </a:xfrm>
+          <a:prstGeom prst="rect">
+            <a:avLst/>
+          </a:prstGeom>
+          <a:solidFill>
+            <a:srgbClr val="FF793F"/>
+          </a:solidFill>
+          <a:ln>
+            <a:noFill/>
+          </a:ln>
+        </p:spPr>
+        <p:style>
+          <a:lnRef idx="1">
+            <a:schemeClr val="accent1"/>
+          </a:lnRef>
+          <a:fillRef idx="3">
+            <a:schemeClr val="accent1"/>
+          </a:fillRef>
+          <a:effectRef idx="2">
+            <a:schemeClr val="accent1"/>
+          </a:effectRef>
+          <a:fontRef idx="minor">
+            <a:schemeClr val="lt1"/>
+          </a:fontRef>
+        </p:style>
+        <p:txBody>
+          <a:bodyPr rtlCol="0" anchor="ctr"/>
+          <a:lstStyle/>
+          <a:p>
+            <a:pPr algn="ctr"/>
+          </a:p>
+        </p:txBody>
+      </p:sp>
+      <p:sp>
+        <p:nvSpPr>
+          <p:cNvPr id="35" name="TextBox 34"/>
+          <p:cNvSpPr txBox="1"/>
+          <p:nvPr/>
+        </p:nvSpPr>
+        <p:spPr>
+          <a:xfrm>
+            <a:off x="9915144" y="2971800"/>
+            <a:ext cx="3828288" cy="694944"/>
+          </a:xfrm>
+          <a:prstGeom prst="rect">
+            <a:avLst/>
+          </a:prstGeom>
+          <a:noFill/>
+        </p:spPr>
+        <p:txBody>
+          <a:bodyPr wrap="square" lIns="0" rIns="0" tIns="0" bIns="0">
+            <a:spAutoFit/>
+          </a:bodyPr>
+          <a:lstStyle/>
+          <a:p>
+            <a:pPr>
+              <a:spcBef>
+                <a:spcPts val="0"/>
+              </a:spcBef>
+              <a:spcAft>
+                <a:spcPts val="900"/>
+              </a:spcAft>
+              <a:defRPr sz="2300" b="1">
+                <a:solidFill>
+                  <a:srgbClr val="F4F1E9"/>
+                </a:solidFill>
+                <a:latin typeface="Noto Sans"/>
+              </a:defRPr>
+            </a:pPr>
+            <a:r>
+              <a:t>Фактические входы</a:t>
+            </a:r>
+          </a:p>
+        </p:txBody>
+      </p:sp>
+      <p:sp>
+        <p:nvSpPr>
+          <p:cNvPr id="36" name="TextBox 35"/>
+          <p:cNvSpPr txBox="1"/>
+          <p:nvPr/>
+        </p:nvSpPr>
+        <p:spPr>
+          <a:xfrm>
+            <a:off x="9915144" y="3685032"/>
+            <a:ext cx="3828288" cy="2423160"/>
+          </a:xfrm>
+          <a:prstGeom prst="rect">
+            <a:avLst/>
+          </a:prstGeom>
+          <a:noFill/>
+        </p:spPr>
+        <p:txBody>
+          <a:bodyPr wrap="square" lIns="0" rIns="0" tIns="0" bIns="0">
+            <a:spAutoFit/>
+          </a:bodyPr>
+          <a:lstStyle/>
+          <a:p>
+            <a:pPr>
+              <a:spcBef>
+                <a:spcPts val="0"/>
+              </a:spcBef>
+              <a:spcAft>
+                <a:spcPts val="900"/>
+              </a:spcAft>
+              <a:defRPr sz="2100" b="0">
+                <a:solidFill>
+                  <a:srgbClr val="AFBDC0"/>
+                </a:solidFill>
+                <a:latin typeface="Noto Sans"/>
+              </a:defRPr>
+            </a:pPr>
+            <a:r>
+              <a:t>Двигатель организаторов, массы, CG, метеопрофиль и направляющая.</a:t>
+            </a:r>
+          </a:p>
+        </p:txBody>
+      </p:sp>
+    </p:spTree>
+  </p:cSld>
+  <p:clrMapOvr>
+    <a:masterClrMapping/>
+  </p:clrMapOvr>
+</p:sld>
+</file>
+
+<file path=ppt/slides/slide21.xml><?xml version="1.0" encoding="utf-8"?>
+<p:sld xmlns:a="http://schemas.openxmlformats.org/drawingml/2006/main" xmlns:p="http://schemas.openxmlformats.org/presentationml/2006/main" xmlns:r="http://schemas.openxmlformats.org/officeDocument/2006/relationships">
+  <p:cSld>
+    <p:bg>
+      <p:bgPr>
+        <a:solidFill>
+          <a:srgbClr val="101719"/>
+        </a:solidFill>
+        <a:effectLst/>
+      </p:bgPr>
+    </p:bg>
+    <p:spTree>
+      <p:nvGrpSpPr>
+        <p:cNvPr id="1" name=""/>
+        <p:cNvGrpSpPr/>
+        <p:nvPr/>
+      </p:nvGrpSpPr>
+      <p:grpSpPr/>
+      <p:sp>
+        <p:nvSpPr>
+          <p:cNvPr id="2" name="Rectangle 1"/>
+          <p:cNvSpPr/>
+          <p:nvPr/>
+        </p:nvSpPr>
+        <p:spPr>
+          <a:xfrm>
+            <a:off x="914400" y="0"/>
+            <a:ext cx="5486" cy="8229600"/>
+          </a:xfrm>
+          <a:prstGeom prst="rect">
+            <a:avLst/>
+          </a:prstGeom>
+          <a:solidFill>
+            <a:srgbClr val="182124"/>
+          </a:solidFill>
+          <a:ln>
+            <a:noFill/>
+          </a:ln>
+        </p:spPr>
+        <p:style>
+          <a:lnRef idx="1">
+            <a:schemeClr val="accent1"/>
+          </a:lnRef>
+          <a:fillRef idx="3">
+            <a:schemeClr val="accent1"/>
+          </a:fillRef>
+          <a:effectRef idx="2">
+            <a:schemeClr val="accent1"/>
+          </a:effectRef>
+          <a:fontRef idx="minor">
+            <a:schemeClr val="lt1"/>
+          </a:fontRef>
+        </p:style>
+        <p:txBody>
+          <a:bodyPr rtlCol="0" anchor="ctr"/>
+          <a:lstStyle/>
+          <a:p>
+            <a:pPr algn="ctr"/>
+          </a:p>
+        </p:txBody>
+      </p:sp>
+      <p:sp>
+        <p:nvSpPr>
+          <p:cNvPr id="3" name="Rectangle 2"/>
+          <p:cNvSpPr/>
+          <p:nvPr/>
+        </p:nvSpPr>
+        <p:spPr>
+          <a:xfrm>
+            <a:off x="1828800" y="0"/>
+            <a:ext cx="5486" cy="8229600"/>
+          </a:xfrm>
+          <a:prstGeom prst="rect">
+            <a:avLst/>
+          </a:prstGeom>
+          <a:solidFill>
+            <a:srgbClr val="182124"/>
+          </a:solidFill>
+          <a:ln>
+            <a:noFill/>
+          </a:ln>
+        </p:spPr>
+        <p:style>
+          <a:lnRef idx="1">
+            <a:schemeClr val="accent1"/>
+          </a:lnRef>
+          <a:fillRef idx="3">
+            <a:schemeClr val="accent1"/>
+          </a:fillRef>
+          <a:effectRef idx="2">
+            <a:schemeClr val="accent1"/>
+          </a:effectRef>
+          <a:fontRef idx="minor">
+            <a:schemeClr val="lt1"/>
+          </a:fontRef>
+        </p:style>
+        <p:txBody>
+          <a:bodyPr rtlCol="0" anchor="ctr"/>
+          <a:lstStyle/>
+          <a:p>
+            <a:pPr algn="ctr"/>
+          </a:p>
+        </p:txBody>
+      </p:sp>
+      <p:sp>
+        <p:nvSpPr>
+          <p:cNvPr id="4" name="Rectangle 3"/>
+          <p:cNvSpPr/>
+          <p:nvPr/>
+        </p:nvSpPr>
+        <p:spPr>
+          <a:xfrm>
+            <a:off x="2743200" y="0"/>
+            <a:ext cx="5486" cy="8229600"/>
+          </a:xfrm>
+          <a:prstGeom prst="rect">
+            <a:avLst/>
+          </a:prstGeom>
+          <a:solidFill>
+            <a:srgbClr val="182124"/>
+          </a:solidFill>
+          <a:ln>
+            <a:noFill/>
+          </a:ln>
+        </p:spPr>
+        <p:style>
+          <a:lnRef idx="1">
+            <a:schemeClr val="accent1"/>
+          </a:lnRef>
+          <a:fillRef idx="3">
+            <a:schemeClr val="accent1"/>
+          </a:fillRef>
+          <a:effectRef idx="2">
+            <a:schemeClr val="accent1"/>
+          </a:effectRef>
+          <a:fontRef idx="minor">
+            <a:schemeClr val="lt1"/>
+          </a:fontRef>
+        </p:style>
+        <p:txBody>
+          <a:bodyPr rtlCol="0" anchor="ctr"/>
+          <a:lstStyle/>
+          <a:p>
+            <a:pPr algn="ctr"/>
+          </a:p>
+        </p:txBody>
+      </p:sp>
+      <p:sp>
+        <p:nvSpPr>
+          <p:cNvPr id="5" name="Rectangle 4"/>
+          <p:cNvSpPr/>
+          <p:nvPr/>
+        </p:nvSpPr>
+        <p:spPr>
+          <a:xfrm>
+            <a:off x="3657600" y="0"/>
+            <a:ext cx="5486" cy="8229600"/>
+          </a:xfrm>
+          <a:prstGeom prst="rect">
+            <a:avLst/>
+          </a:prstGeom>
+          <a:solidFill>
+            <a:srgbClr val="182124"/>
+          </a:solidFill>
+          <a:ln>
+            <a:noFill/>
+          </a:ln>
+        </p:spPr>
+        <p:style>
+          <a:lnRef idx="1">
+            <a:schemeClr val="accent1"/>
+          </a:lnRef>
+          <a:fillRef idx="3">
+            <a:schemeClr val="accent1"/>
+          </a:fillRef>
+          <a:effectRef idx="2">
+            <a:schemeClr val="accent1"/>
+          </a:effectRef>
+          <a:fontRef idx="minor">
+            <a:schemeClr val="lt1"/>
+          </a:fontRef>
+        </p:style>
+        <p:txBody>
+          <a:bodyPr rtlCol="0" anchor="ctr"/>
+          <a:lstStyle/>
+          <a:p>
+            <a:pPr algn="ctr"/>
+          </a:p>
+        </p:txBody>
+      </p:sp>
+      <p:sp>
+        <p:nvSpPr>
+          <p:cNvPr id="6" name="Rectangle 5"/>
+          <p:cNvSpPr/>
+          <p:nvPr/>
+        </p:nvSpPr>
+        <p:spPr>
+          <a:xfrm>
+            <a:off x="4572000" y="0"/>
+            <a:ext cx="5486" cy="8229600"/>
+          </a:xfrm>
+          <a:prstGeom prst="rect">
+            <a:avLst/>
+          </a:prstGeom>
+          <a:solidFill>
+            <a:srgbClr val="182124"/>
+          </a:solidFill>
+          <a:ln>
+            <a:noFill/>
+          </a:ln>
+        </p:spPr>
+        <p:style>
+          <a:lnRef idx="1">
+            <a:schemeClr val="accent1"/>
+          </a:lnRef>
+          <a:fillRef idx="3">
+            <a:schemeClr val="accent1"/>
+          </a:fillRef>
+          <a:effectRef idx="2">
+            <a:schemeClr val="accent1"/>
+          </a:effectRef>
+          <a:fontRef idx="minor">
+            <a:schemeClr val="lt1"/>
+          </a:fontRef>
+        </p:style>
+        <p:txBody>
+          <a:bodyPr rtlCol="0" anchor="ctr"/>
+          <a:lstStyle/>
+          <a:p>
+            <a:pPr algn="ctr"/>
+          </a:p>
+        </p:txBody>
+      </p:sp>
+      <p:sp>
+        <p:nvSpPr>
+          <p:cNvPr id="7" name="Rectangle 6"/>
+          <p:cNvSpPr/>
+          <p:nvPr/>
+        </p:nvSpPr>
+        <p:spPr>
+          <a:xfrm>
+            <a:off x="5486400" y="0"/>
+            <a:ext cx="5486" cy="8229600"/>
+          </a:xfrm>
+          <a:prstGeom prst="rect">
+            <a:avLst/>
+          </a:prstGeom>
+          <a:solidFill>
+            <a:srgbClr val="182124"/>
+          </a:solidFill>
+          <a:ln>
+            <a:noFill/>
+          </a:ln>
+        </p:spPr>
+        <p:style>
+          <a:lnRef idx="1">
+            <a:schemeClr val="accent1"/>
+          </a:lnRef>
+          <a:fillRef idx="3">
+            <a:schemeClr val="accent1"/>
+          </a:fillRef>
+          <a:effectRef idx="2">
+            <a:schemeClr val="accent1"/>
+          </a:effectRef>
+          <a:fontRef idx="minor">
+            <a:schemeClr val="lt1"/>
+          </a:fontRef>
+        </p:style>
+        <p:txBody>
+          <a:bodyPr rtlCol="0" anchor="ctr"/>
+          <a:lstStyle/>
+          <a:p>
+            <a:pPr algn="ctr"/>
+          </a:p>
+        </p:txBody>
+      </p:sp>
+      <p:sp>
+        <p:nvSpPr>
+          <p:cNvPr id="8" name="Rectangle 7"/>
+          <p:cNvSpPr/>
+          <p:nvPr/>
+        </p:nvSpPr>
+        <p:spPr>
+          <a:xfrm>
+            <a:off x="6400800" y="0"/>
+            <a:ext cx="5486" cy="8229600"/>
+          </a:xfrm>
+          <a:prstGeom prst="rect">
+            <a:avLst/>
+          </a:prstGeom>
+          <a:solidFill>
+            <a:srgbClr val="182124"/>
+          </a:solidFill>
+          <a:ln>
+            <a:noFill/>
+          </a:ln>
+        </p:spPr>
+        <p:style>
+          <a:lnRef idx="1">
+            <a:schemeClr val="accent1"/>
+          </a:lnRef>
+          <a:fillRef idx="3">
+            <a:schemeClr val="accent1"/>
+          </a:fillRef>
+          <a:effectRef idx="2">
+            <a:schemeClr val="accent1"/>
+          </a:effectRef>
+          <a:fontRef idx="minor">
+            <a:schemeClr val="lt1"/>
+          </a:fontRef>
+        </p:style>
+        <p:txBody>
+          <a:bodyPr rtlCol="0" anchor="ctr"/>
+          <a:lstStyle/>
+          <a:p>
+            <a:pPr algn="ctr"/>
+          </a:p>
+        </p:txBody>
+      </p:sp>
+      <p:sp>
+        <p:nvSpPr>
+          <p:cNvPr id="9" name="Rectangle 8"/>
+          <p:cNvSpPr/>
+          <p:nvPr/>
+        </p:nvSpPr>
+        <p:spPr>
+          <a:xfrm>
+            <a:off x="7315200" y="0"/>
+            <a:ext cx="5486" cy="8229600"/>
+          </a:xfrm>
+          <a:prstGeom prst="rect">
+            <a:avLst/>
+          </a:prstGeom>
+          <a:solidFill>
+            <a:srgbClr val="182124"/>
+          </a:solidFill>
+          <a:ln>
+            <a:noFill/>
+          </a:ln>
+        </p:spPr>
+        <p:style>
+          <a:lnRef idx="1">
+            <a:schemeClr val="accent1"/>
+          </a:lnRef>
+          <a:fillRef idx="3">
+            <a:schemeClr val="accent1"/>
+          </a:fillRef>
+          <a:effectRef idx="2">
+            <a:schemeClr val="accent1"/>
+          </a:effectRef>
+          <a:fontRef idx="minor">
+            <a:schemeClr val="lt1"/>
+          </a:fontRef>
+        </p:style>
+        <p:txBody>
+          <a:bodyPr rtlCol="0" anchor="ctr"/>
+          <a:lstStyle/>
+          <a:p>
+            <a:pPr algn="ctr"/>
+          </a:p>
+        </p:txBody>
+      </p:sp>
+      <p:sp>
+        <p:nvSpPr>
+          <p:cNvPr id="10" name="Rectangle 9"/>
+          <p:cNvSpPr/>
+          <p:nvPr/>
+        </p:nvSpPr>
+        <p:spPr>
+          <a:xfrm>
+            <a:off x="8229600" y="0"/>
+            <a:ext cx="5486" cy="8229600"/>
+          </a:xfrm>
+          <a:prstGeom prst="rect">
+            <a:avLst/>
+          </a:prstGeom>
+          <a:solidFill>
+            <a:srgbClr val="182124"/>
+          </a:solidFill>
+          <a:ln>
+            <a:noFill/>
+          </a:ln>
+        </p:spPr>
+        <p:style>
+          <a:lnRef idx="1">
+            <a:schemeClr val="accent1"/>
+          </a:lnRef>
+          <a:fillRef idx="3">
+            <a:schemeClr val="accent1"/>
+          </a:fillRef>
+          <a:effectRef idx="2">
+            <a:schemeClr val="accent1"/>
+          </a:effectRef>
+          <a:fontRef idx="minor">
+            <a:schemeClr val="lt1"/>
+          </a:fontRef>
+        </p:style>
+        <p:txBody>
+          <a:bodyPr rtlCol="0" anchor="ctr"/>
+          <a:lstStyle/>
+          <a:p>
+            <a:pPr algn="ctr"/>
+          </a:p>
+        </p:txBody>
+      </p:sp>
+      <p:sp>
+        <p:nvSpPr>
+          <p:cNvPr id="11" name="Rectangle 10"/>
+          <p:cNvSpPr/>
+          <p:nvPr/>
+        </p:nvSpPr>
+        <p:spPr>
+          <a:xfrm>
+            <a:off x="9144000" y="0"/>
+            <a:ext cx="5486" cy="8229600"/>
+          </a:xfrm>
+          <a:prstGeom prst="rect">
+            <a:avLst/>
+          </a:prstGeom>
+          <a:solidFill>
+            <a:srgbClr val="182124"/>
+          </a:solidFill>
+          <a:ln>
+            <a:noFill/>
+          </a:ln>
+        </p:spPr>
+        <p:style>
+          <a:lnRef idx="1">
+            <a:schemeClr val="accent1"/>
+          </a:lnRef>
+          <a:fillRef idx="3">
+            <a:schemeClr val="accent1"/>
+          </a:fillRef>
+          <a:effectRef idx="2">
+            <a:schemeClr val="accent1"/>
+          </a:effectRef>
+          <a:fontRef idx="minor">
+            <a:schemeClr val="lt1"/>
+          </a:fontRef>
+        </p:style>
+        <p:txBody>
+          <a:bodyPr rtlCol="0" anchor="ctr"/>
+          <a:lstStyle/>
+          <a:p>
+            <a:pPr algn="ctr"/>
+          </a:p>
+        </p:txBody>
+      </p:sp>
+      <p:sp>
+        <p:nvSpPr>
+          <p:cNvPr id="12" name="Rectangle 11"/>
+          <p:cNvSpPr/>
+          <p:nvPr/>
+        </p:nvSpPr>
+        <p:spPr>
+          <a:xfrm>
+            <a:off x="10058400" y="0"/>
+            <a:ext cx="5486" cy="8229600"/>
+          </a:xfrm>
+          <a:prstGeom prst="rect">
+            <a:avLst/>
+          </a:prstGeom>
+          <a:solidFill>
+            <a:srgbClr val="182124"/>
+          </a:solidFill>
+          <a:ln>
+            <a:noFill/>
+          </a:ln>
+        </p:spPr>
+        <p:style>
+          <a:lnRef idx="1">
+            <a:schemeClr val="accent1"/>
+          </a:lnRef>
+          <a:fillRef idx="3">
+            <a:schemeClr val="accent1"/>
+          </a:fillRef>
+          <a:effectRef idx="2">
+            <a:schemeClr val="accent1"/>
+          </a:effectRef>
+          <a:fontRef idx="minor">
+            <a:schemeClr val="lt1"/>
+          </a:fontRef>
+        </p:style>
+        <p:txBody>
+          <a:bodyPr rtlCol="0" anchor="ctr"/>
+          <a:lstStyle/>
+          <a:p>
+            <a:pPr algn="ctr"/>
+          </a:p>
+        </p:txBody>
+      </p:sp>
+      <p:sp>
+        <p:nvSpPr>
+          <p:cNvPr id="13" name="Rectangle 12"/>
+          <p:cNvSpPr/>
+          <p:nvPr/>
+        </p:nvSpPr>
+        <p:spPr>
+          <a:xfrm>
+            <a:off x="10972800" y="0"/>
+            <a:ext cx="5486" cy="8229600"/>
+          </a:xfrm>
+          <a:prstGeom prst="rect">
+            <a:avLst/>
+          </a:prstGeom>
+          <a:solidFill>
+            <a:srgbClr val="182124"/>
+          </a:solidFill>
+          <a:ln>
+            <a:noFill/>
+          </a:ln>
+        </p:spPr>
+        <p:style>
+          <a:lnRef idx="1">
+            <a:schemeClr val="accent1"/>
+          </a:lnRef>
+          <a:fillRef idx="3">
+            <a:schemeClr val="accent1"/>
+          </a:fillRef>
+          <a:effectRef idx="2">
+            <a:schemeClr val="accent1"/>
+          </a:effectRef>
+          <a:fontRef idx="minor">
+            <a:schemeClr val="lt1"/>
+          </a:fontRef>
+        </p:style>
+        <p:txBody>
+          <a:bodyPr rtlCol="0" anchor="ctr"/>
+          <a:lstStyle/>
+          <a:p>
+            <a:pPr algn="ctr"/>
+          </a:p>
+        </p:txBody>
+      </p:sp>
+      <p:sp>
+        <p:nvSpPr>
+          <p:cNvPr id="14" name="Rectangle 13"/>
+          <p:cNvSpPr/>
+          <p:nvPr/>
+        </p:nvSpPr>
+        <p:spPr>
+          <a:xfrm>
+            <a:off x="11887200" y="0"/>
+            <a:ext cx="5486" cy="8229600"/>
+          </a:xfrm>
+          <a:prstGeom prst="rect">
+            <a:avLst/>
+          </a:prstGeom>
+          <a:solidFill>
+            <a:srgbClr val="182124"/>
+          </a:solidFill>
+          <a:ln>
+            <a:noFill/>
+          </a:ln>
+        </p:spPr>
+        <p:style>
+          <a:lnRef idx="1">
+            <a:schemeClr val="accent1"/>
+          </a:lnRef>
+          <a:fillRef idx="3">
+            <a:schemeClr val="accent1"/>
+          </a:fillRef>
+          <a:effectRef idx="2">
+            <a:schemeClr val="accent1"/>
+          </a:effectRef>
+          <a:fontRef idx="minor">
+            <a:schemeClr val="lt1"/>
+          </a:fontRef>
+        </p:style>
+        <p:txBody>
+          <a:bodyPr rtlCol="0" anchor="ctr"/>
+          <a:lstStyle/>
+          <a:p>
+            <a:pPr algn="ctr"/>
+          </a:p>
+        </p:txBody>
+      </p:sp>
+      <p:sp>
+        <p:nvSpPr>
+          <p:cNvPr id="15" name="Rectangle 14"/>
+          <p:cNvSpPr/>
+          <p:nvPr/>
+        </p:nvSpPr>
+        <p:spPr>
+          <a:xfrm>
+            <a:off x="12801600" y="0"/>
+            <a:ext cx="5486" cy="8229600"/>
+          </a:xfrm>
+          <a:prstGeom prst="rect">
+            <a:avLst/>
+          </a:prstGeom>
+          <a:solidFill>
+            <a:srgbClr val="182124"/>
+          </a:solidFill>
+          <a:ln>
+            <a:noFill/>
+          </a:ln>
+        </p:spPr>
+        <p:style>
+          <a:lnRef idx="1">
+            <a:schemeClr val="accent1"/>
+          </a:lnRef>
+          <a:fillRef idx="3">
+            <a:schemeClr val="accent1"/>
+          </a:fillRef>
+          <a:effectRef idx="2">
+            <a:schemeClr val="accent1"/>
+          </a:effectRef>
+          <a:fontRef idx="minor">
+            <a:schemeClr val="lt1"/>
+          </a:fontRef>
+        </p:style>
+        <p:txBody>
+          <a:bodyPr rtlCol="0" anchor="ctr"/>
+          <a:lstStyle/>
+          <a:p>
+            <a:pPr algn="ctr"/>
+          </a:p>
+        </p:txBody>
+      </p:sp>
+      <p:sp>
+        <p:nvSpPr>
+          <p:cNvPr id="16" name="Rectangle 15"/>
+          <p:cNvSpPr/>
+          <p:nvPr/>
+        </p:nvSpPr>
+        <p:spPr>
+          <a:xfrm>
+            <a:off x="13716000" y="0"/>
+            <a:ext cx="5486" cy="8229600"/>
+          </a:xfrm>
+          <a:prstGeom prst="rect">
+            <a:avLst/>
+          </a:prstGeom>
+          <a:solidFill>
+            <a:srgbClr val="182124"/>
+          </a:solidFill>
+          <a:ln>
+            <a:noFill/>
+          </a:ln>
+        </p:spPr>
+        <p:style>
+          <a:lnRef idx="1">
+            <a:schemeClr val="accent1"/>
+          </a:lnRef>
+          <a:fillRef idx="3">
+            <a:schemeClr val="accent1"/>
+          </a:fillRef>
+          <a:effectRef idx="2">
+            <a:schemeClr val="accent1"/>
+          </a:effectRef>
+          <a:fontRef idx="minor">
+            <a:schemeClr val="lt1"/>
+          </a:fontRef>
+        </p:style>
+        <p:txBody>
+          <a:bodyPr rtlCol="0" anchor="ctr"/>
+          <a:lstStyle/>
+          <a:p>
+            <a:pPr algn="ctr"/>
+          </a:p>
+        </p:txBody>
+      </p:sp>
+      <p:sp>
+        <p:nvSpPr>
+          <p:cNvPr id="17" name="TextBox 16"/>
+          <p:cNvSpPr txBox="1"/>
+          <p:nvPr/>
+        </p:nvSpPr>
+        <p:spPr>
+          <a:xfrm>
+            <a:off x="658368" y="393192"/>
+            <a:ext cx="10972800" cy="274320"/>
+          </a:xfrm>
+          <a:prstGeom prst="rect">
+            <a:avLst/>
+          </a:prstGeom>
+          <a:noFill/>
+        </p:spPr>
+        <p:txBody>
+          <a:bodyPr wrap="square" lIns="0" rIns="0" tIns="0" bIns="0">
+            <a:spAutoFit/>
+          </a:bodyPr>
+          <a:lstStyle/>
+          <a:p>
+            <a:pPr>
+              <a:spcBef>
+                <a:spcPts val="0"/>
+              </a:spcBef>
+              <a:spcAft>
+                <a:spcPts val="900"/>
+              </a:spcAft>
+              <a:defRPr sz="1100" b="0">
+                <a:solidFill>
+                  <a:srgbClr val="AFBDC0"/>
+                </a:solidFill>
+                <a:latin typeface="Noto Sans"/>
+              </a:defRPr>
+            </a:pPr>
+            <a:r>
+              <a:t>ИСТОЧНИКИ</a:t>
+            </a:r>
+          </a:p>
+        </p:txBody>
+      </p:sp>
+      <p:sp>
+        <p:nvSpPr>
+          <p:cNvPr id="18" name="TextBox 17"/>
+          <p:cNvSpPr txBox="1"/>
+          <p:nvPr/>
+        </p:nvSpPr>
+        <p:spPr>
+          <a:xfrm>
+            <a:off x="12390120" y="393192"/>
+            <a:ext cx="1828800" cy="274320"/>
+          </a:xfrm>
+          <a:prstGeom prst="rect">
+            <a:avLst/>
+          </a:prstGeom>
+          <a:noFill/>
+        </p:spPr>
+        <p:txBody>
+          <a:bodyPr wrap="square" lIns="0" rIns="0" tIns="0" bIns="0">
+            <a:spAutoFit/>
+          </a:bodyPr>
+          <a:lstStyle/>
+          <a:p>
+            <a:pPr>
+              <a:spcBef>
+                <a:spcPts val="0"/>
+              </a:spcBef>
+              <a:spcAft>
+                <a:spcPts val="900"/>
+              </a:spcAft>
+              <a:defRPr sz="1100" b="1">
+                <a:solidFill>
+                  <a:srgbClr val="FF793F"/>
+                </a:solidFill>
+                <a:latin typeface="Noto Sans"/>
+              </a:defRPr>
+            </a:pPr>
+            <a:r>
+              <a:t>PLBP / SG1</a:t>
+            </a:r>
+          </a:p>
+        </p:txBody>
+      </p:sp>
+      <p:sp>
+        <p:nvSpPr>
+          <p:cNvPr id="19" name="Rectangle 18"/>
+          <p:cNvSpPr/>
+          <p:nvPr/>
+        </p:nvSpPr>
+        <p:spPr>
+          <a:xfrm>
+            <a:off x="658368" y="914400"/>
+            <a:ext cx="13313664" cy="10972"/>
+          </a:xfrm>
+          <a:prstGeom prst="rect">
+            <a:avLst/>
+          </a:prstGeom>
+          <a:solidFill>
+            <a:srgbClr val="354347"/>
+          </a:solidFill>
+          <a:ln>
+            <a:noFill/>
+          </a:ln>
+        </p:spPr>
+        <p:style>
+          <a:lnRef idx="1">
+            <a:schemeClr val="accent1"/>
+          </a:lnRef>
+          <a:fillRef idx="3">
+            <a:schemeClr val="accent1"/>
+          </a:fillRef>
+          <a:effectRef idx="2">
+            <a:schemeClr val="accent1"/>
+          </a:effectRef>
+          <a:fontRef idx="minor">
+            <a:schemeClr val="lt1"/>
+          </a:fontRef>
+        </p:style>
+        <p:txBody>
+          <a:bodyPr rtlCol="0" anchor="ctr"/>
+          <a:lstStyle/>
+          <a:p>
+            <a:pPr algn="ctr"/>
+          </a:p>
+        </p:txBody>
+      </p:sp>
+      <p:sp>
+        <p:nvSpPr>
+          <p:cNvPr id="20" name="TextBox 19"/>
+          <p:cNvSpPr txBox="1"/>
+          <p:nvPr/>
+        </p:nvSpPr>
+        <p:spPr>
+          <a:xfrm>
+            <a:off x="658368" y="1243584"/>
+            <a:ext cx="13213080" cy="1097280"/>
+          </a:xfrm>
+          <a:prstGeom prst="rect">
+            <a:avLst/>
+          </a:prstGeom>
+          <a:noFill/>
+        </p:spPr>
+        <p:txBody>
+          <a:bodyPr wrap="square" lIns="0" rIns="0" tIns="0" bIns="0">
+            <a:spAutoFit/>
+          </a:bodyPr>
+          <a:lstStyle/>
+          <a:p>
+            <a:pPr>
+              <a:spcBef>
+                <a:spcPts val="0"/>
+              </a:spcBef>
+              <a:spcAft>
+                <a:spcPts val="900"/>
+              </a:spcAft>
+              <a:defRPr sz="3700" b="1">
+                <a:solidFill>
+                  <a:srgbClr val="F4F1E9"/>
+                </a:solidFill>
+                <a:latin typeface="Noto Sans"/>
+              </a:defRPr>
+            </a:pPr>
+            <a:r>
+              <a:t>Основания и допущения</a:t>
+            </a:r>
+          </a:p>
+        </p:txBody>
+      </p:sp>
+      <p:sp>
+        <p:nvSpPr>
+          <p:cNvPr id="21" name="Rectangle 20"/>
+          <p:cNvSpPr/>
+          <p:nvPr/>
+        </p:nvSpPr>
+        <p:spPr>
+          <a:xfrm>
+            <a:off x="658368" y="7159752"/>
+            <a:ext cx="13313664" cy="10972"/>
+          </a:xfrm>
+          <a:prstGeom prst="rect">
+            <a:avLst/>
+          </a:prstGeom>
+          <a:solidFill>
+            <a:srgbClr val="354347"/>
+          </a:solidFill>
+          <a:ln>
+            <a:noFill/>
+          </a:ln>
+        </p:spPr>
+        <p:style>
+          <a:lnRef idx="1">
+            <a:schemeClr val="accent1"/>
+          </a:lnRef>
+          <a:fillRef idx="3">
+            <a:schemeClr val="accent1"/>
+          </a:fillRef>
+          <a:effectRef idx="2">
+            <a:schemeClr val="accent1"/>
+          </a:effectRef>
+          <a:fontRef idx="minor">
+            <a:schemeClr val="lt1"/>
+          </a:fontRef>
+        </p:style>
+        <p:txBody>
+          <a:bodyPr rtlCol="0" anchor="ctr"/>
+          <a:lstStyle/>
+          <a:p>
+            <a:pPr algn="ctr"/>
+          </a:p>
+        </p:txBody>
+      </p:sp>
+      <p:sp>
+        <p:nvSpPr>
+          <p:cNvPr id="22" name="TextBox 21"/>
+          <p:cNvSpPr txBox="1"/>
+          <p:nvPr/>
+        </p:nvSpPr>
+        <p:spPr>
+          <a:xfrm>
+            <a:off x="658368" y="7342631"/>
+            <a:ext cx="12344400" cy="621792"/>
+          </a:xfrm>
+          <a:prstGeom prst="rect">
+            <a:avLst/>
+          </a:prstGeom>
+          <a:noFill/>
+        </p:spPr>
+        <p:txBody>
+          <a:bodyPr wrap="square" lIns="0" rIns="0" tIns="0" bIns="0">
+            <a:spAutoFit/>
+          </a:bodyPr>
+          <a:lstStyle/>
+          <a:p>
+            <a:pPr>
+              <a:spcBef>
+                <a:spcPts val="0"/>
+              </a:spcBef>
+              <a:spcAft>
+                <a:spcPts val="900"/>
+              </a:spcAft>
+              <a:defRPr sz="1200" b="0">
+                <a:solidFill>
+                  <a:srgbClr val="AFBDC0"/>
+                </a:solidFill>
+                <a:latin typeface="Noto Sans"/>
+              </a:defRPr>
+            </a:pPr>
+            <a:r>
+              <a:t>Официальные документы ВИШ и источники расчётных данных. Проверено 30.09.2026.</a:t>
+            </a:r>
+          </a:p>
+        </p:txBody>
+      </p:sp>
+      <p:sp>
+        <p:nvSpPr>
+          <p:cNvPr id="23" name="TextBox 22"/>
+          <p:cNvSpPr txBox="1"/>
+          <p:nvPr/>
+        </p:nvSpPr>
+        <p:spPr>
+          <a:xfrm>
+            <a:off x="13121640" y="7507224"/>
+            <a:ext cx="914400" cy="365760"/>
+          </a:xfrm>
+          <a:prstGeom prst="rect">
+            <a:avLst/>
+          </a:prstGeom>
+          <a:noFill/>
+        </p:spPr>
+        <p:txBody>
+          <a:bodyPr wrap="square" lIns="0" rIns="0" tIns="0" bIns="0">
+            <a:spAutoFit/>
+          </a:bodyPr>
+          <a:lstStyle/>
+          <a:p>
+            <a:pPr>
+              <a:spcBef>
+                <a:spcPts val="0"/>
+              </a:spcBef>
+              <a:spcAft>
+                <a:spcPts val="900"/>
+              </a:spcAft>
+              <a:defRPr sz="1100" b="0">
+                <a:solidFill>
+                  <a:srgbClr val="FF793F"/>
+                </a:solidFill>
+                <a:latin typeface="Noto Sans"/>
+              </a:defRPr>
+            </a:pPr>
+            <a:r>
+              <a:t>21 / 21</a:t>
+            </a:r>
+          </a:p>
+        </p:txBody>
+      </p:sp>
+      <p:sp>
+        <p:nvSpPr>
+          <p:cNvPr id="24" name="Rectangle 23"/>
+          <p:cNvSpPr/>
+          <p:nvPr/>
+        </p:nvSpPr>
+        <p:spPr>
+          <a:xfrm>
+            <a:off x="0" y="8183879"/>
+            <a:ext cx="14630400" cy="45720"/>
+          </a:xfrm>
+          <a:prstGeom prst="rect">
+            <a:avLst/>
+          </a:prstGeom>
+          <a:solidFill>
+            <a:srgbClr val="FF793F"/>
+          </a:solidFill>
+          <a:ln>
+            <a:noFill/>
+          </a:ln>
+        </p:spPr>
+        <p:style>
+          <a:lnRef idx="1">
+            <a:schemeClr val="accent1"/>
+          </a:lnRef>
+          <a:fillRef idx="3">
+            <a:schemeClr val="accent1"/>
+          </a:fillRef>
+          <a:effectRef idx="2">
+            <a:schemeClr val="accent1"/>
+          </a:effectRef>
+          <a:fontRef idx="minor">
+            <a:schemeClr val="lt1"/>
+          </a:fontRef>
+        </p:style>
+        <p:txBody>
+          <a:bodyPr rtlCol="0" anchor="ctr"/>
+          <a:lstStyle/>
+          <a:p>
+            <a:pPr algn="ctr"/>
+          </a:p>
+        </p:txBody>
+      </p:sp>
+      <p:sp>
+        <p:nvSpPr>
+          <p:cNvPr id="25" name="Rectangle 24"/>
+          <p:cNvSpPr/>
+          <p:nvPr/>
+        </p:nvSpPr>
+        <p:spPr>
+          <a:xfrm>
+            <a:off x="658368" y="2743200"/>
+            <a:ext cx="4279392" cy="3474720"/>
+          </a:xfrm>
+          <a:prstGeom prst="rect">
+            <a:avLst/>
+          </a:prstGeom>
+          <a:solidFill>
+            <a:srgbClr val="1A2427"/>
+          </a:solidFill>
+          <a:ln>
+            <a:noFill/>
+          </a:ln>
+        </p:spPr>
+        <p:style>
+          <a:lnRef idx="1">
+            <a:schemeClr val="accent1"/>
+          </a:lnRef>
+          <a:fillRef idx="3">
+            <a:schemeClr val="accent1"/>
+          </a:fillRef>
+          <a:effectRef idx="2">
+            <a:schemeClr val="accent1"/>
+          </a:effectRef>
+          <a:fontRef idx="minor">
+            <a:schemeClr val="lt1"/>
+          </a:fontRef>
+        </p:style>
+        <p:txBody>
+          <a:bodyPr rtlCol="0" anchor="ctr"/>
+          <a:lstStyle/>
+          <a:p>
+            <a:pPr algn="ctr"/>
+          </a:p>
+        </p:txBody>
+      </p:sp>
+      <p:sp>
+        <p:nvSpPr>
+          <p:cNvPr id="26" name="TextBox 25"/>
+          <p:cNvSpPr txBox="1"/>
+          <p:nvPr/>
+        </p:nvSpPr>
+        <p:spPr>
+          <a:xfrm>
+            <a:off x="886968" y="3017520"/>
+            <a:ext cx="3822191" cy="914400"/>
+          </a:xfrm>
+          <a:prstGeom prst="rect">
+            <a:avLst/>
+          </a:prstGeom>
+          <a:noFill/>
+        </p:spPr>
+        <p:txBody>
+          <a:bodyPr wrap="square" lIns="0" rIns="0" tIns="0" bIns="0">
+            <a:spAutoFit/>
+          </a:bodyPr>
+          <a:lstStyle/>
+          <a:p>
+            <a:pPr>
+              <a:spcBef>
+                <a:spcPts val="0"/>
+              </a:spcBef>
+              <a:spcAft>
+                <a:spcPts val="900"/>
+              </a:spcAft>
+              <a:defRPr sz="2500" b="1">
+                <a:solidFill>
+                  <a:srgbClr val="F4F1E9"/>
+                </a:solidFill>
+                <a:latin typeface="Noto Sans"/>
+              </a:defRPr>
+            </a:pPr>
+            <a:r>
+              <a:t>ВИШ</a:t>
+            </a:r>
+          </a:p>
+        </p:txBody>
+      </p:sp>
+      <p:sp>
+        <p:nvSpPr>
+          <p:cNvPr id="27" name="TextBox 26"/>
+          <p:cNvSpPr txBox="1"/>
+          <p:nvPr/>
+        </p:nvSpPr>
+        <p:spPr>
+          <a:xfrm>
+            <a:off x="886968" y="4133087"/>
+            <a:ext cx="3822191" cy="1097280"/>
+          </a:xfrm>
+          <a:prstGeom prst="rect">
+            <a:avLst/>
+          </a:prstGeom>
+          <a:noFill/>
+        </p:spPr>
+        <p:txBody>
+          <a:bodyPr wrap="square" lIns="0" rIns="0" tIns="0" bIns="0">
+            <a:spAutoFit/>
+          </a:bodyPr>
+          <a:lstStyle/>
+          <a:p>
+            <a:pPr>
+              <a:spcBef>
+                <a:spcPts val="0"/>
+              </a:spcBef>
+              <a:spcAft>
+                <a:spcPts val="900"/>
+              </a:spcAft>
+              <a:defRPr sz="1900" b="0">
+                <a:solidFill>
+                  <a:srgbClr val="AFBDC0"/>
+                </a:solidFill>
+                <a:latin typeface="Noto Sans"/>
+              </a:defRPr>
+            </a:pPr>
+            <a:r>
+              <a:t>Полное положение и приложения 1–7; ТЗ СГ.</a:t>
+            </a:r>
+          </a:p>
+        </p:txBody>
+      </p:sp>
+      <p:sp>
+        <p:nvSpPr>
+          <p:cNvPr id="28" name="TextBox 27"/>
+          <p:cNvSpPr txBox="1"/>
+          <p:nvPr/>
+        </p:nvSpPr>
+        <p:spPr>
+          <a:xfrm>
+            <a:off x="886968" y="5504688"/>
+            <a:ext cx="3822191" cy="594360"/>
+          </a:xfrm>
+          <a:prstGeom prst="rect">
+            <a:avLst/>
+          </a:prstGeom>
+          <a:noFill/>
+        </p:spPr>
+        <p:txBody>
+          <a:bodyPr wrap="square" lIns="0" rIns="0" tIns="0" bIns="0">
+            <a:spAutoFit/>
+          </a:bodyPr>
+          <a:lstStyle/>
+          <a:p>
+            <a:pPr>
+              <a:spcBef>
+                <a:spcPts val="0"/>
+              </a:spcBef>
+              <a:spcAft>
+                <a:spcPts val="900"/>
+              </a:spcAft>
+              <a:defRPr sz="1200" b="0">
+                <a:solidFill>
+                  <a:srgbClr val="FF793F"/>
+                </a:solidFill>
+                <a:latin typeface="Noto Sans"/>
+              </a:defRPr>
+            </a:pPr>
+            <a:r>
+              <a:rPr>
+                <a:hlinkClick r:id="rId3"/>
+              </a:rPr>
+              <a:t>https://aesa.tech/documentation</a:t>
+            </a:r>
+          </a:p>
+        </p:txBody>
+      </p:sp>
+      <p:sp>
+        <p:nvSpPr>
+          <p:cNvPr id="29" name="Rectangle 28"/>
+          <p:cNvSpPr/>
+          <p:nvPr/>
+        </p:nvSpPr>
+        <p:spPr>
+          <a:xfrm>
+            <a:off x="5175504" y="2743200"/>
+            <a:ext cx="4279392" cy="3474720"/>
+          </a:xfrm>
+          <a:prstGeom prst="rect">
+            <a:avLst/>
+          </a:prstGeom>
+          <a:solidFill>
+            <a:srgbClr val="1A2427"/>
+          </a:solidFill>
+          <a:ln>
+            <a:noFill/>
+          </a:ln>
+        </p:spPr>
+        <p:style>
+          <a:lnRef idx="1">
+            <a:schemeClr val="accent1"/>
+          </a:lnRef>
+          <a:fillRef idx="3">
+            <a:schemeClr val="accent1"/>
+          </a:fillRef>
+          <a:effectRef idx="2">
+            <a:schemeClr val="accent1"/>
+          </a:effectRef>
+          <a:fontRef idx="minor">
+            <a:schemeClr val="lt1"/>
+          </a:fontRef>
+        </p:style>
+        <p:txBody>
+          <a:bodyPr rtlCol="0" anchor="ctr"/>
+          <a:lstStyle/>
+          <a:p>
+            <a:pPr algn="ctr"/>
+          </a:p>
+        </p:txBody>
+      </p:sp>
+      <p:sp>
+        <p:nvSpPr>
+          <p:cNvPr id="30" name="TextBox 29"/>
+          <p:cNvSpPr txBox="1"/>
+          <p:nvPr/>
+        </p:nvSpPr>
+        <p:spPr>
+          <a:xfrm>
+            <a:off x="5404104" y="3017520"/>
+            <a:ext cx="3822191" cy="914400"/>
+          </a:xfrm>
+          <a:prstGeom prst="rect">
+            <a:avLst/>
+          </a:prstGeom>
+          <a:noFill/>
+        </p:spPr>
+        <p:txBody>
+          <a:bodyPr wrap="square" lIns="0" rIns="0" tIns="0" bIns="0">
+            <a:spAutoFit/>
+          </a:bodyPr>
+          <a:lstStyle/>
+          <a:p>
+            <a:pPr>
+              <a:spcBef>
+                <a:spcPts val="0"/>
+              </a:spcBef>
+              <a:spcAft>
+                <a:spcPts val="900"/>
+              </a:spcAft>
+              <a:defRPr sz="2500" b="1">
+                <a:solidFill>
+                  <a:srgbClr val="F4F1E9"/>
+                </a:solidFill>
+                <a:latin typeface="Noto Sans"/>
+              </a:defRPr>
+            </a:pPr>
+            <a:r>
+              <a:t>AeroTech</a:t>
+            </a:r>
+          </a:p>
+        </p:txBody>
+      </p:sp>
+      <p:sp>
+        <p:nvSpPr>
+          <p:cNvPr id="31" name="TextBox 30"/>
+          <p:cNvSpPr txBox="1"/>
+          <p:nvPr/>
+        </p:nvSpPr>
+        <p:spPr>
+          <a:xfrm>
+            <a:off x="5404104" y="4133087"/>
+            <a:ext cx="3822191" cy="1097280"/>
+          </a:xfrm>
+          <a:prstGeom prst="rect">
+            <a:avLst/>
+          </a:prstGeom>
+          <a:noFill/>
+        </p:spPr>
+        <p:txBody>
+          <a:bodyPr wrap="square" lIns="0" rIns="0" tIns="0" bIns="0">
+            <a:spAutoFit/>
+          </a:bodyPr>
+          <a:lstStyle/>
+          <a:p>
+            <a:pPr>
+              <a:spcBef>
+                <a:spcPts val="0"/>
+              </a:spcBef>
+              <a:spcAft>
+                <a:spcPts val="900"/>
+              </a:spcAft>
+              <a:defRPr sz="1900" b="0">
+                <a:solidFill>
+                  <a:srgbClr val="AFBDC0"/>
+                </a:solidFill>
+                <a:latin typeface="Noto Sans"/>
+              </a:defRPr>
+            </a:pPr>
+            <a:r>
+              <a:t>Размеры, масса и график справочного двигателя.</a:t>
+            </a:r>
+          </a:p>
+        </p:txBody>
+      </p:sp>
+      <p:sp>
+        <p:nvSpPr>
+          <p:cNvPr id="32" name="TextBox 31"/>
+          <p:cNvSpPr txBox="1"/>
+          <p:nvPr/>
+        </p:nvSpPr>
+        <p:spPr>
+          <a:xfrm>
+            <a:off x="5404104" y="5504688"/>
+            <a:ext cx="3822191" cy="594360"/>
+          </a:xfrm>
+          <a:prstGeom prst="rect">
+            <a:avLst/>
+          </a:prstGeom>
+          <a:noFill/>
+        </p:spPr>
+        <p:txBody>
+          <a:bodyPr wrap="square" lIns="0" rIns="0" tIns="0" bIns="0">
+            <a:spAutoFit/>
+          </a:bodyPr>
+          <a:lstStyle/>
+          <a:p>
+            <a:pPr>
+              <a:spcBef>
+                <a:spcPts val="0"/>
+              </a:spcBef>
+              <a:spcAft>
+                <a:spcPts val="900"/>
+              </a:spcAft>
+              <a:defRPr sz="1200" b="0">
+                <a:solidFill>
+                  <a:srgbClr val="FF793F"/>
+                </a:solidFill>
+                <a:latin typeface="Noto Sans"/>
+              </a:defRPr>
+            </a:pPr>
+            <a:r>
+              <a:rPr>
+                <a:hlinkClick r:id="rId4"/>
+              </a:rPr>
+              <a:t>https://aerotech-rocketry.com/pages/catalogs-brochures</a:t>
+            </a:r>
+          </a:p>
+        </p:txBody>
+      </p:sp>
+      <p:sp>
+        <p:nvSpPr>
+          <p:cNvPr id="33" name="Rectangle 32"/>
+          <p:cNvSpPr/>
+          <p:nvPr/>
+        </p:nvSpPr>
+        <p:spPr>
+          <a:xfrm>
+            <a:off x="9692640" y="2743200"/>
+            <a:ext cx="4279392" cy="3474720"/>
+          </a:xfrm>
+          <a:prstGeom prst="rect">
+            <a:avLst/>
+          </a:prstGeom>
+          <a:solidFill>
+            <a:srgbClr val="1A2427"/>
+          </a:solidFill>
+          <a:ln>
+            <a:noFill/>
+          </a:ln>
+        </p:spPr>
+        <p:style>
+          <a:lnRef idx="1">
+            <a:schemeClr val="accent1"/>
+          </a:lnRef>
+          <a:fillRef idx="3">
+            <a:schemeClr val="accent1"/>
+          </a:fillRef>
+          <a:effectRef idx="2">
+            <a:schemeClr val="accent1"/>
+          </a:effectRef>
+          <a:fontRef idx="minor">
+            <a:schemeClr val="lt1"/>
+          </a:fontRef>
+        </p:style>
+        <p:txBody>
+          <a:bodyPr rtlCol="0" anchor="ctr"/>
+          <a:lstStyle/>
+          <a:p>
+            <a:pPr algn="ctr"/>
+          </a:p>
+        </p:txBody>
+      </p:sp>
+      <p:sp>
+        <p:nvSpPr>
+          <p:cNvPr id="34" name="TextBox 33"/>
+          <p:cNvSpPr txBox="1"/>
+          <p:nvPr/>
+        </p:nvSpPr>
+        <p:spPr>
+          <a:xfrm>
+            <a:off x="9921240" y="3017520"/>
+            <a:ext cx="3822191" cy="914400"/>
+          </a:xfrm>
+          <a:prstGeom prst="rect">
+            <a:avLst/>
+          </a:prstGeom>
+          <a:noFill/>
+        </p:spPr>
+        <p:txBody>
+          <a:bodyPr wrap="square" lIns="0" rIns="0" tIns="0" bIns="0">
+            <a:spAutoFit/>
+          </a:bodyPr>
+          <a:lstStyle/>
+          <a:p>
+            <a:pPr>
+              <a:spcBef>
+                <a:spcPts val="0"/>
+              </a:spcBef>
+              <a:spcAft>
+                <a:spcPts val="900"/>
+              </a:spcAft>
+              <a:defRPr sz="2500" b="1">
+                <a:solidFill>
+                  <a:srgbClr val="F4F1E9"/>
+                </a:solidFill>
+                <a:latin typeface="Noto Sans"/>
+              </a:defRPr>
+            </a:pPr>
+            <a:r>
+              <a:t>NASA / Barrowman</a:t>
+            </a:r>
+          </a:p>
+        </p:txBody>
+      </p:sp>
+      <p:sp>
+        <p:nvSpPr>
+          <p:cNvPr id="35" name="TextBox 34"/>
+          <p:cNvSpPr txBox="1"/>
+          <p:nvPr/>
+        </p:nvSpPr>
+        <p:spPr>
+          <a:xfrm>
+            <a:off x="9921240" y="4133087"/>
+            <a:ext cx="3822191" cy="1097280"/>
+          </a:xfrm>
+          <a:prstGeom prst="rect">
+            <a:avLst/>
+          </a:prstGeom>
+          <a:noFill/>
+        </p:spPr>
+        <p:txBody>
+          <a:bodyPr wrap="square" lIns="0" rIns="0" tIns="0" bIns="0">
+            <a:spAutoFit/>
+          </a:bodyPr>
+          <a:lstStyle/>
+          <a:p>
+            <a:pPr>
+              <a:spcBef>
+                <a:spcPts val="0"/>
+              </a:spcBef>
+              <a:spcAft>
+                <a:spcPts val="900"/>
+              </a:spcAft>
+              <a:defRPr sz="1900" b="0">
+                <a:solidFill>
+                  <a:srgbClr val="AFBDC0"/>
+                </a:solidFill>
+                <a:latin typeface="Noto Sans"/>
+              </a:defRPr>
+            </a:pPr>
+            <a:r>
+              <a:t>Метод линейной оценки и ограничения применимости.</a:t>
+            </a:r>
+          </a:p>
+        </p:txBody>
+      </p:sp>
+      <p:sp>
+        <p:nvSpPr>
+          <p:cNvPr id="36" name="TextBox 35"/>
+          <p:cNvSpPr txBox="1"/>
+          <p:nvPr/>
+        </p:nvSpPr>
+        <p:spPr>
+          <a:xfrm>
+            <a:off x="9921240" y="5504688"/>
+            <a:ext cx="3822191" cy="594360"/>
+          </a:xfrm>
+          <a:prstGeom prst="rect">
+            <a:avLst/>
+          </a:prstGeom>
+          <a:noFill/>
+        </p:spPr>
+        <p:txBody>
+          <a:bodyPr wrap="square" lIns="0" rIns="0" tIns="0" bIns="0">
+            <a:spAutoFit/>
+          </a:bodyPr>
+          <a:lstStyle/>
+          <a:p>
+            <a:pPr>
+              <a:spcBef>
+                <a:spcPts val="0"/>
+              </a:spcBef>
+              <a:spcAft>
+                <a:spcPts val="900"/>
+              </a:spcAft>
+              <a:defRPr sz="1200" b="0">
+                <a:solidFill>
+                  <a:srgbClr val="FF793F"/>
+                </a:solidFill>
+                <a:latin typeface="Noto Sans"/>
+              </a:defRPr>
+            </a:pPr>
+            <a:r>
+              <a:rPr>
+                <a:hlinkClick r:id="rId5"/>
+              </a:rPr>
+              <a:t>https://ntrs.nasa.gov/citations/20010047838</a:t>
             </a:r>
           </a:p>
         </p:txBody>
@@ -18644,7 +24635,7 @@
               </a:defRPr>
             </a:pPr>
             <a:r>
-              <a:t>03 / 16</a:t>
+              <a:t>03 / 21</a:t>
             </a:r>
           </a:p>
         </p:txBody>
@@ -18658,7 +24649,7 @@
         <p:spPr>
           <a:xfrm>
             <a:off x="0" y="8183879"/>
-            <a:ext cx="2743200" cy="45720"/>
+            <a:ext cx="2090057" cy="45720"/>
           </a:xfrm>
           <a:prstGeom prst="rect">
             <a:avLst/>
@@ -20164,7 +26155,7 @@
               </a:defRPr>
             </a:pPr>
             <a:r>
-              <a:t>04 / 16</a:t>
+              <a:t>04 / 21</a:t>
             </a:r>
           </a:p>
         </p:txBody>
@@ -20178,7 +26169,7 @@
         <p:spPr>
           <a:xfrm>
             <a:off x="0" y="8183879"/>
-            <a:ext cx="3657600" cy="45720"/>
+            <a:ext cx="2786742" cy="45720"/>
           </a:xfrm>
           <a:prstGeom prst="rect">
             <a:avLst/>
@@ -21198,7 +27189,7 @@
               </a:defRPr>
             </a:pPr>
             <a:r>
-              <a:t>05 / 16</a:t>
+              <a:t>05 / 21</a:t>
             </a:r>
           </a:p>
         </p:txBody>
@@ -21212,7 +27203,7 @@
         <p:spPr>
           <a:xfrm>
             <a:off x="0" y="8183879"/>
-            <a:ext cx="4572000" cy="45720"/>
+            <a:ext cx="3483428" cy="45720"/>
           </a:xfrm>
           <a:prstGeom prst="rect">
             <a:avLst/>
@@ -22232,7 +28223,7 @@
               </a:defRPr>
             </a:pPr>
             <a:r>
-              <a:t>06 / 16</a:t>
+              <a:t>06 / 21</a:t>
             </a:r>
           </a:p>
         </p:txBody>
@@ -22246,7 +28237,7 @@
         <p:spPr>
           <a:xfrm>
             <a:off x="0" y="8183879"/>
-            <a:ext cx="5486400" cy="45720"/>
+            <a:ext cx="4180114" cy="45720"/>
           </a:xfrm>
           <a:prstGeom prst="rect">
             <a:avLst/>
@@ -23266,7 +29257,7 @@
               </a:defRPr>
             </a:pPr>
             <a:r>
-              <a:t>07 / 16</a:t>
+              <a:t>07 / 21</a:t>
             </a:r>
           </a:p>
         </p:txBody>
@@ -23280,7 +29271,7 @@
         <p:spPr>
           <a:xfrm>
             <a:off x="0" y="8183879"/>
-            <a:ext cx="6400800" cy="45720"/>
+            <a:ext cx="4876800" cy="45720"/>
           </a:xfrm>
           <a:prstGeom prst="rect">
             <a:avLst/>
@@ -24786,7 +30777,7 @@
               </a:defRPr>
             </a:pPr>
             <a:r>
-              <a:t>08 / 16</a:t>
+              <a:t>08 / 21</a:t>
             </a:r>
           </a:p>
         </p:txBody>
@@ -24800,7 +30791,7 @@
         <p:spPr>
           <a:xfrm>
             <a:off x="0" y="8183879"/>
-            <a:ext cx="7315200" cy="45720"/>
+            <a:ext cx="5573485" cy="45720"/>
           </a:xfrm>
           <a:prstGeom prst="rect">
             <a:avLst/>
@@ -25820,7 +31811,7 @@
               </a:defRPr>
             </a:pPr>
             <a:r>
-              <a:t>09 / 16</a:t>
+              <a:t>09 / 21</a:t>
             </a:r>
           </a:p>
         </p:txBody>
@@ -25834,7 +31825,7 @@
         <p:spPr>
           <a:xfrm>
             <a:off x="0" y="8183879"/>
-            <a:ext cx="8229600" cy="45720"/>
+            <a:ext cx="6270171" cy="45720"/>
           </a:xfrm>
           <a:prstGeom prst="rect">
             <a:avLst/>

--- a/presentation/PLBP-SG1.pptx
+++ b/presentation/PLBP-SG1.pptx
@@ -26,6 +26,10 @@
     <p:sldId id="274" r:id="rId26"/>
     <p:sldId id="275" r:id="rId27"/>
     <p:sldId id="276" r:id="rId28"/>
+    <p:sldId id="277" r:id="rId29"/>
+    <p:sldId id="278" r:id="rId30"/>
+    <p:sldId id="279" r:id="rId31"/>
+    <p:sldId id="280" r:id="rId32"/>
   </p:sldIdLst>
   <p:sldSz cx="14630400" cy="8229600" type="screen4x3"/>
   <p:notesSz cx="6858000" cy="9144000"/>
@@ -1401,6 +1405,270 @@
 </p:notes>
 </file>
 
+<file path=ppt/notesSlides/notesSlide22.xml><?xml version="1.0" encoding="utf-8"?>
+<p:notes xmlns:a="http://schemas.openxmlformats.org/drawingml/2006/main" xmlns:p="http://schemas.openxmlformats.org/presentationml/2006/main" xmlns:r="http://schemas.openxmlformats.org/officeDocument/2006/relationships">
+  <p:cSld>
+    <p:spTree>
+      <p:nvGrpSpPr>
+        <p:cNvPr id="1" name=""/>
+        <p:cNvGrpSpPr/>
+        <p:nvPr/>
+      </p:nvGrpSpPr>
+      <p:grpSpPr>
+        <a:xfrm>
+          <a:off x="0" y="0"/>
+          <a:ext cx="0" cy="0"/>
+          <a:chOff x="0" y="0"/>
+          <a:chExt cx="0" cy="0"/>
+        </a:xfrm>
+      </p:grpSpPr>
+      <p:sp>
+        <p:nvSpPr>
+          <p:cNvPr id="2" name="Slide Image Placeholder 1"/>
+          <p:cNvSpPr>
+            <a:spLocks noGrp="1"/>
+          </p:cNvSpPr>
+          <p:nvPr>
+            <p:ph type="sldImg" idx="2"/>
+          </p:nvPr>
+        </p:nvSpPr>
+        <p:spPr/>
+      </p:sp>
+      <p:sp>
+        <p:nvSpPr>
+          <p:cNvPr id="3" name="Notes Placeholder 2"/>
+          <p:cNvSpPr>
+            <a:spLocks noGrp="1"/>
+          </p:cNvSpPr>
+          <p:nvPr>
+            <p:ph type="body" idx="3" sz="quarter"/>
+          </p:nvPr>
+        </p:nvSpPr>
+        <p:spPr/>
+        <p:txBody>
+          <a:bodyPr/>
+          <a:lstStyle/>
+          <a:p/>
+        </p:txBody>
+      </p:sp>
+      <p:sp>
+        <p:nvSpPr>
+          <p:cNvPr id="4" name="Slide Number Placeholder 3"/>
+          <p:cNvSpPr>
+            <a:spLocks noGrp="1"/>
+          </p:cNvSpPr>
+          <p:nvPr>
+            <p:ph type="sldNum" idx="5" sz="quarter"/>
+          </p:nvPr>
+        </p:nvSpPr>
+        <p:spPr/>
+      </p:sp>
+    </p:spTree>
+  </p:cSld>
+  <p:clrMapOvr>
+    <a:masterClrMapping/>
+  </p:clrMapOvr>
+</p:notes>
+</file>
+
+<file path=ppt/notesSlides/notesSlide23.xml><?xml version="1.0" encoding="utf-8"?>
+<p:notes xmlns:a="http://schemas.openxmlformats.org/drawingml/2006/main" xmlns:p="http://schemas.openxmlformats.org/presentationml/2006/main" xmlns:r="http://schemas.openxmlformats.org/officeDocument/2006/relationships">
+  <p:cSld>
+    <p:spTree>
+      <p:nvGrpSpPr>
+        <p:cNvPr id="1" name=""/>
+        <p:cNvGrpSpPr/>
+        <p:nvPr/>
+      </p:nvGrpSpPr>
+      <p:grpSpPr>
+        <a:xfrm>
+          <a:off x="0" y="0"/>
+          <a:ext cx="0" cy="0"/>
+          <a:chOff x="0" y="0"/>
+          <a:chExt cx="0" cy="0"/>
+        </a:xfrm>
+      </p:grpSpPr>
+      <p:sp>
+        <p:nvSpPr>
+          <p:cNvPr id="2" name="Slide Image Placeholder 1"/>
+          <p:cNvSpPr>
+            <a:spLocks noGrp="1"/>
+          </p:cNvSpPr>
+          <p:nvPr>
+            <p:ph type="sldImg" idx="2"/>
+          </p:nvPr>
+        </p:nvSpPr>
+        <p:spPr/>
+      </p:sp>
+      <p:sp>
+        <p:nvSpPr>
+          <p:cNvPr id="3" name="Notes Placeholder 2"/>
+          <p:cNvSpPr>
+            <a:spLocks noGrp="1"/>
+          </p:cNvSpPr>
+          <p:nvPr>
+            <p:ph type="body" idx="3" sz="quarter"/>
+          </p:nvPr>
+        </p:nvSpPr>
+        <p:spPr/>
+        <p:txBody>
+          <a:bodyPr/>
+          <a:lstStyle/>
+          <a:p/>
+        </p:txBody>
+      </p:sp>
+      <p:sp>
+        <p:nvSpPr>
+          <p:cNvPr id="4" name="Slide Number Placeholder 3"/>
+          <p:cNvSpPr>
+            <a:spLocks noGrp="1"/>
+          </p:cNvSpPr>
+          <p:nvPr>
+            <p:ph type="sldNum" idx="5" sz="quarter"/>
+          </p:nvPr>
+        </p:nvSpPr>
+        <p:spPr/>
+      </p:sp>
+    </p:spTree>
+  </p:cSld>
+  <p:clrMapOvr>
+    <a:masterClrMapping/>
+  </p:clrMapOvr>
+</p:notes>
+</file>
+
+<file path=ppt/notesSlides/notesSlide24.xml><?xml version="1.0" encoding="utf-8"?>
+<p:notes xmlns:a="http://schemas.openxmlformats.org/drawingml/2006/main" xmlns:p="http://schemas.openxmlformats.org/presentationml/2006/main" xmlns:r="http://schemas.openxmlformats.org/officeDocument/2006/relationships">
+  <p:cSld>
+    <p:spTree>
+      <p:nvGrpSpPr>
+        <p:cNvPr id="1" name=""/>
+        <p:cNvGrpSpPr/>
+        <p:nvPr/>
+      </p:nvGrpSpPr>
+      <p:grpSpPr>
+        <a:xfrm>
+          <a:off x="0" y="0"/>
+          <a:ext cx="0" cy="0"/>
+          <a:chOff x="0" y="0"/>
+          <a:chExt cx="0" cy="0"/>
+        </a:xfrm>
+      </p:grpSpPr>
+      <p:sp>
+        <p:nvSpPr>
+          <p:cNvPr id="2" name="Slide Image Placeholder 1"/>
+          <p:cNvSpPr>
+            <a:spLocks noGrp="1"/>
+          </p:cNvSpPr>
+          <p:nvPr>
+            <p:ph type="sldImg" idx="2"/>
+          </p:nvPr>
+        </p:nvSpPr>
+        <p:spPr/>
+      </p:sp>
+      <p:sp>
+        <p:nvSpPr>
+          <p:cNvPr id="3" name="Notes Placeholder 2"/>
+          <p:cNvSpPr>
+            <a:spLocks noGrp="1"/>
+          </p:cNvSpPr>
+          <p:nvPr>
+            <p:ph type="body" idx="3" sz="quarter"/>
+          </p:nvPr>
+        </p:nvSpPr>
+        <p:spPr/>
+        <p:txBody>
+          <a:bodyPr/>
+          <a:lstStyle/>
+          <a:p/>
+        </p:txBody>
+      </p:sp>
+      <p:sp>
+        <p:nvSpPr>
+          <p:cNvPr id="4" name="Slide Number Placeholder 3"/>
+          <p:cNvSpPr>
+            <a:spLocks noGrp="1"/>
+          </p:cNvSpPr>
+          <p:nvPr>
+            <p:ph type="sldNum" idx="5" sz="quarter"/>
+          </p:nvPr>
+        </p:nvSpPr>
+        <p:spPr/>
+      </p:sp>
+    </p:spTree>
+  </p:cSld>
+  <p:clrMapOvr>
+    <a:masterClrMapping/>
+  </p:clrMapOvr>
+</p:notes>
+</file>
+
+<file path=ppt/notesSlides/notesSlide25.xml><?xml version="1.0" encoding="utf-8"?>
+<p:notes xmlns:a="http://schemas.openxmlformats.org/drawingml/2006/main" xmlns:p="http://schemas.openxmlformats.org/presentationml/2006/main" xmlns:r="http://schemas.openxmlformats.org/officeDocument/2006/relationships">
+  <p:cSld>
+    <p:spTree>
+      <p:nvGrpSpPr>
+        <p:cNvPr id="1" name=""/>
+        <p:cNvGrpSpPr/>
+        <p:nvPr/>
+      </p:nvGrpSpPr>
+      <p:grpSpPr>
+        <a:xfrm>
+          <a:off x="0" y="0"/>
+          <a:ext cx="0" cy="0"/>
+          <a:chOff x="0" y="0"/>
+          <a:chExt cx="0" cy="0"/>
+        </a:xfrm>
+      </p:grpSpPr>
+      <p:sp>
+        <p:nvSpPr>
+          <p:cNvPr id="2" name="Slide Image Placeholder 1"/>
+          <p:cNvSpPr>
+            <a:spLocks noGrp="1"/>
+          </p:cNvSpPr>
+          <p:nvPr>
+            <p:ph type="sldImg" idx="2"/>
+          </p:nvPr>
+        </p:nvSpPr>
+        <p:spPr/>
+      </p:sp>
+      <p:sp>
+        <p:nvSpPr>
+          <p:cNvPr id="3" name="Notes Placeholder 2"/>
+          <p:cNvSpPr>
+            <a:spLocks noGrp="1"/>
+          </p:cNvSpPr>
+          <p:nvPr>
+            <p:ph type="body" idx="3" sz="quarter"/>
+          </p:nvPr>
+        </p:nvSpPr>
+        <p:spPr/>
+        <p:txBody>
+          <a:bodyPr/>
+          <a:lstStyle/>
+          <a:p/>
+        </p:txBody>
+      </p:sp>
+      <p:sp>
+        <p:nvSpPr>
+          <p:cNvPr id="4" name="Slide Number Placeholder 3"/>
+          <p:cNvSpPr>
+            <a:spLocks noGrp="1"/>
+          </p:cNvSpPr>
+          <p:nvPr>
+            <p:ph type="sldNum" idx="5" sz="quarter"/>
+          </p:nvPr>
+        </p:nvSpPr>
+        <p:spPr/>
+      </p:sp>
+    </p:spTree>
+  </p:cSld>
+  <p:clrMapOvr>
+    <a:masterClrMapping/>
+  </p:clrMapOvr>
+</p:notes>
+</file>
+
 <file path=ppt/notesSlides/notesSlide3.xml><?xml version="1.0" encoding="utf-8"?>
 <p:notes xmlns:a="http://schemas.openxmlformats.org/drawingml/2006/main" xmlns:p="http://schemas.openxmlformats.org/presentationml/2006/main" xmlns:r="http://schemas.openxmlformats.org/officeDocument/2006/relationships">
   <p:cSld>
@@ -5746,7 +6014,7 @@
               </a:defRPr>
             </a:pPr>
             <a:r>
-              <a:t>01 / 21</a:t>
+              <a:t>01 / 25</a:t>
             </a:r>
           </a:p>
         </p:txBody>
@@ -5760,7 +6028,7 @@
         <p:spPr>
           <a:xfrm>
             <a:off x="0" y="8183879"/>
-            <a:ext cx="696685" cy="45720"/>
+            <a:ext cx="585216" cy="45720"/>
           </a:xfrm>
           <a:prstGeom prst="rect">
             <a:avLst/>
@@ -7182,7 +7450,7 @@
               </a:defRPr>
             </a:pPr>
             <a:r>
-              <a:t>10 / 21</a:t>
+              <a:t>10 / 25</a:t>
             </a:r>
           </a:p>
         </p:txBody>
@@ -7196,7 +7464,7 @@
         <p:spPr>
           <a:xfrm>
             <a:off x="0" y="8183879"/>
-            <a:ext cx="6966857" cy="45720"/>
+            <a:ext cx="5852160" cy="45720"/>
           </a:xfrm>
           <a:prstGeom prst="rect">
             <a:avLst/>
@@ -8216,7 +8484,7 @@
               </a:defRPr>
             </a:pPr>
             <a:r>
-              <a:t>11 / 21</a:t>
+              <a:t>11 / 25</a:t>
             </a:r>
           </a:p>
         </p:txBody>
@@ -8230,7 +8498,7 @@
         <p:spPr>
           <a:xfrm>
             <a:off x="0" y="8183879"/>
-            <a:ext cx="7663542" cy="45720"/>
+            <a:ext cx="6437376" cy="45720"/>
           </a:xfrm>
           <a:prstGeom prst="rect">
             <a:avLst/>
@@ -9736,7 +10004,7 @@
               </a:defRPr>
             </a:pPr>
             <a:r>
-              <a:t>12 / 21</a:t>
+              <a:t>12 / 25</a:t>
             </a:r>
           </a:p>
         </p:txBody>
@@ -9750,7 +10018,7 @@
         <p:spPr>
           <a:xfrm>
             <a:off x="0" y="8183879"/>
-            <a:ext cx="8360228" cy="45720"/>
+            <a:ext cx="7022592" cy="45720"/>
           </a:xfrm>
           <a:prstGeom prst="rect">
             <a:avLst/>
@@ -11467,7 +11735,7 @@
               </a:defRPr>
             </a:pPr>
             <a:r>
-              <a:t>1,5 кг нагрузки → 5,787 кг на старте</a:t>
+              <a:t>Масса базовой компоновки A04</a:t>
             </a:r>
           </a:p>
         </p:txBody>
@@ -11552,7 +11820,7 @@
               </a:defRPr>
             </a:pPr>
             <a:r>
-              <a:t>Общая масса по ТЗ не ограничена. Шкала до 6 кг. Масса расчётная, не измеренная.</a:t>
+              <a:t>Историческая база. Текущий вариант E02: 5,932 кг с полезной нагрузкой 1,5 кг.</a:t>
             </a:r>
           </a:p>
         </p:txBody>
@@ -11594,7 +11862,7 @@
               </a:defRPr>
             </a:pPr>
             <a:r>
-              <a:t>13 / 21</a:t>
+              <a:t>13 / 25</a:t>
             </a:r>
           </a:p>
         </p:txBody>
@@ -11608,7 +11876,7 @@
         <p:spPr>
           <a:xfrm>
             <a:off x="0" y="8183879"/>
-            <a:ext cx="9056914" cy="45720"/>
+            <a:ext cx="7607808" cy="45720"/>
           </a:xfrm>
           <a:prstGeom prst="rect">
             <a:avLst/>
@@ -13028,7 +13296,7 @@
               </a:defRPr>
             </a:pPr>
             <a:r>
-              <a:t>14 / 21</a:t>
+              <a:t>14 / 25</a:t>
             </a:r>
           </a:p>
         </p:txBody>
@@ -13042,7 +13310,7 @@
         <p:spPr>
           <a:xfrm>
             <a:off x="0" y="8183879"/>
-            <a:ext cx="9753600" cy="45720"/>
+            <a:ext cx="8193024" cy="45720"/>
           </a:xfrm>
           <a:prstGeom prst="rect">
             <a:avLst/>
@@ -14548,7 +14816,7 @@
               </a:defRPr>
             </a:pPr>
             <a:r>
-              <a:t>15 / 21</a:t>
+              <a:t>15 / 25</a:t>
             </a:r>
           </a:p>
         </p:txBody>
@@ -14562,7 +14830,7 @@
         <p:spPr>
           <a:xfrm>
             <a:off x="0" y="8183879"/>
-            <a:ext cx="10450285" cy="45720"/>
+            <a:ext cx="8778240" cy="45720"/>
           </a:xfrm>
           <a:prstGeom prst="rect">
             <a:avLst/>
@@ -15936,7 +16204,7 @@
               </a:defRPr>
             </a:pPr>
             <a:r>
-              <a:t>16 / 21</a:t>
+              <a:t>16 / 25</a:t>
             </a:r>
           </a:p>
         </p:txBody>
@@ -15950,7 +16218,7 @@
         <p:spPr>
           <a:xfrm>
             <a:off x="0" y="8183879"/>
-            <a:ext cx="11146971" cy="45720"/>
+            <a:ext cx="9363456" cy="45720"/>
           </a:xfrm>
           <a:prstGeom prst="rect">
             <a:avLst/>
@@ -16843,7 +17111,7 @@
               </a:defRPr>
             </a:pPr>
             <a:r>
-              <a:t>Вариант креплений E01</a:t>
+              <a:t>Предыдущий вариант E01</a:t>
             </a:r>
           </a:p>
         </p:txBody>
@@ -16970,7 +17238,7 @@
               </a:defRPr>
             </a:pPr>
             <a:r>
-              <a:t>17 / 21</a:t>
+              <a:t>17 / 25</a:t>
             </a:r>
           </a:p>
         </p:txBody>
@@ -16984,7 +17252,7 @@
         <p:spPr>
           <a:xfrm>
             <a:off x="0" y="8183879"/>
-            <a:ext cx="11843657" cy="45720"/>
+            <a:ext cx="9948672" cy="45720"/>
           </a:xfrm>
           <a:prstGeom prst="rect">
             <a:avLst/>
@@ -18004,7 +18272,7 @@
               </a:defRPr>
             </a:pPr>
             <a:r>
-              <a:t>18 / 21</a:t>
+              <a:t>18 / 25</a:t>
             </a:r>
           </a:p>
         </p:txBody>
@@ -18018,7 +18286,7 @@
         <p:spPr>
           <a:xfrm>
             <a:off x="0" y="8183879"/>
-            <a:ext cx="12540342" cy="45720"/>
+            <a:ext cx="10533888" cy="45720"/>
           </a:xfrm>
           <a:prstGeom prst="rect">
             <a:avLst/>
@@ -19038,7 +19306,7 @@
               </a:defRPr>
             </a:pPr>
             <a:r>
-              <a:t>19 / 21</a:t>
+              <a:t>19 / 25</a:t>
             </a:r>
           </a:p>
         </p:txBody>
@@ -19052,7 +19320,7 @@
         <p:spPr>
           <a:xfrm>
             <a:off x="0" y="8183879"/>
-            <a:ext cx="13237028" cy="45720"/>
+            <a:ext cx="11119104" cy="45720"/>
           </a:xfrm>
           <a:prstGeom prst="rect">
             <a:avLst/>
@@ -20072,7 +20340,7 @@
               </a:defRPr>
             </a:pPr>
             <a:r>
-              <a:t>02 / 21</a:t>
+              <a:t>02 / 25</a:t>
             </a:r>
           </a:p>
         </p:txBody>
@@ -20086,7 +20354,7 @@
         <p:spPr>
           <a:xfrm>
             <a:off x="0" y="8183879"/>
-            <a:ext cx="1393371" cy="45720"/>
+            <a:ext cx="1170432" cy="45720"/>
           </a:xfrm>
           <a:prstGeom prst="rect">
             <a:avLst/>
@@ -21547,7 +21815,7 @@
               </a:defRPr>
             </a:pPr>
             <a:r>
-              <a:t>Базовая A04 сохранена. E01 — примерочный вариант; OR02 оценивает чувствительность к его массе.</a:t>
+              <a:t>Текущая компоновка E02 и миссия M01 показаны далее; испытания остаются отдельным этапом.</a:t>
             </a:r>
           </a:p>
         </p:txBody>
@@ -21589,7 +21857,7 @@
               </a:defRPr>
             </a:pPr>
             <a:r>
-              <a:t>20 / 21</a:t>
+              <a:t>20 / 25</a:t>
             </a:r>
           </a:p>
         </p:txBody>
@@ -21603,7 +21871,7 @@
         <p:spPr>
           <a:xfrm>
             <a:off x="0" y="8183879"/>
-            <a:ext cx="13933714" cy="45720"/>
+            <a:ext cx="11704320" cy="45720"/>
           </a:xfrm>
           <a:prstGeom prst="rect">
             <a:avLst/>
@@ -21760,7 +22028,7 @@
               </a:defRPr>
             </a:pPr>
             <a:r>
-              <a:t>Доступ к батарее</a:t>
+              <a:t>Обслуживание</a:t>
             </a:r>
           </a:p>
         </p:txBody>
@@ -21802,7 +22070,7 @@
               </a:defRPr>
             </a:pPr>
             <a:r>
-              <a:t>Спроектировать обслуживание в собранном корпусе и измерить время замены.</a:t>
+              <a:t>Спроектировать стыки корпуса и доступ к лотку.</a:t>
             </a:r>
           </a:p>
         </p:txBody>
@@ -21930,7 +22198,7 @@
               </a:defRPr>
             </a:pPr>
             <a:r>
-              <a:t>Удержание и соединения</a:t>
+              <a:t>Удержание</a:t>
             </a:r>
           </a:p>
         </p:txBody>
@@ -21972,7 +22240,7 @@
               </a:defRPr>
             </a:pPr>
             <a:r>
-              <a:t>Крепление лотка, ленты, прокладки, проводка и стенд с массовыми макетами.</a:t>
+              <a:t>Закрыть крепления платы, батарей и блока спасения; затем стенд.</a:t>
             </a:r>
           </a:p>
         </p:txBody>
@@ -22100,7 +22368,7 @@
               </a:defRPr>
             </a:pPr>
             <a:r>
-              <a:t>Фактические входы</a:t>
+              <a:t>Данные запуска</a:t>
             </a:r>
           </a:p>
         </p:txBody>
@@ -22142,7 +22410,7 @@
               </a:defRPr>
             </a:pPr>
             <a:r>
-              <a:t>Двигатель организаторов, массы, CG, метеопрофиль и направляющая.</a:t>
+              <a:t>Получить двигатель организаторов, реальные массы, ветер и направляющую.</a:t>
             </a:r>
           </a:p>
         </p:txBody>
@@ -22855,7 +23123,7 @@
               </a:defRPr>
             </a:pPr>
             <a:r>
-              <a:t>ИСТОЧНИКИ</a:t>
+              <a:t>E02 / M01 / OR03 · 01.10.2026</a:t>
             </a:r>
           </a:p>
         </p:txBody>
@@ -22982,6 +23250,5111 @@
               </a:defRPr>
             </a:pPr>
             <a:r>
+              <a:t>Внутренние узлы E02</a:t>
+            </a:r>
+          </a:p>
+        </p:txBody>
+      </p:sp>
+      <p:sp>
+        <p:nvSpPr>
+          <p:cNvPr id="21" name="Rectangle 20"/>
+          <p:cNvSpPr/>
+          <p:nvPr/>
+        </p:nvSpPr>
+        <p:spPr>
+          <a:xfrm>
+            <a:off x="658368" y="7159752"/>
+            <a:ext cx="13313664" cy="10972"/>
+          </a:xfrm>
+          <a:prstGeom prst="rect">
+            <a:avLst/>
+          </a:prstGeom>
+          <a:solidFill>
+            <a:srgbClr val="354347"/>
+          </a:solidFill>
+          <a:ln>
+            <a:noFill/>
+          </a:ln>
+        </p:spPr>
+        <p:style>
+          <a:lnRef idx="1">
+            <a:schemeClr val="accent1"/>
+          </a:lnRef>
+          <a:fillRef idx="3">
+            <a:schemeClr val="accent1"/>
+          </a:fillRef>
+          <a:effectRef idx="2">
+            <a:schemeClr val="accent1"/>
+          </a:effectRef>
+          <a:fontRef idx="minor">
+            <a:schemeClr val="lt1"/>
+          </a:fontRef>
+        </p:style>
+        <p:txBody>
+          <a:bodyPr rtlCol="0" anchor="ctr"/>
+          <a:lstStyle/>
+          <a:p>
+            <a:pPr algn="ctr"/>
+          </a:p>
+        </p:txBody>
+      </p:sp>
+      <p:sp>
+        <p:nvSpPr>
+          <p:cNvPr id="22" name="TextBox 21"/>
+          <p:cNvSpPr txBox="1"/>
+          <p:nvPr/>
+        </p:nvSpPr>
+        <p:spPr>
+          <a:xfrm>
+            <a:off x="658368" y="7342631"/>
+            <a:ext cx="12344400" cy="621792"/>
+          </a:xfrm>
+          <a:prstGeom prst="rect">
+            <a:avLst/>
+          </a:prstGeom>
+          <a:noFill/>
+        </p:spPr>
+        <p:txBody>
+          <a:bodyPr wrap="square" lIns="0" rIns="0" tIns="0" bIns="0">
+            <a:spAutoFit/>
+          </a:bodyPr>
+          <a:lstStyle/>
+          <a:p>
+            <a:pPr>
+              <a:spcBef>
+                <a:spcPts val="0"/>
+              </a:spcBef>
+              <a:spcAft>
+                <a:spcPts val="900"/>
+              </a:spcAft>
+              <a:defRPr sz="1200" b="0">
+                <a:solidFill>
+                  <a:srgbClr val="AFBDC0"/>
+                </a:solidFill>
+                <a:latin typeface="Noto Sans"/>
+              </a:defRPr>
+            </a:pPr>
+            <a:r>
+              <a:t>55 тел без пересечений. Материалы и массы сохранены. Соединения и прочность требуют испытаний.</a:t>
+            </a:r>
+          </a:p>
+        </p:txBody>
+      </p:sp>
+      <p:sp>
+        <p:nvSpPr>
+          <p:cNvPr id="23" name="TextBox 22"/>
+          <p:cNvSpPr txBox="1"/>
+          <p:nvPr/>
+        </p:nvSpPr>
+        <p:spPr>
+          <a:xfrm>
+            <a:off x="13121640" y="7507224"/>
+            <a:ext cx="914400" cy="365760"/>
+          </a:xfrm>
+          <a:prstGeom prst="rect">
+            <a:avLst/>
+          </a:prstGeom>
+          <a:noFill/>
+        </p:spPr>
+        <p:txBody>
+          <a:bodyPr wrap="square" lIns="0" rIns="0" tIns="0" bIns="0">
+            <a:spAutoFit/>
+          </a:bodyPr>
+          <a:lstStyle/>
+          <a:p>
+            <a:pPr>
+              <a:spcBef>
+                <a:spcPts val="0"/>
+              </a:spcBef>
+              <a:spcAft>
+                <a:spcPts val="900"/>
+              </a:spcAft>
+              <a:defRPr sz="1100" b="0">
+                <a:solidFill>
+                  <a:srgbClr val="FF793F"/>
+                </a:solidFill>
+                <a:latin typeface="Noto Sans"/>
+              </a:defRPr>
+            </a:pPr>
+            <a:r>
+              <a:t>21 / 25</a:t>
+            </a:r>
+          </a:p>
+        </p:txBody>
+      </p:sp>
+      <p:sp>
+        <p:nvSpPr>
+          <p:cNvPr id="24" name="Rectangle 23"/>
+          <p:cNvSpPr/>
+          <p:nvPr/>
+        </p:nvSpPr>
+        <p:spPr>
+          <a:xfrm>
+            <a:off x="0" y="8183879"/>
+            <a:ext cx="12289536" cy="45720"/>
+          </a:xfrm>
+          <a:prstGeom prst="rect">
+            <a:avLst/>
+          </a:prstGeom>
+          <a:solidFill>
+            <a:srgbClr val="FF793F"/>
+          </a:solidFill>
+          <a:ln>
+            <a:noFill/>
+          </a:ln>
+        </p:spPr>
+        <p:style>
+          <a:lnRef idx="1">
+            <a:schemeClr val="accent1"/>
+          </a:lnRef>
+          <a:fillRef idx="3">
+            <a:schemeClr val="accent1"/>
+          </a:fillRef>
+          <a:effectRef idx="2">
+            <a:schemeClr val="accent1"/>
+          </a:effectRef>
+          <a:fontRef idx="minor">
+            <a:schemeClr val="lt1"/>
+          </a:fontRef>
+        </p:style>
+        <p:txBody>
+          <a:bodyPr rtlCol="0" anchor="ctr"/>
+          <a:lstStyle/>
+          <a:p>
+            <a:pPr algn="ctr"/>
+          </a:p>
+        </p:txBody>
+      </p:sp>
+      <p:pic>
+        <p:nvPicPr>
+          <p:cNvPr id="25" name="Picture 24" descr="e02-assembly.png"/>
+          <p:cNvPicPr>
+            <a:picLocks noChangeAspect="1"/>
+          </p:cNvPicPr>
+          <p:nvPr/>
+        </p:nvPicPr>
+        <p:blipFill>
+          <a:blip r:embed="rId3"/>
+          <a:stretch>
+            <a:fillRect/>
+          </a:stretch>
+        </p:blipFill>
+        <p:spPr>
+          <a:xfrm>
+            <a:off x="3071812" y="2395728"/>
+            <a:ext cx="8486775" cy="4526280"/>
+          </a:xfrm>
+          <a:prstGeom prst="rect">
+            <a:avLst/>
+          </a:prstGeom>
+        </p:spPr>
+      </p:pic>
+    </p:spTree>
+  </p:cSld>
+  <p:clrMapOvr>
+    <a:masterClrMapping/>
+  </p:clrMapOvr>
+</p:sld>
+</file>
+
+<file path=ppt/slides/slide22.xml><?xml version="1.0" encoding="utf-8"?>
+<p:sld xmlns:a="http://schemas.openxmlformats.org/drawingml/2006/main" xmlns:p="http://schemas.openxmlformats.org/presentationml/2006/main" xmlns:r="http://schemas.openxmlformats.org/officeDocument/2006/relationships">
+  <p:cSld>
+    <p:bg>
+      <p:bgPr>
+        <a:solidFill>
+          <a:srgbClr val="101719"/>
+        </a:solidFill>
+        <a:effectLst/>
+      </p:bgPr>
+    </p:bg>
+    <p:spTree>
+      <p:nvGrpSpPr>
+        <p:cNvPr id="1" name=""/>
+        <p:cNvGrpSpPr/>
+        <p:nvPr/>
+      </p:nvGrpSpPr>
+      <p:grpSpPr/>
+      <p:sp>
+        <p:nvSpPr>
+          <p:cNvPr id="2" name="Rectangle 1"/>
+          <p:cNvSpPr/>
+          <p:nvPr/>
+        </p:nvSpPr>
+        <p:spPr>
+          <a:xfrm>
+            <a:off x="914400" y="0"/>
+            <a:ext cx="5486" cy="8229600"/>
+          </a:xfrm>
+          <a:prstGeom prst="rect">
+            <a:avLst/>
+          </a:prstGeom>
+          <a:solidFill>
+            <a:srgbClr val="182124"/>
+          </a:solidFill>
+          <a:ln>
+            <a:noFill/>
+          </a:ln>
+        </p:spPr>
+        <p:style>
+          <a:lnRef idx="1">
+            <a:schemeClr val="accent1"/>
+          </a:lnRef>
+          <a:fillRef idx="3">
+            <a:schemeClr val="accent1"/>
+          </a:fillRef>
+          <a:effectRef idx="2">
+            <a:schemeClr val="accent1"/>
+          </a:effectRef>
+          <a:fontRef idx="minor">
+            <a:schemeClr val="lt1"/>
+          </a:fontRef>
+        </p:style>
+        <p:txBody>
+          <a:bodyPr rtlCol="0" anchor="ctr"/>
+          <a:lstStyle/>
+          <a:p>
+            <a:pPr algn="ctr"/>
+          </a:p>
+        </p:txBody>
+      </p:sp>
+      <p:sp>
+        <p:nvSpPr>
+          <p:cNvPr id="3" name="Rectangle 2"/>
+          <p:cNvSpPr/>
+          <p:nvPr/>
+        </p:nvSpPr>
+        <p:spPr>
+          <a:xfrm>
+            <a:off x="1828800" y="0"/>
+            <a:ext cx="5486" cy="8229600"/>
+          </a:xfrm>
+          <a:prstGeom prst="rect">
+            <a:avLst/>
+          </a:prstGeom>
+          <a:solidFill>
+            <a:srgbClr val="182124"/>
+          </a:solidFill>
+          <a:ln>
+            <a:noFill/>
+          </a:ln>
+        </p:spPr>
+        <p:style>
+          <a:lnRef idx="1">
+            <a:schemeClr val="accent1"/>
+          </a:lnRef>
+          <a:fillRef idx="3">
+            <a:schemeClr val="accent1"/>
+          </a:fillRef>
+          <a:effectRef idx="2">
+            <a:schemeClr val="accent1"/>
+          </a:effectRef>
+          <a:fontRef idx="minor">
+            <a:schemeClr val="lt1"/>
+          </a:fontRef>
+        </p:style>
+        <p:txBody>
+          <a:bodyPr rtlCol="0" anchor="ctr"/>
+          <a:lstStyle/>
+          <a:p>
+            <a:pPr algn="ctr"/>
+          </a:p>
+        </p:txBody>
+      </p:sp>
+      <p:sp>
+        <p:nvSpPr>
+          <p:cNvPr id="4" name="Rectangle 3"/>
+          <p:cNvSpPr/>
+          <p:nvPr/>
+        </p:nvSpPr>
+        <p:spPr>
+          <a:xfrm>
+            <a:off x="2743200" y="0"/>
+            <a:ext cx="5486" cy="8229600"/>
+          </a:xfrm>
+          <a:prstGeom prst="rect">
+            <a:avLst/>
+          </a:prstGeom>
+          <a:solidFill>
+            <a:srgbClr val="182124"/>
+          </a:solidFill>
+          <a:ln>
+            <a:noFill/>
+          </a:ln>
+        </p:spPr>
+        <p:style>
+          <a:lnRef idx="1">
+            <a:schemeClr val="accent1"/>
+          </a:lnRef>
+          <a:fillRef idx="3">
+            <a:schemeClr val="accent1"/>
+          </a:fillRef>
+          <a:effectRef idx="2">
+            <a:schemeClr val="accent1"/>
+          </a:effectRef>
+          <a:fontRef idx="minor">
+            <a:schemeClr val="lt1"/>
+          </a:fontRef>
+        </p:style>
+        <p:txBody>
+          <a:bodyPr rtlCol="0" anchor="ctr"/>
+          <a:lstStyle/>
+          <a:p>
+            <a:pPr algn="ctr"/>
+          </a:p>
+        </p:txBody>
+      </p:sp>
+      <p:sp>
+        <p:nvSpPr>
+          <p:cNvPr id="5" name="Rectangle 4"/>
+          <p:cNvSpPr/>
+          <p:nvPr/>
+        </p:nvSpPr>
+        <p:spPr>
+          <a:xfrm>
+            <a:off x="3657600" y="0"/>
+            <a:ext cx="5486" cy="8229600"/>
+          </a:xfrm>
+          <a:prstGeom prst="rect">
+            <a:avLst/>
+          </a:prstGeom>
+          <a:solidFill>
+            <a:srgbClr val="182124"/>
+          </a:solidFill>
+          <a:ln>
+            <a:noFill/>
+          </a:ln>
+        </p:spPr>
+        <p:style>
+          <a:lnRef idx="1">
+            <a:schemeClr val="accent1"/>
+          </a:lnRef>
+          <a:fillRef idx="3">
+            <a:schemeClr val="accent1"/>
+          </a:fillRef>
+          <a:effectRef idx="2">
+            <a:schemeClr val="accent1"/>
+          </a:effectRef>
+          <a:fontRef idx="minor">
+            <a:schemeClr val="lt1"/>
+          </a:fontRef>
+        </p:style>
+        <p:txBody>
+          <a:bodyPr rtlCol="0" anchor="ctr"/>
+          <a:lstStyle/>
+          <a:p>
+            <a:pPr algn="ctr"/>
+          </a:p>
+        </p:txBody>
+      </p:sp>
+      <p:sp>
+        <p:nvSpPr>
+          <p:cNvPr id="6" name="Rectangle 5"/>
+          <p:cNvSpPr/>
+          <p:nvPr/>
+        </p:nvSpPr>
+        <p:spPr>
+          <a:xfrm>
+            <a:off x="4572000" y="0"/>
+            <a:ext cx="5486" cy="8229600"/>
+          </a:xfrm>
+          <a:prstGeom prst="rect">
+            <a:avLst/>
+          </a:prstGeom>
+          <a:solidFill>
+            <a:srgbClr val="182124"/>
+          </a:solidFill>
+          <a:ln>
+            <a:noFill/>
+          </a:ln>
+        </p:spPr>
+        <p:style>
+          <a:lnRef idx="1">
+            <a:schemeClr val="accent1"/>
+          </a:lnRef>
+          <a:fillRef idx="3">
+            <a:schemeClr val="accent1"/>
+          </a:fillRef>
+          <a:effectRef idx="2">
+            <a:schemeClr val="accent1"/>
+          </a:effectRef>
+          <a:fontRef idx="minor">
+            <a:schemeClr val="lt1"/>
+          </a:fontRef>
+        </p:style>
+        <p:txBody>
+          <a:bodyPr rtlCol="0" anchor="ctr"/>
+          <a:lstStyle/>
+          <a:p>
+            <a:pPr algn="ctr"/>
+          </a:p>
+        </p:txBody>
+      </p:sp>
+      <p:sp>
+        <p:nvSpPr>
+          <p:cNvPr id="7" name="Rectangle 6"/>
+          <p:cNvSpPr/>
+          <p:nvPr/>
+        </p:nvSpPr>
+        <p:spPr>
+          <a:xfrm>
+            <a:off x="5486400" y="0"/>
+            <a:ext cx="5486" cy="8229600"/>
+          </a:xfrm>
+          <a:prstGeom prst="rect">
+            <a:avLst/>
+          </a:prstGeom>
+          <a:solidFill>
+            <a:srgbClr val="182124"/>
+          </a:solidFill>
+          <a:ln>
+            <a:noFill/>
+          </a:ln>
+        </p:spPr>
+        <p:style>
+          <a:lnRef idx="1">
+            <a:schemeClr val="accent1"/>
+          </a:lnRef>
+          <a:fillRef idx="3">
+            <a:schemeClr val="accent1"/>
+          </a:fillRef>
+          <a:effectRef idx="2">
+            <a:schemeClr val="accent1"/>
+          </a:effectRef>
+          <a:fontRef idx="minor">
+            <a:schemeClr val="lt1"/>
+          </a:fontRef>
+        </p:style>
+        <p:txBody>
+          <a:bodyPr rtlCol="0" anchor="ctr"/>
+          <a:lstStyle/>
+          <a:p>
+            <a:pPr algn="ctr"/>
+          </a:p>
+        </p:txBody>
+      </p:sp>
+      <p:sp>
+        <p:nvSpPr>
+          <p:cNvPr id="8" name="Rectangle 7"/>
+          <p:cNvSpPr/>
+          <p:nvPr/>
+        </p:nvSpPr>
+        <p:spPr>
+          <a:xfrm>
+            <a:off x="6400800" y="0"/>
+            <a:ext cx="5486" cy="8229600"/>
+          </a:xfrm>
+          <a:prstGeom prst="rect">
+            <a:avLst/>
+          </a:prstGeom>
+          <a:solidFill>
+            <a:srgbClr val="182124"/>
+          </a:solidFill>
+          <a:ln>
+            <a:noFill/>
+          </a:ln>
+        </p:spPr>
+        <p:style>
+          <a:lnRef idx="1">
+            <a:schemeClr val="accent1"/>
+          </a:lnRef>
+          <a:fillRef idx="3">
+            <a:schemeClr val="accent1"/>
+          </a:fillRef>
+          <a:effectRef idx="2">
+            <a:schemeClr val="accent1"/>
+          </a:effectRef>
+          <a:fontRef idx="minor">
+            <a:schemeClr val="lt1"/>
+          </a:fontRef>
+        </p:style>
+        <p:txBody>
+          <a:bodyPr rtlCol="0" anchor="ctr"/>
+          <a:lstStyle/>
+          <a:p>
+            <a:pPr algn="ctr"/>
+          </a:p>
+        </p:txBody>
+      </p:sp>
+      <p:sp>
+        <p:nvSpPr>
+          <p:cNvPr id="9" name="Rectangle 8"/>
+          <p:cNvSpPr/>
+          <p:nvPr/>
+        </p:nvSpPr>
+        <p:spPr>
+          <a:xfrm>
+            <a:off x="7315200" y="0"/>
+            <a:ext cx="5486" cy="8229600"/>
+          </a:xfrm>
+          <a:prstGeom prst="rect">
+            <a:avLst/>
+          </a:prstGeom>
+          <a:solidFill>
+            <a:srgbClr val="182124"/>
+          </a:solidFill>
+          <a:ln>
+            <a:noFill/>
+          </a:ln>
+        </p:spPr>
+        <p:style>
+          <a:lnRef idx="1">
+            <a:schemeClr val="accent1"/>
+          </a:lnRef>
+          <a:fillRef idx="3">
+            <a:schemeClr val="accent1"/>
+          </a:fillRef>
+          <a:effectRef idx="2">
+            <a:schemeClr val="accent1"/>
+          </a:effectRef>
+          <a:fontRef idx="minor">
+            <a:schemeClr val="lt1"/>
+          </a:fontRef>
+        </p:style>
+        <p:txBody>
+          <a:bodyPr rtlCol="0" anchor="ctr"/>
+          <a:lstStyle/>
+          <a:p>
+            <a:pPr algn="ctr"/>
+          </a:p>
+        </p:txBody>
+      </p:sp>
+      <p:sp>
+        <p:nvSpPr>
+          <p:cNvPr id="10" name="Rectangle 9"/>
+          <p:cNvSpPr/>
+          <p:nvPr/>
+        </p:nvSpPr>
+        <p:spPr>
+          <a:xfrm>
+            <a:off x="8229600" y="0"/>
+            <a:ext cx="5486" cy="8229600"/>
+          </a:xfrm>
+          <a:prstGeom prst="rect">
+            <a:avLst/>
+          </a:prstGeom>
+          <a:solidFill>
+            <a:srgbClr val="182124"/>
+          </a:solidFill>
+          <a:ln>
+            <a:noFill/>
+          </a:ln>
+        </p:spPr>
+        <p:style>
+          <a:lnRef idx="1">
+            <a:schemeClr val="accent1"/>
+          </a:lnRef>
+          <a:fillRef idx="3">
+            <a:schemeClr val="accent1"/>
+          </a:fillRef>
+          <a:effectRef idx="2">
+            <a:schemeClr val="accent1"/>
+          </a:effectRef>
+          <a:fontRef idx="minor">
+            <a:schemeClr val="lt1"/>
+          </a:fontRef>
+        </p:style>
+        <p:txBody>
+          <a:bodyPr rtlCol="0" anchor="ctr"/>
+          <a:lstStyle/>
+          <a:p>
+            <a:pPr algn="ctr"/>
+          </a:p>
+        </p:txBody>
+      </p:sp>
+      <p:sp>
+        <p:nvSpPr>
+          <p:cNvPr id="11" name="Rectangle 10"/>
+          <p:cNvSpPr/>
+          <p:nvPr/>
+        </p:nvSpPr>
+        <p:spPr>
+          <a:xfrm>
+            <a:off x="9144000" y="0"/>
+            <a:ext cx="5486" cy="8229600"/>
+          </a:xfrm>
+          <a:prstGeom prst="rect">
+            <a:avLst/>
+          </a:prstGeom>
+          <a:solidFill>
+            <a:srgbClr val="182124"/>
+          </a:solidFill>
+          <a:ln>
+            <a:noFill/>
+          </a:ln>
+        </p:spPr>
+        <p:style>
+          <a:lnRef idx="1">
+            <a:schemeClr val="accent1"/>
+          </a:lnRef>
+          <a:fillRef idx="3">
+            <a:schemeClr val="accent1"/>
+          </a:fillRef>
+          <a:effectRef idx="2">
+            <a:schemeClr val="accent1"/>
+          </a:effectRef>
+          <a:fontRef idx="minor">
+            <a:schemeClr val="lt1"/>
+          </a:fontRef>
+        </p:style>
+        <p:txBody>
+          <a:bodyPr rtlCol="0" anchor="ctr"/>
+          <a:lstStyle/>
+          <a:p>
+            <a:pPr algn="ctr"/>
+          </a:p>
+        </p:txBody>
+      </p:sp>
+      <p:sp>
+        <p:nvSpPr>
+          <p:cNvPr id="12" name="Rectangle 11"/>
+          <p:cNvSpPr/>
+          <p:nvPr/>
+        </p:nvSpPr>
+        <p:spPr>
+          <a:xfrm>
+            <a:off x="10058400" y="0"/>
+            <a:ext cx="5486" cy="8229600"/>
+          </a:xfrm>
+          <a:prstGeom prst="rect">
+            <a:avLst/>
+          </a:prstGeom>
+          <a:solidFill>
+            <a:srgbClr val="182124"/>
+          </a:solidFill>
+          <a:ln>
+            <a:noFill/>
+          </a:ln>
+        </p:spPr>
+        <p:style>
+          <a:lnRef idx="1">
+            <a:schemeClr val="accent1"/>
+          </a:lnRef>
+          <a:fillRef idx="3">
+            <a:schemeClr val="accent1"/>
+          </a:fillRef>
+          <a:effectRef idx="2">
+            <a:schemeClr val="accent1"/>
+          </a:effectRef>
+          <a:fontRef idx="minor">
+            <a:schemeClr val="lt1"/>
+          </a:fontRef>
+        </p:style>
+        <p:txBody>
+          <a:bodyPr rtlCol="0" anchor="ctr"/>
+          <a:lstStyle/>
+          <a:p>
+            <a:pPr algn="ctr"/>
+          </a:p>
+        </p:txBody>
+      </p:sp>
+      <p:sp>
+        <p:nvSpPr>
+          <p:cNvPr id="13" name="Rectangle 12"/>
+          <p:cNvSpPr/>
+          <p:nvPr/>
+        </p:nvSpPr>
+        <p:spPr>
+          <a:xfrm>
+            <a:off x="10972800" y="0"/>
+            <a:ext cx="5486" cy="8229600"/>
+          </a:xfrm>
+          <a:prstGeom prst="rect">
+            <a:avLst/>
+          </a:prstGeom>
+          <a:solidFill>
+            <a:srgbClr val="182124"/>
+          </a:solidFill>
+          <a:ln>
+            <a:noFill/>
+          </a:ln>
+        </p:spPr>
+        <p:style>
+          <a:lnRef idx="1">
+            <a:schemeClr val="accent1"/>
+          </a:lnRef>
+          <a:fillRef idx="3">
+            <a:schemeClr val="accent1"/>
+          </a:fillRef>
+          <a:effectRef idx="2">
+            <a:schemeClr val="accent1"/>
+          </a:effectRef>
+          <a:fontRef idx="minor">
+            <a:schemeClr val="lt1"/>
+          </a:fontRef>
+        </p:style>
+        <p:txBody>
+          <a:bodyPr rtlCol="0" anchor="ctr"/>
+          <a:lstStyle/>
+          <a:p>
+            <a:pPr algn="ctr"/>
+          </a:p>
+        </p:txBody>
+      </p:sp>
+      <p:sp>
+        <p:nvSpPr>
+          <p:cNvPr id="14" name="Rectangle 13"/>
+          <p:cNvSpPr/>
+          <p:nvPr/>
+        </p:nvSpPr>
+        <p:spPr>
+          <a:xfrm>
+            <a:off x="11887200" y="0"/>
+            <a:ext cx="5486" cy="8229600"/>
+          </a:xfrm>
+          <a:prstGeom prst="rect">
+            <a:avLst/>
+          </a:prstGeom>
+          <a:solidFill>
+            <a:srgbClr val="182124"/>
+          </a:solidFill>
+          <a:ln>
+            <a:noFill/>
+          </a:ln>
+        </p:spPr>
+        <p:style>
+          <a:lnRef idx="1">
+            <a:schemeClr val="accent1"/>
+          </a:lnRef>
+          <a:fillRef idx="3">
+            <a:schemeClr val="accent1"/>
+          </a:fillRef>
+          <a:effectRef idx="2">
+            <a:schemeClr val="accent1"/>
+          </a:effectRef>
+          <a:fontRef idx="minor">
+            <a:schemeClr val="lt1"/>
+          </a:fontRef>
+        </p:style>
+        <p:txBody>
+          <a:bodyPr rtlCol="0" anchor="ctr"/>
+          <a:lstStyle/>
+          <a:p>
+            <a:pPr algn="ctr"/>
+          </a:p>
+        </p:txBody>
+      </p:sp>
+      <p:sp>
+        <p:nvSpPr>
+          <p:cNvPr id="15" name="Rectangle 14"/>
+          <p:cNvSpPr/>
+          <p:nvPr/>
+        </p:nvSpPr>
+        <p:spPr>
+          <a:xfrm>
+            <a:off x="12801600" y="0"/>
+            <a:ext cx="5486" cy="8229600"/>
+          </a:xfrm>
+          <a:prstGeom prst="rect">
+            <a:avLst/>
+          </a:prstGeom>
+          <a:solidFill>
+            <a:srgbClr val="182124"/>
+          </a:solidFill>
+          <a:ln>
+            <a:noFill/>
+          </a:ln>
+        </p:spPr>
+        <p:style>
+          <a:lnRef idx="1">
+            <a:schemeClr val="accent1"/>
+          </a:lnRef>
+          <a:fillRef idx="3">
+            <a:schemeClr val="accent1"/>
+          </a:fillRef>
+          <a:effectRef idx="2">
+            <a:schemeClr val="accent1"/>
+          </a:effectRef>
+          <a:fontRef idx="minor">
+            <a:schemeClr val="lt1"/>
+          </a:fontRef>
+        </p:style>
+        <p:txBody>
+          <a:bodyPr rtlCol="0" anchor="ctr"/>
+          <a:lstStyle/>
+          <a:p>
+            <a:pPr algn="ctr"/>
+          </a:p>
+        </p:txBody>
+      </p:sp>
+      <p:sp>
+        <p:nvSpPr>
+          <p:cNvPr id="16" name="Rectangle 15"/>
+          <p:cNvSpPr/>
+          <p:nvPr/>
+        </p:nvSpPr>
+        <p:spPr>
+          <a:xfrm>
+            <a:off x="13716000" y="0"/>
+            <a:ext cx="5486" cy="8229600"/>
+          </a:xfrm>
+          <a:prstGeom prst="rect">
+            <a:avLst/>
+          </a:prstGeom>
+          <a:solidFill>
+            <a:srgbClr val="182124"/>
+          </a:solidFill>
+          <a:ln>
+            <a:noFill/>
+          </a:ln>
+        </p:spPr>
+        <p:style>
+          <a:lnRef idx="1">
+            <a:schemeClr val="accent1"/>
+          </a:lnRef>
+          <a:fillRef idx="3">
+            <a:schemeClr val="accent1"/>
+          </a:fillRef>
+          <a:effectRef idx="2">
+            <a:schemeClr val="accent1"/>
+          </a:effectRef>
+          <a:fontRef idx="minor">
+            <a:schemeClr val="lt1"/>
+          </a:fontRef>
+        </p:style>
+        <p:txBody>
+          <a:bodyPr rtlCol="0" anchor="ctr"/>
+          <a:lstStyle/>
+          <a:p>
+            <a:pPr algn="ctr"/>
+          </a:p>
+        </p:txBody>
+      </p:sp>
+      <p:sp>
+        <p:nvSpPr>
+          <p:cNvPr id="17" name="TextBox 16"/>
+          <p:cNvSpPr txBox="1"/>
+          <p:nvPr/>
+        </p:nvSpPr>
+        <p:spPr>
+          <a:xfrm>
+            <a:off x="658368" y="393192"/>
+            <a:ext cx="10972800" cy="274320"/>
+          </a:xfrm>
+          <a:prstGeom prst="rect">
+            <a:avLst/>
+          </a:prstGeom>
+          <a:noFill/>
+        </p:spPr>
+        <p:txBody>
+          <a:bodyPr wrap="square" lIns="0" rIns="0" tIns="0" bIns="0">
+            <a:spAutoFit/>
+          </a:bodyPr>
+          <a:lstStyle/>
+          <a:p>
+            <a:pPr>
+              <a:spcBef>
+                <a:spcPts val="0"/>
+              </a:spcBef>
+              <a:spcAft>
+                <a:spcPts val="900"/>
+              </a:spcAft>
+              <a:defRPr sz="1100" b="0">
+                <a:solidFill>
+                  <a:srgbClr val="AFBDC0"/>
+                </a:solidFill>
+                <a:latin typeface="Noto Sans"/>
+              </a:defRPr>
+            </a:pPr>
+            <a:r>
+              <a:t>E02 / M01 / OR03 · 01.10.2026</a:t>
+            </a:r>
+          </a:p>
+        </p:txBody>
+      </p:sp>
+      <p:sp>
+        <p:nvSpPr>
+          <p:cNvPr id="18" name="TextBox 17"/>
+          <p:cNvSpPr txBox="1"/>
+          <p:nvPr/>
+        </p:nvSpPr>
+        <p:spPr>
+          <a:xfrm>
+            <a:off x="12390120" y="393192"/>
+            <a:ext cx="1828800" cy="274320"/>
+          </a:xfrm>
+          <a:prstGeom prst="rect">
+            <a:avLst/>
+          </a:prstGeom>
+          <a:noFill/>
+        </p:spPr>
+        <p:txBody>
+          <a:bodyPr wrap="square" lIns="0" rIns="0" tIns="0" bIns="0">
+            <a:spAutoFit/>
+          </a:bodyPr>
+          <a:lstStyle/>
+          <a:p>
+            <a:pPr>
+              <a:spcBef>
+                <a:spcPts val="0"/>
+              </a:spcBef>
+              <a:spcAft>
+                <a:spcPts val="900"/>
+              </a:spcAft>
+              <a:defRPr sz="1100" b="1">
+                <a:solidFill>
+                  <a:srgbClr val="FF793F"/>
+                </a:solidFill>
+                <a:latin typeface="Noto Sans"/>
+              </a:defRPr>
+            </a:pPr>
+            <a:r>
+              <a:t>PLBP / SG1</a:t>
+            </a:r>
+          </a:p>
+        </p:txBody>
+      </p:sp>
+      <p:sp>
+        <p:nvSpPr>
+          <p:cNvPr id="19" name="Rectangle 18"/>
+          <p:cNvSpPr/>
+          <p:nvPr/>
+        </p:nvSpPr>
+        <p:spPr>
+          <a:xfrm>
+            <a:off x="658368" y="914400"/>
+            <a:ext cx="13313664" cy="10972"/>
+          </a:xfrm>
+          <a:prstGeom prst="rect">
+            <a:avLst/>
+          </a:prstGeom>
+          <a:solidFill>
+            <a:srgbClr val="354347"/>
+          </a:solidFill>
+          <a:ln>
+            <a:noFill/>
+          </a:ln>
+        </p:spPr>
+        <p:style>
+          <a:lnRef idx="1">
+            <a:schemeClr val="accent1"/>
+          </a:lnRef>
+          <a:fillRef idx="3">
+            <a:schemeClr val="accent1"/>
+          </a:fillRef>
+          <a:effectRef idx="2">
+            <a:schemeClr val="accent1"/>
+          </a:effectRef>
+          <a:fontRef idx="minor">
+            <a:schemeClr val="lt1"/>
+          </a:fontRef>
+        </p:style>
+        <p:txBody>
+          <a:bodyPr rtlCol="0" anchor="ctr"/>
+          <a:lstStyle/>
+          <a:p>
+            <a:pPr algn="ctr"/>
+          </a:p>
+        </p:txBody>
+      </p:sp>
+      <p:sp>
+        <p:nvSpPr>
+          <p:cNvPr id="20" name="TextBox 19"/>
+          <p:cNvSpPr txBox="1"/>
+          <p:nvPr/>
+        </p:nvSpPr>
+        <p:spPr>
+          <a:xfrm>
+            <a:off x="658368" y="1243584"/>
+            <a:ext cx="13213080" cy="1097280"/>
+          </a:xfrm>
+          <a:prstGeom prst="rect">
+            <a:avLst/>
+          </a:prstGeom>
+          <a:noFill/>
+        </p:spPr>
+        <p:txBody>
+          <a:bodyPr wrap="square" lIns="0" rIns="0" tIns="0" bIns="0">
+            <a:spAutoFit/>
+          </a:bodyPr>
+          <a:lstStyle/>
+          <a:p>
+            <a:pPr>
+              <a:spcBef>
+                <a:spcPts val="0"/>
+              </a:spcBef>
+              <a:spcAft>
+                <a:spcPts val="900"/>
+              </a:spcAft>
+              <a:defRPr sz="3700" b="1">
+                <a:solidFill>
+                  <a:srgbClr val="F4F1E9"/>
+                </a:solidFill>
+                <a:latin typeface="Noto Sans"/>
+              </a:defRPr>
+            </a:pPr>
+            <a:r>
+              <a:t>Миссия M01: независимый поиск</a:t>
+            </a:r>
+          </a:p>
+        </p:txBody>
+      </p:sp>
+      <p:sp>
+        <p:nvSpPr>
+          <p:cNvPr id="21" name="Rectangle 20"/>
+          <p:cNvSpPr/>
+          <p:nvPr/>
+        </p:nvSpPr>
+        <p:spPr>
+          <a:xfrm>
+            <a:off x="658368" y="7159752"/>
+            <a:ext cx="13313664" cy="10972"/>
+          </a:xfrm>
+          <a:prstGeom prst="rect">
+            <a:avLst/>
+          </a:prstGeom>
+          <a:solidFill>
+            <a:srgbClr val="354347"/>
+          </a:solidFill>
+          <a:ln>
+            <a:noFill/>
+          </a:ln>
+        </p:spPr>
+        <p:style>
+          <a:lnRef idx="1">
+            <a:schemeClr val="accent1"/>
+          </a:lnRef>
+          <a:fillRef idx="3">
+            <a:schemeClr val="accent1"/>
+          </a:fillRef>
+          <a:effectRef idx="2">
+            <a:schemeClr val="accent1"/>
+          </a:effectRef>
+          <a:fontRef idx="minor">
+            <a:schemeClr val="lt1"/>
+          </a:fontRef>
+        </p:style>
+        <p:txBody>
+          <a:bodyPr rtlCol="0" anchor="ctr"/>
+          <a:lstStyle/>
+          <a:p>
+            <a:pPr algn="ctr"/>
+          </a:p>
+        </p:txBody>
+      </p:sp>
+      <p:sp>
+        <p:nvSpPr>
+          <p:cNvPr id="22" name="TextBox 21"/>
+          <p:cNvSpPr txBox="1"/>
+          <p:nvPr/>
+        </p:nvSpPr>
+        <p:spPr>
+          <a:xfrm>
+            <a:off x="658368" y="7342631"/>
+            <a:ext cx="12344400" cy="621792"/>
+          </a:xfrm>
+          <a:prstGeom prst="rect">
+            <a:avLst/>
+          </a:prstGeom>
+          <a:noFill/>
+        </p:spPr>
+        <p:txBody>
+          <a:bodyPr wrap="square" lIns="0" rIns="0" tIns="0" bIns="0">
+            <a:spAutoFit/>
+          </a:bodyPr>
+          <a:lstStyle/>
+          <a:p>
+            <a:pPr>
+              <a:spcBef>
+                <a:spcPts val="0"/>
+              </a:spcBef>
+              <a:spcAft>
+                <a:spcPts val="900"/>
+              </a:spcAft>
+              <a:defRPr sz="1200" b="0">
+                <a:solidFill>
+                  <a:srgbClr val="AFBDC0"/>
+                </a:solidFill>
+                <a:latin typeface="Noto Sans"/>
+              </a:defRPr>
+            </a:pPr>
+            <a:r>
+              <a:t>Собственная батарея. Посадка не определяется; поиск начинается по таймеру. Программа прошла 17 проверок.</a:t>
+            </a:r>
+          </a:p>
+        </p:txBody>
+      </p:sp>
+      <p:sp>
+        <p:nvSpPr>
+          <p:cNvPr id="23" name="TextBox 22"/>
+          <p:cNvSpPr txBox="1"/>
+          <p:nvPr/>
+        </p:nvSpPr>
+        <p:spPr>
+          <a:xfrm>
+            <a:off x="13121640" y="7507224"/>
+            <a:ext cx="914400" cy="365760"/>
+          </a:xfrm>
+          <a:prstGeom prst="rect">
+            <a:avLst/>
+          </a:prstGeom>
+          <a:noFill/>
+        </p:spPr>
+        <p:txBody>
+          <a:bodyPr wrap="square" lIns="0" rIns="0" tIns="0" bIns="0">
+            <a:spAutoFit/>
+          </a:bodyPr>
+          <a:lstStyle/>
+          <a:p>
+            <a:pPr>
+              <a:spcBef>
+                <a:spcPts val="0"/>
+              </a:spcBef>
+              <a:spcAft>
+                <a:spcPts val="900"/>
+              </a:spcAft>
+              <a:defRPr sz="1100" b="0">
+                <a:solidFill>
+                  <a:srgbClr val="FF793F"/>
+                </a:solidFill>
+                <a:latin typeface="Noto Sans"/>
+              </a:defRPr>
+            </a:pPr>
+            <a:r>
+              <a:t>22 / 25</a:t>
+            </a:r>
+          </a:p>
+        </p:txBody>
+      </p:sp>
+      <p:sp>
+        <p:nvSpPr>
+          <p:cNvPr id="24" name="Rectangle 23"/>
+          <p:cNvSpPr/>
+          <p:nvPr/>
+        </p:nvSpPr>
+        <p:spPr>
+          <a:xfrm>
+            <a:off x="0" y="8183879"/>
+            <a:ext cx="12874752" cy="45720"/>
+          </a:xfrm>
+          <a:prstGeom prst="rect">
+            <a:avLst/>
+          </a:prstGeom>
+          <a:solidFill>
+            <a:srgbClr val="FF793F"/>
+          </a:solidFill>
+          <a:ln>
+            <a:noFill/>
+          </a:ln>
+        </p:spPr>
+        <p:style>
+          <a:lnRef idx="1">
+            <a:schemeClr val="accent1"/>
+          </a:lnRef>
+          <a:fillRef idx="3">
+            <a:schemeClr val="accent1"/>
+          </a:fillRef>
+          <a:effectRef idx="2">
+            <a:schemeClr val="accent1"/>
+          </a:effectRef>
+          <a:fontRef idx="minor">
+            <a:schemeClr val="lt1"/>
+          </a:fontRef>
+        </p:style>
+        <p:txBody>
+          <a:bodyPr rtlCol="0" anchor="ctr"/>
+          <a:lstStyle/>
+          <a:p>
+            <a:pPr algn="ctr"/>
+          </a:p>
+        </p:txBody>
+      </p:sp>
+      <p:pic>
+        <p:nvPicPr>
+          <p:cNvPr id="25" name="Picture 24" descr="m01-timeline.png"/>
+          <p:cNvPicPr>
+            <a:picLocks noChangeAspect="1"/>
+          </p:cNvPicPr>
+          <p:nvPr/>
+        </p:nvPicPr>
+        <p:blipFill>
+          <a:blip r:embed="rId3"/>
+          <a:stretch>
+            <a:fillRect/>
+          </a:stretch>
+        </p:blipFill>
+        <p:spPr>
+          <a:xfrm>
+            <a:off x="2109977" y="2395728"/>
+            <a:ext cx="10410444" cy="4526280"/>
+          </a:xfrm>
+          <a:prstGeom prst="rect">
+            <a:avLst/>
+          </a:prstGeom>
+        </p:spPr>
+      </p:pic>
+    </p:spTree>
+  </p:cSld>
+  <p:clrMapOvr>
+    <a:masterClrMapping/>
+  </p:clrMapOvr>
+</p:sld>
+</file>
+
+<file path=ppt/slides/slide23.xml><?xml version="1.0" encoding="utf-8"?>
+<p:sld xmlns:a="http://schemas.openxmlformats.org/drawingml/2006/main" xmlns:p="http://schemas.openxmlformats.org/presentationml/2006/main" xmlns:r="http://schemas.openxmlformats.org/officeDocument/2006/relationships">
+  <p:cSld>
+    <p:bg>
+      <p:bgPr>
+        <a:solidFill>
+          <a:srgbClr val="101719"/>
+        </a:solidFill>
+        <a:effectLst/>
+      </p:bgPr>
+    </p:bg>
+    <p:spTree>
+      <p:nvGrpSpPr>
+        <p:cNvPr id="1" name=""/>
+        <p:cNvGrpSpPr/>
+        <p:nvPr/>
+      </p:nvGrpSpPr>
+      <p:grpSpPr/>
+      <p:sp>
+        <p:nvSpPr>
+          <p:cNvPr id="2" name="Rectangle 1"/>
+          <p:cNvSpPr/>
+          <p:nvPr/>
+        </p:nvSpPr>
+        <p:spPr>
+          <a:xfrm>
+            <a:off x="914400" y="0"/>
+            <a:ext cx="5486" cy="8229600"/>
+          </a:xfrm>
+          <a:prstGeom prst="rect">
+            <a:avLst/>
+          </a:prstGeom>
+          <a:solidFill>
+            <a:srgbClr val="182124"/>
+          </a:solidFill>
+          <a:ln>
+            <a:noFill/>
+          </a:ln>
+        </p:spPr>
+        <p:style>
+          <a:lnRef idx="1">
+            <a:schemeClr val="accent1"/>
+          </a:lnRef>
+          <a:fillRef idx="3">
+            <a:schemeClr val="accent1"/>
+          </a:fillRef>
+          <a:effectRef idx="2">
+            <a:schemeClr val="accent1"/>
+          </a:effectRef>
+          <a:fontRef idx="minor">
+            <a:schemeClr val="lt1"/>
+          </a:fontRef>
+        </p:style>
+        <p:txBody>
+          <a:bodyPr rtlCol="0" anchor="ctr"/>
+          <a:lstStyle/>
+          <a:p>
+            <a:pPr algn="ctr"/>
+          </a:p>
+        </p:txBody>
+      </p:sp>
+      <p:sp>
+        <p:nvSpPr>
+          <p:cNvPr id="3" name="Rectangle 2"/>
+          <p:cNvSpPr/>
+          <p:nvPr/>
+        </p:nvSpPr>
+        <p:spPr>
+          <a:xfrm>
+            <a:off x="1828800" y="0"/>
+            <a:ext cx="5486" cy="8229600"/>
+          </a:xfrm>
+          <a:prstGeom prst="rect">
+            <a:avLst/>
+          </a:prstGeom>
+          <a:solidFill>
+            <a:srgbClr val="182124"/>
+          </a:solidFill>
+          <a:ln>
+            <a:noFill/>
+          </a:ln>
+        </p:spPr>
+        <p:style>
+          <a:lnRef idx="1">
+            <a:schemeClr val="accent1"/>
+          </a:lnRef>
+          <a:fillRef idx="3">
+            <a:schemeClr val="accent1"/>
+          </a:fillRef>
+          <a:effectRef idx="2">
+            <a:schemeClr val="accent1"/>
+          </a:effectRef>
+          <a:fontRef idx="minor">
+            <a:schemeClr val="lt1"/>
+          </a:fontRef>
+        </p:style>
+        <p:txBody>
+          <a:bodyPr rtlCol="0" anchor="ctr"/>
+          <a:lstStyle/>
+          <a:p>
+            <a:pPr algn="ctr"/>
+          </a:p>
+        </p:txBody>
+      </p:sp>
+      <p:sp>
+        <p:nvSpPr>
+          <p:cNvPr id="4" name="Rectangle 3"/>
+          <p:cNvSpPr/>
+          <p:nvPr/>
+        </p:nvSpPr>
+        <p:spPr>
+          <a:xfrm>
+            <a:off x="2743200" y="0"/>
+            <a:ext cx="5486" cy="8229600"/>
+          </a:xfrm>
+          <a:prstGeom prst="rect">
+            <a:avLst/>
+          </a:prstGeom>
+          <a:solidFill>
+            <a:srgbClr val="182124"/>
+          </a:solidFill>
+          <a:ln>
+            <a:noFill/>
+          </a:ln>
+        </p:spPr>
+        <p:style>
+          <a:lnRef idx="1">
+            <a:schemeClr val="accent1"/>
+          </a:lnRef>
+          <a:fillRef idx="3">
+            <a:schemeClr val="accent1"/>
+          </a:fillRef>
+          <a:effectRef idx="2">
+            <a:schemeClr val="accent1"/>
+          </a:effectRef>
+          <a:fontRef idx="minor">
+            <a:schemeClr val="lt1"/>
+          </a:fontRef>
+        </p:style>
+        <p:txBody>
+          <a:bodyPr rtlCol="0" anchor="ctr"/>
+          <a:lstStyle/>
+          <a:p>
+            <a:pPr algn="ctr"/>
+          </a:p>
+        </p:txBody>
+      </p:sp>
+      <p:sp>
+        <p:nvSpPr>
+          <p:cNvPr id="5" name="Rectangle 4"/>
+          <p:cNvSpPr/>
+          <p:nvPr/>
+        </p:nvSpPr>
+        <p:spPr>
+          <a:xfrm>
+            <a:off x="3657600" y="0"/>
+            <a:ext cx="5486" cy="8229600"/>
+          </a:xfrm>
+          <a:prstGeom prst="rect">
+            <a:avLst/>
+          </a:prstGeom>
+          <a:solidFill>
+            <a:srgbClr val="182124"/>
+          </a:solidFill>
+          <a:ln>
+            <a:noFill/>
+          </a:ln>
+        </p:spPr>
+        <p:style>
+          <a:lnRef idx="1">
+            <a:schemeClr val="accent1"/>
+          </a:lnRef>
+          <a:fillRef idx="3">
+            <a:schemeClr val="accent1"/>
+          </a:fillRef>
+          <a:effectRef idx="2">
+            <a:schemeClr val="accent1"/>
+          </a:effectRef>
+          <a:fontRef idx="minor">
+            <a:schemeClr val="lt1"/>
+          </a:fontRef>
+        </p:style>
+        <p:txBody>
+          <a:bodyPr rtlCol="0" anchor="ctr"/>
+          <a:lstStyle/>
+          <a:p>
+            <a:pPr algn="ctr"/>
+          </a:p>
+        </p:txBody>
+      </p:sp>
+      <p:sp>
+        <p:nvSpPr>
+          <p:cNvPr id="6" name="Rectangle 5"/>
+          <p:cNvSpPr/>
+          <p:nvPr/>
+        </p:nvSpPr>
+        <p:spPr>
+          <a:xfrm>
+            <a:off x="4572000" y="0"/>
+            <a:ext cx="5486" cy="8229600"/>
+          </a:xfrm>
+          <a:prstGeom prst="rect">
+            <a:avLst/>
+          </a:prstGeom>
+          <a:solidFill>
+            <a:srgbClr val="182124"/>
+          </a:solidFill>
+          <a:ln>
+            <a:noFill/>
+          </a:ln>
+        </p:spPr>
+        <p:style>
+          <a:lnRef idx="1">
+            <a:schemeClr val="accent1"/>
+          </a:lnRef>
+          <a:fillRef idx="3">
+            <a:schemeClr val="accent1"/>
+          </a:fillRef>
+          <a:effectRef idx="2">
+            <a:schemeClr val="accent1"/>
+          </a:effectRef>
+          <a:fontRef idx="minor">
+            <a:schemeClr val="lt1"/>
+          </a:fontRef>
+        </p:style>
+        <p:txBody>
+          <a:bodyPr rtlCol="0" anchor="ctr"/>
+          <a:lstStyle/>
+          <a:p>
+            <a:pPr algn="ctr"/>
+          </a:p>
+        </p:txBody>
+      </p:sp>
+      <p:sp>
+        <p:nvSpPr>
+          <p:cNvPr id="7" name="Rectangle 6"/>
+          <p:cNvSpPr/>
+          <p:nvPr/>
+        </p:nvSpPr>
+        <p:spPr>
+          <a:xfrm>
+            <a:off x="5486400" y="0"/>
+            <a:ext cx="5486" cy="8229600"/>
+          </a:xfrm>
+          <a:prstGeom prst="rect">
+            <a:avLst/>
+          </a:prstGeom>
+          <a:solidFill>
+            <a:srgbClr val="182124"/>
+          </a:solidFill>
+          <a:ln>
+            <a:noFill/>
+          </a:ln>
+        </p:spPr>
+        <p:style>
+          <a:lnRef idx="1">
+            <a:schemeClr val="accent1"/>
+          </a:lnRef>
+          <a:fillRef idx="3">
+            <a:schemeClr val="accent1"/>
+          </a:fillRef>
+          <a:effectRef idx="2">
+            <a:schemeClr val="accent1"/>
+          </a:effectRef>
+          <a:fontRef idx="minor">
+            <a:schemeClr val="lt1"/>
+          </a:fontRef>
+        </p:style>
+        <p:txBody>
+          <a:bodyPr rtlCol="0" anchor="ctr"/>
+          <a:lstStyle/>
+          <a:p>
+            <a:pPr algn="ctr"/>
+          </a:p>
+        </p:txBody>
+      </p:sp>
+      <p:sp>
+        <p:nvSpPr>
+          <p:cNvPr id="8" name="Rectangle 7"/>
+          <p:cNvSpPr/>
+          <p:nvPr/>
+        </p:nvSpPr>
+        <p:spPr>
+          <a:xfrm>
+            <a:off x="6400800" y="0"/>
+            <a:ext cx="5486" cy="8229600"/>
+          </a:xfrm>
+          <a:prstGeom prst="rect">
+            <a:avLst/>
+          </a:prstGeom>
+          <a:solidFill>
+            <a:srgbClr val="182124"/>
+          </a:solidFill>
+          <a:ln>
+            <a:noFill/>
+          </a:ln>
+        </p:spPr>
+        <p:style>
+          <a:lnRef idx="1">
+            <a:schemeClr val="accent1"/>
+          </a:lnRef>
+          <a:fillRef idx="3">
+            <a:schemeClr val="accent1"/>
+          </a:fillRef>
+          <a:effectRef idx="2">
+            <a:schemeClr val="accent1"/>
+          </a:effectRef>
+          <a:fontRef idx="minor">
+            <a:schemeClr val="lt1"/>
+          </a:fontRef>
+        </p:style>
+        <p:txBody>
+          <a:bodyPr rtlCol="0" anchor="ctr"/>
+          <a:lstStyle/>
+          <a:p>
+            <a:pPr algn="ctr"/>
+          </a:p>
+        </p:txBody>
+      </p:sp>
+      <p:sp>
+        <p:nvSpPr>
+          <p:cNvPr id="9" name="Rectangle 8"/>
+          <p:cNvSpPr/>
+          <p:nvPr/>
+        </p:nvSpPr>
+        <p:spPr>
+          <a:xfrm>
+            <a:off x="7315200" y="0"/>
+            <a:ext cx="5486" cy="8229600"/>
+          </a:xfrm>
+          <a:prstGeom prst="rect">
+            <a:avLst/>
+          </a:prstGeom>
+          <a:solidFill>
+            <a:srgbClr val="182124"/>
+          </a:solidFill>
+          <a:ln>
+            <a:noFill/>
+          </a:ln>
+        </p:spPr>
+        <p:style>
+          <a:lnRef idx="1">
+            <a:schemeClr val="accent1"/>
+          </a:lnRef>
+          <a:fillRef idx="3">
+            <a:schemeClr val="accent1"/>
+          </a:fillRef>
+          <a:effectRef idx="2">
+            <a:schemeClr val="accent1"/>
+          </a:effectRef>
+          <a:fontRef idx="minor">
+            <a:schemeClr val="lt1"/>
+          </a:fontRef>
+        </p:style>
+        <p:txBody>
+          <a:bodyPr rtlCol="0" anchor="ctr"/>
+          <a:lstStyle/>
+          <a:p>
+            <a:pPr algn="ctr"/>
+          </a:p>
+        </p:txBody>
+      </p:sp>
+      <p:sp>
+        <p:nvSpPr>
+          <p:cNvPr id="10" name="Rectangle 9"/>
+          <p:cNvSpPr/>
+          <p:nvPr/>
+        </p:nvSpPr>
+        <p:spPr>
+          <a:xfrm>
+            <a:off x="8229600" y="0"/>
+            <a:ext cx="5486" cy="8229600"/>
+          </a:xfrm>
+          <a:prstGeom prst="rect">
+            <a:avLst/>
+          </a:prstGeom>
+          <a:solidFill>
+            <a:srgbClr val="182124"/>
+          </a:solidFill>
+          <a:ln>
+            <a:noFill/>
+          </a:ln>
+        </p:spPr>
+        <p:style>
+          <a:lnRef idx="1">
+            <a:schemeClr val="accent1"/>
+          </a:lnRef>
+          <a:fillRef idx="3">
+            <a:schemeClr val="accent1"/>
+          </a:fillRef>
+          <a:effectRef idx="2">
+            <a:schemeClr val="accent1"/>
+          </a:effectRef>
+          <a:fontRef idx="minor">
+            <a:schemeClr val="lt1"/>
+          </a:fontRef>
+        </p:style>
+        <p:txBody>
+          <a:bodyPr rtlCol="0" anchor="ctr"/>
+          <a:lstStyle/>
+          <a:p>
+            <a:pPr algn="ctr"/>
+          </a:p>
+        </p:txBody>
+      </p:sp>
+      <p:sp>
+        <p:nvSpPr>
+          <p:cNvPr id="11" name="Rectangle 10"/>
+          <p:cNvSpPr/>
+          <p:nvPr/>
+        </p:nvSpPr>
+        <p:spPr>
+          <a:xfrm>
+            <a:off x="9144000" y="0"/>
+            <a:ext cx="5486" cy="8229600"/>
+          </a:xfrm>
+          <a:prstGeom prst="rect">
+            <a:avLst/>
+          </a:prstGeom>
+          <a:solidFill>
+            <a:srgbClr val="182124"/>
+          </a:solidFill>
+          <a:ln>
+            <a:noFill/>
+          </a:ln>
+        </p:spPr>
+        <p:style>
+          <a:lnRef idx="1">
+            <a:schemeClr val="accent1"/>
+          </a:lnRef>
+          <a:fillRef idx="3">
+            <a:schemeClr val="accent1"/>
+          </a:fillRef>
+          <a:effectRef idx="2">
+            <a:schemeClr val="accent1"/>
+          </a:effectRef>
+          <a:fontRef idx="minor">
+            <a:schemeClr val="lt1"/>
+          </a:fontRef>
+        </p:style>
+        <p:txBody>
+          <a:bodyPr rtlCol="0" anchor="ctr"/>
+          <a:lstStyle/>
+          <a:p>
+            <a:pPr algn="ctr"/>
+          </a:p>
+        </p:txBody>
+      </p:sp>
+      <p:sp>
+        <p:nvSpPr>
+          <p:cNvPr id="12" name="Rectangle 11"/>
+          <p:cNvSpPr/>
+          <p:nvPr/>
+        </p:nvSpPr>
+        <p:spPr>
+          <a:xfrm>
+            <a:off x="10058400" y="0"/>
+            <a:ext cx="5486" cy="8229600"/>
+          </a:xfrm>
+          <a:prstGeom prst="rect">
+            <a:avLst/>
+          </a:prstGeom>
+          <a:solidFill>
+            <a:srgbClr val="182124"/>
+          </a:solidFill>
+          <a:ln>
+            <a:noFill/>
+          </a:ln>
+        </p:spPr>
+        <p:style>
+          <a:lnRef idx="1">
+            <a:schemeClr val="accent1"/>
+          </a:lnRef>
+          <a:fillRef idx="3">
+            <a:schemeClr val="accent1"/>
+          </a:fillRef>
+          <a:effectRef idx="2">
+            <a:schemeClr val="accent1"/>
+          </a:effectRef>
+          <a:fontRef idx="minor">
+            <a:schemeClr val="lt1"/>
+          </a:fontRef>
+        </p:style>
+        <p:txBody>
+          <a:bodyPr rtlCol="0" anchor="ctr"/>
+          <a:lstStyle/>
+          <a:p>
+            <a:pPr algn="ctr"/>
+          </a:p>
+        </p:txBody>
+      </p:sp>
+      <p:sp>
+        <p:nvSpPr>
+          <p:cNvPr id="13" name="Rectangle 12"/>
+          <p:cNvSpPr/>
+          <p:nvPr/>
+        </p:nvSpPr>
+        <p:spPr>
+          <a:xfrm>
+            <a:off x="10972800" y="0"/>
+            <a:ext cx="5486" cy="8229600"/>
+          </a:xfrm>
+          <a:prstGeom prst="rect">
+            <a:avLst/>
+          </a:prstGeom>
+          <a:solidFill>
+            <a:srgbClr val="182124"/>
+          </a:solidFill>
+          <a:ln>
+            <a:noFill/>
+          </a:ln>
+        </p:spPr>
+        <p:style>
+          <a:lnRef idx="1">
+            <a:schemeClr val="accent1"/>
+          </a:lnRef>
+          <a:fillRef idx="3">
+            <a:schemeClr val="accent1"/>
+          </a:fillRef>
+          <a:effectRef idx="2">
+            <a:schemeClr val="accent1"/>
+          </a:effectRef>
+          <a:fontRef idx="minor">
+            <a:schemeClr val="lt1"/>
+          </a:fontRef>
+        </p:style>
+        <p:txBody>
+          <a:bodyPr rtlCol="0" anchor="ctr"/>
+          <a:lstStyle/>
+          <a:p>
+            <a:pPr algn="ctr"/>
+          </a:p>
+        </p:txBody>
+      </p:sp>
+      <p:sp>
+        <p:nvSpPr>
+          <p:cNvPr id="14" name="Rectangle 13"/>
+          <p:cNvSpPr/>
+          <p:nvPr/>
+        </p:nvSpPr>
+        <p:spPr>
+          <a:xfrm>
+            <a:off x="11887200" y="0"/>
+            <a:ext cx="5486" cy="8229600"/>
+          </a:xfrm>
+          <a:prstGeom prst="rect">
+            <a:avLst/>
+          </a:prstGeom>
+          <a:solidFill>
+            <a:srgbClr val="182124"/>
+          </a:solidFill>
+          <a:ln>
+            <a:noFill/>
+          </a:ln>
+        </p:spPr>
+        <p:style>
+          <a:lnRef idx="1">
+            <a:schemeClr val="accent1"/>
+          </a:lnRef>
+          <a:fillRef idx="3">
+            <a:schemeClr val="accent1"/>
+          </a:fillRef>
+          <a:effectRef idx="2">
+            <a:schemeClr val="accent1"/>
+          </a:effectRef>
+          <a:fontRef idx="minor">
+            <a:schemeClr val="lt1"/>
+          </a:fontRef>
+        </p:style>
+        <p:txBody>
+          <a:bodyPr rtlCol="0" anchor="ctr"/>
+          <a:lstStyle/>
+          <a:p>
+            <a:pPr algn="ctr"/>
+          </a:p>
+        </p:txBody>
+      </p:sp>
+      <p:sp>
+        <p:nvSpPr>
+          <p:cNvPr id="15" name="Rectangle 14"/>
+          <p:cNvSpPr/>
+          <p:nvPr/>
+        </p:nvSpPr>
+        <p:spPr>
+          <a:xfrm>
+            <a:off x="12801600" y="0"/>
+            <a:ext cx="5486" cy="8229600"/>
+          </a:xfrm>
+          <a:prstGeom prst="rect">
+            <a:avLst/>
+          </a:prstGeom>
+          <a:solidFill>
+            <a:srgbClr val="182124"/>
+          </a:solidFill>
+          <a:ln>
+            <a:noFill/>
+          </a:ln>
+        </p:spPr>
+        <p:style>
+          <a:lnRef idx="1">
+            <a:schemeClr val="accent1"/>
+          </a:lnRef>
+          <a:fillRef idx="3">
+            <a:schemeClr val="accent1"/>
+          </a:fillRef>
+          <a:effectRef idx="2">
+            <a:schemeClr val="accent1"/>
+          </a:effectRef>
+          <a:fontRef idx="minor">
+            <a:schemeClr val="lt1"/>
+          </a:fontRef>
+        </p:style>
+        <p:txBody>
+          <a:bodyPr rtlCol="0" anchor="ctr"/>
+          <a:lstStyle/>
+          <a:p>
+            <a:pPr algn="ctr"/>
+          </a:p>
+        </p:txBody>
+      </p:sp>
+      <p:sp>
+        <p:nvSpPr>
+          <p:cNvPr id="16" name="Rectangle 15"/>
+          <p:cNvSpPr/>
+          <p:nvPr/>
+        </p:nvSpPr>
+        <p:spPr>
+          <a:xfrm>
+            <a:off x="13716000" y="0"/>
+            <a:ext cx="5486" cy="8229600"/>
+          </a:xfrm>
+          <a:prstGeom prst="rect">
+            <a:avLst/>
+          </a:prstGeom>
+          <a:solidFill>
+            <a:srgbClr val="182124"/>
+          </a:solidFill>
+          <a:ln>
+            <a:noFill/>
+          </a:ln>
+        </p:spPr>
+        <p:style>
+          <a:lnRef idx="1">
+            <a:schemeClr val="accent1"/>
+          </a:lnRef>
+          <a:fillRef idx="3">
+            <a:schemeClr val="accent1"/>
+          </a:fillRef>
+          <a:effectRef idx="2">
+            <a:schemeClr val="accent1"/>
+          </a:effectRef>
+          <a:fontRef idx="minor">
+            <a:schemeClr val="lt1"/>
+          </a:fontRef>
+        </p:style>
+        <p:txBody>
+          <a:bodyPr rtlCol="0" anchor="ctr"/>
+          <a:lstStyle/>
+          <a:p>
+            <a:pPr algn="ctr"/>
+          </a:p>
+        </p:txBody>
+      </p:sp>
+      <p:sp>
+        <p:nvSpPr>
+          <p:cNvPr id="17" name="TextBox 16"/>
+          <p:cNvSpPr txBox="1"/>
+          <p:nvPr/>
+        </p:nvSpPr>
+        <p:spPr>
+          <a:xfrm>
+            <a:off x="658368" y="393192"/>
+            <a:ext cx="10972800" cy="274320"/>
+          </a:xfrm>
+          <a:prstGeom prst="rect">
+            <a:avLst/>
+          </a:prstGeom>
+          <a:noFill/>
+        </p:spPr>
+        <p:txBody>
+          <a:bodyPr wrap="square" lIns="0" rIns="0" tIns="0" bIns="0">
+            <a:spAutoFit/>
+          </a:bodyPr>
+          <a:lstStyle/>
+          <a:p>
+            <a:pPr>
+              <a:spcBef>
+                <a:spcPts val="0"/>
+              </a:spcBef>
+              <a:spcAft>
+                <a:spcPts val="900"/>
+              </a:spcAft>
+              <a:defRPr sz="1100" b="0">
+                <a:solidFill>
+                  <a:srgbClr val="AFBDC0"/>
+                </a:solidFill>
+                <a:latin typeface="Noto Sans"/>
+              </a:defRPr>
+            </a:pPr>
+            <a:r>
+              <a:t>E02 / M01 / OR03 · 01.10.2026</a:t>
+            </a:r>
+          </a:p>
+        </p:txBody>
+      </p:sp>
+      <p:sp>
+        <p:nvSpPr>
+          <p:cNvPr id="18" name="TextBox 17"/>
+          <p:cNvSpPr txBox="1"/>
+          <p:nvPr/>
+        </p:nvSpPr>
+        <p:spPr>
+          <a:xfrm>
+            <a:off x="12390120" y="393192"/>
+            <a:ext cx="1828800" cy="274320"/>
+          </a:xfrm>
+          <a:prstGeom prst="rect">
+            <a:avLst/>
+          </a:prstGeom>
+          <a:noFill/>
+        </p:spPr>
+        <p:txBody>
+          <a:bodyPr wrap="square" lIns="0" rIns="0" tIns="0" bIns="0">
+            <a:spAutoFit/>
+          </a:bodyPr>
+          <a:lstStyle/>
+          <a:p>
+            <a:pPr>
+              <a:spcBef>
+                <a:spcPts val="0"/>
+              </a:spcBef>
+              <a:spcAft>
+                <a:spcPts val="900"/>
+              </a:spcAft>
+              <a:defRPr sz="1100" b="1">
+                <a:solidFill>
+                  <a:srgbClr val="FF793F"/>
+                </a:solidFill>
+                <a:latin typeface="Noto Sans"/>
+              </a:defRPr>
+            </a:pPr>
+            <a:r>
+              <a:t>PLBP / SG1</a:t>
+            </a:r>
+          </a:p>
+        </p:txBody>
+      </p:sp>
+      <p:sp>
+        <p:nvSpPr>
+          <p:cNvPr id="19" name="Rectangle 18"/>
+          <p:cNvSpPr/>
+          <p:nvPr/>
+        </p:nvSpPr>
+        <p:spPr>
+          <a:xfrm>
+            <a:off x="658368" y="914400"/>
+            <a:ext cx="13313664" cy="10972"/>
+          </a:xfrm>
+          <a:prstGeom prst="rect">
+            <a:avLst/>
+          </a:prstGeom>
+          <a:solidFill>
+            <a:srgbClr val="354347"/>
+          </a:solidFill>
+          <a:ln>
+            <a:noFill/>
+          </a:ln>
+        </p:spPr>
+        <p:style>
+          <a:lnRef idx="1">
+            <a:schemeClr val="accent1"/>
+          </a:lnRef>
+          <a:fillRef idx="3">
+            <a:schemeClr val="accent1"/>
+          </a:fillRef>
+          <a:effectRef idx="2">
+            <a:schemeClr val="accent1"/>
+          </a:effectRef>
+          <a:fontRef idx="minor">
+            <a:schemeClr val="lt1"/>
+          </a:fontRef>
+        </p:style>
+        <p:txBody>
+          <a:bodyPr rtlCol="0" anchor="ctr"/>
+          <a:lstStyle/>
+          <a:p>
+            <a:pPr algn="ctr"/>
+          </a:p>
+        </p:txBody>
+      </p:sp>
+      <p:sp>
+        <p:nvSpPr>
+          <p:cNvPr id="20" name="TextBox 19"/>
+          <p:cNvSpPr txBox="1"/>
+          <p:nvPr/>
+        </p:nvSpPr>
+        <p:spPr>
+          <a:xfrm>
+            <a:off x="658368" y="1243584"/>
+            <a:ext cx="13213080" cy="1097280"/>
+          </a:xfrm>
+          <a:prstGeom prst="rect">
+            <a:avLst/>
+          </a:prstGeom>
+          <a:noFill/>
+        </p:spPr>
+        <p:txBody>
+          <a:bodyPr wrap="square" lIns="0" rIns="0" tIns="0" bIns="0">
+            <a:spAutoFit/>
+          </a:bodyPr>
+          <a:lstStyle/>
+          <a:p>
+            <a:pPr>
+              <a:spcBef>
+                <a:spcPts val="0"/>
+              </a:spcBef>
+              <a:spcAft>
+                <a:spcPts val="900"/>
+              </a:spcAft>
+              <a:defRPr sz="3700" b="1">
+                <a:solidFill>
+                  <a:srgbClr val="F4F1E9"/>
+                </a:solidFill>
+                <a:latin typeface="Noto Sans"/>
+              </a:defRPr>
+            </a:pPr>
+            <a:r>
+              <a:t>M01: от программы к стенду</a:t>
+            </a:r>
+          </a:p>
+        </p:txBody>
+      </p:sp>
+      <p:sp>
+        <p:nvSpPr>
+          <p:cNvPr id="21" name="Rectangle 20"/>
+          <p:cNvSpPr/>
+          <p:nvPr/>
+        </p:nvSpPr>
+        <p:spPr>
+          <a:xfrm>
+            <a:off x="658368" y="7159752"/>
+            <a:ext cx="13313664" cy="10972"/>
+          </a:xfrm>
+          <a:prstGeom prst="rect">
+            <a:avLst/>
+          </a:prstGeom>
+          <a:solidFill>
+            <a:srgbClr val="354347"/>
+          </a:solidFill>
+          <a:ln>
+            <a:noFill/>
+          </a:ln>
+        </p:spPr>
+        <p:style>
+          <a:lnRef idx="1">
+            <a:schemeClr val="accent1"/>
+          </a:lnRef>
+          <a:fillRef idx="3">
+            <a:schemeClr val="accent1"/>
+          </a:fillRef>
+          <a:effectRef idx="2">
+            <a:schemeClr val="accent1"/>
+          </a:effectRef>
+          <a:fontRef idx="minor">
+            <a:schemeClr val="lt1"/>
+          </a:fontRef>
+        </p:style>
+        <p:txBody>
+          <a:bodyPr rtlCol="0" anchor="ctr"/>
+          <a:lstStyle/>
+          <a:p>
+            <a:pPr algn="ctr"/>
+          </a:p>
+        </p:txBody>
+      </p:sp>
+      <p:sp>
+        <p:nvSpPr>
+          <p:cNvPr id="22" name="TextBox 21"/>
+          <p:cNvSpPr txBox="1"/>
+          <p:nvPr/>
+        </p:nvSpPr>
+        <p:spPr>
+          <a:xfrm>
+            <a:off x="658368" y="7342631"/>
+            <a:ext cx="12344400" cy="621792"/>
+          </a:xfrm>
+          <a:prstGeom prst="rect">
+            <a:avLst/>
+          </a:prstGeom>
+          <a:noFill/>
+        </p:spPr>
+        <p:txBody>
+          <a:bodyPr wrap="square" lIns="0" rIns="0" tIns="0" bIns="0">
+            <a:spAutoFit/>
+          </a:bodyPr>
+          <a:lstStyle/>
+          <a:p>
+            <a:pPr>
+              <a:spcBef>
+                <a:spcPts val="0"/>
+              </a:spcBef>
+              <a:spcAft>
+                <a:spcPts val="900"/>
+              </a:spcAft>
+              <a:defRPr sz="1200" b="0">
+                <a:solidFill>
+                  <a:srgbClr val="AFBDC0"/>
+                </a:solidFill>
+                <a:latin typeface="Noto Sans"/>
+              </a:defRPr>
+            </a:pPr>
+            <a:r>
+              <a:t>RP2040, излучатель и отдельная кассета. Аппаратных испытаний ещё нет.</a:t>
+            </a:r>
+          </a:p>
+        </p:txBody>
+      </p:sp>
+      <p:sp>
+        <p:nvSpPr>
+          <p:cNvPr id="23" name="TextBox 22"/>
+          <p:cNvSpPr txBox="1"/>
+          <p:nvPr/>
+        </p:nvSpPr>
+        <p:spPr>
+          <a:xfrm>
+            <a:off x="13121640" y="7507224"/>
+            <a:ext cx="914400" cy="365760"/>
+          </a:xfrm>
+          <a:prstGeom prst="rect">
+            <a:avLst/>
+          </a:prstGeom>
+          <a:noFill/>
+        </p:spPr>
+        <p:txBody>
+          <a:bodyPr wrap="square" lIns="0" rIns="0" tIns="0" bIns="0">
+            <a:spAutoFit/>
+          </a:bodyPr>
+          <a:lstStyle/>
+          <a:p>
+            <a:pPr>
+              <a:spcBef>
+                <a:spcPts val="0"/>
+              </a:spcBef>
+              <a:spcAft>
+                <a:spcPts val="900"/>
+              </a:spcAft>
+              <a:defRPr sz="1100" b="0">
+                <a:solidFill>
+                  <a:srgbClr val="FF793F"/>
+                </a:solidFill>
+                <a:latin typeface="Noto Sans"/>
+              </a:defRPr>
+            </a:pPr>
+            <a:r>
+              <a:t>23 / 25</a:t>
+            </a:r>
+          </a:p>
+        </p:txBody>
+      </p:sp>
+      <p:sp>
+        <p:nvSpPr>
+          <p:cNvPr id="24" name="Rectangle 23"/>
+          <p:cNvSpPr/>
+          <p:nvPr/>
+        </p:nvSpPr>
+        <p:spPr>
+          <a:xfrm>
+            <a:off x="0" y="8183879"/>
+            <a:ext cx="13459968" cy="45720"/>
+          </a:xfrm>
+          <a:prstGeom prst="rect">
+            <a:avLst/>
+          </a:prstGeom>
+          <a:solidFill>
+            <a:srgbClr val="FF793F"/>
+          </a:solidFill>
+          <a:ln>
+            <a:noFill/>
+          </a:ln>
+        </p:spPr>
+        <p:style>
+          <a:lnRef idx="1">
+            <a:schemeClr val="accent1"/>
+          </a:lnRef>
+          <a:fillRef idx="3">
+            <a:schemeClr val="accent1"/>
+          </a:fillRef>
+          <a:effectRef idx="2">
+            <a:schemeClr val="accent1"/>
+          </a:effectRef>
+          <a:fontRef idx="minor">
+            <a:schemeClr val="lt1"/>
+          </a:fontRef>
+        </p:style>
+        <p:txBody>
+          <a:bodyPr rtlCol="0" anchor="ctr"/>
+          <a:lstStyle/>
+          <a:p>
+            <a:pPr algn="ctr"/>
+          </a:p>
+        </p:txBody>
+      </p:sp>
+      <p:sp>
+        <p:nvSpPr>
+          <p:cNvPr id="25" name="Rectangle 24"/>
+          <p:cNvSpPr/>
+          <p:nvPr/>
+        </p:nvSpPr>
+        <p:spPr>
+          <a:xfrm>
+            <a:off x="658368" y="2743200"/>
+            <a:ext cx="4285488" cy="3474720"/>
+          </a:xfrm>
+          <a:prstGeom prst="rect">
+            <a:avLst/>
+          </a:prstGeom>
+          <a:solidFill>
+            <a:srgbClr val="1A2427"/>
+          </a:solidFill>
+          <a:ln>
+            <a:noFill/>
+          </a:ln>
+        </p:spPr>
+        <p:style>
+          <a:lnRef idx="1">
+            <a:schemeClr val="accent1"/>
+          </a:lnRef>
+          <a:fillRef idx="3">
+            <a:schemeClr val="accent1"/>
+          </a:fillRef>
+          <a:effectRef idx="2">
+            <a:schemeClr val="accent1"/>
+          </a:effectRef>
+          <a:fontRef idx="minor">
+            <a:schemeClr val="lt1"/>
+          </a:fontRef>
+        </p:style>
+        <p:txBody>
+          <a:bodyPr rtlCol="0" anchor="ctr"/>
+          <a:lstStyle/>
+          <a:p>
+            <a:pPr algn="ctr"/>
+          </a:p>
+        </p:txBody>
+      </p:sp>
+      <p:sp>
+        <p:nvSpPr>
+          <p:cNvPr id="26" name="Rectangle 25"/>
+          <p:cNvSpPr/>
+          <p:nvPr/>
+        </p:nvSpPr>
+        <p:spPr>
+          <a:xfrm>
+            <a:off x="658368" y="2743200"/>
+            <a:ext cx="4285488" cy="32004"/>
+          </a:xfrm>
+          <a:prstGeom prst="rect">
+            <a:avLst/>
+          </a:prstGeom>
+          <a:solidFill>
+            <a:srgbClr val="FF793F"/>
+          </a:solidFill>
+          <a:ln>
+            <a:noFill/>
+          </a:ln>
+        </p:spPr>
+        <p:style>
+          <a:lnRef idx="1">
+            <a:schemeClr val="accent1"/>
+          </a:lnRef>
+          <a:fillRef idx="3">
+            <a:schemeClr val="accent1"/>
+          </a:fillRef>
+          <a:effectRef idx="2">
+            <a:schemeClr val="accent1"/>
+          </a:effectRef>
+          <a:fontRef idx="minor">
+            <a:schemeClr val="lt1"/>
+          </a:fontRef>
+        </p:style>
+        <p:txBody>
+          <a:bodyPr rtlCol="0" anchor="ctr"/>
+          <a:lstStyle/>
+          <a:p>
+            <a:pPr algn="ctr"/>
+          </a:p>
+        </p:txBody>
+      </p:sp>
+      <p:sp>
+        <p:nvSpPr>
+          <p:cNvPr id="27" name="TextBox 26"/>
+          <p:cNvSpPr txBox="1"/>
+          <p:nvPr/>
+        </p:nvSpPr>
+        <p:spPr>
+          <a:xfrm>
+            <a:off x="886968" y="2971800"/>
+            <a:ext cx="3828288" cy="694944"/>
+          </a:xfrm>
+          <a:prstGeom prst="rect">
+            <a:avLst/>
+          </a:prstGeom>
+          <a:noFill/>
+        </p:spPr>
+        <p:txBody>
+          <a:bodyPr wrap="square" lIns="0" rIns="0" tIns="0" bIns="0">
+            <a:spAutoFit/>
+          </a:bodyPr>
+          <a:lstStyle/>
+          <a:p>
+            <a:pPr>
+              <a:spcBef>
+                <a:spcPts val="0"/>
+              </a:spcBef>
+              <a:spcAft>
+                <a:spcPts val="900"/>
+              </a:spcAft>
+              <a:defRPr sz="2300" b="1">
+                <a:solidFill>
+                  <a:srgbClr val="F4F1E9"/>
+                </a:solidFill>
+                <a:latin typeface="Noto Sans"/>
+              </a:defRPr>
+            </a:pPr>
+            <a:r>
+              <a:t>Цель миссии</a:t>
+            </a:r>
+          </a:p>
+        </p:txBody>
+      </p:sp>
+      <p:sp>
+        <p:nvSpPr>
+          <p:cNvPr id="28" name="TextBox 27"/>
+          <p:cNvSpPr txBox="1"/>
+          <p:nvPr/>
+        </p:nvSpPr>
+        <p:spPr>
+          <a:xfrm>
+            <a:off x="886968" y="3685032"/>
+            <a:ext cx="3828288" cy="2423160"/>
+          </a:xfrm>
+          <a:prstGeom prst="rect">
+            <a:avLst/>
+          </a:prstGeom>
+          <a:noFill/>
+        </p:spPr>
+        <p:txBody>
+          <a:bodyPr wrap="square" lIns="0" rIns="0" tIns="0" bIns="0">
+            <a:spAutoFit/>
+          </a:bodyPr>
+          <a:lstStyle/>
+          <a:p>
+            <a:pPr>
+              <a:spcBef>
+                <a:spcPts val="0"/>
+              </a:spcBef>
+              <a:spcAft>
+                <a:spcPts val="900"/>
+              </a:spcAft>
+              <a:defRPr sz="2100" b="0">
+                <a:solidFill>
+                  <a:srgbClr val="AFBDC0"/>
+                </a:solidFill>
+                <a:latin typeface="Noto Sans"/>
+              </a:defRPr>
+            </a:pPr>
+            <a:r>
+              <a:t>Звук для ближнего поиска. Проверить 10 м, затем целевые 25 м.</a:t>
+            </a:r>
+          </a:p>
+        </p:txBody>
+      </p:sp>
+      <p:sp>
+        <p:nvSpPr>
+          <p:cNvPr id="29" name="Rectangle 28"/>
+          <p:cNvSpPr/>
+          <p:nvPr/>
+        </p:nvSpPr>
+        <p:spPr>
+          <a:xfrm>
+            <a:off x="5172456" y="2743200"/>
+            <a:ext cx="4285488" cy="3474720"/>
+          </a:xfrm>
+          <a:prstGeom prst="rect">
+            <a:avLst/>
+          </a:prstGeom>
+          <a:solidFill>
+            <a:srgbClr val="1A2427"/>
+          </a:solidFill>
+          <a:ln>
+            <a:noFill/>
+          </a:ln>
+        </p:spPr>
+        <p:style>
+          <a:lnRef idx="1">
+            <a:schemeClr val="accent1"/>
+          </a:lnRef>
+          <a:fillRef idx="3">
+            <a:schemeClr val="accent1"/>
+          </a:fillRef>
+          <a:effectRef idx="2">
+            <a:schemeClr val="accent1"/>
+          </a:effectRef>
+          <a:fontRef idx="minor">
+            <a:schemeClr val="lt1"/>
+          </a:fontRef>
+        </p:style>
+        <p:txBody>
+          <a:bodyPr rtlCol="0" anchor="ctr"/>
+          <a:lstStyle/>
+          <a:p>
+            <a:pPr algn="ctr"/>
+          </a:p>
+        </p:txBody>
+      </p:sp>
+      <p:sp>
+        <p:nvSpPr>
+          <p:cNvPr id="30" name="Rectangle 29"/>
+          <p:cNvSpPr/>
+          <p:nvPr/>
+        </p:nvSpPr>
+        <p:spPr>
+          <a:xfrm>
+            <a:off x="5172456" y="2743200"/>
+            <a:ext cx="4285488" cy="32004"/>
+          </a:xfrm>
+          <a:prstGeom prst="rect">
+            <a:avLst/>
+          </a:prstGeom>
+          <a:solidFill>
+            <a:srgbClr val="FF793F"/>
+          </a:solidFill>
+          <a:ln>
+            <a:noFill/>
+          </a:ln>
+        </p:spPr>
+        <p:style>
+          <a:lnRef idx="1">
+            <a:schemeClr val="accent1"/>
+          </a:lnRef>
+          <a:fillRef idx="3">
+            <a:schemeClr val="accent1"/>
+          </a:fillRef>
+          <a:effectRef idx="2">
+            <a:schemeClr val="accent1"/>
+          </a:effectRef>
+          <a:fontRef idx="minor">
+            <a:schemeClr val="lt1"/>
+          </a:fontRef>
+        </p:style>
+        <p:txBody>
+          <a:bodyPr rtlCol="0" anchor="ctr"/>
+          <a:lstStyle/>
+          <a:p>
+            <a:pPr algn="ctr"/>
+          </a:p>
+        </p:txBody>
+      </p:sp>
+      <p:sp>
+        <p:nvSpPr>
+          <p:cNvPr id="31" name="TextBox 30"/>
+          <p:cNvSpPr txBox="1"/>
+          <p:nvPr/>
+        </p:nvSpPr>
+        <p:spPr>
+          <a:xfrm>
+            <a:off x="5401056" y="2971800"/>
+            <a:ext cx="3828288" cy="694944"/>
+          </a:xfrm>
+          <a:prstGeom prst="rect">
+            <a:avLst/>
+          </a:prstGeom>
+          <a:noFill/>
+        </p:spPr>
+        <p:txBody>
+          <a:bodyPr wrap="square" lIns="0" rIns="0" tIns="0" bIns="0">
+            <a:spAutoFit/>
+          </a:bodyPr>
+          <a:lstStyle/>
+          <a:p>
+            <a:pPr>
+              <a:spcBef>
+                <a:spcPts val="0"/>
+              </a:spcBef>
+              <a:spcAft>
+                <a:spcPts val="900"/>
+              </a:spcAft>
+              <a:defRPr sz="2300" b="1">
+                <a:solidFill>
+                  <a:srgbClr val="F4F1E9"/>
+                </a:solidFill>
+                <a:latin typeface="Noto Sans"/>
+              </a:defRPr>
+            </a:pPr>
+            <a:r>
+              <a:t>Питание</a:t>
+            </a:r>
+          </a:p>
+        </p:txBody>
+      </p:sp>
+      <p:sp>
+        <p:nvSpPr>
+          <p:cNvPr id="32" name="TextBox 31"/>
+          <p:cNvSpPr txBox="1"/>
+          <p:nvPr/>
+        </p:nvSpPr>
+        <p:spPr>
+          <a:xfrm>
+            <a:off x="5401056" y="3685032"/>
+            <a:ext cx="3828288" cy="2423160"/>
+          </a:xfrm>
+          <a:prstGeom prst="rect">
+            <a:avLst/>
+          </a:prstGeom>
+          <a:noFill/>
+        </p:spPr>
+        <p:txBody>
+          <a:bodyPr wrap="square" lIns="0" rIns="0" tIns="0" bIns="0">
+            <a:spAutoFit/>
+          </a:bodyPr>
+          <a:lstStyle/>
+          <a:p>
+            <a:pPr>
+              <a:spcBef>
+                <a:spcPts val="0"/>
+              </a:spcBef>
+              <a:spcAft>
+                <a:spcPts val="900"/>
+              </a:spcAft>
+              <a:defRPr sz="2100" b="0">
+                <a:solidFill>
+                  <a:srgbClr val="AFBDC0"/>
+                </a:solidFill>
+                <a:latin typeface="Noto Sans"/>
+              </a:defRPr>
+            </a:pPr>
+            <a:r>
+              <a:t>LiPo 1200 мА·ч. Цель — 6 ч от включения; токи расчётные.</a:t>
+            </a:r>
+          </a:p>
+        </p:txBody>
+      </p:sp>
+      <p:sp>
+        <p:nvSpPr>
+          <p:cNvPr id="33" name="Rectangle 32"/>
+          <p:cNvSpPr/>
+          <p:nvPr/>
+        </p:nvSpPr>
+        <p:spPr>
+          <a:xfrm>
+            <a:off x="9686544" y="2743200"/>
+            <a:ext cx="4285488" cy="3474720"/>
+          </a:xfrm>
+          <a:prstGeom prst="rect">
+            <a:avLst/>
+          </a:prstGeom>
+          <a:solidFill>
+            <a:srgbClr val="1A2427"/>
+          </a:solidFill>
+          <a:ln>
+            <a:noFill/>
+          </a:ln>
+        </p:spPr>
+        <p:style>
+          <a:lnRef idx="1">
+            <a:schemeClr val="accent1"/>
+          </a:lnRef>
+          <a:fillRef idx="3">
+            <a:schemeClr val="accent1"/>
+          </a:fillRef>
+          <a:effectRef idx="2">
+            <a:schemeClr val="accent1"/>
+          </a:effectRef>
+          <a:fontRef idx="minor">
+            <a:schemeClr val="lt1"/>
+          </a:fontRef>
+        </p:style>
+        <p:txBody>
+          <a:bodyPr rtlCol="0" anchor="ctr"/>
+          <a:lstStyle/>
+          <a:p>
+            <a:pPr algn="ctr"/>
+          </a:p>
+        </p:txBody>
+      </p:sp>
+      <p:sp>
+        <p:nvSpPr>
+          <p:cNvPr id="34" name="Rectangle 33"/>
+          <p:cNvSpPr/>
+          <p:nvPr/>
+        </p:nvSpPr>
+        <p:spPr>
+          <a:xfrm>
+            <a:off x="9686544" y="2743200"/>
+            <a:ext cx="4285488" cy="32004"/>
+          </a:xfrm>
+          <a:prstGeom prst="rect">
+            <a:avLst/>
+          </a:prstGeom>
+          <a:solidFill>
+            <a:srgbClr val="FF793F"/>
+          </a:solidFill>
+          <a:ln>
+            <a:noFill/>
+          </a:ln>
+        </p:spPr>
+        <p:style>
+          <a:lnRef idx="1">
+            <a:schemeClr val="accent1"/>
+          </a:lnRef>
+          <a:fillRef idx="3">
+            <a:schemeClr val="accent1"/>
+          </a:fillRef>
+          <a:effectRef idx="2">
+            <a:schemeClr val="accent1"/>
+          </a:effectRef>
+          <a:fontRef idx="minor">
+            <a:schemeClr val="lt1"/>
+          </a:fontRef>
+        </p:style>
+        <p:txBody>
+          <a:bodyPr rtlCol="0" anchor="ctr"/>
+          <a:lstStyle/>
+          <a:p>
+            <a:pPr algn="ctr"/>
+          </a:p>
+        </p:txBody>
+      </p:sp>
+      <p:sp>
+        <p:nvSpPr>
+          <p:cNvPr id="35" name="TextBox 34"/>
+          <p:cNvSpPr txBox="1"/>
+          <p:nvPr/>
+        </p:nvSpPr>
+        <p:spPr>
+          <a:xfrm>
+            <a:off x="9915144" y="2971800"/>
+            <a:ext cx="3828288" cy="694944"/>
+          </a:xfrm>
+          <a:prstGeom prst="rect">
+            <a:avLst/>
+          </a:prstGeom>
+          <a:noFill/>
+        </p:spPr>
+        <p:txBody>
+          <a:bodyPr wrap="square" lIns="0" rIns="0" tIns="0" bIns="0">
+            <a:spAutoFit/>
+          </a:bodyPr>
+          <a:lstStyle/>
+          <a:p>
+            <a:pPr>
+              <a:spcBef>
+                <a:spcPts val="0"/>
+              </a:spcBef>
+              <a:spcAft>
+                <a:spcPts val="900"/>
+              </a:spcAft>
+              <a:defRPr sz="2300" b="1">
+                <a:solidFill>
+                  <a:srgbClr val="F4F1E9"/>
+                </a:solidFill>
+                <a:latin typeface="Noto Sans"/>
+              </a:defRPr>
+            </a:pPr>
+            <a:r>
+              <a:t>Открытая проверка</a:t>
+            </a:r>
+          </a:p>
+        </p:txBody>
+      </p:sp>
+      <p:sp>
+        <p:nvSpPr>
+          <p:cNvPr id="36" name="TextBox 35"/>
+          <p:cNvSpPr txBox="1"/>
+          <p:nvPr/>
+        </p:nvSpPr>
+        <p:spPr>
+          <a:xfrm>
+            <a:off x="9915144" y="3685032"/>
+            <a:ext cx="3828288" cy="2423160"/>
+          </a:xfrm>
+          <a:prstGeom prst="rect">
+            <a:avLst/>
+          </a:prstGeom>
+          <a:noFill/>
+        </p:spPr>
+        <p:txBody>
+          <a:bodyPr wrap="square" lIns="0" rIns="0" tIns="0" bIns="0">
+            <a:spAutoFit/>
+          </a:bodyPr>
+          <a:lstStyle/>
+          <a:p>
+            <a:pPr>
+              <a:spcBef>
+                <a:spcPts val="0"/>
+              </a:spcBef>
+              <a:spcAft>
+                <a:spcPts val="900"/>
+              </a:spcAft>
+              <a:defRPr sz="2100" b="0">
+                <a:solidFill>
+                  <a:srgbClr val="AFBDC0"/>
+                </a:solidFill>
+                <a:latin typeface="Noto Sans"/>
+              </a:defRPr>
+            </a:pPr>
+            <a:r>
+              <a:t>Звук через корпус, помехи самописцу и критерий зачёта.</a:t>
+            </a:r>
+          </a:p>
+        </p:txBody>
+      </p:sp>
+    </p:spTree>
+  </p:cSld>
+  <p:clrMapOvr>
+    <a:masterClrMapping/>
+  </p:clrMapOvr>
+</p:sld>
+</file>
+
+<file path=ppt/slides/slide24.xml><?xml version="1.0" encoding="utf-8"?>
+<p:sld xmlns:a="http://schemas.openxmlformats.org/drawingml/2006/main" xmlns:p="http://schemas.openxmlformats.org/presentationml/2006/main" xmlns:r="http://schemas.openxmlformats.org/officeDocument/2006/relationships">
+  <p:cSld>
+    <p:bg>
+      <p:bgPr>
+        <a:solidFill>
+          <a:srgbClr val="101719"/>
+        </a:solidFill>
+        <a:effectLst/>
+      </p:bgPr>
+    </p:bg>
+    <p:spTree>
+      <p:nvGrpSpPr>
+        <p:cNvPr id="1" name=""/>
+        <p:cNvGrpSpPr/>
+        <p:nvPr/>
+      </p:nvGrpSpPr>
+      <p:grpSpPr/>
+      <p:sp>
+        <p:nvSpPr>
+          <p:cNvPr id="2" name="Rectangle 1"/>
+          <p:cNvSpPr/>
+          <p:nvPr/>
+        </p:nvSpPr>
+        <p:spPr>
+          <a:xfrm>
+            <a:off x="914400" y="0"/>
+            <a:ext cx="5486" cy="8229600"/>
+          </a:xfrm>
+          <a:prstGeom prst="rect">
+            <a:avLst/>
+          </a:prstGeom>
+          <a:solidFill>
+            <a:srgbClr val="182124"/>
+          </a:solidFill>
+          <a:ln>
+            <a:noFill/>
+          </a:ln>
+        </p:spPr>
+        <p:style>
+          <a:lnRef idx="1">
+            <a:schemeClr val="accent1"/>
+          </a:lnRef>
+          <a:fillRef idx="3">
+            <a:schemeClr val="accent1"/>
+          </a:fillRef>
+          <a:effectRef idx="2">
+            <a:schemeClr val="accent1"/>
+          </a:effectRef>
+          <a:fontRef idx="minor">
+            <a:schemeClr val="lt1"/>
+          </a:fontRef>
+        </p:style>
+        <p:txBody>
+          <a:bodyPr rtlCol="0" anchor="ctr"/>
+          <a:lstStyle/>
+          <a:p>
+            <a:pPr algn="ctr"/>
+          </a:p>
+        </p:txBody>
+      </p:sp>
+      <p:sp>
+        <p:nvSpPr>
+          <p:cNvPr id="3" name="Rectangle 2"/>
+          <p:cNvSpPr/>
+          <p:nvPr/>
+        </p:nvSpPr>
+        <p:spPr>
+          <a:xfrm>
+            <a:off x="1828800" y="0"/>
+            <a:ext cx="5486" cy="8229600"/>
+          </a:xfrm>
+          <a:prstGeom prst="rect">
+            <a:avLst/>
+          </a:prstGeom>
+          <a:solidFill>
+            <a:srgbClr val="182124"/>
+          </a:solidFill>
+          <a:ln>
+            <a:noFill/>
+          </a:ln>
+        </p:spPr>
+        <p:style>
+          <a:lnRef idx="1">
+            <a:schemeClr val="accent1"/>
+          </a:lnRef>
+          <a:fillRef idx="3">
+            <a:schemeClr val="accent1"/>
+          </a:fillRef>
+          <a:effectRef idx="2">
+            <a:schemeClr val="accent1"/>
+          </a:effectRef>
+          <a:fontRef idx="minor">
+            <a:schemeClr val="lt1"/>
+          </a:fontRef>
+        </p:style>
+        <p:txBody>
+          <a:bodyPr rtlCol="0" anchor="ctr"/>
+          <a:lstStyle/>
+          <a:p>
+            <a:pPr algn="ctr"/>
+          </a:p>
+        </p:txBody>
+      </p:sp>
+      <p:sp>
+        <p:nvSpPr>
+          <p:cNvPr id="4" name="Rectangle 3"/>
+          <p:cNvSpPr/>
+          <p:nvPr/>
+        </p:nvSpPr>
+        <p:spPr>
+          <a:xfrm>
+            <a:off x="2743200" y="0"/>
+            <a:ext cx="5486" cy="8229600"/>
+          </a:xfrm>
+          <a:prstGeom prst="rect">
+            <a:avLst/>
+          </a:prstGeom>
+          <a:solidFill>
+            <a:srgbClr val="182124"/>
+          </a:solidFill>
+          <a:ln>
+            <a:noFill/>
+          </a:ln>
+        </p:spPr>
+        <p:style>
+          <a:lnRef idx="1">
+            <a:schemeClr val="accent1"/>
+          </a:lnRef>
+          <a:fillRef idx="3">
+            <a:schemeClr val="accent1"/>
+          </a:fillRef>
+          <a:effectRef idx="2">
+            <a:schemeClr val="accent1"/>
+          </a:effectRef>
+          <a:fontRef idx="minor">
+            <a:schemeClr val="lt1"/>
+          </a:fontRef>
+        </p:style>
+        <p:txBody>
+          <a:bodyPr rtlCol="0" anchor="ctr"/>
+          <a:lstStyle/>
+          <a:p>
+            <a:pPr algn="ctr"/>
+          </a:p>
+        </p:txBody>
+      </p:sp>
+      <p:sp>
+        <p:nvSpPr>
+          <p:cNvPr id="5" name="Rectangle 4"/>
+          <p:cNvSpPr/>
+          <p:nvPr/>
+        </p:nvSpPr>
+        <p:spPr>
+          <a:xfrm>
+            <a:off x="3657600" y="0"/>
+            <a:ext cx="5486" cy="8229600"/>
+          </a:xfrm>
+          <a:prstGeom prst="rect">
+            <a:avLst/>
+          </a:prstGeom>
+          <a:solidFill>
+            <a:srgbClr val="182124"/>
+          </a:solidFill>
+          <a:ln>
+            <a:noFill/>
+          </a:ln>
+        </p:spPr>
+        <p:style>
+          <a:lnRef idx="1">
+            <a:schemeClr val="accent1"/>
+          </a:lnRef>
+          <a:fillRef idx="3">
+            <a:schemeClr val="accent1"/>
+          </a:fillRef>
+          <a:effectRef idx="2">
+            <a:schemeClr val="accent1"/>
+          </a:effectRef>
+          <a:fontRef idx="minor">
+            <a:schemeClr val="lt1"/>
+          </a:fontRef>
+        </p:style>
+        <p:txBody>
+          <a:bodyPr rtlCol="0" anchor="ctr"/>
+          <a:lstStyle/>
+          <a:p>
+            <a:pPr algn="ctr"/>
+          </a:p>
+        </p:txBody>
+      </p:sp>
+      <p:sp>
+        <p:nvSpPr>
+          <p:cNvPr id="6" name="Rectangle 5"/>
+          <p:cNvSpPr/>
+          <p:nvPr/>
+        </p:nvSpPr>
+        <p:spPr>
+          <a:xfrm>
+            <a:off x="4572000" y="0"/>
+            <a:ext cx="5486" cy="8229600"/>
+          </a:xfrm>
+          <a:prstGeom prst="rect">
+            <a:avLst/>
+          </a:prstGeom>
+          <a:solidFill>
+            <a:srgbClr val="182124"/>
+          </a:solidFill>
+          <a:ln>
+            <a:noFill/>
+          </a:ln>
+        </p:spPr>
+        <p:style>
+          <a:lnRef idx="1">
+            <a:schemeClr val="accent1"/>
+          </a:lnRef>
+          <a:fillRef idx="3">
+            <a:schemeClr val="accent1"/>
+          </a:fillRef>
+          <a:effectRef idx="2">
+            <a:schemeClr val="accent1"/>
+          </a:effectRef>
+          <a:fontRef idx="minor">
+            <a:schemeClr val="lt1"/>
+          </a:fontRef>
+        </p:style>
+        <p:txBody>
+          <a:bodyPr rtlCol="0" anchor="ctr"/>
+          <a:lstStyle/>
+          <a:p>
+            <a:pPr algn="ctr"/>
+          </a:p>
+        </p:txBody>
+      </p:sp>
+      <p:sp>
+        <p:nvSpPr>
+          <p:cNvPr id="7" name="Rectangle 6"/>
+          <p:cNvSpPr/>
+          <p:nvPr/>
+        </p:nvSpPr>
+        <p:spPr>
+          <a:xfrm>
+            <a:off x="5486400" y="0"/>
+            <a:ext cx="5486" cy="8229600"/>
+          </a:xfrm>
+          <a:prstGeom prst="rect">
+            <a:avLst/>
+          </a:prstGeom>
+          <a:solidFill>
+            <a:srgbClr val="182124"/>
+          </a:solidFill>
+          <a:ln>
+            <a:noFill/>
+          </a:ln>
+        </p:spPr>
+        <p:style>
+          <a:lnRef idx="1">
+            <a:schemeClr val="accent1"/>
+          </a:lnRef>
+          <a:fillRef idx="3">
+            <a:schemeClr val="accent1"/>
+          </a:fillRef>
+          <a:effectRef idx="2">
+            <a:schemeClr val="accent1"/>
+          </a:effectRef>
+          <a:fontRef idx="minor">
+            <a:schemeClr val="lt1"/>
+          </a:fontRef>
+        </p:style>
+        <p:txBody>
+          <a:bodyPr rtlCol="0" anchor="ctr"/>
+          <a:lstStyle/>
+          <a:p>
+            <a:pPr algn="ctr"/>
+          </a:p>
+        </p:txBody>
+      </p:sp>
+      <p:sp>
+        <p:nvSpPr>
+          <p:cNvPr id="8" name="Rectangle 7"/>
+          <p:cNvSpPr/>
+          <p:nvPr/>
+        </p:nvSpPr>
+        <p:spPr>
+          <a:xfrm>
+            <a:off x="6400800" y="0"/>
+            <a:ext cx="5486" cy="8229600"/>
+          </a:xfrm>
+          <a:prstGeom prst="rect">
+            <a:avLst/>
+          </a:prstGeom>
+          <a:solidFill>
+            <a:srgbClr val="182124"/>
+          </a:solidFill>
+          <a:ln>
+            <a:noFill/>
+          </a:ln>
+        </p:spPr>
+        <p:style>
+          <a:lnRef idx="1">
+            <a:schemeClr val="accent1"/>
+          </a:lnRef>
+          <a:fillRef idx="3">
+            <a:schemeClr val="accent1"/>
+          </a:fillRef>
+          <a:effectRef idx="2">
+            <a:schemeClr val="accent1"/>
+          </a:effectRef>
+          <a:fontRef idx="minor">
+            <a:schemeClr val="lt1"/>
+          </a:fontRef>
+        </p:style>
+        <p:txBody>
+          <a:bodyPr rtlCol="0" anchor="ctr"/>
+          <a:lstStyle/>
+          <a:p>
+            <a:pPr algn="ctr"/>
+          </a:p>
+        </p:txBody>
+      </p:sp>
+      <p:sp>
+        <p:nvSpPr>
+          <p:cNvPr id="9" name="Rectangle 8"/>
+          <p:cNvSpPr/>
+          <p:nvPr/>
+        </p:nvSpPr>
+        <p:spPr>
+          <a:xfrm>
+            <a:off x="7315200" y="0"/>
+            <a:ext cx="5486" cy="8229600"/>
+          </a:xfrm>
+          <a:prstGeom prst="rect">
+            <a:avLst/>
+          </a:prstGeom>
+          <a:solidFill>
+            <a:srgbClr val="182124"/>
+          </a:solidFill>
+          <a:ln>
+            <a:noFill/>
+          </a:ln>
+        </p:spPr>
+        <p:style>
+          <a:lnRef idx="1">
+            <a:schemeClr val="accent1"/>
+          </a:lnRef>
+          <a:fillRef idx="3">
+            <a:schemeClr val="accent1"/>
+          </a:fillRef>
+          <a:effectRef idx="2">
+            <a:schemeClr val="accent1"/>
+          </a:effectRef>
+          <a:fontRef idx="minor">
+            <a:schemeClr val="lt1"/>
+          </a:fontRef>
+        </p:style>
+        <p:txBody>
+          <a:bodyPr rtlCol="0" anchor="ctr"/>
+          <a:lstStyle/>
+          <a:p>
+            <a:pPr algn="ctr"/>
+          </a:p>
+        </p:txBody>
+      </p:sp>
+      <p:sp>
+        <p:nvSpPr>
+          <p:cNvPr id="10" name="Rectangle 9"/>
+          <p:cNvSpPr/>
+          <p:nvPr/>
+        </p:nvSpPr>
+        <p:spPr>
+          <a:xfrm>
+            <a:off x="8229600" y="0"/>
+            <a:ext cx="5486" cy="8229600"/>
+          </a:xfrm>
+          <a:prstGeom prst="rect">
+            <a:avLst/>
+          </a:prstGeom>
+          <a:solidFill>
+            <a:srgbClr val="182124"/>
+          </a:solidFill>
+          <a:ln>
+            <a:noFill/>
+          </a:ln>
+        </p:spPr>
+        <p:style>
+          <a:lnRef idx="1">
+            <a:schemeClr val="accent1"/>
+          </a:lnRef>
+          <a:fillRef idx="3">
+            <a:schemeClr val="accent1"/>
+          </a:fillRef>
+          <a:effectRef idx="2">
+            <a:schemeClr val="accent1"/>
+          </a:effectRef>
+          <a:fontRef idx="minor">
+            <a:schemeClr val="lt1"/>
+          </a:fontRef>
+        </p:style>
+        <p:txBody>
+          <a:bodyPr rtlCol="0" anchor="ctr"/>
+          <a:lstStyle/>
+          <a:p>
+            <a:pPr algn="ctr"/>
+          </a:p>
+        </p:txBody>
+      </p:sp>
+      <p:sp>
+        <p:nvSpPr>
+          <p:cNvPr id="11" name="Rectangle 10"/>
+          <p:cNvSpPr/>
+          <p:nvPr/>
+        </p:nvSpPr>
+        <p:spPr>
+          <a:xfrm>
+            <a:off x="9144000" y="0"/>
+            <a:ext cx="5486" cy="8229600"/>
+          </a:xfrm>
+          <a:prstGeom prst="rect">
+            <a:avLst/>
+          </a:prstGeom>
+          <a:solidFill>
+            <a:srgbClr val="182124"/>
+          </a:solidFill>
+          <a:ln>
+            <a:noFill/>
+          </a:ln>
+        </p:spPr>
+        <p:style>
+          <a:lnRef idx="1">
+            <a:schemeClr val="accent1"/>
+          </a:lnRef>
+          <a:fillRef idx="3">
+            <a:schemeClr val="accent1"/>
+          </a:fillRef>
+          <a:effectRef idx="2">
+            <a:schemeClr val="accent1"/>
+          </a:effectRef>
+          <a:fontRef idx="minor">
+            <a:schemeClr val="lt1"/>
+          </a:fontRef>
+        </p:style>
+        <p:txBody>
+          <a:bodyPr rtlCol="0" anchor="ctr"/>
+          <a:lstStyle/>
+          <a:p>
+            <a:pPr algn="ctr"/>
+          </a:p>
+        </p:txBody>
+      </p:sp>
+      <p:sp>
+        <p:nvSpPr>
+          <p:cNvPr id="12" name="Rectangle 11"/>
+          <p:cNvSpPr/>
+          <p:nvPr/>
+        </p:nvSpPr>
+        <p:spPr>
+          <a:xfrm>
+            <a:off x="10058400" y="0"/>
+            <a:ext cx="5486" cy="8229600"/>
+          </a:xfrm>
+          <a:prstGeom prst="rect">
+            <a:avLst/>
+          </a:prstGeom>
+          <a:solidFill>
+            <a:srgbClr val="182124"/>
+          </a:solidFill>
+          <a:ln>
+            <a:noFill/>
+          </a:ln>
+        </p:spPr>
+        <p:style>
+          <a:lnRef idx="1">
+            <a:schemeClr val="accent1"/>
+          </a:lnRef>
+          <a:fillRef idx="3">
+            <a:schemeClr val="accent1"/>
+          </a:fillRef>
+          <a:effectRef idx="2">
+            <a:schemeClr val="accent1"/>
+          </a:effectRef>
+          <a:fontRef idx="minor">
+            <a:schemeClr val="lt1"/>
+          </a:fontRef>
+        </p:style>
+        <p:txBody>
+          <a:bodyPr rtlCol="0" anchor="ctr"/>
+          <a:lstStyle/>
+          <a:p>
+            <a:pPr algn="ctr"/>
+          </a:p>
+        </p:txBody>
+      </p:sp>
+      <p:sp>
+        <p:nvSpPr>
+          <p:cNvPr id="13" name="Rectangle 12"/>
+          <p:cNvSpPr/>
+          <p:nvPr/>
+        </p:nvSpPr>
+        <p:spPr>
+          <a:xfrm>
+            <a:off x="10972800" y="0"/>
+            <a:ext cx="5486" cy="8229600"/>
+          </a:xfrm>
+          <a:prstGeom prst="rect">
+            <a:avLst/>
+          </a:prstGeom>
+          <a:solidFill>
+            <a:srgbClr val="182124"/>
+          </a:solidFill>
+          <a:ln>
+            <a:noFill/>
+          </a:ln>
+        </p:spPr>
+        <p:style>
+          <a:lnRef idx="1">
+            <a:schemeClr val="accent1"/>
+          </a:lnRef>
+          <a:fillRef idx="3">
+            <a:schemeClr val="accent1"/>
+          </a:fillRef>
+          <a:effectRef idx="2">
+            <a:schemeClr val="accent1"/>
+          </a:effectRef>
+          <a:fontRef idx="minor">
+            <a:schemeClr val="lt1"/>
+          </a:fontRef>
+        </p:style>
+        <p:txBody>
+          <a:bodyPr rtlCol="0" anchor="ctr"/>
+          <a:lstStyle/>
+          <a:p>
+            <a:pPr algn="ctr"/>
+          </a:p>
+        </p:txBody>
+      </p:sp>
+      <p:sp>
+        <p:nvSpPr>
+          <p:cNvPr id="14" name="Rectangle 13"/>
+          <p:cNvSpPr/>
+          <p:nvPr/>
+        </p:nvSpPr>
+        <p:spPr>
+          <a:xfrm>
+            <a:off x="11887200" y="0"/>
+            <a:ext cx="5486" cy="8229600"/>
+          </a:xfrm>
+          <a:prstGeom prst="rect">
+            <a:avLst/>
+          </a:prstGeom>
+          <a:solidFill>
+            <a:srgbClr val="182124"/>
+          </a:solidFill>
+          <a:ln>
+            <a:noFill/>
+          </a:ln>
+        </p:spPr>
+        <p:style>
+          <a:lnRef idx="1">
+            <a:schemeClr val="accent1"/>
+          </a:lnRef>
+          <a:fillRef idx="3">
+            <a:schemeClr val="accent1"/>
+          </a:fillRef>
+          <a:effectRef idx="2">
+            <a:schemeClr val="accent1"/>
+          </a:effectRef>
+          <a:fontRef idx="minor">
+            <a:schemeClr val="lt1"/>
+          </a:fontRef>
+        </p:style>
+        <p:txBody>
+          <a:bodyPr rtlCol="0" anchor="ctr"/>
+          <a:lstStyle/>
+          <a:p>
+            <a:pPr algn="ctr"/>
+          </a:p>
+        </p:txBody>
+      </p:sp>
+      <p:sp>
+        <p:nvSpPr>
+          <p:cNvPr id="15" name="Rectangle 14"/>
+          <p:cNvSpPr/>
+          <p:nvPr/>
+        </p:nvSpPr>
+        <p:spPr>
+          <a:xfrm>
+            <a:off x="12801600" y="0"/>
+            <a:ext cx="5486" cy="8229600"/>
+          </a:xfrm>
+          <a:prstGeom prst="rect">
+            <a:avLst/>
+          </a:prstGeom>
+          <a:solidFill>
+            <a:srgbClr val="182124"/>
+          </a:solidFill>
+          <a:ln>
+            <a:noFill/>
+          </a:ln>
+        </p:spPr>
+        <p:style>
+          <a:lnRef idx="1">
+            <a:schemeClr val="accent1"/>
+          </a:lnRef>
+          <a:fillRef idx="3">
+            <a:schemeClr val="accent1"/>
+          </a:fillRef>
+          <a:effectRef idx="2">
+            <a:schemeClr val="accent1"/>
+          </a:effectRef>
+          <a:fontRef idx="minor">
+            <a:schemeClr val="lt1"/>
+          </a:fontRef>
+        </p:style>
+        <p:txBody>
+          <a:bodyPr rtlCol="0" anchor="ctr"/>
+          <a:lstStyle/>
+          <a:p>
+            <a:pPr algn="ctr"/>
+          </a:p>
+        </p:txBody>
+      </p:sp>
+      <p:sp>
+        <p:nvSpPr>
+          <p:cNvPr id="16" name="Rectangle 15"/>
+          <p:cNvSpPr/>
+          <p:nvPr/>
+        </p:nvSpPr>
+        <p:spPr>
+          <a:xfrm>
+            <a:off x="13716000" y="0"/>
+            <a:ext cx="5486" cy="8229600"/>
+          </a:xfrm>
+          <a:prstGeom prst="rect">
+            <a:avLst/>
+          </a:prstGeom>
+          <a:solidFill>
+            <a:srgbClr val="182124"/>
+          </a:solidFill>
+          <a:ln>
+            <a:noFill/>
+          </a:ln>
+        </p:spPr>
+        <p:style>
+          <a:lnRef idx="1">
+            <a:schemeClr val="accent1"/>
+          </a:lnRef>
+          <a:fillRef idx="3">
+            <a:schemeClr val="accent1"/>
+          </a:fillRef>
+          <a:effectRef idx="2">
+            <a:schemeClr val="accent1"/>
+          </a:effectRef>
+          <a:fontRef idx="minor">
+            <a:schemeClr val="lt1"/>
+          </a:fontRef>
+        </p:style>
+        <p:txBody>
+          <a:bodyPr rtlCol="0" anchor="ctr"/>
+          <a:lstStyle/>
+          <a:p>
+            <a:pPr algn="ctr"/>
+          </a:p>
+        </p:txBody>
+      </p:sp>
+      <p:sp>
+        <p:nvSpPr>
+          <p:cNvPr id="17" name="TextBox 16"/>
+          <p:cNvSpPr txBox="1"/>
+          <p:nvPr/>
+        </p:nvSpPr>
+        <p:spPr>
+          <a:xfrm>
+            <a:off x="658368" y="393192"/>
+            <a:ext cx="10972800" cy="274320"/>
+          </a:xfrm>
+          <a:prstGeom prst="rect">
+            <a:avLst/>
+          </a:prstGeom>
+          <a:noFill/>
+        </p:spPr>
+        <p:txBody>
+          <a:bodyPr wrap="square" lIns="0" rIns="0" tIns="0" bIns="0">
+            <a:spAutoFit/>
+          </a:bodyPr>
+          <a:lstStyle/>
+          <a:p>
+            <a:pPr>
+              <a:spcBef>
+                <a:spcPts val="0"/>
+              </a:spcBef>
+              <a:spcAft>
+                <a:spcPts val="900"/>
+              </a:spcAft>
+              <a:defRPr sz="1100" b="0">
+                <a:solidFill>
+                  <a:srgbClr val="AFBDC0"/>
+                </a:solidFill>
+                <a:latin typeface="Noto Sans"/>
+              </a:defRPr>
+            </a:pPr>
+            <a:r>
+              <a:t>E02 / M01 / OR03 · 01.10.2026</a:t>
+            </a:r>
+          </a:p>
+        </p:txBody>
+      </p:sp>
+      <p:sp>
+        <p:nvSpPr>
+          <p:cNvPr id="18" name="TextBox 17"/>
+          <p:cNvSpPr txBox="1"/>
+          <p:nvPr/>
+        </p:nvSpPr>
+        <p:spPr>
+          <a:xfrm>
+            <a:off x="12390120" y="393192"/>
+            <a:ext cx="1828800" cy="274320"/>
+          </a:xfrm>
+          <a:prstGeom prst="rect">
+            <a:avLst/>
+          </a:prstGeom>
+          <a:noFill/>
+        </p:spPr>
+        <p:txBody>
+          <a:bodyPr wrap="square" lIns="0" rIns="0" tIns="0" bIns="0">
+            <a:spAutoFit/>
+          </a:bodyPr>
+          <a:lstStyle/>
+          <a:p>
+            <a:pPr>
+              <a:spcBef>
+                <a:spcPts val="0"/>
+              </a:spcBef>
+              <a:spcAft>
+                <a:spcPts val="900"/>
+              </a:spcAft>
+              <a:defRPr sz="1100" b="1">
+                <a:solidFill>
+                  <a:srgbClr val="FF793F"/>
+                </a:solidFill>
+                <a:latin typeface="Noto Sans"/>
+              </a:defRPr>
+            </a:pPr>
+            <a:r>
+              <a:t>PLBP / SG1</a:t>
+            </a:r>
+          </a:p>
+        </p:txBody>
+      </p:sp>
+      <p:sp>
+        <p:nvSpPr>
+          <p:cNvPr id="19" name="Rectangle 18"/>
+          <p:cNvSpPr/>
+          <p:nvPr/>
+        </p:nvSpPr>
+        <p:spPr>
+          <a:xfrm>
+            <a:off x="658368" y="914400"/>
+            <a:ext cx="13313664" cy="10972"/>
+          </a:xfrm>
+          <a:prstGeom prst="rect">
+            <a:avLst/>
+          </a:prstGeom>
+          <a:solidFill>
+            <a:srgbClr val="354347"/>
+          </a:solidFill>
+          <a:ln>
+            <a:noFill/>
+          </a:ln>
+        </p:spPr>
+        <p:style>
+          <a:lnRef idx="1">
+            <a:schemeClr val="accent1"/>
+          </a:lnRef>
+          <a:fillRef idx="3">
+            <a:schemeClr val="accent1"/>
+          </a:fillRef>
+          <a:effectRef idx="2">
+            <a:schemeClr val="accent1"/>
+          </a:effectRef>
+          <a:fontRef idx="minor">
+            <a:schemeClr val="lt1"/>
+          </a:fontRef>
+        </p:style>
+        <p:txBody>
+          <a:bodyPr rtlCol="0" anchor="ctr"/>
+          <a:lstStyle/>
+          <a:p>
+            <a:pPr algn="ctr"/>
+          </a:p>
+        </p:txBody>
+      </p:sp>
+      <p:sp>
+        <p:nvSpPr>
+          <p:cNvPr id="20" name="TextBox 19"/>
+          <p:cNvSpPr txBox="1"/>
+          <p:nvPr/>
+        </p:nvSpPr>
+        <p:spPr>
+          <a:xfrm>
+            <a:off x="658368" y="1243584"/>
+            <a:ext cx="13213080" cy="1097280"/>
+          </a:xfrm>
+          <a:prstGeom prst="rect">
+            <a:avLst/>
+          </a:prstGeom>
+          <a:noFill/>
+        </p:spPr>
+        <p:txBody>
+          <a:bodyPr wrap="square" lIns="0" rIns="0" tIns="0" bIns="0">
+            <a:spAutoFit/>
+          </a:bodyPr>
+          <a:lstStyle/>
+          <a:p>
+            <a:pPr>
+              <a:spcBef>
+                <a:spcPts val="0"/>
+              </a:spcBef>
+              <a:spcAft>
+                <a:spcPts val="900"/>
+              </a:spcAft>
+              <a:defRPr sz="3700" b="1">
+                <a:solidFill>
+                  <a:srgbClr val="F4F1E9"/>
+                </a:solidFill>
+                <a:latin typeface="Noto Sans"/>
+              </a:defRPr>
+            </a:pPr>
+            <a:r>
+              <a:t>E02 в расчёте OpenRocket</a:t>
+            </a:r>
+          </a:p>
+        </p:txBody>
+      </p:sp>
+      <p:sp>
+        <p:nvSpPr>
+          <p:cNvPr id="21" name="Rectangle 20"/>
+          <p:cNvSpPr/>
+          <p:nvPr/>
+        </p:nvSpPr>
+        <p:spPr>
+          <a:xfrm>
+            <a:off x="658368" y="7159752"/>
+            <a:ext cx="13313664" cy="10972"/>
+          </a:xfrm>
+          <a:prstGeom prst="rect">
+            <a:avLst/>
+          </a:prstGeom>
+          <a:solidFill>
+            <a:srgbClr val="354347"/>
+          </a:solidFill>
+          <a:ln>
+            <a:noFill/>
+          </a:ln>
+        </p:spPr>
+        <p:style>
+          <a:lnRef idx="1">
+            <a:schemeClr val="accent1"/>
+          </a:lnRef>
+          <a:fillRef idx="3">
+            <a:schemeClr val="accent1"/>
+          </a:fillRef>
+          <a:effectRef idx="2">
+            <a:schemeClr val="accent1"/>
+          </a:effectRef>
+          <a:fontRef idx="minor">
+            <a:schemeClr val="lt1"/>
+          </a:fontRef>
+        </p:style>
+        <p:txBody>
+          <a:bodyPr rtlCol="0" anchor="ctr"/>
+          <a:lstStyle/>
+          <a:p>
+            <a:pPr algn="ctr"/>
+          </a:p>
+        </p:txBody>
+      </p:sp>
+      <p:sp>
+        <p:nvSpPr>
+          <p:cNvPr id="22" name="TextBox 21"/>
+          <p:cNvSpPr txBox="1"/>
+          <p:nvPr/>
+        </p:nvSpPr>
+        <p:spPr>
+          <a:xfrm>
+            <a:off x="658368" y="7342631"/>
+            <a:ext cx="12344400" cy="621792"/>
+          </a:xfrm>
+          <a:prstGeom prst="rect">
+            <a:avLst/>
+          </a:prstGeom>
+          <a:noFill/>
+        </p:spPr>
+        <p:txBody>
+          <a:bodyPr wrap="square" lIns="0" rIns="0" tIns="0" bIns="0">
+            <a:spAutoFit/>
+          </a:bodyPr>
+          <a:lstStyle/>
+          <a:p>
+            <a:pPr>
+              <a:spcBef>
+                <a:spcPts val="0"/>
+              </a:spcBef>
+              <a:spcAft>
+                <a:spcPts val="900"/>
+              </a:spcAft>
+              <a:defRPr sz="1200" b="0">
+                <a:solidFill>
+                  <a:srgbClr val="AFBDC0"/>
+                </a:solidFill>
+                <a:latin typeface="Noto Sans"/>
+              </a:defRPr>
+            </a:pPr>
+            <a:r>
+              <a:t>OR03: масса и CG сверены с CAD, сохранённая модель повторно открыта и пересчитана. Физической валидации нет.</a:t>
+            </a:r>
+          </a:p>
+        </p:txBody>
+      </p:sp>
+      <p:sp>
+        <p:nvSpPr>
+          <p:cNvPr id="23" name="TextBox 22"/>
+          <p:cNvSpPr txBox="1"/>
+          <p:nvPr/>
+        </p:nvSpPr>
+        <p:spPr>
+          <a:xfrm>
+            <a:off x="13121640" y="7507224"/>
+            <a:ext cx="914400" cy="365760"/>
+          </a:xfrm>
+          <a:prstGeom prst="rect">
+            <a:avLst/>
+          </a:prstGeom>
+          <a:noFill/>
+        </p:spPr>
+        <p:txBody>
+          <a:bodyPr wrap="square" lIns="0" rIns="0" tIns="0" bIns="0">
+            <a:spAutoFit/>
+          </a:bodyPr>
+          <a:lstStyle/>
+          <a:p>
+            <a:pPr>
+              <a:spcBef>
+                <a:spcPts val="0"/>
+              </a:spcBef>
+              <a:spcAft>
+                <a:spcPts val="900"/>
+              </a:spcAft>
+              <a:defRPr sz="1100" b="0">
+                <a:solidFill>
+                  <a:srgbClr val="FF793F"/>
+                </a:solidFill>
+                <a:latin typeface="Noto Sans"/>
+              </a:defRPr>
+            </a:pPr>
+            <a:r>
+              <a:t>24 / 25</a:t>
+            </a:r>
+          </a:p>
+        </p:txBody>
+      </p:sp>
+      <p:sp>
+        <p:nvSpPr>
+          <p:cNvPr id="24" name="Rectangle 23"/>
+          <p:cNvSpPr/>
+          <p:nvPr/>
+        </p:nvSpPr>
+        <p:spPr>
+          <a:xfrm>
+            <a:off x="0" y="8183879"/>
+            <a:ext cx="14045184" cy="45720"/>
+          </a:xfrm>
+          <a:prstGeom prst="rect">
+            <a:avLst/>
+          </a:prstGeom>
+          <a:solidFill>
+            <a:srgbClr val="FF793F"/>
+          </a:solidFill>
+          <a:ln>
+            <a:noFill/>
+          </a:ln>
+        </p:spPr>
+        <p:style>
+          <a:lnRef idx="1">
+            <a:schemeClr val="accent1"/>
+          </a:lnRef>
+          <a:fillRef idx="3">
+            <a:schemeClr val="accent1"/>
+          </a:fillRef>
+          <a:effectRef idx="2">
+            <a:schemeClr val="accent1"/>
+          </a:effectRef>
+          <a:fontRef idx="minor">
+            <a:schemeClr val="lt1"/>
+          </a:fontRef>
+        </p:style>
+        <p:txBody>
+          <a:bodyPr rtlCol="0" anchor="ctr"/>
+          <a:lstStyle/>
+          <a:p>
+            <a:pPr algn="ctr"/>
+          </a:p>
+        </p:txBody>
+      </p:sp>
+      <p:sp>
+        <p:nvSpPr>
+          <p:cNvPr id="25" name="Rectangle 24"/>
+          <p:cNvSpPr/>
+          <p:nvPr/>
+        </p:nvSpPr>
+        <p:spPr>
+          <a:xfrm>
+            <a:off x="658368" y="2743200"/>
+            <a:ext cx="4279392" cy="3511296"/>
+          </a:xfrm>
+          <a:prstGeom prst="rect">
+            <a:avLst/>
+          </a:prstGeom>
+          <a:solidFill>
+            <a:srgbClr val="1A2427"/>
+          </a:solidFill>
+          <a:ln>
+            <a:noFill/>
+          </a:ln>
+        </p:spPr>
+        <p:style>
+          <a:lnRef idx="1">
+            <a:schemeClr val="accent1"/>
+          </a:lnRef>
+          <a:fillRef idx="3">
+            <a:schemeClr val="accent1"/>
+          </a:fillRef>
+          <a:effectRef idx="2">
+            <a:schemeClr val="accent1"/>
+          </a:effectRef>
+          <a:fontRef idx="minor">
+            <a:schemeClr val="lt1"/>
+          </a:fontRef>
+        </p:style>
+        <p:txBody>
+          <a:bodyPr rtlCol="0" anchor="ctr"/>
+          <a:lstStyle/>
+          <a:p>
+            <a:pPr algn="ctr"/>
+          </a:p>
+        </p:txBody>
+      </p:sp>
+      <p:sp>
+        <p:nvSpPr>
+          <p:cNvPr id="26" name="TextBox 25"/>
+          <p:cNvSpPr txBox="1"/>
+          <p:nvPr/>
+        </p:nvSpPr>
+        <p:spPr>
+          <a:xfrm>
+            <a:off x="914400" y="3090672"/>
+            <a:ext cx="3767328" cy="1143000"/>
+          </a:xfrm>
+          <a:prstGeom prst="rect">
+            <a:avLst/>
+          </a:prstGeom>
+          <a:noFill/>
+        </p:spPr>
+        <p:txBody>
+          <a:bodyPr wrap="square" lIns="0" rIns="0" tIns="0" bIns="0">
+            <a:spAutoFit/>
+          </a:bodyPr>
+          <a:lstStyle/>
+          <a:p>
+            <a:pPr>
+              <a:spcBef>
+                <a:spcPts val="0"/>
+              </a:spcBef>
+              <a:spcAft>
+                <a:spcPts val="900"/>
+              </a:spcAft>
+              <a:defRPr sz="4800" b="1">
+                <a:solidFill>
+                  <a:srgbClr val="FF793F"/>
+                </a:solidFill>
+                <a:latin typeface="Noto Sans"/>
+              </a:defRPr>
+            </a:pPr>
+            <a:r>
+              <a:t>5,932</a:t>
+            </a:r>
+          </a:p>
+        </p:txBody>
+      </p:sp>
+      <p:sp>
+        <p:nvSpPr>
+          <p:cNvPr id="27" name="TextBox 26"/>
+          <p:cNvSpPr txBox="1"/>
+          <p:nvPr/>
+        </p:nvSpPr>
+        <p:spPr>
+          <a:xfrm>
+            <a:off x="914400" y="4480560"/>
+            <a:ext cx="3767328" cy="594360"/>
+          </a:xfrm>
+          <a:prstGeom prst="rect">
+            <a:avLst/>
+          </a:prstGeom>
+          <a:noFill/>
+        </p:spPr>
+        <p:txBody>
+          <a:bodyPr wrap="square" lIns="0" rIns="0" tIns="0" bIns="0">
+            <a:spAutoFit/>
+          </a:bodyPr>
+          <a:lstStyle/>
+          <a:p>
+            <a:pPr>
+              <a:spcBef>
+                <a:spcPts val="0"/>
+              </a:spcBef>
+              <a:spcAft>
+                <a:spcPts val="900"/>
+              </a:spcAft>
+              <a:defRPr sz="2300" b="1">
+                <a:solidFill>
+                  <a:srgbClr val="F4F1E9"/>
+                </a:solidFill>
+                <a:latin typeface="Noto Sans"/>
+              </a:defRPr>
+            </a:pPr>
+            <a:r>
+              <a:t>кг на старте</a:t>
+            </a:r>
+          </a:p>
+        </p:txBody>
+      </p:sp>
+      <p:sp>
+        <p:nvSpPr>
+          <p:cNvPr id="28" name="TextBox 27"/>
+          <p:cNvSpPr txBox="1"/>
+          <p:nvPr/>
+        </p:nvSpPr>
+        <p:spPr>
+          <a:xfrm>
+            <a:off x="914400" y="5257800"/>
+            <a:ext cx="3767328" cy="822960"/>
+          </a:xfrm>
+          <a:prstGeom prst="rect">
+            <a:avLst/>
+          </a:prstGeom>
+          <a:noFill/>
+        </p:spPr>
+        <p:txBody>
+          <a:bodyPr wrap="square" lIns="0" rIns="0" tIns="0" bIns="0">
+            <a:spAutoFit/>
+          </a:bodyPr>
+          <a:lstStyle/>
+          <a:p>
+            <a:pPr>
+              <a:spcBef>
+                <a:spcPts val="0"/>
+              </a:spcBef>
+              <a:spcAft>
+                <a:spcPts val="900"/>
+              </a:spcAft>
+              <a:defRPr sz="1800" b="0">
+                <a:solidFill>
+                  <a:srgbClr val="AFBDC0"/>
+                </a:solidFill>
+                <a:latin typeface="Noto Sans"/>
+              </a:defRPr>
+            </a:pPr>
+            <a:r>
+              <a:t>Макет 1,5 кг; +144,7 г к A04.</a:t>
+            </a:r>
+          </a:p>
+        </p:txBody>
+      </p:sp>
+      <p:sp>
+        <p:nvSpPr>
+          <p:cNvPr id="29" name="Rectangle 28"/>
+          <p:cNvSpPr/>
+          <p:nvPr/>
+        </p:nvSpPr>
+        <p:spPr>
+          <a:xfrm>
+            <a:off x="5175504" y="2743200"/>
+            <a:ext cx="4279392" cy="3511296"/>
+          </a:xfrm>
+          <a:prstGeom prst="rect">
+            <a:avLst/>
+          </a:prstGeom>
+          <a:solidFill>
+            <a:srgbClr val="1A2427"/>
+          </a:solidFill>
+          <a:ln>
+            <a:noFill/>
+          </a:ln>
+        </p:spPr>
+        <p:style>
+          <a:lnRef idx="1">
+            <a:schemeClr val="accent1"/>
+          </a:lnRef>
+          <a:fillRef idx="3">
+            <a:schemeClr val="accent1"/>
+          </a:fillRef>
+          <a:effectRef idx="2">
+            <a:schemeClr val="accent1"/>
+          </a:effectRef>
+          <a:fontRef idx="minor">
+            <a:schemeClr val="lt1"/>
+          </a:fontRef>
+        </p:style>
+        <p:txBody>
+          <a:bodyPr rtlCol="0" anchor="ctr"/>
+          <a:lstStyle/>
+          <a:p>
+            <a:pPr algn="ctr"/>
+          </a:p>
+        </p:txBody>
+      </p:sp>
+      <p:sp>
+        <p:nvSpPr>
+          <p:cNvPr id="30" name="TextBox 29"/>
+          <p:cNvSpPr txBox="1"/>
+          <p:nvPr/>
+        </p:nvSpPr>
+        <p:spPr>
+          <a:xfrm>
+            <a:off x="5431536" y="3090672"/>
+            <a:ext cx="3767328" cy="1143000"/>
+          </a:xfrm>
+          <a:prstGeom prst="rect">
+            <a:avLst/>
+          </a:prstGeom>
+          <a:noFill/>
+        </p:spPr>
+        <p:txBody>
+          <a:bodyPr wrap="square" lIns="0" rIns="0" tIns="0" bIns="0">
+            <a:spAutoFit/>
+          </a:bodyPr>
+          <a:lstStyle/>
+          <a:p>
+            <a:pPr>
+              <a:spcBef>
+                <a:spcPts val="0"/>
+              </a:spcBef>
+              <a:spcAft>
+                <a:spcPts val="900"/>
+              </a:spcAft>
+              <a:defRPr sz="4800" b="1">
+                <a:solidFill>
+                  <a:srgbClr val="FF793F"/>
+                </a:solidFill>
+                <a:latin typeface="Noto Sans"/>
+              </a:defRPr>
+            </a:pPr>
+            <a:r>
+              <a:t>1488</a:t>
+            </a:r>
+          </a:p>
+        </p:txBody>
+      </p:sp>
+      <p:sp>
+        <p:nvSpPr>
+          <p:cNvPr id="31" name="TextBox 30"/>
+          <p:cNvSpPr txBox="1"/>
+          <p:nvPr/>
+        </p:nvSpPr>
+        <p:spPr>
+          <a:xfrm>
+            <a:off x="5431536" y="4480560"/>
+            <a:ext cx="3767328" cy="594360"/>
+          </a:xfrm>
+          <a:prstGeom prst="rect">
+            <a:avLst/>
+          </a:prstGeom>
+          <a:noFill/>
+        </p:spPr>
+        <p:txBody>
+          <a:bodyPr wrap="square" lIns="0" rIns="0" tIns="0" bIns="0">
+            <a:spAutoFit/>
+          </a:bodyPr>
+          <a:lstStyle/>
+          <a:p>
+            <a:pPr>
+              <a:spcBef>
+                <a:spcPts val="0"/>
+              </a:spcBef>
+              <a:spcAft>
+                <a:spcPts val="900"/>
+              </a:spcAft>
+              <a:defRPr sz="2300" b="1">
+                <a:solidFill>
+                  <a:srgbClr val="F4F1E9"/>
+                </a:solidFill>
+                <a:latin typeface="Noto Sans"/>
+              </a:defRPr>
+            </a:pPr>
+            <a:r>
+              <a:t>м над стартом</a:t>
+            </a:r>
+          </a:p>
+        </p:txBody>
+      </p:sp>
+      <p:sp>
+        <p:nvSpPr>
+          <p:cNvPr id="32" name="TextBox 31"/>
+          <p:cNvSpPr txBox="1"/>
+          <p:nvPr/>
+        </p:nvSpPr>
+        <p:spPr>
+          <a:xfrm>
+            <a:off x="5431536" y="5257800"/>
+            <a:ext cx="3767328" cy="822960"/>
+          </a:xfrm>
+          <a:prstGeom prst="rect">
+            <a:avLst/>
+          </a:prstGeom>
+          <a:noFill/>
+        </p:spPr>
+        <p:txBody>
+          <a:bodyPr wrap="square" lIns="0" rIns="0" tIns="0" bIns="0">
+            <a:spAutoFit/>
+          </a:bodyPr>
+          <a:lstStyle/>
+          <a:p>
+            <a:pPr>
+              <a:spcBef>
+                <a:spcPts val="0"/>
+              </a:spcBef>
+              <a:spcAft>
+                <a:spcPts val="900"/>
+              </a:spcAft>
+              <a:defRPr sz="1800" b="0">
+                <a:solidFill>
+                  <a:srgbClr val="AFBDC0"/>
+                </a:solidFill>
+                <a:latin typeface="Noto Sans"/>
+              </a:defRPr>
+            </a:pPr>
+            <a:r>
+              <a:t>Тестовый K535W, штиль, направляющая 4 м.</a:t>
+            </a:r>
+          </a:p>
+        </p:txBody>
+      </p:sp>
+      <p:sp>
+        <p:nvSpPr>
+          <p:cNvPr id="33" name="Rectangle 32"/>
+          <p:cNvSpPr/>
+          <p:nvPr/>
+        </p:nvSpPr>
+        <p:spPr>
+          <a:xfrm>
+            <a:off x="9692640" y="2743200"/>
+            <a:ext cx="4279392" cy="3511296"/>
+          </a:xfrm>
+          <a:prstGeom prst="rect">
+            <a:avLst/>
+          </a:prstGeom>
+          <a:solidFill>
+            <a:srgbClr val="1A2427"/>
+          </a:solidFill>
+          <a:ln>
+            <a:noFill/>
+          </a:ln>
+        </p:spPr>
+        <p:style>
+          <a:lnRef idx="1">
+            <a:schemeClr val="accent1"/>
+          </a:lnRef>
+          <a:fillRef idx="3">
+            <a:schemeClr val="accent1"/>
+          </a:fillRef>
+          <a:effectRef idx="2">
+            <a:schemeClr val="accent1"/>
+          </a:effectRef>
+          <a:fontRef idx="minor">
+            <a:schemeClr val="lt1"/>
+          </a:fontRef>
+        </p:style>
+        <p:txBody>
+          <a:bodyPr rtlCol="0" anchor="ctr"/>
+          <a:lstStyle/>
+          <a:p>
+            <a:pPr algn="ctr"/>
+          </a:p>
+        </p:txBody>
+      </p:sp>
+      <p:sp>
+        <p:nvSpPr>
+          <p:cNvPr id="34" name="TextBox 33"/>
+          <p:cNvSpPr txBox="1"/>
+          <p:nvPr/>
+        </p:nvSpPr>
+        <p:spPr>
+          <a:xfrm>
+            <a:off x="9948672" y="3090672"/>
+            <a:ext cx="3767328" cy="1143000"/>
+          </a:xfrm>
+          <a:prstGeom prst="rect">
+            <a:avLst/>
+          </a:prstGeom>
+          <a:noFill/>
+        </p:spPr>
+        <p:txBody>
+          <a:bodyPr wrap="square" lIns="0" rIns="0" tIns="0" bIns="0">
+            <a:spAutoFit/>
+          </a:bodyPr>
+          <a:lstStyle/>
+          <a:p>
+            <a:pPr>
+              <a:spcBef>
+                <a:spcPts val="0"/>
+              </a:spcBef>
+              <a:spcAft>
+                <a:spcPts val="900"/>
+              </a:spcAft>
+              <a:defRPr sz="4800" b="1">
+                <a:solidFill>
+                  <a:srgbClr val="FF793F"/>
+                </a:solidFill>
+                <a:latin typeface="Noto Sans"/>
+              </a:defRPr>
+            </a:pPr>
+            <a:r>
+              <a:t>25,286</a:t>
+            </a:r>
+          </a:p>
+        </p:txBody>
+      </p:sp>
+      <p:sp>
+        <p:nvSpPr>
+          <p:cNvPr id="35" name="TextBox 34"/>
+          <p:cNvSpPr txBox="1"/>
+          <p:nvPr/>
+        </p:nvSpPr>
+        <p:spPr>
+          <a:xfrm>
+            <a:off x="9948672" y="4480560"/>
+            <a:ext cx="3767328" cy="594360"/>
+          </a:xfrm>
+          <a:prstGeom prst="rect">
+            <a:avLst/>
+          </a:prstGeom>
+          <a:noFill/>
+        </p:spPr>
+        <p:txBody>
+          <a:bodyPr wrap="square" lIns="0" rIns="0" tIns="0" bIns="0">
+            <a:spAutoFit/>
+          </a:bodyPr>
+          <a:lstStyle/>
+          <a:p>
+            <a:pPr>
+              <a:spcBef>
+                <a:spcPts val="0"/>
+              </a:spcBef>
+              <a:spcAft>
+                <a:spcPts val="900"/>
+              </a:spcAft>
+              <a:defRPr sz="2300" b="1">
+                <a:solidFill>
+                  <a:srgbClr val="F4F1E9"/>
+                </a:solidFill>
+                <a:latin typeface="Noto Sans"/>
+              </a:defRPr>
+            </a:pPr>
+            <a:r>
+              <a:t>кПа / max q</a:t>
+            </a:r>
+          </a:p>
+        </p:txBody>
+      </p:sp>
+      <p:sp>
+        <p:nvSpPr>
+          <p:cNvPr id="36" name="TextBox 35"/>
+          <p:cNvSpPr txBox="1"/>
+          <p:nvPr/>
+        </p:nvSpPr>
+        <p:spPr>
+          <a:xfrm>
+            <a:off x="9948672" y="5257800"/>
+            <a:ext cx="3767328" cy="822960"/>
+          </a:xfrm>
+          <a:prstGeom prst="rect">
+            <a:avLst/>
+          </a:prstGeom>
+          <a:noFill/>
+        </p:spPr>
+        <p:txBody>
+          <a:bodyPr wrap="square" lIns="0" rIns="0" tIns="0" bIns="0">
+            <a:spAutoFit/>
+          </a:bodyPr>
+          <a:lstStyle/>
+          <a:p>
+            <a:pPr>
+              <a:spcBef>
+                <a:spcPts val="0"/>
+              </a:spcBef>
+              <a:spcAft>
+                <a:spcPts val="900"/>
+              </a:spcAft>
+              <a:defRPr sz="1800" b="0">
+                <a:solidFill>
+                  <a:srgbClr val="AFBDC0"/>
+                </a:solidFill>
+                <a:latin typeface="Noto Sans"/>
+              </a:defRPr>
+            </a:pPr>
+            <a:r>
+              <a:t>Расчёт до апогея; без спасения и посадки.</a:t>
+            </a:r>
+          </a:p>
+        </p:txBody>
+      </p:sp>
+    </p:spTree>
+  </p:cSld>
+  <p:clrMapOvr>
+    <a:masterClrMapping/>
+  </p:clrMapOvr>
+</p:sld>
+</file>
+
+<file path=ppt/slides/slide25.xml><?xml version="1.0" encoding="utf-8"?>
+<p:sld xmlns:a="http://schemas.openxmlformats.org/drawingml/2006/main" xmlns:p="http://schemas.openxmlformats.org/presentationml/2006/main" xmlns:r="http://schemas.openxmlformats.org/officeDocument/2006/relationships">
+  <p:cSld>
+    <p:bg>
+      <p:bgPr>
+        <a:solidFill>
+          <a:srgbClr val="101719"/>
+        </a:solidFill>
+        <a:effectLst/>
+      </p:bgPr>
+    </p:bg>
+    <p:spTree>
+      <p:nvGrpSpPr>
+        <p:cNvPr id="1" name=""/>
+        <p:cNvGrpSpPr/>
+        <p:nvPr/>
+      </p:nvGrpSpPr>
+      <p:grpSpPr/>
+      <p:sp>
+        <p:nvSpPr>
+          <p:cNvPr id="2" name="Rectangle 1"/>
+          <p:cNvSpPr/>
+          <p:nvPr/>
+        </p:nvSpPr>
+        <p:spPr>
+          <a:xfrm>
+            <a:off x="914400" y="0"/>
+            <a:ext cx="5486" cy="8229600"/>
+          </a:xfrm>
+          <a:prstGeom prst="rect">
+            <a:avLst/>
+          </a:prstGeom>
+          <a:solidFill>
+            <a:srgbClr val="182124"/>
+          </a:solidFill>
+          <a:ln>
+            <a:noFill/>
+          </a:ln>
+        </p:spPr>
+        <p:style>
+          <a:lnRef idx="1">
+            <a:schemeClr val="accent1"/>
+          </a:lnRef>
+          <a:fillRef idx="3">
+            <a:schemeClr val="accent1"/>
+          </a:fillRef>
+          <a:effectRef idx="2">
+            <a:schemeClr val="accent1"/>
+          </a:effectRef>
+          <a:fontRef idx="minor">
+            <a:schemeClr val="lt1"/>
+          </a:fontRef>
+        </p:style>
+        <p:txBody>
+          <a:bodyPr rtlCol="0" anchor="ctr"/>
+          <a:lstStyle/>
+          <a:p>
+            <a:pPr algn="ctr"/>
+          </a:p>
+        </p:txBody>
+      </p:sp>
+      <p:sp>
+        <p:nvSpPr>
+          <p:cNvPr id="3" name="Rectangle 2"/>
+          <p:cNvSpPr/>
+          <p:nvPr/>
+        </p:nvSpPr>
+        <p:spPr>
+          <a:xfrm>
+            <a:off x="1828800" y="0"/>
+            <a:ext cx="5486" cy="8229600"/>
+          </a:xfrm>
+          <a:prstGeom prst="rect">
+            <a:avLst/>
+          </a:prstGeom>
+          <a:solidFill>
+            <a:srgbClr val="182124"/>
+          </a:solidFill>
+          <a:ln>
+            <a:noFill/>
+          </a:ln>
+        </p:spPr>
+        <p:style>
+          <a:lnRef idx="1">
+            <a:schemeClr val="accent1"/>
+          </a:lnRef>
+          <a:fillRef idx="3">
+            <a:schemeClr val="accent1"/>
+          </a:fillRef>
+          <a:effectRef idx="2">
+            <a:schemeClr val="accent1"/>
+          </a:effectRef>
+          <a:fontRef idx="minor">
+            <a:schemeClr val="lt1"/>
+          </a:fontRef>
+        </p:style>
+        <p:txBody>
+          <a:bodyPr rtlCol="0" anchor="ctr"/>
+          <a:lstStyle/>
+          <a:p>
+            <a:pPr algn="ctr"/>
+          </a:p>
+        </p:txBody>
+      </p:sp>
+      <p:sp>
+        <p:nvSpPr>
+          <p:cNvPr id="4" name="Rectangle 3"/>
+          <p:cNvSpPr/>
+          <p:nvPr/>
+        </p:nvSpPr>
+        <p:spPr>
+          <a:xfrm>
+            <a:off x="2743200" y="0"/>
+            <a:ext cx="5486" cy="8229600"/>
+          </a:xfrm>
+          <a:prstGeom prst="rect">
+            <a:avLst/>
+          </a:prstGeom>
+          <a:solidFill>
+            <a:srgbClr val="182124"/>
+          </a:solidFill>
+          <a:ln>
+            <a:noFill/>
+          </a:ln>
+        </p:spPr>
+        <p:style>
+          <a:lnRef idx="1">
+            <a:schemeClr val="accent1"/>
+          </a:lnRef>
+          <a:fillRef idx="3">
+            <a:schemeClr val="accent1"/>
+          </a:fillRef>
+          <a:effectRef idx="2">
+            <a:schemeClr val="accent1"/>
+          </a:effectRef>
+          <a:fontRef idx="minor">
+            <a:schemeClr val="lt1"/>
+          </a:fontRef>
+        </p:style>
+        <p:txBody>
+          <a:bodyPr rtlCol="0" anchor="ctr"/>
+          <a:lstStyle/>
+          <a:p>
+            <a:pPr algn="ctr"/>
+          </a:p>
+        </p:txBody>
+      </p:sp>
+      <p:sp>
+        <p:nvSpPr>
+          <p:cNvPr id="5" name="Rectangle 4"/>
+          <p:cNvSpPr/>
+          <p:nvPr/>
+        </p:nvSpPr>
+        <p:spPr>
+          <a:xfrm>
+            <a:off x="3657600" y="0"/>
+            <a:ext cx="5486" cy="8229600"/>
+          </a:xfrm>
+          <a:prstGeom prst="rect">
+            <a:avLst/>
+          </a:prstGeom>
+          <a:solidFill>
+            <a:srgbClr val="182124"/>
+          </a:solidFill>
+          <a:ln>
+            <a:noFill/>
+          </a:ln>
+        </p:spPr>
+        <p:style>
+          <a:lnRef idx="1">
+            <a:schemeClr val="accent1"/>
+          </a:lnRef>
+          <a:fillRef idx="3">
+            <a:schemeClr val="accent1"/>
+          </a:fillRef>
+          <a:effectRef idx="2">
+            <a:schemeClr val="accent1"/>
+          </a:effectRef>
+          <a:fontRef idx="minor">
+            <a:schemeClr val="lt1"/>
+          </a:fontRef>
+        </p:style>
+        <p:txBody>
+          <a:bodyPr rtlCol="0" anchor="ctr"/>
+          <a:lstStyle/>
+          <a:p>
+            <a:pPr algn="ctr"/>
+          </a:p>
+        </p:txBody>
+      </p:sp>
+      <p:sp>
+        <p:nvSpPr>
+          <p:cNvPr id="6" name="Rectangle 5"/>
+          <p:cNvSpPr/>
+          <p:nvPr/>
+        </p:nvSpPr>
+        <p:spPr>
+          <a:xfrm>
+            <a:off x="4572000" y="0"/>
+            <a:ext cx="5486" cy="8229600"/>
+          </a:xfrm>
+          <a:prstGeom prst="rect">
+            <a:avLst/>
+          </a:prstGeom>
+          <a:solidFill>
+            <a:srgbClr val="182124"/>
+          </a:solidFill>
+          <a:ln>
+            <a:noFill/>
+          </a:ln>
+        </p:spPr>
+        <p:style>
+          <a:lnRef idx="1">
+            <a:schemeClr val="accent1"/>
+          </a:lnRef>
+          <a:fillRef idx="3">
+            <a:schemeClr val="accent1"/>
+          </a:fillRef>
+          <a:effectRef idx="2">
+            <a:schemeClr val="accent1"/>
+          </a:effectRef>
+          <a:fontRef idx="minor">
+            <a:schemeClr val="lt1"/>
+          </a:fontRef>
+        </p:style>
+        <p:txBody>
+          <a:bodyPr rtlCol="0" anchor="ctr"/>
+          <a:lstStyle/>
+          <a:p>
+            <a:pPr algn="ctr"/>
+          </a:p>
+        </p:txBody>
+      </p:sp>
+      <p:sp>
+        <p:nvSpPr>
+          <p:cNvPr id="7" name="Rectangle 6"/>
+          <p:cNvSpPr/>
+          <p:nvPr/>
+        </p:nvSpPr>
+        <p:spPr>
+          <a:xfrm>
+            <a:off x="5486400" y="0"/>
+            <a:ext cx="5486" cy="8229600"/>
+          </a:xfrm>
+          <a:prstGeom prst="rect">
+            <a:avLst/>
+          </a:prstGeom>
+          <a:solidFill>
+            <a:srgbClr val="182124"/>
+          </a:solidFill>
+          <a:ln>
+            <a:noFill/>
+          </a:ln>
+        </p:spPr>
+        <p:style>
+          <a:lnRef idx="1">
+            <a:schemeClr val="accent1"/>
+          </a:lnRef>
+          <a:fillRef idx="3">
+            <a:schemeClr val="accent1"/>
+          </a:fillRef>
+          <a:effectRef idx="2">
+            <a:schemeClr val="accent1"/>
+          </a:effectRef>
+          <a:fontRef idx="minor">
+            <a:schemeClr val="lt1"/>
+          </a:fontRef>
+        </p:style>
+        <p:txBody>
+          <a:bodyPr rtlCol="0" anchor="ctr"/>
+          <a:lstStyle/>
+          <a:p>
+            <a:pPr algn="ctr"/>
+          </a:p>
+        </p:txBody>
+      </p:sp>
+      <p:sp>
+        <p:nvSpPr>
+          <p:cNvPr id="8" name="Rectangle 7"/>
+          <p:cNvSpPr/>
+          <p:nvPr/>
+        </p:nvSpPr>
+        <p:spPr>
+          <a:xfrm>
+            <a:off x="6400800" y="0"/>
+            <a:ext cx="5486" cy="8229600"/>
+          </a:xfrm>
+          <a:prstGeom prst="rect">
+            <a:avLst/>
+          </a:prstGeom>
+          <a:solidFill>
+            <a:srgbClr val="182124"/>
+          </a:solidFill>
+          <a:ln>
+            <a:noFill/>
+          </a:ln>
+        </p:spPr>
+        <p:style>
+          <a:lnRef idx="1">
+            <a:schemeClr val="accent1"/>
+          </a:lnRef>
+          <a:fillRef idx="3">
+            <a:schemeClr val="accent1"/>
+          </a:fillRef>
+          <a:effectRef idx="2">
+            <a:schemeClr val="accent1"/>
+          </a:effectRef>
+          <a:fontRef idx="minor">
+            <a:schemeClr val="lt1"/>
+          </a:fontRef>
+        </p:style>
+        <p:txBody>
+          <a:bodyPr rtlCol="0" anchor="ctr"/>
+          <a:lstStyle/>
+          <a:p>
+            <a:pPr algn="ctr"/>
+          </a:p>
+        </p:txBody>
+      </p:sp>
+      <p:sp>
+        <p:nvSpPr>
+          <p:cNvPr id="9" name="Rectangle 8"/>
+          <p:cNvSpPr/>
+          <p:nvPr/>
+        </p:nvSpPr>
+        <p:spPr>
+          <a:xfrm>
+            <a:off x="7315200" y="0"/>
+            <a:ext cx="5486" cy="8229600"/>
+          </a:xfrm>
+          <a:prstGeom prst="rect">
+            <a:avLst/>
+          </a:prstGeom>
+          <a:solidFill>
+            <a:srgbClr val="182124"/>
+          </a:solidFill>
+          <a:ln>
+            <a:noFill/>
+          </a:ln>
+        </p:spPr>
+        <p:style>
+          <a:lnRef idx="1">
+            <a:schemeClr val="accent1"/>
+          </a:lnRef>
+          <a:fillRef idx="3">
+            <a:schemeClr val="accent1"/>
+          </a:fillRef>
+          <a:effectRef idx="2">
+            <a:schemeClr val="accent1"/>
+          </a:effectRef>
+          <a:fontRef idx="minor">
+            <a:schemeClr val="lt1"/>
+          </a:fontRef>
+        </p:style>
+        <p:txBody>
+          <a:bodyPr rtlCol="0" anchor="ctr"/>
+          <a:lstStyle/>
+          <a:p>
+            <a:pPr algn="ctr"/>
+          </a:p>
+        </p:txBody>
+      </p:sp>
+      <p:sp>
+        <p:nvSpPr>
+          <p:cNvPr id="10" name="Rectangle 9"/>
+          <p:cNvSpPr/>
+          <p:nvPr/>
+        </p:nvSpPr>
+        <p:spPr>
+          <a:xfrm>
+            <a:off x="8229600" y="0"/>
+            <a:ext cx="5486" cy="8229600"/>
+          </a:xfrm>
+          <a:prstGeom prst="rect">
+            <a:avLst/>
+          </a:prstGeom>
+          <a:solidFill>
+            <a:srgbClr val="182124"/>
+          </a:solidFill>
+          <a:ln>
+            <a:noFill/>
+          </a:ln>
+        </p:spPr>
+        <p:style>
+          <a:lnRef idx="1">
+            <a:schemeClr val="accent1"/>
+          </a:lnRef>
+          <a:fillRef idx="3">
+            <a:schemeClr val="accent1"/>
+          </a:fillRef>
+          <a:effectRef idx="2">
+            <a:schemeClr val="accent1"/>
+          </a:effectRef>
+          <a:fontRef idx="minor">
+            <a:schemeClr val="lt1"/>
+          </a:fontRef>
+        </p:style>
+        <p:txBody>
+          <a:bodyPr rtlCol="0" anchor="ctr"/>
+          <a:lstStyle/>
+          <a:p>
+            <a:pPr algn="ctr"/>
+          </a:p>
+        </p:txBody>
+      </p:sp>
+      <p:sp>
+        <p:nvSpPr>
+          <p:cNvPr id="11" name="Rectangle 10"/>
+          <p:cNvSpPr/>
+          <p:nvPr/>
+        </p:nvSpPr>
+        <p:spPr>
+          <a:xfrm>
+            <a:off x="9144000" y="0"/>
+            <a:ext cx="5486" cy="8229600"/>
+          </a:xfrm>
+          <a:prstGeom prst="rect">
+            <a:avLst/>
+          </a:prstGeom>
+          <a:solidFill>
+            <a:srgbClr val="182124"/>
+          </a:solidFill>
+          <a:ln>
+            <a:noFill/>
+          </a:ln>
+        </p:spPr>
+        <p:style>
+          <a:lnRef idx="1">
+            <a:schemeClr val="accent1"/>
+          </a:lnRef>
+          <a:fillRef idx="3">
+            <a:schemeClr val="accent1"/>
+          </a:fillRef>
+          <a:effectRef idx="2">
+            <a:schemeClr val="accent1"/>
+          </a:effectRef>
+          <a:fontRef idx="minor">
+            <a:schemeClr val="lt1"/>
+          </a:fontRef>
+        </p:style>
+        <p:txBody>
+          <a:bodyPr rtlCol="0" anchor="ctr"/>
+          <a:lstStyle/>
+          <a:p>
+            <a:pPr algn="ctr"/>
+          </a:p>
+        </p:txBody>
+      </p:sp>
+      <p:sp>
+        <p:nvSpPr>
+          <p:cNvPr id="12" name="Rectangle 11"/>
+          <p:cNvSpPr/>
+          <p:nvPr/>
+        </p:nvSpPr>
+        <p:spPr>
+          <a:xfrm>
+            <a:off x="10058400" y="0"/>
+            <a:ext cx="5486" cy="8229600"/>
+          </a:xfrm>
+          <a:prstGeom prst="rect">
+            <a:avLst/>
+          </a:prstGeom>
+          <a:solidFill>
+            <a:srgbClr val="182124"/>
+          </a:solidFill>
+          <a:ln>
+            <a:noFill/>
+          </a:ln>
+        </p:spPr>
+        <p:style>
+          <a:lnRef idx="1">
+            <a:schemeClr val="accent1"/>
+          </a:lnRef>
+          <a:fillRef idx="3">
+            <a:schemeClr val="accent1"/>
+          </a:fillRef>
+          <a:effectRef idx="2">
+            <a:schemeClr val="accent1"/>
+          </a:effectRef>
+          <a:fontRef idx="minor">
+            <a:schemeClr val="lt1"/>
+          </a:fontRef>
+        </p:style>
+        <p:txBody>
+          <a:bodyPr rtlCol="0" anchor="ctr"/>
+          <a:lstStyle/>
+          <a:p>
+            <a:pPr algn="ctr"/>
+          </a:p>
+        </p:txBody>
+      </p:sp>
+      <p:sp>
+        <p:nvSpPr>
+          <p:cNvPr id="13" name="Rectangle 12"/>
+          <p:cNvSpPr/>
+          <p:nvPr/>
+        </p:nvSpPr>
+        <p:spPr>
+          <a:xfrm>
+            <a:off x="10972800" y="0"/>
+            <a:ext cx="5486" cy="8229600"/>
+          </a:xfrm>
+          <a:prstGeom prst="rect">
+            <a:avLst/>
+          </a:prstGeom>
+          <a:solidFill>
+            <a:srgbClr val="182124"/>
+          </a:solidFill>
+          <a:ln>
+            <a:noFill/>
+          </a:ln>
+        </p:spPr>
+        <p:style>
+          <a:lnRef idx="1">
+            <a:schemeClr val="accent1"/>
+          </a:lnRef>
+          <a:fillRef idx="3">
+            <a:schemeClr val="accent1"/>
+          </a:fillRef>
+          <a:effectRef idx="2">
+            <a:schemeClr val="accent1"/>
+          </a:effectRef>
+          <a:fontRef idx="minor">
+            <a:schemeClr val="lt1"/>
+          </a:fontRef>
+        </p:style>
+        <p:txBody>
+          <a:bodyPr rtlCol="0" anchor="ctr"/>
+          <a:lstStyle/>
+          <a:p>
+            <a:pPr algn="ctr"/>
+          </a:p>
+        </p:txBody>
+      </p:sp>
+      <p:sp>
+        <p:nvSpPr>
+          <p:cNvPr id="14" name="Rectangle 13"/>
+          <p:cNvSpPr/>
+          <p:nvPr/>
+        </p:nvSpPr>
+        <p:spPr>
+          <a:xfrm>
+            <a:off x="11887200" y="0"/>
+            <a:ext cx="5486" cy="8229600"/>
+          </a:xfrm>
+          <a:prstGeom prst="rect">
+            <a:avLst/>
+          </a:prstGeom>
+          <a:solidFill>
+            <a:srgbClr val="182124"/>
+          </a:solidFill>
+          <a:ln>
+            <a:noFill/>
+          </a:ln>
+        </p:spPr>
+        <p:style>
+          <a:lnRef idx="1">
+            <a:schemeClr val="accent1"/>
+          </a:lnRef>
+          <a:fillRef idx="3">
+            <a:schemeClr val="accent1"/>
+          </a:fillRef>
+          <a:effectRef idx="2">
+            <a:schemeClr val="accent1"/>
+          </a:effectRef>
+          <a:fontRef idx="minor">
+            <a:schemeClr val="lt1"/>
+          </a:fontRef>
+        </p:style>
+        <p:txBody>
+          <a:bodyPr rtlCol="0" anchor="ctr"/>
+          <a:lstStyle/>
+          <a:p>
+            <a:pPr algn="ctr"/>
+          </a:p>
+        </p:txBody>
+      </p:sp>
+      <p:sp>
+        <p:nvSpPr>
+          <p:cNvPr id="15" name="Rectangle 14"/>
+          <p:cNvSpPr/>
+          <p:nvPr/>
+        </p:nvSpPr>
+        <p:spPr>
+          <a:xfrm>
+            <a:off x="12801600" y="0"/>
+            <a:ext cx="5486" cy="8229600"/>
+          </a:xfrm>
+          <a:prstGeom prst="rect">
+            <a:avLst/>
+          </a:prstGeom>
+          <a:solidFill>
+            <a:srgbClr val="182124"/>
+          </a:solidFill>
+          <a:ln>
+            <a:noFill/>
+          </a:ln>
+        </p:spPr>
+        <p:style>
+          <a:lnRef idx="1">
+            <a:schemeClr val="accent1"/>
+          </a:lnRef>
+          <a:fillRef idx="3">
+            <a:schemeClr val="accent1"/>
+          </a:fillRef>
+          <a:effectRef idx="2">
+            <a:schemeClr val="accent1"/>
+          </a:effectRef>
+          <a:fontRef idx="minor">
+            <a:schemeClr val="lt1"/>
+          </a:fontRef>
+        </p:style>
+        <p:txBody>
+          <a:bodyPr rtlCol="0" anchor="ctr"/>
+          <a:lstStyle/>
+          <a:p>
+            <a:pPr algn="ctr"/>
+          </a:p>
+        </p:txBody>
+      </p:sp>
+      <p:sp>
+        <p:nvSpPr>
+          <p:cNvPr id="16" name="Rectangle 15"/>
+          <p:cNvSpPr/>
+          <p:nvPr/>
+        </p:nvSpPr>
+        <p:spPr>
+          <a:xfrm>
+            <a:off x="13716000" y="0"/>
+            <a:ext cx="5486" cy="8229600"/>
+          </a:xfrm>
+          <a:prstGeom prst="rect">
+            <a:avLst/>
+          </a:prstGeom>
+          <a:solidFill>
+            <a:srgbClr val="182124"/>
+          </a:solidFill>
+          <a:ln>
+            <a:noFill/>
+          </a:ln>
+        </p:spPr>
+        <p:style>
+          <a:lnRef idx="1">
+            <a:schemeClr val="accent1"/>
+          </a:lnRef>
+          <a:fillRef idx="3">
+            <a:schemeClr val="accent1"/>
+          </a:fillRef>
+          <a:effectRef idx="2">
+            <a:schemeClr val="accent1"/>
+          </a:effectRef>
+          <a:fontRef idx="minor">
+            <a:schemeClr val="lt1"/>
+          </a:fontRef>
+        </p:style>
+        <p:txBody>
+          <a:bodyPr rtlCol="0" anchor="ctr"/>
+          <a:lstStyle/>
+          <a:p>
+            <a:pPr algn="ctr"/>
+          </a:p>
+        </p:txBody>
+      </p:sp>
+      <p:sp>
+        <p:nvSpPr>
+          <p:cNvPr id="17" name="TextBox 16"/>
+          <p:cNvSpPr txBox="1"/>
+          <p:nvPr/>
+        </p:nvSpPr>
+        <p:spPr>
+          <a:xfrm>
+            <a:off x="658368" y="393192"/>
+            <a:ext cx="10972800" cy="274320"/>
+          </a:xfrm>
+          <a:prstGeom prst="rect">
+            <a:avLst/>
+          </a:prstGeom>
+          <a:noFill/>
+        </p:spPr>
+        <p:txBody>
+          <a:bodyPr wrap="square" lIns="0" rIns="0" tIns="0" bIns="0">
+            <a:spAutoFit/>
+          </a:bodyPr>
+          <a:lstStyle/>
+          <a:p>
+            <a:pPr>
+              <a:spcBef>
+                <a:spcPts val="0"/>
+              </a:spcBef>
+              <a:spcAft>
+                <a:spcPts val="900"/>
+              </a:spcAft>
+              <a:defRPr sz="1100" b="0">
+                <a:solidFill>
+                  <a:srgbClr val="AFBDC0"/>
+                </a:solidFill>
+                <a:latin typeface="Noto Sans"/>
+              </a:defRPr>
+            </a:pPr>
+            <a:r>
+              <a:t>ИСТОЧНИКИ</a:t>
+            </a:r>
+          </a:p>
+        </p:txBody>
+      </p:sp>
+      <p:sp>
+        <p:nvSpPr>
+          <p:cNvPr id="18" name="TextBox 17"/>
+          <p:cNvSpPr txBox="1"/>
+          <p:nvPr/>
+        </p:nvSpPr>
+        <p:spPr>
+          <a:xfrm>
+            <a:off x="12390120" y="393192"/>
+            <a:ext cx="1828800" cy="274320"/>
+          </a:xfrm>
+          <a:prstGeom prst="rect">
+            <a:avLst/>
+          </a:prstGeom>
+          <a:noFill/>
+        </p:spPr>
+        <p:txBody>
+          <a:bodyPr wrap="square" lIns="0" rIns="0" tIns="0" bIns="0">
+            <a:spAutoFit/>
+          </a:bodyPr>
+          <a:lstStyle/>
+          <a:p>
+            <a:pPr>
+              <a:spcBef>
+                <a:spcPts val="0"/>
+              </a:spcBef>
+              <a:spcAft>
+                <a:spcPts val="900"/>
+              </a:spcAft>
+              <a:defRPr sz="1100" b="1">
+                <a:solidFill>
+                  <a:srgbClr val="FF793F"/>
+                </a:solidFill>
+                <a:latin typeface="Noto Sans"/>
+              </a:defRPr>
+            </a:pPr>
+            <a:r>
+              <a:t>PLBP / SG1</a:t>
+            </a:r>
+          </a:p>
+        </p:txBody>
+      </p:sp>
+      <p:sp>
+        <p:nvSpPr>
+          <p:cNvPr id="19" name="Rectangle 18"/>
+          <p:cNvSpPr/>
+          <p:nvPr/>
+        </p:nvSpPr>
+        <p:spPr>
+          <a:xfrm>
+            <a:off x="658368" y="914400"/>
+            <a:ext cx="13313664" cy="10972"/>
+          </a:xfrm>
+          <a:prstGeom prst="rect">
+            <a:avLst/>
+          </a:prstGeom>
+          <a:solidFill>
+            <a:srgbClr val="354347"/>
+          </a:solidFill>
+          <a:ln>
+            <a:noFill/>
+          </a:ln>
+        </p:spPr>
+        <p:style>
+          <a:lnRef idx="1">
+            <a:schemeClr val="accent1"/>
+          </a:lnRef>
+          <a:fillRef idx="3">
+            <a:schemeClr val="accent1"/>
+          </a:fillRef>
+          <a:effectRef idx="2">
+            <a:schemeClr val="accent1"/>
+          </a:effectRef>
+          <a:fontRef idx="minor">
+            <a:schemeClr val="lt1"/>
+          </a:fontRef>
+        </p:style>
+        <p:txBody>
+          <a:bodyPr rtlCol="0" anchor="ctr"/>
+          <a:lstStyle/>
+          <a:p>
+            <a:pPr algn="ctr"/>
+          </a:p>
+        </p:txBody>
+      </p:sp>
+      <p:sp>
+        <p:nvSpPr>
+          <p:cNvPr id="20" name="TextBox 19"/>
+          <p:cNvSpPr txBox="1"/>
+          <p:nvPr/>
+        </p:nvSpPr>
+        <p:spPr>
+          <a:xfrm>
+            <a:off x="658368" y="1243584"/>
+            <a:ext cx="13213080" cy="1097280"/>
+          </a:xfrm>
+          <a:prstGeom prst="rect">
+            <a:avLst/>
+          </a:prstGeom>
+          <a:noFill/>
+        </p:spPr>
+        <p:txBody>
+          <a:bodyPr wrap="square" lIns="0" rIns="0" tIns="0" bIns="0">
+            <a:spAutoFit/>
+          </a:bodyPr>
+          <a:lstStyle/>
+          <a:p>
+            <a:pPr>
+              <a:spcBef>
+                <a:spcPts val="0"/>
+              </a:spcBef>
+              <a:spcAft>
+                <a:spcPts val="900"/>
+              </a:spcAft>
+              <a:defRPr sz="3700" b="1">
+                <a:solidFill>
+                  <a:srgbClr val="F4F1E9"/>
+                </a:solidFill>
+                <a:latin typeface="Noto Sans"/>
+              </a:defRPr>
+            </a:pPr>
+            <a:r>
               <a:t>Основания и допущения</a:t>
             </a:r>
           </a:p>
@@ -23109,7 +28482,7 @@
               </a:defRPr>
             </a:pPr>
             <a:r>
-              <a:t>21 / 21</a:t>
+              <a:t>25 / 25</a:t>
             </a:r>
           </a:p>
         </p:txBody>
@@ -24635,7 +30008,7 @@
               </a:defRPr>
             </a:pPr>
             <a:r>
-              <a:t>03 / 21</a:t>
+              <a:t>03 / 25</a:t>
             </a:r>
           </a:p>
         </p:txBody>
@@ -24649,7 +30022,7 @@
         <p:spPr>
           <a:xfrm>
             <a:off x="0" y="8183879"/>
-            <a:ext cx="2090057" cy="45720"/>
+            <a:ext cx="1755648" cy="45720"/>
           </a:xfrm>
           <a:prstGeom prst="rect">
             <a:avLst/>
@@ -26155,7 +31528,7 @@
               </a:defRPr>
             </a:pPr>
             <a:r>
-              <a:t>04 / 21</a:t>
+              <a:t>04 / 25</a:t>
             </a:r>
           </a:p>
         </p:txBody>
@@ -26169,7 +31542,7 @@
         <p:spPr>
           <a:xfrm>
             <a:off x="0" y="8183879"/>
-            <a:ext cx="2786742" cy="45720"/>
+            <a:ext cx="2340864" cy="45720"/>
           </a:xfrm>
           <a:prstGeom prst="rect">
             <a:avLst/>
@@ -27189,7 +32562,7 @@
               </a:defRPr>
             </a:pPr>
             <a:r>
-              <a:t>05 / 21</a:t>
+              <a:t>05 / 25</a:t>
             </a:r>
           </a:p>
         </p:txBody>
@@ -27203,7 +32576,7 @@
         <p:spPr>
           <a:xfrm>
             <a:off x="0" y="8183879"/>
-            <a:ext cx="3483428" cy="45720"/>
+            <a:ext cx="2926080" cy="45720"/>
           </a:xfrm>
           <a:prstGeom prst="rect">
             <a:avLst/>
@@ -28223,7 +33596,7 @@
               </a:defRPr>
             </a:pPr>
             <a:r>
-              <a:t>06 / 21</a:t>
+              <a:t>06 / 25</a:t>
             </a:r>
           </a:p>
         </p:txBody>
@@ -28237,7 +33610,7 @@
         <p:spPr>
           <a:xfrm>
             <a:off x="0" y="8183879"/>
-            <a:ext cx="4180114" cy="45720"/>
+            <a:ext cx="3511296" cy="45720"/>
           </a:xfrm>
           <a:prstGeom prst="rect">
             <a:avLst/>
@@ -29257,7 +34630,7 @@
               </a:defRPr>
             </a:pPr>
             <a:r>
-              <a:t>07 / 21</a:t>
+              <a:t>07 / 25</a:t>
             </a:r>
           </a:p>
         </p:txBody>
@@ -29271,7 +34644,7 @@
         <p:spPr>
           <a:xfrm>
             <a:off x="0" y="8183879"/>
-            <a:ext cx="4876800" cy="45720"/>
+            <a:ext cx="4096512" cy="45720"/>
           </a:xfrm>
           <a:prstGeom prst="rect">
             <a:avLst/>
@@ -30777,7 +36150,7 @@
               </a:defRPr>
             </a:pPr>
             <a:r>
-              <a:t>08 / 21</a:t>
+              <a:t>08 / 25</a:t>
             </a:r>
           </a:p>
         </p:txBody>
@@ -30791,7 +36164,7 @@
         <p:spPr>
           <a:xfrm>
             <a:off x="0" y="8183879"/>
-            <a:ext cx="5573485" cy="45720"/>
+            <a:ext cx="4681728" cy="45720"/>
           </a:xfrm>
           <a:prstGeom prst="rect">
             <a:avLst/>
@@ -31811,7 +37184,7 @@
               </a:defRPr>
             </a:pPr>
             <a:r>
-              <a:t>09 / 21</a:t>
+              <a:t>09 / 25</a:t>
             </a:r>
           </a:p>
         </p:txBody>
@@ -31825,7 +37198,7 @@
         <p:spPr>
           <a:xfrm>
             <a:off x="0" y="8183879"/>
-            <a:ext cx="6270171" cy="45720"/>
+            <a:ext cx="5266944" cy="45720"/>
           </a:xfrm>
           <a:prstGeom prst="rect">
             <a:avLst/>
